--- a/family-outings/assets/legoland_20260923_plan.pptx
+++ b/family-outings/assets/legoland_20260923_plan.pptx
@@ -13,9 +13,10 @@
     <p:sldId id="261" r:id="rId7"/>
     <p:sldId id="262" r:id="rId8"/>
     <p:sldId id="263" r:id="rId9"/>
+    <p:sldId id="264" r:id="rId10"/>
   </p:sldIdLst>
   <p:notesMasterIdLst>
-    <p:notesMasterId r:id="rId10"/>
+    <p:notesMasterId r:id="rId11"/>
   </p:notesMasterIdLst>
   <p:sldSz cx="12192000" cy="6858000"/>
   <p:notesSz cx="6858000" cy="12192000"/>
@@ -1149,6 +1150,94 @@
             <a:fld id="{F7021451-1387-4CA6-816F-3879F97B5CBC}" type="slidenum">
               <a:rPr lang="en-US"/>
               <a:t>8</a:t>
+            </a:fld>
+            <a:endParaRPr lang="en-US"/>
+          </a:p>
+        </p:txBody>
+      </p:sp>
+    </p:spTree>
+    <p:extLst>
+      <p:ext uri="{BB962C8B-B14F-4D97-AF65-F5344CB8AC3E}">
+        <p14:creationId xmlns:p14="http://schemas.microsoft.com/office/powerpoint/2010/main" val="1024086991"/>
+      </p:ext>
+    </p:extLst>
+  </p:cSld>
+  <p:clrMapOvr>
+    <a:masterClrMapping/>
+  </p:clrMapOvr>
+</p:notes>
+</file>
+
+<file path=ppt/notesSlides/notesSlide9.xml><?xml version="1.0" encoding="utf-8"?>
+<p:notes xmlns:a="http://schemas.openxmlformats.org/drawingml/2006/main" xmlns:r="http://schemas.openxmlformats.org/officeDocument/2006/relationships" xmlns:p="http://schemas.openxmlformats.org/presentationml/2006/main">
+  <p:cSld>
+    <p:spTree>
+      <p:nvGrpSpPr>
+        <p:cNvPr id="1" name=""/>
+        <p:cNvGrpSpPr/>
+        <p:nvPr/>
+      </p:nvGrpSpPr>
+      <p:grpSpPr>
+        <a:xfrm>
+          <a:off x="0" y="0"/>
+          <a:ext cx="0" cy="0"/>
+          <a:chOff x="0" y="0"/>
+          <a:chExt cx="0" cy="0"/>
+        </a:xfrm>
+      </p:grpSpPr>
+      <p:sp>
+        <p:nvSpPr>
+          <p:cNvPr id="2" name="Slide Image Placeholder 1"/>
+          <p:cNvSpPr>
+            <a:spLocks noGrp="1" noRot="1" noChangeAspect="1"/>
+          </p:cNvSpPr>
+          <p:nvPr>
+            <p:ph type="sldImg"/>
+          </p:nvPr>
+        </p:nvSpPr>
+        <p:spPr/>
+      </p:sp>
+      <p:sp>
+        <p:nvSpPr>
+          <p:cNvPr id="3" name="Notes Placeholder 2"/>
+          <p:cNvSpPr>
+            <a:spLocks noGrp="1"/>
+          </p:cNvSpPr>
+          <p:nvPr>
+            <p:ph type="body" idx="1"/>
+          </p:nvPr>
+        </p:nvSpPr>
+        <p:spPr/>
+        <p:txBody>
+          <a:bodyPr/>
+          <a:lstStyle/>
+          <a:p>
+            <a:r>
+              <a:rPr lang="en-US" dirty="0"/>
+              <a:t/>
+            </a:r>
+            <a:endParaRPr lang="en-US" dirty="0"/>
+          </a:p>
+        </p:txBody>
+      </p:sp>
+      <p:sp>
+        <p:nvSpPr>
+          <p:cNvPr id="4" name="Slide Number Placeholder 3"/>
+          <p:cNvSpPr>
+            <a:spLocks noGrp="1"/>
+          </p:cNvSpPr>
+          <p:nvPr>
+            <p:ph type="sldNum" sz="quarter" idx="10"/>
+          </p:nvPr>
+        </p:nvSpPr>
+        <p:spPr/>
+        <p:txBody>
+          <a:bodyPr/>
+          <a:lstStyle/>
+          <a:p>
+            <a:fld id="{F7021451-1387-4CA6-816F-3879F97B5CBC}" type="slidenum">
+              <a:rPr lang="en-US"/>
+              <a:t>9</a:t>
             </a:fld>
             <a:endParaRPr lang="en-US"/>
           </a:p>
@@ -2696,7 +2785,7 @@
                 <a:ea typeface="Noto Sans CJK KR" pitchFamily="34" charset="-122"/>
                 <a:cs typeface="Noto Sans CJK KR" pitchFamily="34" charset="-120"/>
               </a:rPr>
-              <a:t>SCHEDULE 1/2</a:t>
+              <a:t>SCHEDULE 1/3</a:t>
             </a:r>
             <a:endParaRPr lang="en-US" sz="1200" dirty="0"/>
           </a:p>
@@ -2741,6 +2830,72 @@
           </a:p>
         </p:txBody>
       </p:sp>
+      <p:sp>
+        <p:nvSpPr>
+          <p:cNvPr id="4" name="Shape 2"/>
+          <p:cNvSpPr/>
+          <p:nvPr/>
+        </p:nvSpPr>
+        <p:spPr>
+          <a:xfrm>
+            <a:off x="457200" y="1207008"/>
+            <a:ext cx="11247120" cy="438912"/>
+          </a:xfrm>
+          <a:prstGeom prst="roundRect">
+            <a:avLst>
+              <a:gd name="adj" fmla="val 12500"/>
+            </a:avLst>
+          </a:prstGeom>
+          <a:solidFill>
+            <a:srgbClr val="EFF3FB"/>
+          </a:solidFill>
+          <a:ln w="12700">
+            <a:solidFill>
+              <a:srgbClr val="D8E0F2"/>
+            </a:solidFill>
+            <a:prstDash val="solid"/>
+          </a:ln>
+        </p:spPr>
+      </p:sp>
+      <p:sp>
+        <p:nvSpPr>
+          <p:cNvPr id="5" name="Text 3"/>
+          <p:cNvSpPr txBox="1"/>
+          <p:nvPr/>
+        </p:nvSpPr>
+        <p:spPr>
+          <a:xfrm>
+            <a:off x="685800" y="1207008"/>
+            <a:ext cx="10789920" cy="438912"/>
+          </a:xfrm>
+          <a:prstGeom prst="rect">
+            <a:avLst/>
+          </a:prstGeom>
+          <a:noFill/>
+          <a:ln/>
+        </p:spPr>
+        <p:txBody>
+          <a:bodyPr wrap="square" lIns="0" tIns="0" rIns="0" bIns="0" rtlCol="0" anchor="ctr"/>
+          <a:lstStyle/>
+          <a:p>
+            <a:pPr indent="0" marL="0">
+              <a:buNone/>
+            </a:pPr>
+            <a:r>
+              <a:rPr lang="en-US" sz="1100" i="1" dirty="0">
+                <a:solidFill>
+                  <a:srgbClr val="3A4A7A"/>
+                </a:solidFill>
+                <a:latin typeface="Noto Sans CJK KR" pitchFamily="34" charset="0"/>
+                <a:ea typeface="Noto Sans CJK KR" pitchFamily="34" charset="-122"/>
+                <a:cs typeface="Noto Sans CJK KR" pitchFamily="34" charset="-120"/>
+              </a:rPr>
+              <a:t>동선 검증: 캐슬(드래곤)↔시티는 파크 반대편 — 왕복 1회로 압축. 이동 구간은 별도 줄로 표기, 시간은 추정치(맵이 스케일 보증 안 함, D등급)</a:t>
+            </a:r>
+            <a:endParaRPr lang="en-US" sz="1100" dirty="0"/>
+          </a:p>
+        </p:txBody>
+      </p:sp>
       <p:graphicFrame>
         <p:nvGraphicFramePr>
           <p:cNvPr id="4" name="Table 0"/>
@@ -2756,7 +2911,7 @@
           </p:nvPr>
         </p:nvGraphicFramePr>
         <p:xfrm>
-          <a:off x="457200" y="1280160"/>
+          <a:off x="457200" y="1700784"/>
           <a:ext cx="11247120" cy="914400"/>
         </p:xfrm>
         <a:graphic>
@@ -2768,7 +2923,7 @@
                 <a:gridCol w="1828800"/>
                 <a:gridCol w="7955280"/>
               </a:tblGrid>
-              <a:tr h="457200">
+              <a:tr h="420624">
                 <a:tc>
                   <a:txBody>
                     <a:bodyPr/>
@@ -2974,7 +3129,7 @@
                   </a:tcPr>
                 </a:tc>
               </a:tr>
-              <a:tr h="457200">
+              <a:tr h="420624">
                 <a:tc>
                   <a:txBody>
                     <a:bodyPr/>
@@ -3180,7 +3335,7 @@
                   </a:tcPr>
                 </a:tc>
               </a:tr>
-              <a:tr h="457200">
+              <a:tr h="420624">
                 <a:tc>
                   <a:txBody>
                     <a:bodyPr/>
@@ -3386,7 +3541,7 @@
                   </a:tcPr>
                 </a:tc>
               </a:tr>
-              <a:tr h="457200">
+              <a:tr h="420624">
                 <a:tc>
                   <a:txBody>
                     <a:bodyPr/>
@@ -3592,7 +3747,7 @@
                   </a:tcPr>
                 </a:tc>
               </a:tr>
-              <a:tr h="457200">
+              <a:tr h="420624">
                 <a:tc>
                   <a:txBody>
                     <a:bodyPr/>
@@ -3798,7 +3953,7 @@
                   </a:tcPr>
                 </a:tc>
               </a:tr>
-              <a:tr h="457200">
+              <a:tr h="420624">
                 <a:tc>
                   <a:txBody>
                     <a:bodyPr/>
@@ -4004,7 +4159,7 @@
                   </a:tcPr>
                 </a:tc>
               </a:tr>
-              <a:tr h="457200">
+              <a:tr h="420624">
                 <a:tc>
                   <a:txBody>
                     <a:bodyPr/>
@@ -4158,7 +4313,7 @@
                           <a:ea typeface="Noto Sans CJK KR" pitchFamily="34" charset="-122"/>
                           <a:cs typeface="Noto Sans CJK KR" pitchFamily="34" charset="-120"/>
                         </a:rPr>
-                        <a:t>입장 → 캐슬 방향 직행</a:t>
+                        <a:t>입장</a:t>
                       </a:r>
                       <a:endParaRPr lang="en-US" sz="1150" dirty="0">
                         <a:latin typeface="Noto Sans CJK KR" charset="0"/>
@@ -4210,7 +4365,213 @@
                   </a:tcPr>
                 </a:tc>
               </a:tr>
-              <a:tr h="457200">
+              <a:tr h="420624">
+                <a:tc>
+                  <a:txBody>
+                    <a:bodyPr/>
+                    <a:lstStyle/>
+                    <a:p>
+                      <a:pPr indent="0" marL="0">
+                        <a:buNone/>
+                      </a:pPr>
+                      <a:r>
+                        <a:rPr lang="en-US" sz="1150" dirty="0">
+                          <a:solidFill>
+                            <a:srgbClr val="1A2440"/>
+                          </a:solidFill>
+                          <a:latin typeface="Noto Sans CJK KR" pitchFamily="34" charset="0"/>
+                          <a:ea typeface="Noto Sans CJK KR" pitchFamily="34" charset="-122"/>
+                          <a:cs typeface="Noto Sans CJK KR" pitchFamily="34" charset="-120"/>
+                        </a:rPr>
+                        <a:t>10:00~10:05</a:t>
+                      </a:r>
+                      <a:endParaRPr lang="en-US" sz="1150" dirty="0">
+                        <a:latin typeface="Noto Sans CJK KR" charset="0"/>
+                        <a:ea typeface="Noto Sans CJK KR" charset="0"/>
+                        <a:cs typeface="Noto Sans CJK KR" charset="0"/>
+                      </a:endParaRPr>
+                    </a:p>
+                  </a:txBody>
+                  <a:tcPr marL="91440" marR="91440" marT="45720" marB="45720" anchor="ctr">
+                    <a:lnL w="9525" cap="flat" cmpd="sng" algn="ctr">
+                      <a:solidFill>
+                        <a:srgbClr val="E2E4E8"/>
+                      </a:solidFill>
+                      <a:prstDash val="solid"/>
+                      <a:round/>
+                      <a:headEnd type="none" w="med" len="med"/>
+                      <a:tailEnd type="none" w="med" len="med"/>
+                    </a:lnL>
+                    <a:lnR w="9525" cap="flat" cmpd="sng" algn="ctr">
+                      <a:solidFill>
+                        <a:srgbClr val="E2E4E8"/>
+                      </a:solidFill>
+                      <a:prstDash val="solid"/>
+                      <a:round/>
+                      <a:headEnd type="none" w="med" len="med"/>
+                      <a:tailEnd type="none" w="med" len="med"/>
+                    </a:lnR>
+                    <a:lnT w="9525" cap="flat" cmpd="sng" algn="ctr">
+                      <a:solidFill>
+                        <a:srgbClr val="E2E4E8"/>
+                      </a:solidFill>
+                      <a:prstDash val="solid"/>
+                      <a:round/>
+                      <a:headEnd type="none" w="med" len="med"/>
+                      <a:tailEnd type="none" w="med" len="med"/>
+                    </a:lnT>
+                    <a:lnB w="9525" cap="flat" cmpd="sng" algn="ctr">
+                      <a:solidFill>
+                        <a:srgbClr val="E2E4E8"/>
+                      </a:solidFill>
+                      <a:prstDash val="solid"/>
+                      <a:round/>
+                      <a:headEnd type="none" w="med" len="med"/>
+                      <a:tailEnd type="none" w="med" len="med"/>
+                    </a:lnB>
+                    <a:solidFill>
+                      <a:srgbClr val="FFFFFF"/>
+                    </a:solidFill>
+                  </a:tcPr>
+                </a:tc>
+                <a:tc>
+                  <a:txBody>
+                    <a:bodyPr/>
+                    <a:lstStyle/>
+                    <a:p>
+                      <a:pPr indent="0" marL="0">
+                        <a:buNone/>
+                      </a:pPr>
+                      <a:r>
+                        <a:rPr lang="en-US" sz="1150" dirty="0">
+                          <a:solidFill>
+                            <a:srgbClr val="1A2440"/>
+                          </a:solidFill>
+                          <a:latin typeface="Noto Sans CJK KR" pitchFamily="34" charset="0"/>
+                          <a:ea typeface="Noto Sans CJK KR" pitchFamily="34" charset="-122"/>
+                          <a:cs typeface="Noto Sans CJK KR" pitchFamily="34" charset="-120"/>
+                        </a:rPr>
+                        <a:t>이동</a:t>
+                      </a:r>
+                      <a:endParaRPr lang="en-US" sz="1150" dirty="0">
+                        <a:latin typeface="Noto Sans CJK KR" charset="0"/>
+                        <a:ea typeface="Noto Sans CJK KR" charset="0"/>
+                        <a:cs typeface="Noto Sans CJK KR" charset="0"/>
+                      </a:endParaRPr>
+                    </a:p>
+                  </a:txBody>
+                  <a:tcPr marL="91440" marR="91440" marT="45720" marB="45720" anchor="ctr">
+                    <a:lnL w="9525" cap="flat" cmpd="sng" algn="ctr">
+                      <a:solidFill>
+                        <a:srgbClr val="E2E4E8"/>
+                      </a:solidFill>
+                      <a:prstDash val="solid"/>
+                      <a:round/>
+                      <a:headEnd type="none" w="med" len="med"/>
+                      <a:tailEnd type="none" w="med" len="med"/>
+                    </a:lnL>
+                    <a:lnR w="9525" cap="flat" cmpd="sng" algn="ctr">
+                      <a:solidFill>
+                        <a:srgbClr val="E2E4E8"/>
+                      </a:solidFill>
+                      <a:prstDash val="solid"/>
+                      <a:round/>
+                      <a:headEnd type="none" w="med" len="med"/>
+                      <a:tailEnd type="none" w="med" len="med"/>
+                    </a:lnR>
+                    <a:lnT w="9525" cap="flat" cmpd="sng" algn="ctr">
+                      <a:solidFill>
+                        <a:srgbClr val="E2E4E8"/>
+                      </a:solidFill>
+                      <a:prstDash val="solid"/>
+                      <a:round/>
+                      <a:headEnd type="none" w="med" len="med"/>
+                      <a:tailEnd type="none" w="med" len="med"/>
+                    </a:lnT>
+                    <a:lnB w="9525" cap="flat" cmpd="sng" algn="ctr">
+                      <a:solidFill>
+                        <a:srgbClr val="E2E4E8"/>
+                      </a:solidFill>
+                      <a:prstDash val="solid"/>
+                      <a:round/>
+                      <a:headEnd type="none" w="med" len="med"/>
+                      <a:tailEnd type="none" w="med" len="med"/>
+                    </a:lnB>
+                    <a:solidFill>
+                      <a:srgbClr val="FFFFFF"/>
+                    </a:solidFill>
+                  </a:tcPr>
+                </a:tc>
+                <a:tc>
+                  <a:txBody>
+                    <a:bodyPr/>
+                    <a:lstStyle/>
+                    <a:p>
+                      <a:pPr indent="0" marL="0">
+                        <a:buNone/>
+                      </a:pPr>
+                      <a:r>
+                        <a:rPr lang="en-US" sz="1150" dirty="0">
+                          <a:solidFill>
+                            <a:srgbClr val="1A2440"/>
+                          </a:solidFill>
+                          <a:latin typeface="Noto Sans CJK KR" pitchFamily="34" charset="0"/>
+                          <a:ea typeface="Noto Sans CJK KR" pitchFamily="34" charset="-122"/>
+                          <a:cs typeface="Noto Sans CJK KR" pitchFamily="34" charset="-120"/>
+                        </a:rPr>
+                        <a:t>입구→캐슬, 브릭스트릿·브릭토피아 무정차 통과</a:t>
+                      </a:r>
+                      <a:endParaRPr lang="en-US" sz="1150" dirty="0">
+                        <a:latin typeface="Noto Sans CJK KR" charset="0"/>
+                        <a:ea typeface="Noto Sans CJK KR" charset="0"/>
+                        <a:cs typeface="Noto Sans CJK KR" charset="0"/>
+                      </a:endParaRPr>
+                    </a:p>
+                  </a:txBody>
+                  <a:tcPr marL="91440" marR="91440" marT="45720" marB="45720" anchor="ctr">
+                    <a:lnL w="9525" cap="flat" cmpd="sng" algn="ctr">
+                      <a:solidFill>
+                        <a:srgbClr val="E2E4E8"/>
+                      </a:solidFill>
+                      <a:prstDash val="solid"/>
+                      <a:round/>
+                      <a:headEnd type="none" w="med" len="med"/>
+                      <a:tailEnd type="none" w="med" len="med"/>
+                    </a:lnL>
+                    <a:lnR w="9525" cap="flat" cmpd="sng" algn="ctr">
+                      <a:solidFill>
+                        <a:srgbClr val="E2E4E8"/>
+                      </a:solidFill>
+                      <a:prstDash val="solid"/>
+                      <a:round/>
+                      <a:headEnd type="none" w="med" len="med"/>
+                      <a:tailEnd type="none" w="med" len="med"/>
+                    </a:lnR>
+                    <a:lnT w="9525" cap="flat" cmpd="sng" algn="ctr">
+                      <a:solidFill>
+                        <a:srgbClr val="E2E4E8"/>
+                      </a:solidFill>
+                      <a:prstDash val="solid"/>
+                      <a:round/>
+                      <a:headEnd type="none" w="med" len="med"/>
+                      <a:tailEnd type="none" w="med" len="med"/>
+                    </a:lnT>
+                    <a:lnB w="9525" cap="flat" cmpd="sng" algn="ctr">
+                      <a:solidFill>
+                        <a:srgbClr val="E2E4E8"/>
+                      </a:solidFill>
+                      <a:prstDash val="solid"/>
+                      <a:round/>
+                      <a:headEnd type="none" w="med" len="med"/>
+                      <a:tailEnd type="none" w="med" len="med"/>
+                    </a:lnB>
+                    <a:solidFill>
+                      <a:srgbClr val="FFFFFF"/>
+                    </a:solidFill>
+                  </a:tcPr>
+                </a:tc>
+              </a:tr>
+              <a:tr h="420624">
                 <a:tc>
                   <a:txBody>
                     <a:bodyPr/>
@@ -4416,7 +4777,7 @@
                   </a:tcPr>
                 </a:tc>
               </a:tr>
-              <a:tr h="457200">
+              <a:tr h="420624">
                 <a:tc>
                   <a:txBody>
                     <a:bodyPr/>
@@ -4481,7 +4842,7 @@
                       <a:tailEnd type="none" w="med" len="med"/>
                     </a:lnB>
                     <a:solidFill>
-                      <a:srgbClr val="F5F6F8"/>
+                      <a:srgbClr val="FFFFFF"/>
                     </a:solidFill>
                   </a:tcPr>
                 </a:tc>
@@ -4549,7 +4910,7 @@
                       <a:tailEnd type="none" w="med" len="med"/>
                     </a:lnB>
                     <a:solidFill>
-                      <a:srgbClr val="F5F6F8"/>
+                      <a:srgbClr val="FFFFFF"/>
                     </a:solidFill>
                   </a:tcPr>
                 </a:tc>
@@ -4617,12 +4978,12 @@
                       <a:tailEnd type="none" w="med" len="med"/>
                     </a:lnB>
                     <a:solidFill>
-                      <a:srgbClr val="F5F6F8"/>
+                      <a:srgbClr val="FFFFFF"/>
                     </a:solidFill>
                   </a:tcPr>
                 </a:tc>
               </a:tr>
-              <a:tr h="457200">
+              <a:tr h="420624">
                 <a:tc>
                   <a:txBody>
                     <a:bodyPr/>
@@ -4640,7 +5001,638 @@
                           <a:ea typeface="Noto Sans CJK KR" pitchFamily="34" charset="-122"/>
                           <a:cs typeface="Noto Sans CJK KR" pitchFamily="34" charset="-120"/>
                         </a:rPr>
-                        <a:t>11:15~12:00</a:t>
+                        <a:t>11:15~11:20</a:t>
+                      </a:r>
+                      <a:endParaRPr lang="en-US" sz="1150" dirty="0">
+                        <a:latin typeface="Noto Sans CJK KR" charset="0"/>
+                        <a:ea typeface="Noto Sans CJK KR" charset="0"/>
+                        <a:cs typeface="Noto Sans CJK KR" charset="0"/>
+                      </a:endParaRPr>
+                    </a:p>
+                  </a:txBody>
+                  <a:tcPr marL="91440" marR="91440" marT="45720" marB="45720" anchor="ctr">
+                    <a:lnL w="9525" cap="flat" cmpd="sng" algn="ctr">
+                      <a:solidFill>
+                        <a:srgbClr val="E2E4E8"/>
+                      </a:solidFill>
+                      <a:prstDash val="solid"/>
+                      <a:round/>
+                      <a:headEnd type="none" w="med" len="med"/>
+                      <a:tailEnd type="none" w="med" len="med"/>
+                    </a:lnL>
+                    <a:lnR w="9525" cap="flat" cmpd="sng" algn="ctr">
+                      <a:solidFill>
+                        <a:srgbClr val="E2E4E8"/>
+                      </a:solidFill>
+                      <a:prstDash val="solid"/>
+                      <a:round/>
+                      <a:headEnd type="none" w="med" len="med"/>
+                      <a:tailEnd type="none" w="med" len="med"/>
+                    </a:lnR>
+                    <a:lnT w="9525" cap="flat" cmpd="sng" algn="ctr">
+                      <a:solidFill>
+                        <a:srgbClr val="E2E4E8"/>
+                      </a:solidFill>
+                      <a:prstDash val="solid"/>
+                      <a:round/>
+                      <a:headEnd type="none" w="med" len="med"/>
+                      <a:tailEnd type="none" w="med" len="med"/>
+                    </a:lnT>
+                    <a:lnB w="9525" cap="flat" cmpd="sng" algn="ctr">
+                      <a:solidFill>
+                        <a:srgbClr val="E2E4E8"/>
+                      </a:solidFill>
+                      <a:prstDash val="solid"/>
+                      <a:round/>
+                      <a:headEnd type="none" w="med" len="med"/>
+                      <a:tailEnd type="none" w="med" len="med"/>
+                    </a:lnB>
+                    <a:solidFill>
+                      <a:srgbClr val="F5F6F8"/>
+                    </a:solidFill>
+                  </a:tcPr>
+                </a:tc>
+                <a:tc>
+                  <a:txBody>
+                    <a:bodyPr/>
+                    <a:lstStyle/>
+                    <a:p>
+                      <a:pPr indent="0" marL="0">
+                        <a:buNone/>
+                      </a:pPr>
+                      <a:r>
+                        <a:rPr lang="en-US" sz="1150" dirty="0">
+                          <a:solidFill>
+                            <a:srgbClr val="1A2440"/>
+                          </a:solidFill>
+                          <a:latin typeface="Noto Sans CJK KR" pitchFamily="34" charset="0"/>
+                          <a:ea typeface="Noto Sans CJK KR" pitchFamily="34" charset="-122"/>
+                          <a:cs typeface="Noto Sans CJK KR" pitchFamily="34" charset="-120"/>
+                        </a:rPr>
+                        <a:t>이동</a:t>
+                      </a:r>
+                      <a:endParaRPr lang="en-US" sz="1150" dirty="0">
+                        <a:latin typeface="Noto Sans CJK KR" charset="0"/>
+                        <a:ea typeface="Noto Sans CJK KR" charset="0"/>
+                        <a:cs typeface="Noto Sans CJK KR" charset="0"/>
+                      </a:endParaRPr>
+                    </a:p>
+                  </a:txBody>
+                  <a:tcPr marL="91440" marR="91440" marT="45720" marB="45720" anchor="ctr">
+                    <a:lnL w="9525" cap="flat" cmpd="sng" algn="ctr">
+                      <a:solidFill>
+                        <a:srgbClr val="E2E4E8"/>
+                      </a:solidFill>
+                      <a:prstDash val="solid"/>
+                      <a:round/>
+                      <a:headEnd type="none" w="med" len="med"/>
+                      <a:tailEnd type="none" w="med" len="med"/>
+                    </a:lnL>
+                    <a:lnR w="9525" cap="flat" cmpd="sng" algn="ctr">
+                      <a:solidFill>
+                        <a:srgbClr val="E2E4E8"/>
+                      </a:solidFill>
+                      <a:prstDash val="solid"/>
+                      <a:round/>
+                      <a:headEnd type="none" w="med" len="med"/>
+                      <a:tailEnd type="none" w="med" len="med"/>
+                    </a:lnR>
+                    <a:lnT w="9525" cap="flat" cmpd="sng" algn="ctr">
+                      <a:solidFill>
+                        <a:srgbClr val="E2E4E8"/>
+                      </a:solidFill>
+                      <a:prstDash val="solid"/>
+                      <a:round/>
+                      <a:headEnd type="none" w="med" len="med"/>
+                      <a:tailEnd type="none" w="med" len="med"/>
+                    </a:lnT>
+                    <a:lnB w="9525" cap="flat" cmpd="sng" algn="ctr">
+                      <a:solidFill>
+                        <a:srgbClr val="E2E4E8"/>
+                      </a:solidFill>
+                      <a:prstDash val="solid"/>
+                      <a:round/>
+                      <a:headEnd type="none" w="med" len="med"/>
+                      <a:tailEnd type="none" w="med" len="med"/>
+                    </a:lnB>
+                    <a:solidFill>
+                      <a:srgbClr val="F5F6F8"/>
+                    </a:solidFill>
+                  </a:tcPr>
+                </a:tc>
+                <a:tc>
+                  <a:txBody>
+                    <a:bodyPr/>
+                    <a:lstStyle/>
+                    <a:p>
+                      <a:pPr indent="0" marL="0">
+                        <a:buNone/>
+                      </a:pPr>
+                      <a:r>
+                        <a:rPr lang="en-US" sz="1150" dirty="0">
+                          <a:solidFill>
+                            <a:srgbClr val="1A2440"/>
+                          </a:solidFill>
+                          <a:latin typeface="Noto Sans CJK KR" pitchFamily="34" charset="0"/>
+                          <a:ea typeface="Noto Sans CJK KR" pitchFamily="34" charset="-122"/>
+                          <a:cs typeface="Noto Sans CJK KR" pitchFamily="34" charset="-120"/>
+                        </a:rPr>
+                        <a:t>캐슬→NINJAGO World (인접 구역)</a:t>
+                      </a:r>
+                      <a:endParaRPr lang="en-US" sz="1150" dirty="0">
+                        <a:latin typeface="Noto Sans CJK KR" charset="0"/>
+                        <a:ea typeface="Noto Sans CJK KR" charset="0"/>
+                        <a:cs typeface="Noto Sans CJK KR" charset="0"/>
+                      </a:endParaRPr>
+                    </a:p>
+                  </a:txBody>
+                  <a:tcPr marL="91440" marR="91440" marT="45720" marB="45720" anchor="ctr">
+                    <a:lnL w="9525" cap="flat" cmpd="sng" algn="ctr">
+                      <a:solidFill>
+                        <a:srgbClr val="E2E4E8"/>
+                      </a:solidFill>
+                      <a:prstDash val="solid"/>
+                      <a:round/>
+                      <a:headEnd type="none" w="med" len="med"/>
+                      <a:tailEnd type="none" w="med" len="med"/>
+                    </a:lnL>
+                    <a:lnR w="9525" cap="flat" cmpd="sng" algn="ctr">
+                      <a:solidFill>
+                        <a:srgbClr val="E2E4E8"/>
+                      </a:solidFill>
+                      <a:prstDash val="solid"/>
+                      <a:round/>
+                      <a:headEnd type="none" w="med" len="med"/>
+                      <a:tailEnd type="none" w="med" len="med"/>
+                    </a:lnR>
+                    <a:lnT w="9525" cap="flat" cmpd="sng" algn="ctr">
+                      <a:solidFill>
+                        <a:srgbClr val="E2E4E8"/>
+                      </a:solidFill>
+                      <a:prstDash val="solid"/>
+                      <a:round/>
+                      <a:headEnd type="none" w="med" len="med"/>
+                      <a:tailEnd type="none" w="med" len="med"/>
+                    </a:lnT>
+                    <a:lnB w="9525" cap="flat" cmpd="sng" algn="ctr">
+                      <a:solidFill>
+                        <a:srgbClr val="E2E4E8"/>
+                      </a:solidFill>
+                      <a:prstDash val="solid"/>
+                      <a:round/>
+                      <a:headEnd type="none" w="med" len="med"/>
+                      <a:tailEnd type="none" w="med" len="med"/>
+                    </a:lnB>
+                    <a:solidFill>
+                      <a:srgbClr val="F5F6F8"/>
+                    </a:solidFill>
+                  </a:tcPr>
+                </a:tc>
+              </a:tr>
+            </a:tbl>
+          </a:graphicData>
+        </a:graphic>
+      </p:graphicFrame>
+      <p:sp>
+        <p:nvSpPr>
+          <p:cNvPr id="7" name="Text 4"/>
+          <p:cNvSpPr txBox="1"/>
+          <p:nvPr/>
+        </p:nvSpPr>
+        <p:spPr>
+          <a:xfrm>
+            <a:off x="457200" y="6537960"/>
+            <a:ext cx="10515600" cy="274320"/>
+          </a:xfrm>
+          <a:prstGeom prst="rect">
+            <a:avLst/>
+          </a:prstGeom>
+          <a:noFill/>
+          <a:ln/>
+        </p:spPr>
+        <p:txBody>
+          <a:bodyPr wrap="square" lIns="0" tIns="0" rIns="0" bIns="0" rtlCol="0" anchor="ctr"/>
+          <a:lstStyle/>
+          <a:p>
+            <a:pPr indent="0" marL="0">
+              <a:buNone/>
+            </a:pPr>
+            <a:r>
+              <a:rPr lang="en-US" sz="900" dirty="0">
+                <a:solidFill>
+                  <a:srgbClr val="5C5749"/>
+                </a:solidFill>
+                <a:latin typeface="Noto Sans CJK KR" pitchFamily="34" charset="0"/>
+                <a:ea typeface="Noto Sans CJK KR" pitchFamily="34" charset="-122"/>
+                <a:cs typeface="Noto Sans CJK KR" pitchFamily="34" charset="-120"/>
+              </a:rPr>
+              <a:t>레고랜드 코리아 · 2026-09-23(수) · 아빠+첫째(8세·130cm)+둘째(3세후반·101cm)</a:t>
+            </a:r>
+            <a:endParaRPr lang="en-US" sz="900" dirty="0"/>
+          </a:p>
+        </p:txBody>
+      </p:sp>
+      <p:sp>
+        <p:nvSpPr>
+          <p:cNvPr id="8" name="Text 5"/>
+          <p:cNvSpPr txBox="1"/>
+          <p:nvPr/>
+        </p:nvSpPr>
+        <p:spPr>
+          <a:xfrm>
+            <a:off x="11430000" y="6537960"/>
+            <a:ext cx="365760" cy="274320"/>
+          </a:xfrm>
+          <a:prstGeom prst="rect">
+            <a:avLst/>
+          </a:prstGeom>
+          <a:noFill/>
+          <a:ln/>
+        </p:spPr>
+        <p:txBody>
+          <a:bodyPr wrap="square" lIns="0" tIns="0" rIns="0" bIns="0" rtlCol="0" anchor="ctr"/>
+          <a:lstStyle/>
+          <a:p>
+            <a:pPr algn="r" indent="0" marL="0">
+              <a:buNone/>
+            </a:pPr>
+            <a:r>
+              <a:rPr lang="en-US" sz="900" dirty="0">
+                <a:solidFill>
+                  <a:srgbClr val="5C5749"/>
+                </a:solidFill>
+                <a:latin typeface="Noto Sans CJK KR" pitchFamily="34" charset="0"/>
+                <a:ea typeface="Noto Sans CJK KR" pitchFamily="34" charset="-122"/>
+                <a:cs typeface="Noto Sans CJK KR" pitchFamily="34" charset="-120"/>
+              </a:rPr>
+              <a:t>3</a:t>
+            </a:r>
+            <a:endParaRPr lang="en-US" sz="900" dirty="0"/>
+          </a:p>
+        </p:txBody>
+      </p:sp>
+    </p:spTree>
+  </p:cSld>
+  <p:clrMapOvr>
+    <a:masterClrMapping/>
+  </p:clrMapOvr>
+</p:sld>
+</file>
+
+<file path=ppt/slides/slide4.xml><?xml version="1.0" encoding="utf-8"?>
+<p:sld xmlns:a="http://schemas.openxmlformats.org/drawingml/2006/main" xmlns:r="http://schemas.openxmlformats.org/officeDocument/2006/relationships" xmlns:p="http://schemas.openxmlformats.org/presentationml/2006/main">
+  <p:cSld name="Slide 4">
+    <p:bg>
+      <p:bgPr>
+        <a:solidFill>
+          <a:srgbClr val="FFFFFF"/>
+        </a:solidFill>
+      </p:bgPr>
+    </p:bg>
+    <p:spTree>
+      <p:nvGrpSpPr>
+        <p:cNvPr id="1" name=""/>
+        <p:cNvGrpSpPr/>
+        <p:nvPr/>
+      </p:nvGrpSpPr>
+      <p:grpSpPr>
+        <a:xfrm>
+          <a:off x="0" y="0"/>
+          <a:ext cx="0" cy="0"/>
+          <a:chOff x="0" y="0"/>
+          <a:chExt cx="0" cy="0"/>
+        </a:xfrm>
+      </p:grpSpPr>
+      <p:sp>
+        <p:nvSpPr>
+          <p:cNvPr id="2" name="Text 0"/>
+          <p:cNvSpPr txBox="1"/>
+          <p:nvPr/>
+        </p:nvSpPr>
+        <p:spPr>
+          <a:xfrm>
+            <a:off x="457200" y="320040"/>
+            <a:ext cx="11247120" cy="320040"/>
+          </a:xfrm>
+          <a:prstGeom prst="rect">
+            <a:avLst/>
+          </a:prstGeom>
+          <a:noFill/>
+          <a:ln/>
+        </p:spPr>
+        <p:txBody>
+          <a:bodyPr wrap="square" lIns="0" tIns="0" rIns="0" bIns="0" rtlCol="0" anchor="ctr"/>
+          <a:lstStyle/>
+          <a:p>
+            <a:pPr indent="0" marL="0">
+              <a:buNone/>
+            </a:pPr>
+            <a:r>
+              <a:rPr lang="en-US" sz="1200" b="1" dirty="0">
+                <a:solidFill>
+                  <a:srgbClr val="D62839"/>
+                </a:solidFill>
+                <a:latin typeface="Noto Sans CJK KR" pitchFamily="34" charset="0"/>
+                <a:ea typeface="Noto Sans CJK KR" pitchFamily="34" charset="-122"/>
+                <a:cs typeface="Noto Sans CJK KR" pitchFamily="34" charset="-120"/>
+              </a:rPr>
+              <a:t>SCHEDULE 2/3</a:t>
+            </a:r>
+            <a:endParaRPr lang="en-US" sz="1200" dirty="0"/>
+          </a:p>
+        </p:txBody>
+      </p:sp>
+      <p:sp>
+        <p:nvSpPr>
+          <p:cNvPr id="3" name="Text 1"/>
+          <p:cNvSpPr txBox="1"/>
+          <p:nvPr/>
+        </p:nvSpPr>
+        <p:spPr>
+          <a:xfrm>
+            <a:off x="457200" y="594360"/>
+            <a:ext cx="11247120" cy="548640"/>
+          </a:xfrm>
+          <a:prstGeom prst="rect">
+            <a:avLst/>
+          </a:prstGeom>
+          <a:noFill/>
+          <a:ln/>
+        </p:spPr>
+        <p:txBody>
+          <a:bodyPr wrap="square" lIns="0" tIns="0" rIns="0" bIns="0" rtlCol="0" anchor="ctr"/>
+          <a:lstStyle/>
+          <a:p>
+            <a:pPr indent="0" marL="0">
+              <a:buNone/>
+            </a:pPr>
+            <a:r>
+              <a:rPr lang="en-US" sz="2600" b="1" dirty="0">
+                <a:solidFill>
+                  <a:srgbClr val="1A2440"/>
+                </a:solidFill>
+                <a:latin typeface="Noto Sans CJK KR" pitchFamily="34" charset="0"/>
+                <a:ea typeface="Noto Sans CJK KR" pitchFamily="34" charset="-122"/>
+                <a:cs typeface="Noto Sans CJK KR" pitchFamily="34" charset="-120"/>
+              </a:rPr>
+              <a:t>미사 출발 → 미사 복귀 전체 일정</a:t>
+            </a:r>
+            <a:endParaRPr lang="en-US" sz="2600" dirty="0"/>
+          </a:p>
+        </p:txBody>
+      </p:sp>
+      <p:graphicFrame>
+        <p:nvGraphicFramePr>
+          <p:cNvPr id="5" name="Table 0"/>
+          <p:cNvGraphicFramePr>
+            <a:graphicFrameLocks noGrp="1"/>
+          </p:cNvGraphicFramePr>
+          <p:nvPr>
+            <p:extLst>
+              <p:ext uri="{D42A27DB-BD31-4B8C-83A1-F6EECF244321}">
+                <p14:modId xmlns:p14="http://schemas.microsoft.com/office/powerpoint/2010/main" val="1579011935"/>
+              </p:ext>
+            </p:extLst>
+          </p:nvPr>
+        </p:nvGraphicFramePr>
+        <p:xfrm>
+          <a:off x="457200" y="1280160"/>
+          <a:ext cx="11247120" cy="914400"/>
+        </p:xfrm>
+        <a:graphic>
+          <a:graphicData uri="http://schemas.openxmlformats.org/drawingml/2006/table">
+            <a:tbl>
+              <a:tblPr/>
+              <a:tblGrid>
+                <a:gridCol w="1463040"/>
+                <a:gridCol w="1828800"/>
+                <a:gridCol w="7955280"/>
+              </a:tblGrid>
+              <a:tr h="420624">
+                <a:tc>
+                  <a:txBody>
+                    <a:bodyPr/>
+                    <a:lstStyle/>
+                    <a:p>
+                      <a:pPr algn="l" indent="0" marL="0">
+                        <a:buNone/>
+                      </a:pPr>
+                      <a:r>
+                        <a:rPr lang="en-US" sz="1200" b="1" dirty="0">
+                          <a:solidFill>
+                            <a:srgbClr val="FFFFFF"/>
+                          </a:solidFill>
+                          <a:latin typeface="Noto Sans CJK KR" pitchFamily="34" charset="0"/>
+                          <a:ea typeface="Noto Sans CJK KR" pitchFamily="34" charset="-122"/>
+                          <a:cs typeface="Noto Sans CJK KR" pitchFamily="34" charset="-120"/>
+                        </a:rPr>
+                        <a:t>시각</a:t>
+                      </a:r>
+                      <a:endParaRPr lang="en-US" sz="1200" dirty="0">
+                        <a:latin typeface="Noto Sans CJK KR" charset="0"/>
+                        <a:ea typeface="Noto Sans CJK KR" charset="0"/>
+                        <a:cs typeface="Noto Sans CJK KR" charset="0"/>
+                      </a:endParaRPr>
+                    </a:p>
+                  </a:txBody>
+                  <a:tcPr marL="91440" marR="91440" marT="45720" marB="45720" anchor="ctr">
+                    <a:lnL w="9525" cap="flat" cmpd="sng" algn="ctr">
+                      <a:solidFill>
+                        <a:srgbClr val="E2E4E8"/>
+                      </a:solidFill>
+                      <a:prstDash val="solid"/>
+                      <a:round/>
+                      <a:headEnd type="none" w="med" len="med"/>
+                      <a:tailEnd type="none" w="med" len="med"/>
+                    </a:lnL>
+                    <a:lnR w="9525" cap="flat" cmpd="sng" algn="ctr">
+                      <a:solidFill>
+                        <a:srgbClr val="E2E4E8"/>
+                      </a:solidFill>
+                      <a:prstDash val="solid"/>
+                      <a:round/>
+                      <a:headEnd type="none" w="med" len="med"/>
+                      <a:tailEnd type="none" w="med" len="med"/>
+                    </a:lnR>
+                    <a:lnT w="9525" cap="flat" cmpd="sng" algn="ctr">
+                      <a:solidFill>
+                        <a:srgbClr val="E2E4E8"/>
+                      </a:solidFill>
+                      <a:prstDash val="solid"/>
+                      <a:round/>
+                      <a:headEnd type="none" w="med" len="med"/>
+                      <a:tailEnd type="none" w="med" len="med"/>
+                    </a:lnT>
+                    <a:lnB w="9525" cap="flat" cmpd="sng" algn="ctr">
+                      <a:solidFill>
+                        <a:srgbClr val="E2E4E8"/>
+                      </a:solidFill>
+                      <a:prstDash val="solid"/>
+                      <a:round/>
+                      <a:headEnd type="none" w="med" len="med"/>
+                      <a:tailEnd type="none" w="med" len="med"/>
+                    </a:lnB>
+                    <a:solidFill>
+                      <a:srgbClr val="1A2440"/>
+                    </a:solidFill>
+                  </a:tcPr>
+                </a:tc>
+                <a:tc>
+                  <a:txBody>
+                    <a:bodyPr/>
+                    <a:lstStyle/>
+                    <a:p>
+                      <a:pPr algn="l" indent="0" marL="0">
+                        <a:buNone/>
+                      </a:pPr>
+                      <a:r>
+                        <a:rPr lang="en-US" sz="1200" b="1" dirty="0">
+                          <a:solidFill>
+                            <a:srgbClr val="FFFFFF"/>
+                          </a:solidFill>
+                          <a:latin typeface="Noto Sans CJK KR" pitchFamily="34" charset="0"/>
+                          <a:ea typeface="Noto Sans CJK KR" pitchFamily="34" charset="-122"/>
+                          <a:cs typeface="Noto Sans CJK KR" pitchFamily="34" charset="-120"/>
+                        </a:rPr>
+                        <a:t>구간</a:t>
+                      </a:r>
+                      <a:endParaRPr lang="en-US" sz="1200" dirty="0">
+                        <a:latin typeface="Noto Sans CJK KR" charset="0"/>
+                        <a:ea typeface="Noto Sans CJK KR" charset="0"/>
+                        <a:cs typeface="Noto Sans CJK KR" charset="0"/>
+                      </a:endParaRPr>
+                    </a:p>
+                  </a:txBody>
+                  <a:tcPr marL="91440" marR="91440" marT="45720" marB="45720" anchor="ctr">
+                    <a:lnL w="9525" cap="flat" cmpd="sng" algn="ctr">
+                      <a:solidFill>
+                        <a:srgbClr val="E2E4E8"/>
+                      </a:solidFill>
+                      <a:prstDash val="solid"/>
+                      <a:round/>
+                      <a:headEnd type="none" w="med" len="med"/>
+                      <a:tailEnd type="none" w="med" len="med"/>
+                    </a:lnL>
+                    <a:lnR w="9525" cap="flat" cmpd="sng" algn="ctr">
+                      <a:solidFill>
+                        <a:srgbClr val="E2E4E8"/>
+                      </a:solidFill>
+                      <a:prstDash val="solid"/>
+                      <a:round/>
+                      <a:headEnd type="none" w="med" len="med"/>
+                      <a:tailEnd type="none" w="med" len="med"/>
+                    </a:lnR>
+                    <a:lnT w="9525" cap="flat" cmpd="sng" algn="ctr">
+                      <a:solidFill>
+                        <a:srgbClr val="E2E4E8"/>
+                      </a:solidFill>
+                      <a:prstDash val="solid"/>
+                      <a:round/>
+                      <a:headEnd type="none" w="med" len="med"/>
+                      <a:tailEnd type="none" w="med" len="med"/>
+                    </a:lnT>
+                    <a:lnB w="9525" cap="flat" cmpd="sng" algn="ctr">
+                      <a:solidFill>
+                        <a:srgbClr val="E2E4E8"/>
+                      </a:solidFill>
+                      <a:prstDash val="solid"/>
+                      <a:round/>
+                      <a:headEnd type="none" w="med" len="med"/>
+                      <a:tailEnd type="none" w="med" len="med"/>
+                    </a:lnB>
+                    <a:solidFill>
+                      <a:srgbClr val="1A2440"/>
+                    </a:solidFill>
+                  </a:tcPr>
+                </a:tc>
+                <a:tc>
+                  <a:txBody>
+                    <a:bodyPr/>
+                    <a:lstStyle/>
+                    <a:p>
+                      <a:pPr algn="l" indent="0" marL="0">
+                        <a:buNone/>
+                      </a:pPr>
+                      <a:r>
+                        <a:rPr lang="en-US" sz="1200" b="1" dirty="0">
+                          <a:solidFill>
+                            <a:srgbClr val="FFFFFF"/>
+                          </a:solidFill>
+                          <a:latin typeface="Noto Sans CJK KR" pitchFamily="34" charset="0"/>
+                          <a:ea typeface="Noto Sans CJK KR" pitchFamily="34" charset="-122"/>
+                          <a:cs typeface="Noto Sans CJK KR" pitchFamily="34" charset="-120"/>
+                        </a:rPr>
+                        <a:t>내용</a:t>
+                      </a:r>
+                      <a:endParaRPr lang="en-US" sz="1200" dirty="0">
+                        <a:latin typeface="Noto Sans CJK KR" charset="0"/>
+                        <a:ea typeface="Noto Sans CJK KR" charset="0"/>
+                        <a:cs typeface="Noto Sans CJK KR" charset="0"/>
+                      </a:endParaRPr>
+                    </a:p>
+                  </a:txBody>
+                  <a:tcPr marL="91440" marR="91440" marT="45720" marB="45720" anchor="ctr">
+                    <a:lnL w="9525" cap="flat" cmpd="sng" algn="ctr">
+                      <a:solidFill>
+                        <a:srgbClr val="E2E4E8"/>
+                      </a:solidFill>
+                      <a:prstDash val="solid"/>
+                      <a:round/>
+                      <a:headEnd type="none" w="med" len="med"/>
+                      <a:tailEnd type="none" w="med" len="med"/>
+                    </a:lnL>
+                    <a:lnR w="9525" cap="flat" cmpd="sng" algn="ctr">
+                      <a:solidFill>
+                        <a:srgbClr val="E2E4E8"/>
+                      </a:solidFill>
+                      <a:prstDash val="solid"/>
+                      <a:round/>
+                      <a:headEnd type="none" w="med" len="med"/>
+                      <a:tailEnd type="none" w="med" len="med"/>
+                    </a:lnR>
+                    <a:lnT w="9525" cap="flat" cmpd="sng" algn="ctr">
+                      <a:solidFill>
+                        <a:srgbClr val="E2E4E8"/>
+                      </a:solidFill>
+                      <a:prstDash val="solid"/>
+                      <a:round/>
+                      <a:headEnd type="none" w="med" len="med"/>
+                      <a:tailEnd type="none" w="med" len="med"/>
+                    </a:lnT>
+                    <a:lnB w="9525" cap="flat" cmpd="sng" algn="ctr">
+                      <a:solidFill>
+                        <a:srgbClr val="E2E4E8"/>
+                      </a:solidFill>
+                      <a:prstDash val="solid"/>
+                      <a:round/>
+                      <a:headEnd type="none" w="med" len="med"/>
+                      <a:tailEnd type="none" w="med" len="med"/>
+                    </a:lnB>
+                    <a:solidFill>
+                      <a:srgbClr val="1A2440"/>
+                    </a:solidFill>
+                  </a:tcPr>
+                </a:tc>
+              </a:tr>
+              <a:tr h="420624">
+                <a:tc>
+                  <a:txBody>
+                    <a:bodyPr/>
+                    <a:lstStyle/>
+                    <a:p>
+                      <a:pPr indent="0" marL="0">
+                        <a:buNone/>
+                      </a:pPr>
+                      <a:r>
+                        <a:rPr lang="en-US" sz="1150" dirty="0">
+                          <a:solidFill>
+                            <a:srgbClr val="1A2440"/>
+                          </a:solidFill>
+                          <a:latin typeface="Noto Sans CJK KR" pitchFamily="34" charset="0"/>
+                          <a:ea typeface="Noto Sans CJK KR" pitchFamily="34" charset="-122"/>
+                          <a:cs typeface="Noto Sans CJK KR" pitchFamily="34" charset="-120"/>
+                        </a:rPr>
+                        <a:t>11:20~12:00</a:t>
                       </a:r>
                       <a:endParaRPr lang="en-US" sz="1150" dirty="0">
                         <a:latin typeface="Noto Sans CJK KR" charset="0"/>
@@ -4828,6 +5820,1654 @@
                   </a:tcPr>
                 </a:tc>
               </a:tr>
+              <a:tr h="420624">
+                <a:tc>
+                  <a:txBody>
+                    <a:bodyPr/>
+                    <a:lstStyle/>
+                    <a:p>
+                      <a:pPr indent="0" marL="0">
+                        <a:buNone/>
+                      </a:pPr>
+                      <a:r>
+                        <a:rPr lang="en-US" sz="1150" b="1" dirty="0">
+                          <a:solidFill>
+                            <a:srgbClr val="D62839"/>
+                          </a:solidFill>
+                          <a:latin typeface="Noto Sans CJK KR" pitchFamily="34" charset="0"/>
+                          <a:ea typeface="Noto Sans CJK KR" pitchFamily="34" charset="-122"/>
+                          <a:cs typeface="Noto Sans CJK KR" pitchFamily="34" charset="-120"/>
+                        </a:rPr>
+                        <a:t>12:00~12:15</a:t>
+                      </a:r>
+                      <a:endParaRPr lang="en-US" sz="1150" dirty="0">
+                        <a:latin typeface="Noto Sans CJK KR" charset="0"/>
+                        <a:ea typeface="Noto Sans CJK KR" charset="0"/>
+                        <a:cs typeface="Noto Sans CJK KR" charset="0"/>
+                      </a:endParaRPr>
+                    </a:p>
+                  </a:txBody>
+                  <a:tcPr marL="91440" marR="91440" marT="45720" marB="45720" anchor="ctr">
+                    <a:lnL w="9525" cap="flat" cmpd="sng" algn="ctr">
+                      <a:solidFill>
+                        <a:srgbClr val="E2E4E8"/>
+                      </a:solidFill>
+                      <a:prstDash val="solid"/>
+                      <a:round/>
+                      <a:headEnd type="none" w="med" len="med"/>
+                      <a:tailEnd type="none" w="med" len="med"/>
+                    </a:lnL>
+                    <a:lnR w="9525" cap="flat" cmpd="sng" algn="ctr">
+                      <a:solidFill>
+                        <a:srgbClr val="E2E4E8"/>
+                      </a:solidFill>
+                      <a:prstDash val="solid"/>
+                      <a:round/>
+                      <a:headEnd type="none" w="med" len="med"/>
+                      <a:tailEnd type="none" w="med" len="med"/>
+                    </a:lnR>
+                    <a:lnT w="9525" cap="flat" cmpd="sng" algn="ctr">
+                      <a:solidFill>
+                        <a:srgbClr val="E2E4E8"/>
+                      </a:solidFill>
+                      <a:prstDash val="solid"/>
+                      <a:round/>
+                      <a:headEnd type="none" w="med" len="med"/>
+                      <a:tailEnd type="none" w="med" len="med"/>
+                    </a:lnT>
+                    <a:lnB w="9525" cap="flat" cmpd="sng" algn="ctr">
+                      <a:solidFill>
+                        <a:srgbClr val="E2E4E8"/>
+                      </a:solidFill>
+                      <a:prstDash val="solid"/>
+                      <a:round/>
+                      <a:headEnd type="none" w="med" len="med"/>
+                      <a:tailEnd type="none" w="med" len="med"/>
+                    </a:lnB>
+                    <a:solidFill>
+                      <a:srgbClr val="FDECEC"/>
+                    </a:solidFill>
+                  </a:tcPr>
+                </a:tc>
+                <a:tc>
+                  <a:txBody>
+                    <a:bodyPr/>
+                    <a:lstStyle/>
+                    <a:p>
+                      <a:pPr indent="0" marL="0">
+                        <a:buNone/>
+                      </a:pPr>
+                      <a:r>
+                        <a:rPr lang="en-US" sz="1150" b="1" dirty="0">
+                          <a:solidFill>
+                            <a:srgbClr val="1A2440"/>
+                          </a:solidFill>
+                          <a:latin typeface="Noto Sans CJK KR" pitchFamily="34" charset="0"/>
+                          <a:ea typeface="Noto Sans CJK KR" pitchFamily="34" charset="-122"/>
+                          <a:cs typeface="Noto Sans CJK KR" pitchFamily="34" charset="-120"/>
+                        </a:rPr>
+                        <a:t>이동</a:t>
+                      </a:r>
+                      <a:endParaRPr lang="en-US" sz="1150" dirty="0">
+                        <a:latin typeface="Noto Sans CJK KR" charset="0"/>
+                        <a:ea typeface="Noto Sans CJK KR" charset="0"/>
+                        <a:cs typeface="Noto Sans CJK KR" charset="0"/>
+                      </a:endParaRPr>
+                    </a:p>
+                  </a:txBody>
+                  <a:tcPr marL="91440" marR="91440" marT="45720" marB="45720" anchor="ctr">
+                    <a:lnL w="9525" cap="flat" cmpd="sng" algn="ctr">
+                      <a:solidFill>
+                        <a:srgbClr val="E2E4E8"/>
+                      </a:solidFill>
+                      <a:prstDash val="solid"/>
+                      <a:round/>
+                      <a:headEnd type="none" w="med" len="med"/>
+                      <a:tailEnd type="none" w="med" len="med"/>
+                    </a:lnL>
+                    <a:lnR w="9525" cap="flat" cmpd="sng" algn="ctr">
+                      <a:solidFill>
+                        <a:srgbClr val="E2E4E8"/>
+                      </a:solidFill>
+                      <a:prstDash val="solid"/>
+                      <a:round/>
+                      <a:headEnd type="none" w="med" len="med"/>
+                      <a:tailEnd type="none" w="med" len="med"/>
+                    </a:lnR>
+                    <a:lnT w="9525" cap="flat" cmpd="sng" algn="ctr">
+                      <a:solidFill>
+                        <a:srgbClr val="E2E4E8"/>
+                      </a:solidFill>
+                      <a:prstDash val="solid"/>
+                      <a:round/>
+                      <a:headEnd type="none" w="med" len="med"/>
+                      <a:tailEnd type="none" w="med" len="med"/>
+                    </a:lnT>
+                    <a:lnB w="9525" cap="flat" cmpd="sng" algn="ctr">
+                      <a:solidFill>
+                        <a:srgbClr val="E2E4E8"/>
+                      </a:solidFill>
+                      <a:prstDash val="solid"/>
+                      <a:round/>
+                      <a:headEnd type="none" w="med" len="med"/>
+                      <a:tailEnd type="none" w="med" len="med"/>
+                    </a:lnB>
+                    <a:solidFill>
+                      <a:srgbClr val="FDECEC"/>
+                    </a:solidFill>
+                  </a:tcPr>
+                </a:tc>
+                <a:tc>
+                  <a:txBody>
+                    <a:bodyPr/>
+                    <a:lstStyle/>
+                    <a:p>
+                      <a:pPr indent="0" marL="0">
+                        <a:buNone/>
+                      </a:pPr>
+                      <a:r>
+                        <a:rPr lang="en-US" sz="1150" dirty="0">
+                          <a:solidFill>
+                            <a:srgbClr val="1A2440"/>
+                          </a:solidFill>
+                          <a:latin typeface="Noto Sans CJK KR" pitchFamily="34" charset="0"/>
+                          <a:ea typeface="Noto Sans CJK KR" pitchFamily="34" charset="-122"/>
+                          <a:cs typeface="Noto Sans CJK KR" pitchFamily="34" charset="-120"/>
+                        </a:rPr>
+                        <a:t>NINJAGO→미니랜드→해적의 바다→시티 (통과만, 라이드 없음)</a:t>
+                      </a:r>
+                      <a:endParaRPr lang="en-US" sz="1150" dirty="0">
+                        <a:latin typeface="Noto Sans CJK KR" charset="0"/>
+                        <a:ea typeface="Noto Sans CJK KR" charset="0"/>
+                        <a:cs typeface="Noto Sans CJK KR" charset="0"/>
+                      </a:endParaRPr>
+                    </a:p>
+                  </a:txBody>
+                  <a:tcPr marL="91440" marR="91440" marT="45720" marB="45720" anchor="ctr">
+                    <a:lnL w="9525" cap="flat" cmpd="sng" algn="ctr">
+                      <a:solidFill>
+                        <a:srgbClr val="E2E4E8"/>
+                      </a:solidFill>
+                      <a:prstDash val="solid"/>
+                      <a:round/>
+                      <a:headEnd type="none" w="med" len="med"/>
+                      <a:tailEnd type="none" w="med" len="med"/>
+                    </a:lnL>
+                    <a:lnR w="9525" cap="flat" cmpd="sng" algn="ctr">
+                      <a:solidFill>
+                        <a:srgbClr val="E2E4E8"/>
+                      </a:solidFill>
+                      <a:prstDash val="solid"/>
+                      <a:round/>
+                      <a:headEnd type="none" w="med" len="med"/>
+                      <a:tailEnd type="none" w="med" len="med"/>
+                    </a:lnR>
+                    <a:lnT w="9525" cap="flat" cmpd="sng" algn="ctr">
+                      <a:solidFill>
+                        <a:srgbClr val="E2E4E8"/>
+                      </a:solidFill>
+                      <a:prstDash val="solid"/>
+                      <a:round/>
+                      <a:headEnd type="none" w="med" len="med"/>
+                      <a:tailEnd type="none" w="med" len="med"/>
+                    </a:lnT>
+                    <a:lnB w="9525" cap="flat" cmpd="sng" algn="ctr">
+                      <a:solidFill>
+                        <a:srgbClr val="E2E4E8"/>
+                      </a:solidFill>
+                      <a:prstDash val="solid"/>
+                      <a:round/>
+                      <a:headEnd type="none" w="med" len="med"/>
+                      <a:tailEnd type="none" w="med" len="med"/>
+                    </a:lnB>
+                    <a:solidFill>
+                      <a:srgbClr val="FDECEC"/>
+                    </a:solidFill>
+                  </a:tcPr>
+                </a:tc>
+              </a:tr>
+              <a:tr h="420624">
+                <a:tc>
+                  <a:txBody>
+                    <a:bodyPr/>
+                    <a:lstStyle/>
+                    <a:p>
+                      <a:pPr indent="0" marL="0">
+                        <a:buNone/>
+                      </a:pPr>
+                      <a:r>
+                        <a:rPr lang="en-US" sz="1150" dirty="0">
+                          <a:solidFill>
+                            <a:srgbClr val="1A2440"/>
+                          </a:solidFill>
+                          <a:latin typeface="Noto Sans CJK KR" pitchFamily="34" charset="0"/>
+                          <a:ea typeface="Noto Sans CJK KR" pitchFamily="34" charset="-122"/>
+                          <a:cs typeface="Noto Sans CJK KR" pitchFamily="34" charset="-120"/>
+                        </a:rPr>
+                        <a:t>12:15~13:00</a:t>
+                      </a:r>
+                      <a:endParaRPr lang="en-US" sz="1150" dirty="0">
+                        <a:latin typeface="Noto Sans CJK KR" charset="0"/>
+                        <a:ea typeface="Noto Sans CJK KR" charset="0"/>
+                        <a:cs typeface="Noto Sans CJK KR" charset="0"/>
+                      </a:endParaRPr>
+                    </a:p>
+                  </a:txBody>
+                  <a:tcPr marL="91440" marR="91440" marT="45720" marB="45720" anchor="ctr">
+                    <a:lnL w="9525" cap="flat" cmpd="sng" algn="ctr">
+                      <a:solidFill>
+                        <a:srgbClr val="E2E4E8"/>
+                      </a:solidFill>
+                      <a:prstDash val="solid"/>
+                      <a:round/>
+                      <a:headEnd type="none" w="med" len="med"/>
+                      <a:tailEnd type="none" w="med" len="med"/>
+                    </a:lnL>
+                    <a:lnR w="9525" cap="flat" cmpd="sng" algn="ctr">
+                      <a:solidFill>
+                        <a:srgbClr val="E2E4E8"/>
+                      </a:solidFill>
+                      <a:prstDash val="solid"/>
+                      <a:round/>
+                      <a:headEnd type="none" w="med" len="med"/>
+                      <a:tailEnd type="none" w="med" len="med"/>
+                    </a:lnR>
+                    <a:lnT w="9525" cap="flat" cmpd="sng" algn="ctr">
+                      <a:solidFill>
+                        <a:srgbClr val="E2E4E8"/>
+                      </a:solidFill>
+                      <a:prstDash val="solid"/>
+                      <a:round/>
+                      <a:headEnd type="none" w="med" len="med"/>
+                      <a:tailEnd type="none" w="med" len="med"/>
+                    </a:lnT>
+                    <a:lnB w="9525" cap="flat" cmpd="sng" algn="ctr">
+                      <a:solidFill>
+                        <a:srgbClr val="E2E4E8"/>
+                      </a:solidFill>
+                      <a:prstDash val="solid"/>
+                      <a:round/>
+                      <a:headEnd type="none" w="med" len="med"/>
+                      <a:tailEnd type="none" w="med" len="med"/>
+                    </a:lnB>
+                    <a:solidFill>
+                      <a:srgbClr val="FFFFFF"/>
+                    </a:solidFill>
+                  </a:tcPr>
+                </a:tc>
+                <a:tc>
+                  <a:txBody>
+                    <a:bodyPr/>
+                    <a:lstStyle/>
+                    <a:p>
+                      <a:pPr indent="0" marL="0">
+                        <a:buNone/>
+                      </a:pPr>
+                      <a:r>
+                        <a:rPr lang="en-US" sz="1150" dirty="0">
+                          <a:solidFill>
+                            <a:srgbClr val="1A2440"/>
+                          </a:solidFill>
+                          <a:latin typeface="Noto Sans CJK KR" pitchFamily="34" charset="0"/>
+                          <a:ea typeface="Noto Sans CJK KR" pitchFamily="34" charset="-122"/>
+                          <a:cs typeface="Noto Sans CJK KR" pitchFamily="34" charset="-120"/>
+                        </a:rPr>
+                        <a:t>점심</a:t>
+                      </a:r>
+                      <a:endParaRPr lang="en-US" sz="1150" dirty="0">
+                        <a:latin typeface="Noto Sans CJK KR" charset="0"/>
+                        <a:ea typeface="Noto Sans CJK KR" charset="0"/>
+                        <a:cs typeface="Noto Sans CJK KR" charset="0"/>
+                      </a:endParaRPr>
+                    </a:p>
+                  </a:txBody>
+                  <a:tcPr marL="91440" marR="91440" marT="45720" marB="45720" anchor="ctr">
+                    <a:lnL w="9525" cap="flat" cmpd="sng" algn="ctr">
+                      <a:solidFill>
+                        <a:srgbClr val="E2E4E8"/>
+                      </a:solidFill>
+                      <a:prstDash val="solid"/>
+                      <a:round/>
+                      <a:headEnd type="none" w="med" len="med"/>
+                      <a:tailEnd type="none" w="med" len="med"/>
+                    </a:lnL>
+                    <a:lnR w="9525" cap="flat" cmpd="sng" algn="ctr">
+                      <a:solidFill>
+                        <a:srgbClr val="E2E4E8"/>
+                      </a:solidFill>
+                      <a:prstDash val="solid"/>
+                      <a:round/>
+                      <a:headEnd type="none" w="med" len="med"/>
+                      <a:tailEnd type="none" w="med" len="med"/>
+                    </a:lnR>
+                    <a:lnT w="9525" cap="flat" cmpd="sng" algn="ctr">
+                      <a:solidFill>
+                        <a:srgbClr val="E2E4E8"/>
+                      </a:solidFill>
+                      <a:prstDash val="solid"/>
+                      <a:round/>
+                      <a:headEnd type="none" w="med" len="med"/>
+                      <a:tailEnd type="none" w="med" len="med"/>
+                    </a:lnT>
+                    <a:lnB w="9525" cap="flat" cmpd="sng" algn="ctr">
+                      <a:solidFill>
+                        <a:srgbClr val="E2E4E8"/>
+                      </a:solidFill>
+                      <a:prstDash val="solid"/>
+                      <a:round/>
+                      <a:headEnd type="none" w="med" len="med"/>
+                      <a:tailEnd type="none" w="med" len="med"/>
+                    </a:lnB>
+                    <a:solidFill>
+                      <a:srgbClr val="FFFFFF"/>
+                    </a:solidFill>
+                  </a:tcPr>
+                </a:tc>
+                <a:tc>
+                  <a:txBody>
+                    <a:bodyPr/>
+                    <a:lstStyle/>
+                    <a:p>
+                      <a:pPr indent="0" marL="0">
+                        <a:buNone/>
+                      </a:pPr>
+                      <a:r>
+                        <a:rPr lang="en-US" sz="1150" dirty="0">
+                          <a:solidFill>
+                            <a:srgbClr val="1A2440"/>
+                          </a:solidFill>
+                          <a:latin typeface="Noto Sans CJK KR" pitchFamily="34" charset="0"/>
+                          <a:ea typeface="Noto Sans CJK KR" pitchFamily="34" charset="-122"/>
+                          <a:cs typeface="Noto Sans CJK KR" pitchFamily="34" charset="-120"/>
+                        </a:rPr>
+                        <a:t>밥+스팸 도시락, LEGO City 존 내 벤치</a:t>
+                      </a:r>
+                      <a:endParaRPr lang="en-US" sz="1150" dirty="0">
+                        <a:latin typeface="Noto Sans CJK KR" charset="0"/>
+                        <a:ea typeface="Noto Sans CJK KR" charset="0"/>
+                        <a:cs typeface="Noto Sans CJK KR" charset="0"/>
+                      </a:endParaRPr>
+                    </a:p>
+                  </a:txBody>
+                  <a:tcPr marL="91440" marR="91440" marT="45720" marB="45720" anchor="ctr">
+                    <a:lnL w="9525" cap="flat" cmpd="sng" algn="ctr">
+                      <a:solidFill>
+                        <a:srgbClr val="E2E4E8"/>
+                      </a:solidFill>
+                      <a:prstDash val="solid"/>
+                      <a:round/>
+                      <a:headEnd type="none" w="med" len="med"/>
+                      <a:tailEnd type="none" w="med" len="med"/>
+                    </a:lnL>
+                    <a:lnR w="9525" cap="flat" cmpd="sng" algn="ctr">
+                      <a:solidFill>
+                        <a:srgbClr val="E2E4E8"/>
+                      </a:solidFill>
+                      <a:prstDash val="solid"/>
+                      <a:round/>
+                      <a:headEnd type="none" w="med" len="med"/>
+                      <a:tailEnd type="none" w="med" len="med"/>
+                    </a:lnR>
+                    <a:lnT w="9525" cap="flat" cmpd="sng" algn="ctr">
+                      <a:solidFill>
+                        <a:srgbClr val="E2E4E8"/>
+                      </a:solidFill>
+                      <a:prstDash val="solid"/>
+                      <a:round/>
+                      <a:headEnd type="none" w="med" len="med"/>
+                      <a:tailEnd type="none" w="med" len="med"/>
+                    </a:lnT>
+                    <a:lnB w="9525" cap="flat" cmpd="sng" algn="ctr">
+                      <a:solidFill>
+                        <a:srgbClr val="E2E4E8"/>
+                      </a:solidFill>
+                      <a:prstDash val="solid"/>
+                      <a:round/>
+                      <a:headEnd type="none" w="med" len="med"/>
+                      <a:tailEnd type="none" w="med" len="med"/>
+                    </a:lnB>
+                    <a:solidFill>
+                      <a:srgbClr val="FFFFFF"/>
+                    </a:solidFill>
+                  </a:tcPr>
+                </a:tc>
+              </a:tr>
+              <a:tr h="420624">
+                <a:tc>
+                  <a:txBody>
+                    <a:bodyPr/>
+                    <a:lstStyle/>
+                    <a:p>
+                      <a:pPr indent="0" marL="0">
+                        <a:buNone/>
+                      </a:pPr>
+                      <a:r>
+                        <a:rPr lang="en-US" sz="1150" dirty="0">
+                          <a:solidFill>
+                            <a:srgbClr val="1A2440"/>
+                          </a:solidFill>
+                          <a:latin typeface="Noto Sans CJK KR" pitchFamily="34" charset="0"/>
+                          <a:ea typeface="Noto Sans CJK KR" pitchFamily="34" charset="-122"/>
+                          <a:cs typeface="Noto Sans CJK KR" pitchFamily="34" charset="-120"/>
+                        </a:rPr>
+                        <a:t>13:00~13:20</a:t>
+                      </a:r>
+                      <a:endParaRPr lang="en-US" sz="1150" dirty="0">
+                        <a:latin typeface="Noto Sans CJK KR" charset="0"/>
+                        <a:ea typeface="Noto Sans CJK KR" charset="0"/>
+                        <a:cs typeface="Noto Sans CJK KR" charset="0"/>
+                      </a:endParaRPr>
+                    </a:p>
+                  </a:txBody>
+                  <a:tcPr marL="91440" marR="91440" marT="45720" marB="45720" anchor="ctr">
+                    <a:lnL w="9525" cap="flat" cmpd="sng" algn="ctr">
+                      <a:solidFill>
+                        <a:srgbClr val="E2E4E8"/>
+                      </a:solidFill>
+                      <a:prstDash val="solid"/>
+                      <a:round/>
+                      <a:headEnd type="none" w="med" len="med"/>
+                      <a:tailEnd type="none" w="med" len="med"/>
+                    </a:lnL>
+                    <a:lnR w="9525" cap="flat" cmpd="sng" algn="ctr">
+                      <a:solidFill>
+                        <a:srgbClr val="E2E4E8"/>
+                      </a:solidFill>
+                      <a:prstDash val="solid"/>
+                      <a:round/>
+                      <a:headEnd type="none" w="med" len="med"/>
+                      <a:tailEnd type="none" w="med" len="med"/>
+                    </a:lnR>
+                    <a:lnT w="9525" cap="flat" cmpd="sng" algn="ctr">
+                      <a:solidFill>
+                        <a:srgbClr val="E2E4E8"/>
+                      </a:solidFill>
+                      <a:prstDash val="solid"/>
+                      <a:round/>
+                      <a:headEnd type="none" w="med" len="med"/>
+                      <a:tailEnd type="none" w="med" len="med"/>
+                    </a:lnT>
+                    <a:lnB w="9525" cap="flat" cmpd="sng" algn="ctr">
+                      <a:solidFill>
+                        <a:srgbClr val="E2E4E8"/>
+                      </a:solidFill>
+                      <a:prstDash val="solid"/>
+                      <a:round/>
+                      <a:headEnd type="none" w="med" len="med"/>
+                      <a:tailEnd type="none" w="med" len="med"/>
+                    </a:lnB>
+                    <a:solidFill>
+                      <a:srgbClr val="F5F6F8"/>
+                    </a:solidFill>
+                  </a:tcPr>
+                </a:tc>
+                <a:tc>
+                  <a:txBody>
+                    <a:bodyPr/>
+                    <a:lstStyle/>
+                    <a:p>
+                      <a:pPr indent="0" marL="0">
+                        <a:buNone/>
+                      </a:pPr>
+                      <a:r>
+                        <a:rPr lang="en-US" sz="1150" dirty="0">
+                          <a:solidFill>
+                            <a:srgbClr val="1A2440"/>
+                          </a:solidFill>
+                          <a:latin typeface="Noto Sans CJK KR" pitchFamily="34" charset="0"/>
+                          <a:ea typeface="Noto Sans CJK KR" pitchFamily="34" charset="-122"/>
+                          <a:cs typeface="Noto Sans CJK KR" pitchFamily="34" charset="-120"/>
+                        </a:rPr>
+                        <a:t>Wave Racers</a:t>
+                      </a:r>
+                      <a:endParaRPr lang="en-US" sz="1150" dirty="0">
+                        <a:latin typeface="Noto Sans CJK KR" charset="0"/>
+                        <a:ea typeface="Noto Sans CJK KR" charset="0"/>
+                        <a:cs typeface="Noto Sans CJK KR" charset="0"/>
+                      </a:endParaRPr>
+                    </a:p>
+                  </a:txBody>
+                  <a:tcPr marL="91440" marR="91440" marT="45720" marB="45720" anchor="ctr">
+                    <a:lnL w="9525" cap="flat" cmpd="sng" algn="ctr">
+                      <a:solidFill>
+                        <a:srgbClr val="E2E4E8"/>
+                      </a:solidFill>
+                      <a:prstDash val="solid"/>
+                      <a:round/>
+                      <a:headEnd type="none" w="med" len="med"/>
+                      <a:tailEnd type="none" w="med" len="med"/>
+                    </a:lnL>
+                    <a:lnR w="9525" cap="flat" cmpd="sng" algn="ctr">
+                      <a:solidFill>
+                        <a:srgbClr val="E2E4E8"/>
+                      </a:solidFill>
+                      <a:prstDash val="solid"/>
+                      <a:round/>
+                      <a:headEnd type="none" w="med" len="med"/>
+                      <a:tailEnd type="none" w="med" len="med"/>
+                    </a:lnR>
+                    <a:lnT w="9525" cap="flat" cmpd="sng" algn="ctr">
+                      <a:solidFill>
+                        <a:srgbClr val="E2E4E8"/>
+                      </a:solidFill>
+                      <a:prstDash val="solid"/>
+                      <a:round/>
+                      <a:headEnd type="none" w="med" len="med"/>
+                      <a:tailEnd type="none" w="med" len="med"/>
+                    </a:lnT>
+                    <a:lnB w="9525" cap="flat" cmpd="sng" algn="ctr">
+                      <a:solidFill>
+                        <a:srgbClr val="E2E4E8"/>
+                      </a:solidFill>
+                      <a:prstDash val="solid"/>
+                      <a:round/>
+                      <a:headEnd type="none" w="med" len="med"/>
+                      <a:tailEnd type="none" w="med" len="med"/>
+                    </a:lnB>
+                    <a:solidFill>
+                      <a:srgbClr val="F5F6F8"/>
+                    </a:solidFill>
+                  </a:tcPr>
+                </a:tc>
+                <a:tc>
+                  <a:txBody>
+                    <a:bodyPr/>
+                    <a:lstStyle/>
+                    <a:p>
+                      <a:pPr indent="0" marL="0">
+                        <a:buNone/>
+                      </a:pPr>
+                      <a:r>
+                        <a:rPr lang="en-US" sz="1150" dirty="0">
+                          <a:solidFill>
+                            <a:srgbClr val="1A2440"/>
+                          </a:solidFill>
+                          <a:latin typeface="Noto Sans CJK KR" pitchFamily="34" charset="0"/>
+                          <a:ea typeface="Noto Sans CJK KR" pitchFamily="34" charset="-122"/>
+                          <a:cs typeface="Noto Sans CJK KR" pitchFamily="34" charset="-120"/>
+                        </a:rPr>
+                        <a:t>젖음</a:t>
+                      </a:r>
+                      <a:endParaRPr lang="en-US" sz="1150" dirty="0">
+                        <a:latin typeface="Noto Sans CJK KR" charset="0"/>
+                        <a:ea typeface="Noto Sans CJK KR" charset="0"/>
+                        <a:cs typeface="Noto Sans CJK KR" charset="0"/>
+                      </a:endParaRPr>
+                    </a:p>
+                  </a:txBody>
+                  <a:tcPr marL="91440" marR="91440" marT="45720" marB="45720" anchor="ctr">
+                    <a:lnL w="9525" cap="flat" cmpd="sng" algn="ctr">
+                      <a:solidFill>
+                        <a:srgbClr val="E2E4E8"/>
+                      </a:solidFill>
+                      <a:prstDash val="solid"/>
+                      <a:round/>
+                      <a:headEnd type="none" w="med" len="med"/>
+                      <a:tailEnd type="none" w="med" len="med"/>
+                    </a:lnL>
+                    <a:lnR w="9525" cap="flat" cmpd="sng" algn="ctr">
+                      <a:solidFill>
+                        <a:srgbClr val="E2E4E8"/>
+                      </a:solidFill>
+                      <a:prstDash val="solid"/>
+                      <a:round/>
+                      <a:headEnd type="none" w="med" len="med"/>
+                      <a:tailEnd type="none" w="med" len="med"/>
+                    </a:lnR>
+                    <a:lnT w="9525" cap="flat" cmpd="sng" algn="ctr">
+                      <a:solidFill>
+                        <a:srgbClr val="E2E4E8"/>
+                      </a:solidFill>
+                      <a:prstDash val="solid"/>
+                      <a:round/>
+                      <a:headEnd type="none" w="med" len="med"/>
+                      <a:tailEnd type="none" w="med" len="med"/>
+                    </a:lnT>
+                    <a:lnB w="9525" cap="flat" cmpd="sng" algn="ctr">
+                      <a:solidFill>
+                        <a:srgbClr val="E2E4E8"/>
+                      </a:solidFill>
+                      <a:prstDash val="solid"/>
+                      <a:round/>
+                      <a:headEnd type="none" w="med" len="med"/>
+                      <a:tailEnd type="none" w="med" len="med"/>
+                    </a:lnB>
+                    <a:solidFill>
+                      <a:srgbClr val="F5F6F8"/>
+                    </a:solidFill>
+                  </a:tcPr>
+                </a:tc>
+              </a:tr>
+              <a:tr h="420624">
+                <a:tc>
+                  <a:txBody>
+                    <a:bodyPr/>
+                    <a:lstStyle/>
+                    <a:p>
+                      <a:pPr indent="0" marL="0">
+                        <a:buNone/>
+                      </a:pPr>
+                      <a:r>
+                        <a:rPr lang="en-US" sz="1150" dirty="0">
+                          <a:solidFill>
+                            <a:srgbClr val="1A2440"/>
+                          </a:solidFill>
+                          <a:latin typeface="Noto Sans CJK KR" pitchFamily="34" charset="0"/>
+                          <a:ea typeface="Noto Sans CJK KR" pitchFamily="34" charset="-122"/>
+                          <a:cs typeface="Noto Sans CJK KR" pitchFamily="34" charset="-120"/>
+                        </a:rPr>
+                        <a:t>13:20~13:40</a:t>
+                      </a:r>
+                      <a:endParaRPr lang="en-US" sz="1150" dirty="0">
+                        <a:latin typeface="Noto Sans CJK KR" charset="0"/>
+                        <a:ea typeface="Noto Sans CJK KR" charset="0"/>
+                        <a:cs typeface="Noto Sans CJK KR" charset="0"/>
+                      </a:endParaRPr>
+                    </a:p>
+                  </a:txBody>
+                  <a:tcPr marL="91440" marR="91440" marT="45720" marB="45720" anchor="ctr">
+                    <a:lnL w="9525" cap="flat" cmpd="sng" algn="ctr">
+                      <a:solidFill>
+                        <a:srgbClr val="E2E4E8"/>
+                      </a:solidFill>
+                      <a:prstDash val="solid"/>
+                      <a:round/>
+                      <a:headEnd type="none" w="med" len="med"/>
+                      <a:tailEnd type="none" w="med" len="med"/>
+                    </a:lnL>
+                    <a:lnR w="9525" cap="flat" cmpd="sng" algn="ctr">
+                      <a:solidFill>
+                        <a:srgbClr val="E2E4E8"/>
+                      </a:solidFill>
+                      <a:prstDash val="solid"/>
+                      <a:round/>
+                      <a:headEnd type="none" w="med" len="med"/>
+                      <a:tailEnd type="none" w="med" len="med"/>
+                    </a:lnR>
+                    <a:lnT w="9525" cap="flat" cmpd="sng" algn="ctr">
+                      <a:solidFill>
+                        <a:srgbClr val="E2E4E8"/>
+                      </a:solidFill>
+                      <a:prstDash val="solid"/>
+                      <a:round/>
+                      <a:headEnd type="none" w="med" len="med"/>
+                      <a:tailEnd type="none" w="med" len="med"/>
+                    </a:lnT>
+                    <a:lnB w="9525" cap="flat" cmpd="sng" algn="ctr">
+                      <a:solidFill>
+                        <a:srgbClr val="E2E4E8"/>
+                      </a:solidFill>
+                      <a:prstDash val="solid"/>
+                      <a:round/>
+                      <a:headEnd type="none" w="med" len="med"/>
+                      <a:tailEnd type="none" w="med" len="med"/>
+                    </a:lnB>
+                    <a:solidFill>
+                      <a:srgbClr val="FFFFFF"/>
+                    </a:solidFill>
+                  </a:tcPr>
+                </a:tc>
+                <a:tc>
+                  <a:txBody>
+                    <a:bodyPr/>
+                    <a:lstStyle/>
+                    <a:p>
+                      <a:pPr indent="0" marL="0">
+                        <a:buNone/>
+                      </a:pPr>
+                      <a:r>
+                        <a:rPr lang="en-US" sz="1150" dirty="0">
+                          <a:solidFill>
+                            <a:srgbClr val="1A2440"/>
+                          </a:solidFill>
+                          <a:latin typeface="Noto Sans CJK KR" pitchFamily="34" charset="0"/>
+                          <a:ea typeface="Noto Sans CJK KR" pitchFamily="34" charset="-122"/>
+                          <a:cs typeface="Noto Sans CJK KR" pitchFamily="34" charset="-120"/>
+                        </a:rPr>
+                        <a:t>Coast Guard Academy</a:t>
+                      </a:r>
+                      <a:endParaRPr lang="en-US" sz="1150" dirty="0">
+                        <a:latin typeface="Noto Sans CJK KR" charset="0"/>
+                        <a:ea typeface="Noto Sans CJK KR" charset="0"/>
+                        <a:cs typeface="Noto Sans CJK KR" charset="0"/>
+                      </a:endParaRPr>
+                    </a:p>
+                  </a:txBody>
+                  <a:tcPr marL="91440" marR="91440" marT="45720" marB="45720" anchor="ctr">
+                    <a:lnL w="9525" cap="flat" cmpd="sng" algn="ctr">
+                      <a:solidFill>
+                        <a:srgbClr val="E2E4E8"/>
+                      </a:solidFill>
+                      <a:prstDash val="solid"/>
+                      <a:round/>
+                      <a:headEnd type="none" w="med" len="med"/>
+                      <a:tailEnd type="none" w="med" len="med"/>
+                    </a:lnL>
+                    <a:lnR w="9525" cap="flat" cmpd="sng" algn="ctr">
+                      <a:solidFill>
+                        <a:srgbClr val="E2E4E8"/>
+                      </a:solidFill>
+                      <a:prstDash val="solid"/>
+                      <a:round/>
+                      <a:headEnd type="none" w="med" len="med"/>
+                      <a:tailEnd type="none" w="med" len="med"/>
+                    </a:lnR>
+                    <a:lnT w="9525" cap="flat" cmpd="sng" algn="ctr">
+                      <a:solidFill>
+                        <a:srgbClr val="E2E4E8"/>
+                      </a:solidFill>
+                      <a:prstDash val="solid"/>
+                      <a:round/>
+                      <a:headEnd type="none" w="med" len="med"/>
+                      <a:tailEnd type="none" w="med" len="med"/>
+                    </a:lnT>
+                    <a:lnB w="9525" cap="flat" cmpd="sng" algn="ctr">
+                      <a:solidFill>
+                        <a:srgbClr val="E2E4E8"/>
+                      </a:solidFill>
+                      <a:prstDash val="solid"/>
+                      <a:round/>
+                      <a:headEnd type="none" w="med" len="med"/>
+                      <a:tailEnd type="none" w="med" len="med"/>
+                    </a:lnB>
+                    <a:solidFill>
+                      <a:srgbClr val="FFFFFF"/>
+                    </a:solidFill>
+                  </a:tcPr>
+                </a:tc>
+                <a:tc>
+                  <a:txBody>
+                    <a:bodyPr/>
+                    <a:lstStyle/>
+                    <a:p>
+                      <a:pPr indent="0" marL="0">
+                        <a:buNone/>
+                      </a:pPr>
+                      <a:r>
+                        <a:rPr lang="en-US" sz="1150" dirty="0">
+                          <a:solidFill>
+                            <a:srgbClr val="1A2440"/>
+                          </a:solidFill>
+                          <a:latin typeface="Noto Sans CJK KR" pitchFamily="34" charset="0"/>
+                          <a:ea typeface="Noto Sans CJK KR" pitchFamily="34" charset="-122"/>
+                          <a:cs typeface="Noto Sans CJK KR" pitchFamily="34" charset="-120"/>
+                        </a:rPr>
+                        <a:t>Wave Racers보다 덜 젖음</a:t>
+                      </a:r>
+                      <a:endParaRPr lang="en-US" sz="1150" dirty="0">
+                        <a:latin typeface="Noto Sans CJK KR" charset="0"/>
+                        <a:ea typeface="Noto Sans CJK KR" charset="0"/>
+                        <a:cs typeface="Noto Sans CJK KR" charset="0"/>
+                      </a:endParaRPr>
+                    </a:p>
+                  </a:txBody>
+                  <a:tcPr marL="91440" marR="91440" marT="45720" marB="45720" anchor="ctr">
+                    <a:lnL w="9525" cap="flat" cmpd="sng" algn="ctr">
+                      <a:solidFill>
+                        <a:srgbClr val="E2E4E8"/>
+                      </a:solidFill>
+                      <a:prstDash val="solid"/>
+                      <a:round/>
+                      <a:headEnd type="none" w="med" len="med"/>
+                      <a:tailEnd type="none" w="med" len="med"/>
+                    </a:lnL>
+                    <a:lnR w="9525" cap="flat" cmpd="sng" algn="ctr">
+                      <a:solidFill>
+                        <a:srgbClr val="E2E4E8"/>
+                      </a:solidFill>
+                      <a:prstDash val="solid"/>
+                      <a:round/>
+                      <a:headEnd type="none" w="med" len="med"/>
+                      <a:tailEnd type="none" w="med" len="med"/>
+                    </a:lnR>
+                    <a:lnT w="9525" cap="flat" cmpd="sng" algn="ctr">
+                      <a:solidFill>
+                        <a:srgbClr val="E2E4E8"/>
+                      </a:solidFill>
+                      <a:prstDash val="solid"/>
+                      <a:round/>
+                      <a:headEnd type="none" w="med" len="med"/>
+                      <a:tailEnd type="none" w="med" len="med"/>
+                    </a:lnT>
+                    <a:lnB w="9525" cap="flat" cmpd="sng" algn="ctr">
+                      <a:solidFill>
+                        <a:srgbClr val="E2E4E8"/>
+                      </a:solidFill>
+                      <a:prstDash val="solid"/>
+                      <a:round/>
+                      <a:headEnd type="none" w="med" len="med"/>
+                      <a:tailEnd type="none" w="med" len="med"/>
+                    </a:lnB>
+                    <a:solidFill>
+                      <a:srgbClr val="FFFFFF"/>
+                    </a:solidFill>
+                  </a:tcPr>
+                </a:tc>
+              </a:tr>
+              <a:tr h="420624">
+                <a:tc>
+                  <a:txBody>
+                    <a:bodyPr/>
+                    <a:lstStyle/>
+                    <a:p>
+                      <a:pPr indent="0" marL="0">
+                        <a:buNone/>
+                      </a:pPr>
+                      <a:r>
+                        <a:rPr lang="en-US" sz="1150" dirty="0">
+                          <a:solidFill>
+                            <a:srgbClr val="1A2440"/>
+                          </a:solidFill>
+                          <a:latin typeface="Noto Sans CJK KR" pitchFamily="34" charset="0"/>
+                          <a:ea typeface="Noto Sans CJK KR" pitchFamily="34" charset="-122"/>
+                          <a:cs typeface="Noto Sans CJK KR" pitchFamily="34" charset="-120"/>
+                        </a:rPr>
+                        <a:t>13:40~14:05</a:t>
+                      </a:r>
+                      <a:endParaRPr lang="en-US" sz="1150" dirty="0">
+                        <a:latin typeface="Noto Sans CJK KR" charset="0"/>
+                        <a:ea typeface="Noto Sans CJK KR" charset="0"/>
+                        <a:cs typeface="Noto Sans CJK KR" charset="0"/>
+                      </a:endParaRPr>
+                    </a:p>
+                  </a:txBody>
+                  <a:tcPr marL="91440" marR="91440" marT="45720" marB="45720" anchor="ctr">
+                    <a:lnL w="9525" cap="flat" cmpd="sng" algn="ctr">
+                      <a:solidFill>
+                        <a:srgbClr val="E2E4E8"/>
+                      </a:solidFill>
+                      <a:prstDash val="solid"/>
+                      <a:round/>
+                      <a:headEnd type="none" w="med" len="med"/>
+                      <a:tailEnd type="none" w="med" len="med"/>
+                    </a:lnL>
+                    <a:lnR w="9525" cap="flat" cmpd="sng" algn="ctr">
+                      <a:solidFill>
+                        <a:srgbClr val="E2E4E8"/>
+                      </a:solidFill>
+                      <a:prstDash val="solid"/>
+                      <a:round/>
+                      <a:headEnd type="none" w="med" len="med"/>
+                      <a:tailEnd type="none" w="med" len="med"/>
+                    </a:lnR>
+                    <a:lnT w="9525" cap="flat" cmpd="sng" algn="ctr">
+                      <a:solidFill>
+                        <a:srgbClr val="E2E4E8"/>
+                      </a:solidFill>
+                      <a:prstDash val="solid"/>
+                      <a:round/>
+                      <a:headEnd type="none" w="med" len="med"/>
+                      <a:tailEnd type="none" w="med" len="med"/>
+                    </a:lnT>
+                    <a:lnB w="9525" cap="flat" cmpd="sng" algn="ctr">
+                      <a:solidFill>
+                        <a:srgbClr val="E2E4E8"/>
+                      </a:solidFill>
+                      <a:prstDash val="solid"/>
+                      <a:round/>
+                      <a:headEnd type="none" w="med" len="med"/>
+                      <a:tailEnd type="none" w="med" len="med"/>
+                    </a:lnB>
+                    <a:solidFill>
+                      <a:srgbClr val="F5F6F8"/>
+                    </a:solidFill>
+                  </a:tcPr>
+                </a:tc>
+                <a:tc>
+                  <a:txBody>
+                    <a:bodyPr/>
+                    <a:lstStyle/>
+                    <a:p>
+                      <a:pPr indent="0" marL="0">
+                        <a:buNone/>
+                      </a:pPr>
+                      <a:r>
+                        <a:rPr lang="en-US" sz="1150" dirty="0">
+                          <a:solidFill>
+                            <a:srgbClr val="1A2440"/>
+                          </a:solidFill>
+                          <a:latin typeface="Noto Sans CJK KR" pitchFamily="34" charset="0"/>
+                          <a:ea typeface="Noto Sans CJK KR" pitchFamily="34" charset="-122"/>
+                          <a:cs typeface="Noto Sans CJK KR" pitchFamily="34" charset="-120"/>
+                        </a:rPr>
+                        <a:t>Palace 4D Cinema</a:t>
+                      </a:r>
+                      <a:endParaRPr lang="en-US" sz="1150" dirty="0">
+                        <a:latin typeface="Noto Sans CJK KR" charset="0"/>
+                        <a:ea typeface="Noto Sans CJK KR" charset="0"/>
+                        <a:cs typeface="Noto Sans CJK KR" charset="0"/>
+                      </a:endParaRPr>
+                    </a:p>
+                  </a:txBody>
+                  <a:tcPr marL="91440" marR="91440" marT="45720" marB="45720" anchor="ctr">
+                    <a:lnL w="9525" cap="flat" cmpd="sng" algn="ctr">
+                      <a:solidFill>
+                        <a:srgbClr val="E2E4E8"/>
+                      </a:solidFill>
+                      <a:prstDash val="solid"/>
+                      <a:round/>
+                      <a:headEnd type="none" w="med" len="med"/>
+                      <a:tailEnd type="none" w="med" len="med"/>
+                    </a:lnL>
+                    <a:lnR w="9525" cap="flat" cmpd="sng" algn="ctr">
+                      <a:solidFill>
+                        <a:srgbClr val="E2E4E8"/>
+                      </a:solidFill>
+                      <a:prstDash val="solid"/>
+                      <a:round/>
+                      <a:headEnd type="none" w="med" len="med"/>
+                      <a:tailEnd type="none" w="med" len="med"/>
+                    </a:lnR>
+                    <a:lnT w="9525" cap="flat" cmpd="sng" algn="ctr">
+                      <a:solidFill>
+                        <a:srgbClr val="E2E4E8"/>
+                      </a:solidFill>
+                      <a:prstDash val="solid"/>
+                      <a:round/>
+                      <a:headEnd type="none" w="med" len="med"/>
+                      <a:tailEnd type="none" w="med" len="med"/>
+                    </a:lnT>
+                    <a:lnB w="9525" cap="flat" cmpd="sng" algn="ctr">
+                      <a:solidFill>
+                        <a:srgbClr val="E2E4E8"/>
+                      </a:solidFill>
+                      <a:prstDash val="solid"/>
+                      <a:round/>
+                      <a:headEnd type="none" w="med" len="med"/>
+                      <a:tailEnd type="none" w="med" len="med"/>
+                    </a:lnB>
+                    <a:solidFill>
+                      <a:srgbClr val="F5F6F8"/>
+                    </a:solidFill>
+                  </a:tcPr>
+                </a:tc>
+                <a:tc>
+                  <a:txBody>
+                    <a:bodyPr/>
+                    <a:lstStyle/>
+                    <a:p>
+                      <a:pPr indent="0" marL="0">
+                        <a:buNone/>
+                      </a:pPr>
+                      <a:r>
+                        <a:rPr lang="en-US" sz="1150" dirty="0">
+                          <a:solidFill>
+                            <a:srgbClr val="1A2440"/>
+                          </a:solidFill>
+                          <a:latin typeface="Noto Sans CJK KR" pitchFamily="34" charset="0"/>
+                          <a:ea typeface="Noto Sans CJK KR" pitchFamily="34" charset="-122"/>
+                          <a:cs typeface="Noto Sans CJK KR" pitchFamily="34" charset="-120"/>
+                        </a:rPr>
+                        <a:t>도착 즉시 앱으로 상영 시각 확인 후 배정 — 다음 슬라이드 참고</a:t>
+                      </a:r>
+                      <a:endParaRPr lang="en-US" sz="1150" dirty="0">
+                        <a:latin typeface="Noto Sans CJK KR" charset="0"/>
+                        <a:ea typeface="Noto Sans CJK KR" charset="0"/>
+                        <a:cs typeface="Noto Sans CJK KR" charset="0"/>
+                      </a:endParaRPr>
+                    </a:p>
+                  </a:txBody>
+                  <a:tcPr marL="91440" marR="91440" marT="45720" marB="45720" anchor="ctr">
+                    <a:lnL w="9525" cap="flat" cmpd="sng" algn="ctr">
+                      <a:solidFill>
+                        <a:srgbClr val="E2E4E8"/>
+                      </a:solidFill>
+                      <a:prstDash val="solid"/>
+                      <a:round/>
+                      <a:headEnd type="none" w="med" len="med"/>
+                      <a:tailEnd type="none" w="med" len="med"/>
+                    </a:lnL>
+                    <a:lnR w="9525" cap="flat" cmpd="sng" algn="ctr">
+                      <a:solidFill>
+                        <a:srgbClr val="E2E4E8"/>
+                      </a:solidFill>
+                      <a:prstDash val="solid"/>
+                      <a:round/>
+                      <a:headEnd type="none" w="med" len="med"/>
+                      <a:tailEnd type="none" w="med" len="med"/>
+                    </a:lnR>
+                    <a:lnT w="9525" cap="flat" cmpd="sng" algn="ctr">
+                      <a:solidFill>
+                        <a:srgbClr val="E2E4E8"/>
+                      </a:solidFill>
+                      <a:prstDash val="solid"/>
+                      <a:round/>
+                      <a:headEnd type="none" w="med" len="med"/>
+                      <a:tailEnd type="none" w="med" len="med"/>
+                    </a:lnT>
+                    <a:lnB w="9525" cap="flat" cmpd="sng" algn="ctr">
+                      <a:solidFill>
+                        <a:srgbClr val="E2E4E8"/>
+                      </a:solidFill>
+                      <a:prstDash val="solid"/>
+                      <a:round/>
+                      <a:headEnd type="none" w="med" len="med"/>
+                      <a:tailEnd type="none" w="med" len="med"/>
+                    </a:lnB>
+                    <a:solidFill>
+                      <a:srgbClr val="F5F6F8"/>
+                    </a:solidFill>
+                  </a:tcPr>
+                </a:tc>
+              </a:tr>
+              <a:tr h="420624">
+                <a:tc>
+                  <a:txBody>
+                    <a:bodyPr/>
+                    <a:lstStyle/>
+                    <a:p>
+                      <a:pPr indent="0" marL="0">
+                        <a:buNone/>
+                      </a:pPr>
+                      <a:r>
+                        <a:rPr lang="en-US" sz="1150" dirty="0">
+                          <a:solidFill>
+                            <a:srgbClr val="1A2440"/>
+                          </a:solidFill>
+                          <a:latin typeface="Noto Sans CJK KR" pitchFamily="34" charset="0"/>
+                          <a:ea typeface="Noto Sans CJK KR" pitchFamily="34" charset="-122"/>
+                          <a:cs typeface="Noto Sans CJK KR" pitchFamily="34" charset="-120"/>
+                        </a:rPr>
+                        <a:t>14:05~14:20</a:t>
+                      </a:r>
+                      <a:endParaRPr lang="en-US" sz="1150" dirty="0">
+                        <a:latin typeface="Noto Sans CJK KR" charset="0"/>
+                        <a:ea typeface="Noto Sans CJK KR" charset="0"/>
+                        <a:cs typeface="Noto Sans CJK KR" charset="0"/>
+                      </a:endParaRPr>
+                    </a:p>
+                  </a:txBody>
+                  <a:tcPr marL="91440" marR="91440" marT="45720" marB="45720" anchor="ctr">
+                    <a:lnL w="9525" cap="flat" cmpd="sng" algn="ctr">
+                      <a:solidFill>
+                        <a:srgbClr val="E2E4E8"/>
+                      </a:solidFill>
+                      <a:prstDash val="solid"/>
+                      <a:round/>
+                      <a:headEnd type="none" w="med" len="med"/>
+                      <a:tailEnd type="none" w="med" len="med"/>
+                    </a:lnL>
+                    <a:lnR w="9525" cap="flat" cmpd="sng" algn="ctr">
+                      <a:solidFill>
+                        <a:srgbClr val="E2E4E8"/>
+                      </a:solidFill>
+                      <a:prstDash val="solid"/>
+                      <a:round/>
+                      <a:headEnd type="none" w="med" len="med"/>
+                      <a:tailEnd type="none" w="med" len="med"/>
+                    </a:lnR>
+                    <a:lnT w="9525" cap="flat" cmpd="sng" algn="ctr">
+                      <a:solidFill>
+                        <a:srgbClr val="E2E4E8"/>
+                      </a:solidFill>
+                      <a:prstDash val="solid"/>
+                      <a:round/>
+                      <a:headEnd type="none" w="med" len="med"/>
+                      <a:tailEnd type="none" w="med" len="med"/>
+                    </a:lnT>
+                    <a:lnB w="9525" cap="flat" cmpd="sng" algn="ctr">
+                      <a:solidFill>
+                        <a:srgbClr val="E2E4E8"/>
+                      </a:solidFill>
+                      <a:prstDash val="solid"/>
+                      <a:round/>
+                      <a:headEnd type="none" w="med" len="med"/>
+                      <a:tailEnd type="none" w="med" len="med"/>
+                    </a:lnB>
+                    <a:solidFill>
+                      <a:srgbClr val="FFFFFF"/>
+                    </a:solidFill>
+                  </a:tcPr>
+                </a:tc>
+                <a:tc>
+                  <a:txBody>
+                    <a:bodyPr/>
+                    <a:lstStyle/>
+                    <a:p>
+                      <a:pPr indent="0" marL="0">
+                        <a:buNone/>
+                      </a:pPr>
+                      <a:r>
+                        <a:rPr lang="en-US" sz="1150" dirty="0">
+                          <a:solidFill>
+                            <a:srgbClr val="1A2440"/>
+                          </a:solidFill>
+                          <a:latin typeface="Noto Sans CJK KR" pitchFamily="34" charset="0"/>
+                          <a:ea typeface="Noto Sans CJK KR" pitchFamily="34" charset="-122"/>
+                          <a:cs typeface="Noto Sans CJK KR" pitchFamily="34" charset="-120"/>
+                        </a:rPr>
+                        <a:t>환복·휴식</a:t>
+                      </a:r>
+                      <a:endParaRPr lang="en-US" sz="1150" dirty="0">
+                        <a:latin typeface="Noto Sans CJK KR" charset="0"/>
+                        <a:ea typeface="Noto Sans CJK KR" charset="0"/>
+                        <a:cs typeface="Noto Sans CJK KR" charset="0"/>
+                      </a:endParaRPr>
+                    </a:p>
+                  </a:txBody>
+                  <a:tcPr marL="91440" marR="91440" marT="45720" marB="45720" anchor="ctr">
+                    <a:lnL w="9525" cap="flat" cmpd="sng" algn="ctr">
+                      <a:solidFill>
+                        <a:srgbClr val="E2E4E8"/>
+                      </a:solidFill>
+                      <a:prstDash val="solid"/>
+                      <a:round/>
+                      <a:headEnd type="none" w="med" len="med"/>
+                      <a:tailEnd type="none" w="med" len="med"/>
+                    </a:lnL>
+                    <a:lnR w="9525" cap="flat" cmpd="sng" algn="ctr">
+                      <a:solidFill>
+                        <a:srgbClr val="E2E4E8"/>
+                      </a:solidFill>
+                      <a:prstDash val="solid"/>
+                      <a:round/>
+                      <a:headEnd type="none" w="med" len="med"/>
+                      <a:tailEnd type="none" w="med" len="med"/>
+                    </a:lnR>
+                    <a:lnT w="9525" cap="flat" cmpd="sng" algn="ctr">
+                      <a:solidFill>
+                        <a:srgbClr val="E2E4E8"/>
+                      </a:solidFill>
+                      <a:prstDash val="solid"/>
+                      <a:round/>
+                      <a:headEnd type="none" w="med" len="med"/>
+                      <a:tailEnd type="none" w="med" len="med"/>
+                    </a:lnT>
+                    <a:lnB w="9525" cap="flat" cmpd="sng" algn="ctr">
+                      <a:solidFill>
+                        <a:srgbClr val="E2E4E8"/>
+                      </a:solidFill>
+                      <a:prstDash val="solid"/>
+                      <a:round/>
+                      <a:headEnd type="none" w="med" len="med"/>
+                      <a:tailEnd type="none" w="med" len="med"/>
+                    </a:lnB>
+                    <a:solidFill>
+                      <a:srgbClr val="FFFFFF"/>
+                    </a:solidFill>
+                  </a:tcPr>
+                </a:tc>
+                <a:tc>
+                  <a:txBody>
+                    <a:bodyPr/>
+                    <a:lstStyle/>
+                    <a:p>
+                      <a:pPr indent="0" marL="0">
+                        <a:buNone/>
+                      </a:pPr>
+                      <a:r>
+                        <a:rPr lang="en-US" sz="1150" dirty="0">
+                          <a:solidFill>
+                            <a:srgbClr val="1A2440"/>
+                          </a:solidFill>
+                          <a:latin typeface="Noto Sans CJK KR" pitchFamily="34" charset="0"/>
+                          <a:ea typeface="Noto Sans CJK KR" pitchFamily="34" charset="-122"/>
+                          <a:cs typeface="Noto Sans CJK KR" pitchFamily="34" charset="-120"/>
+                        </a:rPr>
+                        <a:t>물놀이 옷 갈아입기 (시티 화장실)</a:t>
+                      </a:r>
+                      <a:endParaRPr lang="en-US" sz="1150" dirty="0">
+                        <a:latin typeface="Noto Sans CJK KR" charset="0"/>
+                        <a:ea typeface="Noto Sans CJK KR" charset="0"/>
+                        <a:cs typeface="Noto Sans CJK KR" charset="0"/>
+                      </a:endParaRPr>
+                    </a:p>
+                  </a:txBody>
+                  <a:tcPr marL="91440" marR="91440" marT="45720" marB="45720" anchor="ctr">
+                    <a:lnL w="9525" cap="flat" cmpd="sng" algn="ctr">
+                      <a:solidFill>
+                        <a:srgbClr val="E2E4E8"/>
+                      </a:solidFill>
+                      <a:prstDash val="solid"/>
+                      <a:round/>
+                      <a:headEnd type="none" w="med" len="med"/>
+                      <a:tailEnd type="none" w="med" len="med"/>
+                    </a:lnL>
+                    <a:lnR w="9525" cap="flat" cmpd="sng" algn="ctr">
+                      <a:solidFill>
+                        <a:srgbClr val="E2E4E8"/>
+                      </a:solidFill>
+                      <a:prstDash val="solid"/>
+                      <a:round/>
+                      <a:headEnd type="none" w="med" len="med"/>
+                      <a:tailEnd type="none" w="med" len="med"/>
+                    </a:lnR>
+                    <a:lnT w="9525" cap="flat" cmpd="sng" algn="ctr">
+                      <a:solidFill>
+                        <a:srgbClr val="E2E4E8"/>
+                      </a:solidFill>
+                      <a:prstDash val="solid"/>
+                      <a:round/>
+                      <a:headEnd type="none" w="med" len="med"/>
+                      <a:tailEnd type="none" w="med" len="med"/>
+                    </a:lnT>
+                    <a:lnB w="9525" cap="flat" cmpd="sng" algn="ctr">
+                      <a:solidFill>
+                        <a:srgbClr val="E2E4E8"/>
+                      </a:solidFill>
+                      <a:prstDash val="solid"/>
+                      <a:round/>
+                      <a:headEnd type="none" w="med" len="med"/>
+                      <a:tailEnd type="none" w="med" len="med"/>
+                    </a:lnB>
+                    <a:solidFill>
+                      <a:srgbClr val="FFFFFF"/>
+                    </a:solidFill>
+                  </a:tcPr>
+                </a:tc>
+              </a:tr>
+              <a:tr h="420624">
+                <a:tc>
+                  <a:txBody>
+                    <a:bodyPr/>
+                    <a:lstStyle/>
+                    <a:p>
+                      <a:pPr indent="0" marL="0">
+                        <a:buNone/>
+                      </a:pPr>
+                      <a:r>
+                        <a:rPr lang="en-US" sz="1150" b="1" dirty="0">
+                          <a:solidFill>
+                            <a:srgbClr val="D62839"/>
+                          </a:solidFill>
+                          <a:latin typeface="Noto Sans CJK KR" pitchFamily="34" charset="0"/>
+                          <a:ea typeface="Noto Sans CJK KR" pitchFamily="34" charset="-122"/>
+                          <a:cs typeface="Noto Sans CJK KR" pitchFamily="34" charset="-120"/>
+                        </a:rPr>
+                        <a:t>14:20~14:35</a:t>
+                      </a:r>
+                      <a:endParaRPr lang="en-US" sz="1150" dirty="0">
+                        <a:latin typeface="Noto Sans CJK KR" charset="0"/>
+                        <a:ea typeface="Noto Sans CJK KR" charset="0"/>
+                        <a:cs typeface="Noto Sans CJK KR" charset="0"/>
+                      </a:endParaRPr>
+                    </a:p>
+                  </a:txBody>
+                  <a:tcPr marL="91440" marR="91440" marT="45720" marB="45720" anchor="ctr">
+                    <a:lnL w="9525" cap="flat" cmpd="sng" algn="ctr">
+                      <a:solidFill>
+                        <a:srgbClr val="E2E4E8"/>
+                      </a:solidFill>
+                      <a:prstDash val="solid"/>
+                      <a:round/>
+                      <a:headEnd type="none" w="med" len="med"/>
+                      <a:tailEnd type="none" w="med" len="med"/>
+                    </a:lnL>
+                    <a:lnR w="9525" cap="flat" cmpd="sng" algn="ctr">
+                      <a:solidFill>
+                        <a:srgbClr val="E2E4E8"/>
+                      </a:solidFill>
+                      <a:prstDash val="solid"/>
+                      <a:round/>
+                      <a:headEnd type="none" w="med" len="med"/>
+                      <a:tailEnd type="none" w="med" len="med"/>
+                    </a:lnR>
+                    <a:lnT w="9525" cap="flat" cmpd="sng" algn="ctr">
+                      <a:solidFill>
+                        <a:srgbClr val="E2E4E8"/>
+                      </a:solidFill>
+                      <a:prstDash val="solid"/>
+                      <a:round/>
+                      <a:headEnd type="none" w="med" len="med"/>
+                      <a:tailEnd type="none" w="med" len="med"/>
+                    </a:lnT>
+                    <a:lnB w="9525" cap="flat" cmpd="sng" algn="ctr">
+                      <a:solidFill>
+                        <a:srgbClr val="E2E4E8"/>
+                      </a:solidFill>
+                      <a:prstDash val="solid"/>
+                      <a:round/>
+                      <a:headEnd type="none" w="med" len="med"/>
+                      <a:tailEnd type="none" w="med" len="med"/>
+                    </a:lnB>
+                    <a:solidFill>
+                      <a:srgbClr val="FDECEC"/>
+                    </a:solidFill>
+                  </a:tcPr>
+                </a:tc>
+                <a:tc>
+                  <a:txBody>
+                    <a:bodyPr/>
+                    <a:lstStyle/>
+                    <a:p>
+                      <a:pPr indent="0" marL="0">
+                        <a:buNone/>
+                      </a:pPr>
+                      <a:r>
+                        <a:rPr lang="en-US" sz="1150" b="1" dirty="0">
+                          <a:solidFill>
+                            <a:srgbClr val="1A2440"/>
+                          </a:solidFill>
+                          <a:latin typeface="Noto Sans CJK KR" pitchFamily="34" charset="0"/>
+                          <a:ea typeface="Noto Sans CJK KR" pitchFamily="34" charset="-122"/>
+                          <a:cs typeface="Noto Sans CJK KR" pitchFamily="34" charset="-120"/>
+                        </a:rPr>
+                        <a:t>이동</a:t>
+                      </a:r>
+                      <a:endParaRPr lang="en-US" sz="1150" dirty="0">
+                        <a:latin typeface="Noto Sans CJK KR" charset="0"/>
+                        <a:ea typeface="Noto Sans CJK KR" charset="0"/>
+                        <a:cs typeface="Noto Sans CJK KR" charset="0"/>
+                      </a:endParaRPr>
+                    </a:p>
+                  </a:txBody>
+                  <a:tcPr marL="91440" marR="91440" marT="45720" marB="45720" anchor="ctr">
+                    <a:lnL w="9525" cap="flat" cmpd="sng" algn="ctr">
+                      <a:solidFill>
+                        <a:srgbClr val="E2E4E8"/>
+                      </a:solidFill>
+                      <a:prstDash val="solid"/>
+                      <a:round/>
+                      <a:headEnd type="none" w="med" len="med"/>
+                      <a:tailEnd type="none" w="med" len="med"/>
+                    </a:lnL>
+                    <a:lnR w="9525" cap="flat" cmpd="sng" algn="ctr">
+                      <a:solidFill>
+                        <a:srgbClr val="E2E4E8"/>
+                      </a:solidFill>
+                      <a:prstDash val="solid"/>
+                      <a:round/>
+                      <a:headEnd type="none" w="med" len="med"/>
+                      <a:tailEnd type="none" w="med" len="med"/>
+                    </a:lnR>
+                    <a:lnT w="9525" cap="flat" cmpd="sng" algn="ctr">
+                      <a:solidFill>
+                        <a:srgbClr val="E2E4E8"/>
+                      </a:solidFill>
+                      <a:prstDash val="solid"/>
+                      <a:round/>
+                      <a:headEnd type="none" w="med" len="med"/>
+                      <a:tailEnd type="none" w="med" len="med"/>
+                    </a:lnT>
+                    <a:lnB w="9525" cap="flat" cmpd="sng" algn="ctr">
+                      <a:solidFill>
+                        <a:srgbClr val="E2E4E8"/>
+                      </a:solidFill>
+                      <a:prstDash val="solid"/>
+                      <a:round/>
+                      <a:headEnd type="none" w="med" len="med"/>
+                      <a:tailEnd type="none" w="med" len="med"/>
+                    </a:lnB>
+                    <a:solidFill>
+                      <a:srgbClr val="FDECEC"/>
+                    </a:solidFill>
+                  </a:tcPr>
+                </a:tc>
+                <a:tc>
+                  <a:txBody>
+                    <a:bodyPr/>
+                    <a:lstStyle/>
+                    <a:p>
+                      <a:pPr indent="0" marL="0">
+                        <a:buNone/>
+                      </a:pPr>
+                      <a:r>
+                        <a:rPr lang="en-US" sz="1150" dirty="0">
+                          <a:solidFill>
+                            <a:srgbClr val="1A2440"/>
+                          </a:solidFill>
+                          <a:latin typeface="Noto Sans CJK KR" pitchFamily="34" charset="0"/>
+                          <a:ea typeface="Noto Sans CJK KR" pitchFamily="34" charset="-122"/>
+                          <a:cs typeface="Noto Sans CJK KR" pitchFamily="34" charset="-120"/>
+                        </a:rPr>
+                        <a:t>시티→해적의 바다→미니랜드→NINJAGO→캐슬 (귀환)</a:t>
+                      </a:r>
+                      <a:endParaRPr lang="en-US" sz="1150" dirty="0">
+                        <a:latin typeface="Noto Sans CJK KR" charset="0"/>
+                        <a:ea typeface="Noto Sans CJK KR" charset="0"/>
+                        <a:cs typeface="Noto Sans CJK KR" charset="0"/>
+                      </a:endParaRPr>
+                    </a:p>
+                  </a:txBody>
+                  <a:tcPr marL="91440" marR="91440" marT="45720" marB="45720" anchor="ctr">
+                    <a:lnL w="9525" cap="flat" cmpd="sng" algn="ctr">
+                      <a:solidFill>
+                        <a:srgbClr val="E2E4E8"/>
+                      </a:solidFill>
+                      <a:prstDash val="solid"/>
+                      <a:round/>
+                      <a:headEnd type="none" w="med" len="med"/>
+                      <a:tailEnd type="none" w="med" len="med"/>
+                    </a:lnL>
+                    <a:lnR w="9525" cap="flat" cmpd="sng" algn="ctr">
+                      <a:solidFill>
+                        <a:srgbClr val="E2E4E8"/>
+                      </a:solidFill>
+                      <a:prstDash val="solid"/>
+                      <a:round/>
+                      <a:headEnd type="none" w="med" len="med"/>
+                      <a:tailEnd type="none" w="med" len="med"/>
+                    </a:lnR>
+                    <a:lnT w="9525" cap="flat" cmpd="sng" algn="ctr">
+                      <a:solidFill>
+                        <a:srgbClr val="E2E4E8"/>
+                      </a:solidFill>
+                      <a:prstDash val="solid"/>
+                      <a:round/>
+                      <a:headEnd type="none" w="med" len="med"/>
+                      <a:tailEnd type="none" w="med" len="med"/>
+                    </a:lnT>
+                    <a:lnB w="9525" cap="flat" cmpd="sng" algn="ctr">
+                      <a:solidFill>
+                        <a:srgbClr val="E2E4E8"/>
+                      </a:solidFill>
+                      <a:prstDash val="solid"/>
+                      <a:round/>
+                      <a:headEnd type="none" w="med" len="med"/>
+                      <a:tailEnd type="none" w="med" len="med"/>
+                    </a:lnB>
+                    <a:solidFill>
+                      <a:srgbClr val="FDECEC"/>
+                    </a:solidFill>
+                  </a:tcPr>
+                </a:tc>
+              </a:tr>
+              <a:tr h="420624">
+                <a:tc>
+                  <a:txBody>
+                    <a:bodyPr/>
+                    <a:lstStyle/>
+                    <a:p>
+                      <a:pPr indent="0" marL="0">
+                        <a:buNone/>
+                      </a:pPr>
+                      <a:r>
+                        <a:rPr lang="en-US" sz="1150" b="1" dirty="0">
+                          <a:solidFill>
+                            <a:srgbClr val="D62839"/>
+                          </a:solidFill>
+                          <a:latin typeface="Noto Sans CJK KR" pitchFamily="34" charset="0"/>
+                          <a:ea typeface="Noto Sans CJK KR" pitchFamily="34" charset="-122"/>
+                          <a:cs typeface="Noto Sans CJK KR" pitchFamily="34" charset="-120"/>
+                        </a:rPr>
+                        <a:t>14:35~15:40</a:t>
+                      </a:r>
+                      <a:endParaRPr lang="en-US" sz="1150" dirty="0">
+                        <a:latin typeface="Noto Sans CJK KR" charset="0"/>
+                        <a:ea typeface="Noto Sans CJK KR" charset="0"/>
+                        <a:cs typeface="Noto Sans CJK KR" charset="0"/>
+                      </a:endParaRPr>
+                    </a:p>
+                  </a:txBody>
+                  <a:tcPr marL="91440" marR="91440" marT="45720" marB="45720" anchor="ctr">
+                    <a:lnL w="9525" cap="flat" cmpd="sng" algn="ctr">
+                      <a:solidFill>
+                        <a:srgbClr val="E2E4E8"/>
+                      </a:solidFill>
+                      <a:prstDash val="solid"/>
+                      <a:round/>
+                      <a:headEnd type="none" w="med" len="med"/>
+                      <a:tailEnd type="none" w="med" len="med"/>
+                    </a:lnL>
+                    <a:lnR w="9525" cap="flat" cmpd="sng" algn="ctr">
+                      <a:solidFill>
+                        <a:srgbClr val="E2E4E8"/>
+                      </a:solidFill>
+                      <a:prstDash val="solid"/>
+                      <a:round/>
+                      <a:headEnd type="none" w="med" len="med"/>
+                      <a:tailEnd type="none" w="med" len="med"/>
+                    </a:lnR>
+                    <a:lnT w="9525" cap="flat" cmpd="sng" algn="ctr">
+                      <a:solidFill>
+                        <a:srgbClr val="E2E4E8"/>
+                      </a:solidFill>
+                      <a:prstDash val="solid"/>
+                      <a:round/>
+                      <a:headEnd type="none" w="med" len="med"/>
+                      <a:tailEnd type="none" w="med" len="med"/>
+                    </a:lnT>
+                    <a:lnB w="9525" cap="flat" cmpd="sng" algn="ctr">
+                      <a:solidFill>
+                        <a:srgbClr val="E2E4E8"/>
+                      </a:solidFill>
+                      <a:prstDash val="solid"/>
+                      <a:round/>
+                      <a:headEnd type="none" w="med" len="med"/>
+                      <a:tailEnd type="none" w="med" len="med"/>
+                    </a:lnB>
+                    <a:solidFill>
+                      <a:srgbClr val="FDECEC"/>
+                    </a:solidFill>
+                  </a:tcPr>
+                </a:tc>
+                <a:tc>
+                  <a:txBody>
+                    <a:bodyPr/>
+                    <a:lstStyle/>
+                    <a:p>
+                      <a:pPr indent="0" marL="0">
+                        <a:buNone/>
+                      </a:pPr>
+                      <a:r>
+                        <a:rPr lang="en-US" sz="1150" b="1" dirty="0">
+                          <a:solidFill>
+                            <a:srgbClr val="1A2440"/>
+                          </a:solidFill>
+                          <a:latin typeface="Noto Sans CJK KR" pitchFamily="34" charset="0"/>
+                          <a:ea typeface="Noto Sans CJK KR" pitchFamily="34" charset="-122"/>
+                          <a:cs typeface="Noto Sans CJK KR" pitchFamily="34" charset="-120"/>
+                        </a:rPr>
+                        <a:t>★★★ 드래곤 2차</a:t>
+                      </a:r>
+                      <a:endParaRPr lang="en-US" sz="1150" dirty="0">
+                        <a:latin typeface="Noto Sans CJK KR" charset="0"/>
+                        <a:ea typeface="Noto Sans CJK KR" charset="0"/>
+                        <a:cs typeface="Noto Sans CJK KR" charset="0"/>
+                      </a:endParaRPr>
+                    </a:p>
+                  </a:txBody>
+                  <a:tcPr marL="91440" marR="91440" marT="45720" marB="45720" anchor="ctr">
+                    <a:lnL w="9525" cap="flat" cmpd="sng" algn="ctr">
+                      <a:solidFill>
+                        <a:srgbClr val="E2E4E8"/>
+                      </a:solidFill>
+                      <a:prstDash val="solid"/>
+                      <a:round/>
+                      <a:headEnd type="none" w="med" len="med"/>
+                      <a:tailEnd type="none" w="med" len="med"/>
+                    </a:lnL>
+                    <a:lnR w="9525" cap="flat" cmpd="sng" algn="ctr">
+                      <a:solidFill>
+                        <a:srgbClr val="E2E4E8"/>
+                      </a:solidFill>
+                      <a:prstDash val="solid"/>
+                      <a:round/>
+                      <a:headEnd type="none" w="med" len="med"/>
+                      <a:tailEnd type="none" w="med" len="med"/>
+                    </a:lnR>
+                    <a:lnT w="9525" cap="flat" cmpd="sng" algn="ctr">
+                      <a:solidFill>
+                        <a:srgbClr val="E2E4E8"/>
+                      </a:solidFill>
+                      <a:prstDash val="solid"/>
+                      <a:round/>
+                      <a:headEnd type="none" w="med" len="med"/>
+                      <a:tailEnd type="none" w="med" len="med"/>
+                    </a:lnT>
+                    <a:lnB w="9525" cap="flat" cmpd="sng" algn="ctr">
+                      <a:solidFill>
+                        <a:srgbClr val="E2E4E8"/>
+                      </a:solidFill>
+                      <a:prstDash val="solid"/>
+                      <a:round/>
+                      <a:headEnd type="none" w="med" len="med"/>
+                      <a:tailEnd type="none" w="med" len="med"/>
+                    </a:lnB>
+                    <a:solidFill>
+                      <a:srgbClr val="FDECEC"/>
+                    </a:solidFill>
+                  </a:tcPr>
+                </a:tc>
+                <a:tc>
+                  <a:txBody>
+                    <a:bodyPr/>
+                    <a:lstStyle/>
+                    <a:p>
+                      <a:pPr indent="0" marL="0">
+                        <a:buNone/>
+                      </a:pPr>
+                      <a:r>
+                        <a:rPr lang="en-US" sz="1150" dirty="0">
+                          <a:solidFill>
+                            <a:srgbClr val="1A2440"/>
+                          </a:solidFill>
+                          <a:latin typeface="Noto Sans CJK KR" pitchFamily="34" charset="0"/>
+                          <a:ea typeface="Noto Sans CJK KR" pitchFamily="34" charset="-122"/>
+                          <a:cs typeface="Noto Sans CJK KR" pitchFamily="34" charset="-120"/>
+                        </a:rPr>
+                        <a:t>몰아타기 65분 — 폐장 전 두 번째로 비는 시간대</a:t>
+                      </a:r>
+                      <a:endParaRPr lang="en-US" sz="1150" dirty="0">
+                        <a:latin typeface="Noto Sans CJK KR" charset="0"/>
+                        <a:ea typeface="Noto Sans CJK KR" charset="0"/>
+                        <a:cs typeface="Noto Sans CJK KR" charset="0"/>
+                      </a:endParaRPr>
+                    </a:p>
+                  </a:txBody>
+                  <a:tcPr marL="91440" marR="91440" marT="45720" marB="45720" anchor="ctr">
+                    <a:lnL w="9525" cap="flat" cmpd="sng" algn="ctr">
+                      <a:solidFill>
+                        <a:srgbClr val="E2E4E8"/>
+                      </a:solidFill>
+                      <a:prstDash val="solid"/>
+                      <a:round/>
+                      <a:headEnd type="none" w="med" len="med"/>
+                      <a:tailEnd type="none" w="med" len="med"/>
+                    </a:lnL>
+                    <a:lnR w="9525" cap="flat" cmpd="sng" algn="ctr">
+                      <a:solidFill>
+                        <a:srgbClr val="E2E4E8"/>
+                      </a:solidFill>
+                      <a:prstDash val="solid"/>
+                      <a:round/>
+                      <a:headEnd type="none" w="med" len="med"/>
+                      <a:tailEnd type="none" w="med" len="med"/>
+                    </a:lnR>
+                    <a:lnT w="9525" cap="flat" cmpd="sng" algn="ctr">
+                      <a:solidFill>
+                        <a:srgbClr val="E2E4E8"/>
+                      </a:solidFill>
+                      <a:prstDash val="solid"/>
+                      <a:round/>
+                      <a:headEnd type="none" w="med" len="med"/>
+                      <a:tailEnd type="none" w="med" len="med"/>
+                    </a:lnT>
+                    <a:lnB w="9525" cap="flat" cmpd="sng" algn="ctr">
+                      <a:solidFill>
+                        <a:srgbClr val="E2E4E8"/>
+                      </a:solidFill>
+                      <a:prstDash val="solid"/>
+                      <a:round/>
+                      <a:headEnd type="none" w="med" len="med"/>
+                      <a:tailEnd type="none" w="med" len="med"/>
+                    </a:lnB>
+                    <a:solidFill>
+                      <a:srgbClr val="FDECEC"/>
+                    </a:solidFill>
+                  </a:tcPr>
+                </a:tc>
+              </a:tr>
             </a:tbl>
           </a:graphicData>
         </a:graphic>
@@ -4904,7 +7544,7 @@
                 <a:ea typeface="Noto Sans CJK KR" pitchFamily="34" charset="-122"/>
                 <a:cs typeface="Noto Sans CJK KR" pitchFamily="34" charset="-120"/>
               </a:rPr>
-              <a:t>3</a:t>
+              <a:t>4</a:t>
             </a:r>
             <a:endParaRPr lang="en-US" sz="900" dirty="0"/>
           </a:p>
@@ -4918,9 +7558,9 @@
 </p:sld>
 </file>
 
-<file path=ppt/slides/slide4.xml><?xml version="1.0" encoding="utf-8"?>
+<file path=ppt/slides/slide5.xml><?xml version="1.0" encoding="utf-8"?>
 <p:sld xmlns:a="http://schemas.openxmlformats.org/drawingml/2006/main" xmlns:r="http://schemas.openxmlformats.org/officeDocument/2006/relationships" xmlns:p="http://schemas.openxmlformats.org/presentationml/2006/main">
-  <p:cSld name="Slide 4">
+  <p:cSld name="Slide 5">
     <p:bg>
       <p:bgPr>
         <a:solidFill>
@@ -4975,7 +7615,7 @@
                 <a:ea typeface="Noto Sans CJK KR" pitchFamily="34" charset="-122"/>
                 <a:cs typeface="Noto Sans CJK KR" pitchFamily="34" charset="-120"/>
               </a:rPr>
-              <a:t>SCHEDULE 2/2</a:t>
+              <a:t>SCHEDULE 3/3</a:t>
             </a:r>
             <a:endParaRPr lang="en-US" sz="1200" dirty="0"/>
           </a:p>
@@ -5022,7 +7662,7 @@
       </p:sp>
       <p:graphicFrame>
         <p:nvGraphicFramePr>
-          <p:cNvPr id="5" name="Table 0"/>
+          <p:cNvPr id="6" name="Table 0"/>
           <p:cNvGraphicFramePr>
             <a:graphicFrameLocks noGrp="1"/>
           </p:cNvGraphicFramePr>
@@ -5047,7 +7687,7 @@
                 <a:gridCol w="1828800"/>
                 <a:gridCol w="7955280"/>
               </a:tblGrid>
-              <a:tr h="457200">
+              <a:tr h="420624">
                 <a:tc>
                   <a:txBody>
                     <a:bodyPr/>
@@ -5253,7 +7893,7 @@
                   </a:tcPr>
                 </a:tc>
               </a:tr>
-              <a:tr h="457200">
+              <a:tr h="420624">
                 <a:tc>
                   <a:txBody>
                     <a:bodyPr/>
@@ -5271,7 +7911,7 @@
                           <a:ea typeface="Noto Sans CJK KR" pitchFamily="34" charset="-122"/>
                           <a:cs typeface="Noto Sans CJK KR" pitchFamily="34" charset="-120"/>
                         </a:rPr>
-                        <a:t>12:00~12:45</a:t>
+                        <a:t>15:40~15:45</a:t>
                       </a:r>
                       <a:endParaRPr lang="en-US" sz="1150" dirty="0">
                         <a:latin typeface="Noto Sans CJK KR" charset="0"/>
@@ -5339,7 +7979,7 @@
                           <a:ea typeface="Noto Sans CJK KR" pitchFamily="34" charset="-122"/>
                           <a:cs typeface="Noto Sans CJK KR" pitchFamily="34" charset="-120"/>
                         </a:rPr>
-                        <a:t>점심</a:t>
+                        <a:t>이동</a:t>
                       </a:r>
                       <a:endParaRPr lang="en-US" sz="1150" dirty="0">
                         <a:latin typeface="Noto Sans CJK KR" charset="0"/>
@@ -5407,7 +8047,7 @@
                           <a:ea typeface="Noto Sans CJK KR" pitchFamily="34" charset="-122"/>
                           <a:cs typeface="Noto Sans CJK KR" pitchFamily="34" charset="-120"/>
                         </a:rPr>
-                        <a:t>밥+스팸 도시락 (외부음식 반입은 권고 수준, 강제 아님)</a:t>
+                        <a:t>캐슬→브릭토피아 (인접 구역)</a:t>
                       </a:r>
                       <a:endParaRPr lang="en-US" sz="1150" dirty="0">
                         <a:latin typeface="Noto Sans CJK KR" charset="0"/>
@@ -5459,7 +8099,7 @@
                   </a:tcPr>
                 </a:tc>
               </a:tr>
-              <a:tr h="457200">
+              <a:tr h="420624">
                 <a:tc>
                   <a:txBody>
                     <a:bodyPr/>
@@ -5477,7 +8117,7 @@
                           <a:ea typeface="Noto Sans CJK KR" pitchFamily="34" charset="-122"/>
                           <a:cs typeface="Noto Sans CJK KR" pitchFamily="34" charset="-120"/>
                         </a:rPr>
-                        <a:t>12:45~13:25</a:t>
+                        <a:t>15:45~16:15</a:t>
                       </a:r>
                       <a:endParaRPr lang="en-US" sz="1150" dirty="0">
                         <a:latin typeface="Noto Sans CJK KR" charset="0"/>
@@ -5665,7 +8305,7 @@
                   </a:tcPr>
                 </a:tc>
               </a:tr>
-              <a:tr h="457200">
+              <a:tr h="420624">
                 <a:tc>
                   <a:txBody>
                     <a:bodyPr/>
@@ -5675,15 +8315,15 @@
                         <a:buNone/>
                       </a:pPr>
                       <a:r>
-                        <a:rPr lang="en-US" sz="1150" b="1" dirty="0">
+                        <a:rPr lang="en-US" sz="1150" dirty="0">
                           <a:solidFill>
-                            <a:srgbClr val="D62839"/>
+                            <a:srgbClr val="1A2440"/>
                           </a:solidFill>
                           <a:latin typeface="Noto Sans CJK KR" pitchFamily="34" charset="0"/>
                           <a:ea typeface="Noto Sans CJK KR" pitchFamily="34" charset="-122"/>
                           <a:cs typeface="Noto Sans CJK KR" pitchFamily="34" charset="-120"/>
                         </a:rPr>
-                        <a:t>13:25~14:35</a:t>
+                        <a:t>16:15~16:20</a:t>
                       </a:r>
                       <a:endParaRPr lang="en-US" sz="1150" dirty="0">
                         <a:latin typeface="Noto Sans CJK KR" charset="0"/>
@@ -5730,75 +8370,7 @@
                       <a:tailEnd type="none" w="med" len="med"/>
                     </a:lnB>
                     <a:solidFill>
-                      <a:srgbClr val="FDECEC"/>
-                    </a:solidFill>
-                  </a:tcPr>
-                </a:tc>
-                <a:tc>
-                  <a:txBody>
-                    <a:bodyPr/>
-                    <a:lstStyle/>
-                    <a:p>
-                      <a:pPr indent="0" marL="0">
-                        <a:buNone/>
-                      </a:pPr>
-                      <a:r>
-                        <a:rPr lang="en-US" sz="1150" b="1" dirty="0">
-                          <a:solidFill>
-                            <a:srgbClr val="1A2440"/>
-                          </a:solidFill>
-                          <a:latin typeface="Noto Sans CJK KR" pitchFamily="34" charset="0"/>
-                          <a:ea typeface="Noto Sans CJK KR" pitchFamily="34" charset="-122"/>
-                          <a:cs typeface="Noto Sans CJK KR" pitchFamily="34" charset="-120"/>
-                        </a:rPr>
-                        <a:t>LEGO City</a:t>
-                      </a:r>
-                      <a:endParaRPr lang="en-US" sz="1150" dirty="0">
-                        <a:latin typeface="Noto Sans CJK KR" charset="0"/>
-                        <a:ea typeface="Noto Sans CJK KR" charset="0"/>
-                        <a:cs typeface="Noto Sans CJK KR" charset="0"/>
-                      </a:endParaRPr>
-                    </a:p>
-                  </a:txBody>
-                  <a:tcPr marL="91440" marR="91440" marT="45720" marB="45720" anchor="ctr">
-                    <a:lnL w="9525" cap="flat" cmpd="sng" algn="ctr">
-                      <a:solidFill>
-                        <a:srgbClr val="E2E4E8"/>
-                      </a:solidFill>
-                      <a:prstDash val="solid"/>
-                      <a:round/>
-                      <a:headEnd type="none" w="med" len="med"/>
-                      <a:tailEnd type="none" w="med" len="med"/>
-                    </a:lnL>
-                    <a:lnR w="9525" cap="flat" cmpd="sng" algn="ctr">
-                      <a:solidFill>
-                        <a:srgbClr val="E2E4E8"/>
-                      </a:solidFill>
-                      <a:prstDash val="solid"/>
-                      <a:round/>
-                      <a:headEnd type="none" w="med" len="med"/>
-                      <a:tailEnd type="none" w="med" len="med"/>
-                    </a:lnR>
-                    <a:lnT w="9525" cap="flat" cmpd="sng" algn="ctr">
-                      <a:solidFill>
-                        <a:srgbClr val="E2E4E8"/>
-                      </a:solidFill>
-                      <a:prstDash val="solid"/>
-                      <a:round/>
-                      <a:headEnd type="none" w="med" len="med"/>
-                      <a:tailEnd type="none" w="med" len="med"/>
-                    </a:lnT>
-                    <a:lnB w="9525" cap="flat" cmpd="sng" algn="ctr">
-                      <a:solidFill>
-                        <a:srgbClr val="E2E4E8"/>
-                      </a:solidFill>
-                      <a:prstDash val="solid"/>
-                      <a:round/>
-                      <a:headEnd type="none" w="med" len="med"/>
-                      <a:tailEnd type="none" w="med" len="med"/>
-                    </a:lnB>
-                    <a:solidFill>
-                      <a:srgbClr val="FDECEC"/>
+                      <a:srgbClr val="FFFFFF"/>
                     </a:solidFill>
                   </a:tcPr>
                 </a:tc>
@@ -5819,7 +8391,7 @@
                           <a:ea typeface="Noto Sans CJK KR" pitchFamily="34" charset="-122"/>
                           <a:cs typeface="Noto Sans CJK KR" pitchFamily="34" charset="-120"/>
                         </a:rPr>
-                        <a:t>Wave Racers(젖음) → Coast Guard Academy → Palace 4D Cinema — 다음 슬라이드 참고</a:t>
+                        <a:t>이동</a:t>
                       </a:r>
                       <a:endParaRPr lang="en-US" sz="1150" dirty="0">
                         <a:latin typeface="Noto Sans CJK KR" charset="0"/>
@@ -5866,77 +8438,7 @@
                       <a:tailEnd type="none" w="med" len="med"/>
                     </a:lnB>
                     <a:solidFill>
-                      <a:srgbClr val="FDECEC"/>
-                    </a:solidFill>
-                  </a:tcPr>
-                </a:tc>
-              </a:tr>
-              <a:tr h="457200">
-                <a:tc>
-                  <a:txBody>
-                    <a:bodyPr/>
-                    <a:lstStyle/>
-                    <a:p>
-                      <a:pPr indent="0" marL="0">
-                        <a:buNone/>
-                      </a:pPr>
-                      <a:r>
-                        <a:rPr lang="en-US" sz="1150" dirty="0">
-                          <a:solidFill>
-                            <a:srgbClr val="1A2440"/>
-                          </a:solidFill>
-                          <a:latin typeface="Noto Sans CJK KR" pitchFamily="34" charset="0"/>
-                          <a:ea typeface="Noto Sans CJK KR" pitchFamily="34" charset="-122"/>
-                          <a:cs typeface="Noto Sans CJK KR" pitchFamily="34" charset="-120"/>
-                        </a:rPr>
-                        <a:t>14:35~14:55</a:t>
-                      </a:r>
-                      <a:endParaRPr lang="en-US" sz="1150" dirty="0">
-                        <a:latin typeface="Noto Sans CJK KR" charset="0"/>
-                        <a:ea typeface="Noto Sans CJK KR" charset="0"/>
-                        <a:cs typeface="Noto Sans CJK KR" charset="0"/>
-                      </a:endParaRPr>
-                    </a:p>
-                  </a:txBody>
-                  <a:tcPr marL="91440" marR="91440" marT="45720" marB="45720" anchor="ctr">
-                    <a:lnL w="9525" cap="flat" cmpd="sng" algn="ctr">
-                      <a:solidFill>
-                        <a:srgbClr val="E2E4E8"/>
-                      </a:solidFill>
-                      <a:prstDash val="solid"/>
-                      <a:round/>
-                      <a:headEnd type="none" w="med" len="med"/>
-                      <a:tailEnd type="none" w="med" len="med"/>
-                    </a:lnL>
-                    <a:lnR w="9525" cap="flat" cmpd="sng" algn="ctr">
-                      <a:solidFill>
-                        <a:srgbClr val="E2E4E8"/>
-                      </a:solidFill>
-                      <a:prstDash val="solid"/>
-                      <a:round/>
-                      <a:headEnd type="none" w="med" len="med"/>
-                      <a:tailEnd type="none" w="med" len="med"/>
-                    </a:lnR>
-                    <a:lnT w="9525" cap="flat" cmpd="sng" algn="ctr">
-                      <a:solidFill>
-                        <a:srgbClr val="E2E4E8"/>
-                      </a:solidFill>
-                      <a:prstDash val="solid"/>
-                      <a:round/>
-                      <a:headEnd type="none" w="med" len="med"/>
-                      <a:tailEnd type="none" w="med" len="med"/>
-                    </a:lnT>
-                    <a:lnB w="9525" cap="flat" cmpd="sng" algn="ctr">
-                      <a:solidFill>
-                        <a:srgbClr val="E2E4E8"/>
-                      </a:solidFill>
-                      <a:prstDash val="solid"/>
-                      <a:round/>
-                      <a:headEnd type="none" w="med" len="med"/>
-                      <a:tailEnd type="none" w="med" len="med"/>
-                    </a:lnB>
-                    <a:solidFill>
-                      <a:srgbClr val="F5F6F8"/>
+                      <a:srgbClr val="FFFFFF"/>
                     </a:solidFill>
                   </a:tcPr>
                 </a:tc>
@@ -5957,7 +8459,7 @@
                           <a:ea typeface="Noto Sans CJK KR" pitchFamily="34" charset="-122"/>
                           <a:cs typeface="Noto Sans CJK KR" pitchFamily="34" charset="-120"/>
                         </a:rPr>
-                        <a:t>환복·휴식</a:t>
+                        <a:t>브릭토피아→브릭스트릿 (인접 구역)</a:t>
                       </a:r>
                       <a:endParaRPr lang="en-US" sz="1150" dirty="0">
                         <a:latin typeface="Noto Sans CJK KR" charset="0"/>
@@ -6004,10 +8506,12 @@
                       <a:tailEnd type="none" w="med" len="med"/>
                     </a:lnB>
                     <a:solidFill>
-                      <a:srgbClr val="F5F6F8"/>
+                      <a:srgbClr val="FFFFFF"/>
                     </a:solidFill>
                   </a:tcPr>
                 </a:tc>
+              </a:tr>
+              <a:tr h="420624">
                 <a:tc>
                   <a:txBody>
                     <a:bodyPr/>
@@ -6025,283 +8529,7 @@
                           <a:ea typeface="Noto Sans CJK KR" pitchFamily="34" charset="-122"/>
                           <a:cs typeface="Noto Sans CJK KR" pitchFamily="34" charset="-120"/>
                         </a:rPr>
-                        <a:t>물놀이 옷 갈아입기</a:t>
-                      </a:r>
-                      <a:endParaRPr lang="en-US" sz="1150" dirty="0">
-                        <a:latin typeface="Noto Sans CJK KR" charset="0"/>
-                        <a:ea typeface="Noto Sans CJK KR" charset="0"/>
-                        <a:cs typeface="Noto Sans CJK KR" charset="0"/>
-                      </a:endParaRPr>
-                    </a:p>
-                  </a:txBody>
-                  <a:tcPr marL="91440" marR="91440" marT="45720" marB="45720" anchor="ctr">
-                    <a:lnL w="9525" cap="flat" cmpd="sng" algn="ctr">
-                      <a:solidFill>
-                        <a:srgbClr val="E2E4E8"/>
-                      </a:solidFill>
-                      <a:prstDash val="solid"/>
-                      <a:round/>
-                      <a:headEnd type="none" w="med" len="med"/>
-                      <a:tailEnd type="none" w="med" len="med"/>
-                    </a:lnL>
-                    <a:lnR w="9525" cap="flat" cmpd="sng" algn="ctr">
-                      <a:solidFill>
-                        <a:srgbClr val="E2E4E8"/>
-                      </a:solidFill>
-                      <a:prstDash val="solid"/>
-                      <a:round/>
-                      <a:headEnd type="none" w="med" len="med"/>
-                      <a:tailEnd type="none" w="med" len="med"/>
-                    </a:lnR>
-                    <a:lnT w="9525" cap="flat" cmpd="sng" algn="ctr">
-                      <a:solidFill>
-                        <a:srgbClr val="E2E4E8"/>
-                      </a:solidFill>
-                      <a:prstDash val="solid"/>
-                      <a:round/>
-                      <a:headEnd type="none" w="med" len="med"/>
-                      <a:tailEnd type="none" w="med" len="med"/>
-                    </a:lnT>
-                    <a:lnB w="9525" cap="flat" cmpd="sng" algn="ctr">
-                      <a:solidFill>
-                        <a:srgbClr val="E2E4E8"/>
-                      </a:solidFill>
-                      <a:prstDash val="solid"/>
-                      <a:round/>
-                      <a:headEnd type="none" w="med" len="med"/>
-                      <a:tailEnd type="none" w="med" len="med"/>
-                    </a:lnB>
-                    <a:solidFill>
-                      <a:srgbClr val="F5F6F8"/>
-                    </a:solidFill>
-                  </a:tcPr>
-                </a:tc>
-              </a:tr>
-              <a:tr h="457200">
-                <a:tc>
-                  <a:txBody>
-                    <a:bodyPr/>
-                    <a:lstStyle/>
-                    <a:p>
-                      <a:pPr indent="0" marL="0">
-                        <a:buNone/>
-                      </a:pPr>
-                      <a:r>
-                        <a:rPr lang="en-US" sz="1150" b="1" dirty="0">
-                          <a:solidFill>
-                            <a:srgbClr val="D62839"/>
-                          </a:solidFill>
-                          <a:latin typeface="Noto Sans CJK KR" pitchFamily="34" charset="0"/>
-                          <a:ea typeface="Noto Sans CJK KR" pitchFamily="34" charset="-122"/>
-                          <a:cs typeface="Noto Sans CJK KR" pitchFamily="34" charset="-120"/>
-                        </a:rPr>
-                        <a:t>14:55~16:00</a:t>
-                      </a:r>
-                      <a:endParaRPr lang="en-US" sz="1150" dirty="0">
-                        <a:latin typeface="Noto Sans CJK KR" charset="0"/>
-                        <a:ea typeface="Noto Sans CJK KR" charset="0"/>
-                        <a:cs typeface="Noto Sans CJK KR" charset="0"/>
-                      </a:endParaRPr>
-                    </a:p>
-                  </a:txBody>
-                  <a:tcPr marL="91440" marR="91440" marT="45720" marB="45720" anchor="ctr">
-                    <a:lnL w="9525" cap="flat" cmpd="sng" algn="ctr">
-                      <a:solidFill>
-                        <a:srgbClr val="E2E4E8"/>
-                      </a:solidFill>
-                      <a:prstDash val="solid"/>
-                      <a:round/>
-                      <a:headEnd type="none" w="med" len="med"/>
-                      <a:tailEnd type="none" w="med" len="med"/>
-                    </a:lnL>
-                    <a:lnR w="9525" cap="flat" cmpd="sng" algn="ctr">
-                      <a:solidFill>
-                        <a:srgbClr val="E2E4E8"/>
-                      </a:solidFill>
-                      <a:prstDash val="solid"/>
-                      <a:round/>
-                      <a:headEnd type="none" w="med" len="med"/>
-                      <a:tailEnd type="none" w="med" len="med"/>
-                    </a:lnR>
-                    <a:lnT w="9525" cap="flat" cmpd="sng" algn="ctr">
-                      <a:solidFill>
-                        <a:srgbClr val="E2E4E8"/>
-                      </a:solidFill>
-                      <a:prstDash val="solid"/>
-                      <a:round/>
-                      <a:headEnd type="none" w="med" len="med"/>
-                      <a:tailEnd type="none" w="med" len="med"/>
-                    </a:lnT>
-                    <a:lnB w="9525" cap="flat" cmpd="sng" algn="ctr">
-                      <a:solidFill>
-                        <a:srgbClr val="E2E4E8"/>
-                      </a:solidFill>
-                      <a:prstDash val="solid"/>
-                      <a:round/>
-                      <a:headEnd type="none" w="med" len="med"/>
-                      <a:tailEnd type="none" w="med" len="med"/>
-                    </a:lnB>
-                    <a:solidFill>
-                      <a:srgbClr val="FDECEC"/>
-                    </a:solidFill>
-                  </a:tcPr>
-                </a:tc>
-                <a:tc>
-                  <a:txBody>
-                    <a:bodyPr/>
-                    <a:lstStyle/>
-                    <a:p>
-                      <a:pPr indent="0" marL="0">
-                        <a:buNone/>
-                      </a:pPr>
-                      <a:r>
-                        <a:rPr lang="en-US" sz="1150" b="1" dirty="0">
-                          <a:solidFill>
-                            <a:srgbClr val="1A2440"/>
-                          </a:solidFill>
-                          <a:latin typeface="Noto Sans CJK KR" pitchFamily="34" charset="0"/>
-                          <a:ea typeface="Noto Sans CJK KR" pitchFamily="34" charset="-122"/>
-                          <a:cs typeface="Noto Sans CJK KR" pitchFamily="34" charset="-120"/>
-                        </a:rPr>
-                        <a:t>★★★ 드래곤 2차</a:t>
-                      </a:r>
-                      <a:endParaRPr lang="en-US" sz="1150" dirty="0">
-                        <a:latin typeface="Noto Sans CJK KR" charset="0"/>
-                        <a:ea typeface="Noto Sans CJK KR" charset="0"/>
-                        <a:cs typeface="Noto Sans CJK KR" charset="0"/>
-                      </a:endParaRPr>
-                    </a:p>
-                  </a:txBody>
-                  <a:tcPr marL="91440" marR="91440" marT="45720" marB="45720" anchor="ctr">
-                    <a:lnL w="9525" cap="flat" cmpd="sng" algn="ctr">
-                      <a:solidFill>
-                        <a:srgbClr val="E2E4E8"/>
-                      </a:solidFill>
-                      <a:prstDash val="solid"/>
-                      <a:round/>
-                      <a:headEnd type="none" w="med" len="med"/>
-                      <a:tailEnd type="none" w="med" len="med"/>
-                    </a:lnL>
-                    <a:lnR w="9525" cap="flat" cmpd="sng" algn="ctr">
-                      <a:solidFill>
-                        <a:srgbClr val="E2E4E8"/>
-                      </a:solidFill>
-                      <a:prstDash val="solid"/>
-                      <a:round/>
-                      <a:headEnd type="none" w="med" len="med"/>
-                      <a:tailEnd type="none" w="med" len="med"/>
-                    </a:lnR>
-                    <a:lnT w="9525" cap="flat" cmpd="sng" algn="ctr">
-                      <a:solidFill>
-                        <a:srgbClr val="E2E4E8"/>
-                      </a:solidFill>
-                      <a:prstDash val="solid"/>
-                      <a:round/>
-                      <a:headEnd type="none" w="med" len="med"/>
-                      <a:tailEnd type="none" w="med" len="med"/>
-                    </a:lnT>
-                    <a:lnB w="9525" cap="flat" cmpd="sng" algn="ctr">
-                      <a:solidFill>
-                        <a:srgbClr val="E2E4E8"/>
-                      </a:solidFill>
-                      <a:prstDash val="solid"/>
-                      <a:round/>
-                      <a:headEnd type="none" w="med" len="med"/>
-                      <a:tailEnd type="none" w="med" len="med"/>
-                    </a:lnB>
-                    <a:solidFill>
-                      <a:srgbClr val="FDECEC"/>
-                    </a:solidFill>
-                  </a:tcPr>
-                </a:tc>
-                <a:tc>
-                  <a:txBody>
-                    <a:bodyPr/>
-                    <a:lstStyle/>
-                    <a:p>
-                      <a:pPr indent="0" marL="0">
-                        <a:buNone/>
-                      </a:pPr>
-                      <a:r>
-                        <a:rPr lang="en-US" sz="1150" dirty="0">
-                          <a:solidFill>
-                            <a:srgbClr val="1A2440"/>
-                          </a:solidFill>
-                          <a:latin typeface="Noto Sans CJK KR" pitchFamily="34" charset="0"/>
-                          <a:ea typeface="Noto Sans CJK KR" pitchFamily="34" charset="-122"/>
-                          <a:cs typeface="Noto Sans CJK KR" pitchFamily="34" charset="-120"/>
-                        </a:rPr>
-                        <a:t>몰아타기 65분 — 폐장 전 두 번째로 비는 시간대</a:t>
-                      </a:r>
-                      <a:endParaRPr lang="en-US" sz="1150" dirty="0">
-                        <a:latin typeface="Noto Sans CJK KR" charset="0"/>
-                        <a:ea typeface="Noto Sans CJK KR" charset="0"/>
-                        <a:cs typeface="Noto Sans CJK KR" charset="0"/>
-                      </a:endParaRPr>
-                    </a:p>
-                  </a:txBody>
-                  <a:tcPr marL="91440" marR="91440" marT="45720" marB="45720" anchor="ctr">
-                    <a:lnL w="9525" cap="flat" cmpd="sng" algn="ctr">
-                      <a:solidFill>
-                        <a:srgbClr val="E2E4E8"/>
-                      </a:solidFill>
-                      <a:prstDash val="solid"/>
-                      <a:round/>
-                      <a:headEnd type="none" w="med" len="med"/>
-                      <a:tailEnd type="none" w="med" len="med"/>
-                    </a:lnL>
-                    <a:lnR w="9525" cap="flat" cmpd="sng" algn="ctr">
-                      <a:solidFill>
-                        <a:srgbClr val="E2E4E8"/>
-                      </a:solidFill>
-                      <a:prstDash val="solid"/>
-                      <a:round/>
-                      <a:headEnd type="none" w="med" len="med"/>
-                      <a:tailEnd type="none" w="med" len="med"/>
-                    </a:lnR>
-                    <a:lnT w="9525" cap="flat" cmpd="sng" algn="ctr">
-                      <a:solidFill>
-                        <a:srgbClr val="E2E4E8"/>
-                      </a:solidFill>
-                      <a:prstDash val="solid"/>
-                      <a:round/>
-                      <a:headEnd type="none" w="med" len="med"/>
-                      <a:tailEnd type="none" w="med" len="med"/>
-                    </a:lnT>
-                    <a:lnB w="9525" cap="flat" cmpd="sng" algn="ctr">
-                      <a:solidFill>
-                        <a:srgbClr val="E2E4E8"/>
-                      </a:solidFill>
-                      <a:prstDash val="solid"/>
-                      <a:round/>
-                      <a:headEnd type="none" w="med" len="med"/>
-                      <a:tailEnd type="none" w="med" len="med"/>
-                    </a:lnB>
-                    <a:solidFill>
-                      <a:srgbClr val="FDECEC"/>
-                    </a:solidFill>
-                  </a:tcPr>
-                </a:tc>
-              </a:tr>
-              <a:tr h="457200">
-                <a:tc>
-                  <a:txBody>
-                    <a:bodyPr/>
-                    <a:lstStyle/>
-                    <a:p>
-                      <a:pPr indent="0" marL="0">
-                        <a:buNone/>
-                      </a:pPr>
-                      <a:r>
-                        <a:rPr lang="en-US" sz="1150" dirty="0">
-                          <a:solidFill>
-                            <a:srgbClr val="1A2440"/>
-                          </a:solidFill>
-                          <a:latin typeface="Noto Sans CJK KR" pitchFamily="34" charset="0"/>
-                          <a:ea typeface="Noto Sans CJK KR" pitchFamily="34" charset="-122"/>
-                          <a:cs typeface="Noto Sans CJK KR" pitchFamily="34" charset="-120"/>
-                        </a:rPr>
-                        <a:t>16:00~16:30</a:t>
+                        <a:t>16:20~16:45</a:t>
                       </a:r>
                       <a:endParaRPr lang="en-US" sz="1150" dirty="0">
                         <a:latin typeface="Noto Sans CJK KR" charset="0"/>
@@ -6489,7 +8717,7 @@
                   </a:tcPr>
                 </a:tc>
               </a:tr>
-              <a:tr h="457200">
+              <a:tr h="420624">
                 <a:tc>
                   <a:txBody>
                     <a:bodyPr/>
@@ -6507,7 +8735,419 @@
                           <a:ea typeface="Noto Sans CJK KR" pitchFamily="34" charset="-122"/>
                           <a:cs typeface="Noto Sans CJK KR" pitchFamily="34" charset="-120"/>
                         </a:rPr>
-                        <a:t>16:30~16:40</a:t>
+                        <a:t>16:45~16:55</a:t>
+                      </a:r>
+                      <a:endParaRPr lang="en-US" sz="1150" dirty="0">
+                        <a:latin typeface="Noto Sans CJK KR" charset="0"/>
+                        <a:ea typeface="Noto Sans CJK KR" charset="0"/>
+                        <a:cs typeface="Noto Sans CJK KR" charset="0"/>
+                      </a:endParaRPr>
+                    </a:p>
+                  </a:txBody>
+                  <a:tcPr marL="91440" marR="91440" marT="45720" marB="45720" anchor="ctr">
+                    <a:lnL w="9525" cap="flat" cmpd="sng" algn="ctr">
+                      <a:solidFill>
+                        <a:srgbClr val="E2E4E8"/>
+                      </a:solidFill>
+                      <a:prstDash val="solid"/>
+                      <a:round/>
+                      <a:headEnd type="none" w="med" len="med"/>
+                      <a:tailEnd type="none" w="med" len="med"/>
+                    </a:lnL>
+                    <a:lnR w="9525" cap="flat" cmpd="sng" algn="ctr">
+                      <a:solidFill>
+                        <a:srgbClr val="E2E4E8"/>
+                      </a:solidFill>
+                      <a:prstDash val="solid"/>
+                      <a:round/>
+                      <a:headEnd type="none" w="med" len="med"/>
+                      <a:tailEnd type="none" w="med" len="med"/>
+                    </a:lnR>
+                    <a:lnT w="9525" cap="flat" cmpd="sng" algn="ctr">
+                      <a:solidFill>
+                        <a:srgbClr val="E2E4E8"/>
+                      </a:solidFill>
+                      <a:prstDash val="solid"/>
+                      <a:round/>
+                      <a:headEnd type="none" w="med" len="med"/>
+                      <a:tailEnd type="none" w="med" len="med"/>
+                    </a:lnT>
+                    <a:lnB w="9525" cap="flat" cmpd="sng" algn="ctr">
+                      <a:solidFill>
+                        <a:srgbClr val="E2E4E8"/>
+                      </a:solidFill>
+                      <a:prstDash val="solid"/>
+                      <a:round/>
+                      <a:headEnd type="none" w="med" len="med"/>
+                      <a:tailEnd type="none" w="med" len="med"/>
+                    </a:lnB>
+                    <a:solidFill>
+                      <a:srgbClr val="FFFFFF"/>
+                    </a:solidFill>
+                  </a:tcPr>
+                </a:tc>
+                <a:tc>
+                  <a:txBody>
+                    <a:bodyPr/>
+                    <a:lstStyle/>
+                    <a:p>
+                      <a:pPr indent="0" marL="0">
+                        <a:buNone/>
+                      </a:pPr>
+                      <a:r>
+                        <a:rPr lang="en-US" sz="1150" dirty="0">
+                          <a:solidFill>
+                            <a:srgbClr val="1A2440"/>
+                          </a:solidFill>
+                          <a:latin typeface="Noto Sans CJK KR" pitchFamily="34" charset="0"/>
+                          <a:ea typeface="Noto Sans CJK KR" pitchFamily="34" charset="-122"/>
+                          <a:cs typeface="Noto Sans CJK KR" pitchFamily="34" charset="-120"/>
+                        </a:rPr>
+                        <a:t>이동</a:t>
+                      </a:r>
+                      <a:endParaRPr lang="en-US" sz="1150" dirty="0">
+                        <a:latin typeface="Noto Sans CJK KR" charset="0"/>
+                        <a:ea typeface="Noto Sans CJK KR" charset="0"/>
+                        <a:cs typeface="Noto Sans CJK KR" charset="0"/>
+                      </a:endParaRPr>
+                    </a:p>
+                  </a:txBody>
+                  <a:tcPr marL="91440" marR="91440" marT="45720" marB="45720" anchor="ctr">
+                    <a:lnL w="9525" cap="flat" cmpd="sng" algn="ctr">
+                      <a:solidFill>
+                        <a:srgbClr val="E2E4E8"/>
+                      </a:solidFill>
+                      <a:prstDash val="solid"/>
+                      <a:round/>
+                      <a:headEnd type="none" w="med" len="med"/>
+                      <a:tailEnd type="none" w="med" len="med"/>
+                    </a:lnL>
+                    <a:lnR w="9525" cap="flat" cmpd="sng" algn="ctr">
+                      <a:solidFill>
+                        <a:srgbClr val="E2E4E8"/>
+                      </a:solidFill>
+                      <a:prstDash val="solid"/>
+                      <a:round/>
+                      <a:headEnd type="none" w="med" len="med"/>
+                      <a:tailEnd type="none" w="med" len="med"/>
+                    </a:lnR>
+                    <a:lnT w="9525" cap="flat" cmpd="sng" algn="ctr">
+                      <a:solidFill>
+                        <a:srgbClr val="E2E4E8"/>
+                      </a:solidFill>
+                      <a:prstDash val="solid"/>
+                      <a:round/>
+                      <a:headEnd type="none" w="med" len="med"/>
+                      <a:tailEnd type="none" w="med" len="med"/>
+                    </a:lnT>
+                    <a:lnB w="9525" cap="flat" cmpd="sng" algn="ctr">
+                      <a:solidFill>
+                        <a:srgbClr val="E2E4E8"/>
+                      </a:solidFill>
+                      <a:prstDash val="solid"/>
+                      <a:round/>
+                      <a:headEnd type="none" w="med" len="med"/>
+                      <a:tailEnd type="none" w="med" len="med"/>
+                    </a:lnB>
+                    <a:solidFill>
+                      <a:srgbClr val="FFFFFF"/>
+                    </a:solidFill>
+                  </a:tcPr>
+                </a:tc>
+                <a:tc>
+                  <a:txBody>
+                    <a:bodyPr/>
+                    <a:lstStyle/>
+                    <a:p>
+                      <a:pPr indent="0" marL="0">
+                        <a:buNone/>
+                      </a:pPr>
+                      <a:r>
+                        <a:rPr lang="en-US" sz="1150" dirty="0">
+                          <a:solidFill>
+                            <a:srgbClr val="1A2440"/>
+                          </a:solidFill>
+                          <a:latin typeface="Noto Sans CJK KR" pitchFamily="34" charset="0"/>
+                          <a:ea typeface="Noto Sans CJK KR" pitchFamily="34" charset="-122"/>
+                          <a:cs typeface="Noto Sans CJK KR" pitchFamily="34" charset="-120"/>
+                        </a:rPr>
+                        <a:t>브릭스트릿→출구</a:t>
+                      </a:r>
+                      <a:endParaRPr lang="en-US" sz="1150" dirty="0">
+                        <a:latin typeface="Noto Sans CJK KR" charset="0"/>
+                        <a:ea typeface="Noto Sans CJK KR" charset="0"/>
+                        <a:cs typeface="Noto Sans CJK KR" charset="0"/>
+                      </a:endParaRPr>
+                    </a:p>
+                  </a:txBody>
+                  <a:tcPr marL="91440" marR="91440" marT="45720" marB="45720" anchor="ctr">
+                    <a:lnL w="9525" cap="flat" cmpd="sng" algn="ctr">
+                      <a:solidFill>
+                        <a:srgbClr val="E2E4E8"/>
+                      </a:solidFill>
+                      <a:prstDash val="solid"/>
+                      <a:round/>
+                      <a:headEnd type="none" w="med" len="med"/>
+                      <a:tailEnd type="none" w="med" len="med"/>
+                    </a:lnL>
+                    <a:lnR w="9525" cap="flat" cmpd="sng" algn="ctr">
+                      <a:solidFill>
+                        <a:srgbClr val="E2E4E8"/>
+                      </a:solidFill>
+                      <a:prstDash val="solid"/>
+                      <a:round/>
+                      <a:headEnd type="none" w="med" len="med"/>
+                      <a:tailEnd type="none" w="med" len="med"/>
+                    </a:lnR>
+                    <a:lnT w="9525" cap="flat" cmpd="sng" algn="ctr">
+                      <a:solidFill>
+                        <a:srgbClr val="E2E4E8"/>
+                      </a:solidFill>
+                      <a:prstDash val="solid"/>
+                      <a:round/>
+                      <a:headEnd type="none" w="med" len="med"/>
+                      <a:tailEnd type="none" w="med" len="med"/>
+                    </a:lnT>
+                    <a:lnB w="9525" cap="flat" cmpd="sng" algn="ctr">
+                      <a:solidFill>
+                        <a:srgbClr val="E2E4E8"/>
+                      </a:solidFill>
+                      <a:prstDash val="solid"/>
+                      <a:round/>
+                      <a:headEnd type="none" w="med" len="med"/>
+                      <a:tailEnd type="none" w="med" len="med"/>
+                    </a:lnB>
+                    <a:solidFill>
+                      <a:srgbClr val="FFFFFF"/>
+                    </a:solidFill>
+                  </a:tcPr>
+                </a:tc>
+              </a:tr>
+              <a:tr h="420624">
+                <a:tc>
+                  <a:txBody>
+                    <a:bodyPr/>
+                    <a:lstStyle/>
+                    <a:p>
+                      <a:pPr indent="0" marL="0">
+                        <a:buNone/>
+                      </a:pPr>
+                      <a:r>
+                        <a:rPr lang="en-US" sz="1150" b="1" dirty="0">
+                          <a:solidFill>
+                            <a:srgbClr val="D62839"/>
+                          </a:solidFill>
+                          <a:latin typeface="Noto Sans CJK KR" pitchFamily="34" charset="0"/>
+                          <a:ea typeface="Noto Sans CJK KR" pitchFamily="34" charset="-122"/>
+                          <a:cs typeface="Noto Sans CJK KR" pitchFamily="34" charset="-120"/>
+                        </a:rPr>
+                        <a:t>16:55</a:t>
+                      </a:r>
+                      <a:endParaRPr lang="en-US" sz="1150" dirty="0">
+                        <a:latin typeface="Noto Sans CJK KR" charset="0"/>
+                        <a:ea typeface="Noto Sans CJK KR" charset="0"/>
+                        <a:cs typeface="Noto Sans CJK KR" charset="0"/>
+                      </a:endParaRPr>
+                    </a:p>
+                  </a:txBody>
+                  <a:tcPr marL="91440" marR="91440" marT="45720" marB="45720" anchor="ctr">
+                    <a:lnL w="9525" cap="flat" cmpd="sng" algn="ctr">
+                      <a:solidFill>
+                        <a:srgbClr val="E2E4E8"/>
+                      </a:solidFill>
+                      <a:prstDash val="solid"/>
+                      <a:round/>
+                      <a:headEnd type="none" w="med" len="med"/>
+                      <a:tailEnd type="none" w="med" len="med"/>
+                    </a:lnL>
+                    <a:lnR w="9525" cap="flat" cmpd="sng" algn="ctr">
+                      <a:solidFill>
+                        <a:srgbClr val="E2E4E8"/>
+                      </a:solidFill>
+                      <a:prstDash val="solid"/>
+                      <a:round/>
+                      <a:headEnd type="none" w="med" len="med"/>
+                      <a:tailEnd type="none" w="med" len="med"/>
+                    </a:lnR>
+                    <a:lnT w="9525" cap="flat" cmpd="sng" algn="ctr">
+                      <a:solidFill>
+                        <a:srgbClr val="E2E4E8"/>
+                      </a:solidFill>
+                      <a:prstDash val="solid"/>
+                      <a:round/>
+                      <a:headEnd type="none" w="med" len="med"/>
+                      <a:tailEnd type="none" w="med" len="med"/>
+                    </a:lnT>
+                    <a:lnB w="9525" cap="flat" cmpd="sng" algn="ctr">
+                      <a:solidFill>
+                        <a:srgbClr val="E2E4E8"/>
+                      </a:solidFill>
+                      <a:prstDash val="solid"/>
+                      <a:round/>
+                      <a:headEnd type="none" w="med" len="med"/>
+                      <a:tailEnd type="none" w="med" len="med"/>
+                    </a:lnB>
+                    <a:solidFill>
+                      <a:srgbClr val="FDECEC"/>
+                    </a:solidFill>
+                  </a:tcPr>
+                </a:tc>
+                <a:tc>
+                  <a:txBody>
+                    <a:bodyPr/>
+                    <a:lstStyle/>
+                    <a:p>
+                      <a:pPr indent="0" marL="0">
+                        <a:buNone/>
+                      </a:pPr>
+                      <a:r>
+                        <a:rPr lang="en-US" sz="1150" b="1" dirty="0">
+                          <a:solidFill>
+                            <a:srgbClr val="1A2440"/>
+                          </a:solidFill>
+                          <a:latin typeface="Noto Sans CJK KR" pitchFamily="34" charset="0"/>
+                          <a:ea typeface="Noto Sans CJK KR" pitchFamily="34" charset="-122"/>
+                          <a:cs typeface="Noto Sans CJK KR" pitchFamily="34" charset="-120"/>
+                        </a:rPr>
+                        <a:t>퇴장</a:t>
+                      </a:r>
+                      <a:endParaRPr lang="en-US" sz="1150" dirty="0">
+                        <a:latin typeface="Noto Sans CJK KR" charset="0"/>
+                        <a:ea typeface="Noto Sans CJK KR" charset="0"/>
+                        <a:cs typeface="Noto Sans CJK KR" charset="0"/>
+                      </a:endParaRPr>
+                    </a:p>
+                  </a:txBody>
+                  <a:tcPr marL="91440" marR="91440" marT="45720" marB="45720" anchor="ctr">
+                    <a:lnL w="9525" cap="flat" cmpd="sng" algn="ctr">
+                      <a:solidFill>
+                        <a:srgbClr val="E2E4E8"/>
+                      </a:solidFill>
+                      <a:prstDash val="solid"/>
+                      <a:round/>
+                      <a:headEnd type="none" w="med" len="med"/>
+                      <a:tailEnd type="none" w="med" len="med"/>
+                    </a:lnL>
+                    <a:lnR w="9525" cap="flat" cmpd="sng" algn="ctr">
+                      <a:solidFill>
+                        <a:srgbClr val="E2E4E8"/>
+                      </a:solidFill>
+                      <a:prstDash val="solid"/>
+                      <a:round/>
+                      <a:headEnd type="none" w="med" len="med"/>
+                      <a:tailEnd type="none" w="med" len="med"/>
+                    </a:lnR>
+                    <a:lnT w="9525" cap="flat" cmpd="sng" algn="ctr">
+                      <a:solidFill>
+                        <a:srgbClr val="E2E4E8"/>
+                      </a:solidFill>
+                      <a:prstDash val="solid"/>
+                      <a:round/>
+                      <a:headEnd type="none" w="med" len="med"/>
+                      <a:tailEnd type="none" w="med" len="med"/>
+                    </a:lnT>
+                    <a:lnB w="9525" cap="flat" cmpd="sng" algn="ctr">
+                      <a:solidFill>
+                        <a:srgbClr val="E2E4E8"/>
+                      </a:solidFill>
+                      <a:prstDash val="solid"/>
+                      <a:round/>
+                      <a:headEnd type="none" w="med" len="med"/>
+                      <a:tailEnd type="none" w="med" len="med"/>
+                    </a:lnB>
+                    <a:solidFill>
+                      <a:srgbClr val="FDECEC"/>
+                    </a:solidFill>
+                  </a:tcPr>
+                </a:tc>
+                <a:tc>
+                  <a:txBody>
+                    <a:bodyPr/>
+                    <a:lstStyle/>
+                    <a:p>
+                      <a:pPr indent="0" marL="0">
+                        <a:buNone/>
+                      </a:pPr>
+                      <a:r>
+                        <a:rPr lang="en-US" sz="1150" dirty="0">
+                          <a:solidFill>
+                            <a:srgbClr val="1A2440"/>
+                          </a:solidFill>
+                          <a:latin typeface="Noto Sans CJK KR" pitchFamily="34" charset="0"/>
+                          <a:ea typeface="Noto Sans CJK KR" pitchFamily="34" charset="-122"/>
+                          <a:cs typeface="Noto Sans CJK KR" pitchFamily="34" charset="-120"/>
+                        </a:rPr>
+                        <a:t>폐장(17:00) 5분 전 — 여유 없음, 늦어지면 Bricktopia 축소</a:t>
+                      </a:r>
+                      <a:endParaRPr lang="en-US" sz="1150" dirty="0">
+                        <a:latin typeface="Noto Sans CJK KR" charset="0"/>
+                        <a:ea typeface="Noto Sans CJK KR" charset="0"/>
+                        <a:cs typeface="Noto Sans CJK KR" charset="0"/>
+                      </a:endParaRPr>
+                    </a:p>
+                  </a:txBody>
+                  <a:tcPr marL="91440" marR="91440" marT="45720" marB="45720" anchor="ctr">
+                    <a:lnL w="9525" cap="flat" cmpd="sng" algn="ctr">
+                      <a:solidFill>
+                        <a:srgbClr val="E2E4E8"/>
+                      </a:solidFill>
+                      <a:prstDash val="solid"/>
+                      <a:round/>
+                      <a:headEnd type="none" w="med" len="med"/>
+                      <a:tailEnd type="none" w="med" len="med"/>
+                    </a:lnL>
+                    <a:lnR w="9525" cap="flat" cmpd="sng" algn="ctr">
+                      <a:solidFill>
+                        <a:srgbClr val="E2E4E8"/>
+                      </a:solidFill>
+                      <a:prstDash val="solid"/>
+                      <a:round/>
+                      <a:headEnd type="none" w="med" len="med"/>
+                      <a:tailEnd type="none" w="med" len="med"/>
+                    </a:lnR>
+                    <a:lnT w="9525" cap="flat" cmpd="sng" algn="ctr">
+                      <a:solidFill>
+                        <a:srgbClr val="E2E4E8"/>
+                      </a:solidFill>
+                      <a:prstDash val="solid"/>
+                      <a:round/>
+                      <a:headEnd type="none" w="med" len="med"/>
+                      <a:tailEnd type="none" w="med" len="med"/>
+                    </a:lnT>
+                    <a:lnB w="9525" cap="flat" cmpd="sng" algn="ctr">
+                      <a:solidFill>
+                        <a:srgbClr val="E2E4E8"/>
+                      </a:solidFill>
+                      <a:prstDash val="solid"/>
+                      <a:round/>
+                      <a:headEnd type="none" w="med" len="med"/>
+                      <a:tailEnd type="none" w="med" len="med"/>
+                    </a:lnB>
+                    <a:solidFill>
+                      <a:srgbClr val="FDECEC"/>
+                    </a:solidFill>
+                  </a:tcPr>
+                </a:tc>
+              </a:tr>
+              <a:tr h="420624">
+                <a:tc>
+                  <a:txBody>
+                    <a:bodyPr/>
+                    <a:lstStyle/>
+                    <a:p>
+                      <a:pPr indent="0" marL="0">
+                        <a:buNone/>
+                      </a:pPr>
+                      <a:r>
+                        <a:rPr lang="en-US" sz="1150" dirty="0">
+                          <a:solidFill>
+                            <a:srgbClr val="1A2440"/>
+                          </a:solidFill>
+                          <a:latin typeface="Noto Sans CJK KR" pitchFamily="34" charset="0"/>
+                          <a:ea typeface="Noto Sans CJK KR" pitchFamily="34" charset="-122"/>
+                          <a:cs typeface="Noto Sans CJK KR" pitchFamily="34" charset="-120"/>
+                        </a:rPr>
+                        <a:t>16:55~17:05</a:t>
                       </a:r>
                       <a:endParaRPr lang="en-US" sz="1150" dirty="0">
                         <a:latin typeface="Noto Sans CJK KR" charset="0"/>
@@ -6695,7 +9335,7 @@
                   </a:tcPr>
                 </a:tc>
               </a:tr>
-              <a:tr h="457200">
+              <a:tr h="420624">
                 <a:tc>
                   <a:txBody>
                     <a:bodyPr/>
@@ -6713,7 +9353,7 @@
                           <a:ea typeface="Noto Sans CJK KR" pitchFamily="34" charset="-122"/>
                           <a:cs typeface="Noto Sans CJK KR" pitchFamily="34" charset="-120"/>
                         </a:rPr>
-                        <a:t>16:40~16:55</a:t>
+                        <a:t>17:05~17:20</a:t>
                       </a:r>
                       <a:endParaRPr lang="en-US" sz="1150" dirty="0">
                         <a:latin typeface="Noto Sans CJK KR" charset="0"/>
@@ -6901,7 +9541,7 @@
                   </a:tcPr>
                 </a:tc>
               </a:tr>
-              <a:tr h="457200">
+              <a:tr h="420624">
                 <a:tc>
                   <a:txBody>
                     <a:bodyPr/>
@@ -6919,7 +9559,7 @@
                           <a:ea typeface="Noto Sans CJK KR" pitchFamily="34" charset="-122"/>
                           <a:cs typeface="Noto Sans CJK KR" pitchFamily="34" charset="-120"/>
                         </a:rPr>
-                        <a:t>16:55</a:t>
+                        <a:t>17:20</a:t>
                       </a:r>
                       <a:endParaRPr lang="en-US" sz="1150" dirty="0">
                         <a:latin typeface="Noto Sans CJK KR" charset="0"/>
@@ -7096,7 +9736,7 @@
                   </a:tcPr>
                 </a:tc>
               </a:tr>
-              <a:tr h="457200">
+              <a:tr h="420624">
                 <a:tc>
                   <a:txBody>
                     <a:bodyPr/>
@@ -7114,7 +9754,7 @@
                           <a:ea typeface="Noto Sans CJK KR" pitchFamily="34" charset="-122"/>
                           <a:cs typeface="Noto Sans CJK KR" pitchFamily="34" charset="-120"/>
                         </a:rPr>
-                        <a:t>18:05~18:15</a:t>
+                        <a:t>18:25~18:35</a:t>
                       </a:r>
                       <a:endParaRPr lang="en-US" sz="1150" dirty="0">
                         <a:latin typeface="Noto Sans CJK KR" charset="0"/>
@@ -7250,7 +9890,7 @@
                           <a:ea typeface="Noto Sans CJK KR" pitchFamily="34" charset="-122"/>
                           <a:cs typeface="Noto Sans CJK KR" pitchFamily="34" charset="-120"/>
                         </a:rPr>
-                        <a:t>왕복 이동 약 2시간 20분(주행 69분×2 + 도보 20분)</a:t>
+                        <a:t>왕복 이동 약 2시간 38분(주행 69분×2 + 도보 20분)</a:t>
                       </a:r>
                       <a:endParaRPr lang="en-US" sz="1150" dirty="0">
                         <a:latin typeface="Noto Sans CJK KR" charset="0"/>
@@ -7378,7 +10018,7 @@
                 <a:ea typeface="Noto Sans CJK KR" pitchFamily="34" charset="-122"/>
                 <a:cs typeface="Noto Sans CJK KR" pitchFamily="34" charset="-120"/>
               </a:rPr>
-              <a:t>4</a:t>
+              <a:t>5</a:t>
             </a:r>
             <a:endParaRPr lang="en-US" sz="900" dirty="0"/>
           </a:p>
@@ -7392,9 +10032,9 @@
 </p:sld>
 </file>
 
-<file path=ppt/slides/slide5.xml><?xml version="1.0" encoding="utf-8"?>
+<file path=ppt/slides/slide6.xml><?xml version="1.0" encoding="utf-8"?>
 <p:sld xmlns:a="http://schemas.openxmlformats.org/drawingml/2006/main" xmlns:r="http://schemas.openxmlformats.org/officeDocument/2006/relationships" xmlns:p="http://schemas.openxmlformats.org/presentationml/2006/main">
-  <p:cSld name="Slide 5">
+  <p:cSld name="Slide 6">
     <p:bg>
       <p:bgPr>
         <a:solidFill>
@@ -8068,2084 +10708,6 @@
                 <a:ea typeface="Noto Sans CJK KR" pitchFamily="34" charset="-122"/>
                 <a:cs typeface="Noto Sans CJK KR" pitchFamily="34" charset="-120"/>
               </a:rPr>
-              <a:t>5</a:t>
-            </a:r>
-            <a:endParaRPr lang="en-US" sz="900" dirty="0"/>
-          </a:p>
-        </p:txBody>
-      </p:sp>
-    </p:spTree>
-  </p:cSld>
-  <p:clrMapOvr>
-    <a:masterClrMapping/>
-  </p:clrMapOvr>
-</p:sld>
-</file>
-
-<file path=ppt/slides/slide6.xml><?xml version="1.0" encoding="utf-8"?>
-<p:sld xmlns:a="http://schemas.openxmlformats.org/drawingml/2006/main" xmlns:r="http://schemas.openxmlformats.org/officeDocument/2006/relationships" xmlns:p="http://schemas.openxmlformats.org/presentationml/2006/main">
-  <p:cSld name="Slide 6">
-    <p:bg>
-      <p:bgPr>
-        <a:solidFill>
-          <a:srgbClr val="FFFFFF"/>
-        </a:solidFill>
-      </p:bgPr>
-    </p:bg>
-    <p:spTree>
-      <p:nvGrpSpPr>
-        <p:cNvPr id="1" name=""/>
-        <p:cNvGrpSpPr/>
-        <p:nvPr/>
-      </p:nvGrpSpPr>
-      <p:grpSpPr>
-        <a:xfrm>
-          <a:off x="0" y="0"/>
-          <a:ext cx="0" cy="0"/>
-          <a:chOff x="0" y="0"/>
-          <a:chExt cx="0" cy="0"/>
-        </a:xfrm>
-      </p:grpSpPr>
-      <p:sp>
-        <p:nvSpPr>
-          <p:cNvPr id="2" name="Text 0"/>
-          <p:cNvSpPr txBox="1"/>
-          <p:nvPr/>
-        </p:nvSpPr>
-        <p:spPr>
-          <a:xfrm>
-            <a:off x="457200" y="320040"/>
-            <a:ext cx="11247120" cy="320040"/>
-          </a:xfrm>
-          <a:prstGeom prst="rect">
-            <a:avLst/>
-          </a:prstGeom>
-          <a:noFill/>
-          <a:ln/>
-        </p:spPr>
-        <p:txBody>
-          <a:bodyPr wrap="square" lIns="0" tIns="0" rIns="0" bIns="0" rtlCol="0" anchor="ctr"/>
-          <a:lstStyle/>
-          <a:p>
-            <a:pPr indent="0" marL="0">
-              <a:buNone/>
-            </a:pPr>
-            <a:r>
-              <a:rPr lang="en-US" sz="1200" b="1" dirty="0">
-                <a:solidFill>
-                  <a:srgbClr val="D62839"/>
-                </a:solidFill>
-                <a:latin typeface="Noto Sans CJK KR" pitchFamily="34" charset="0"/>
-                <a:ea typeface="Noto Sans CJK KR" pitchFamily="34" charset="-122"/>
-                <a:cs typeface="Noto Sans CJK KR" pitchFamily="34" charset="-120"/>
-              </a:rPr>
-              <a:t>ATTRACTIONS</a:t>
-            </a:r>
-            <a:endParaRPr lang="en-US" sz="1200" dirty="0"/>
-          </a:p>
-        </p:txBody>
-      </p:sp>
-      <p:sp>
-        <p:nvSpPr>
-          <p:cNvPr id="3" name="Text 1"/>
-          <p:cNvSpPr txBox="1"/>
-          <p:nvPr/>
-        </p:nvSpPr>
-        <p:spPr>
-          <a:xfrm>
-            <a:off x="457200" y="594360"/>
-            <a:ext cx="11247120" cy="548640"/>
-          </a:xfrm>
-          <a:prstGeom prst="rect">
-            <a:avLst/>
-          </a:prstGeom>
-          <a:noFill/>
-          <a:ln/>
-        </p:spPr>
-        <p:txBody>
-          <a:bodyPr wrap="square" lIns="0" tIns="0" rIns="0" bIns="0" rtlCol="0" anchor="ctr"/>
-          <a:lstStyle/>
-          <a:p>
-            <a:pPr indent="0" marL="0">
-              <a:buNone/>
-            </a:pPr>
-            <a:r>
-              <a:rPr lang="en-US" sz="2600" b="1" dirty="0">
-                <a:solidFill>
-                  <a:srgbClr val="1A2440"/>
-                </a:solidFill>
-                <a:latin typeface="Noto Sans CJK KR" pitchFamily="34" charset="0"/>
-                <a:ea typeface="Noto Sans CJK KR" pitchFamily="34" charset="-122"/>
-                <a:cs typeface="Noto Sans CJK KR" pitchFamily="34" charset="-120"/>
-              </a:rPr>
-              <a:t>오늘 탈 어트랙션 9종</a:t>
-            </a:r>
-            <a:endParaRPr lang="en-US" sz="2600" dirty="0"/>
-          </a:p>
-        </p:txBody>
-      </p:sp>
-      <p:sp>
-        <p:nvSpPr>
-          <p:cNvPr id="4" name="Shape 2"/>
-          <p:cNvSpPr/>
-          <p:nvPr/>
-        </p:nvSpPr>
-        <p:spPr>
-          <a:xfrm>
-            <a:off x="457200" y="1371600"/>
-            <a:ext cx="3657600" cy="1417320"/>
-          </a:xfrm>
-          <a:prstGeom prst="roundRect">
-            <a:avLst>
-              <a:gd name="adj" fmla="val 4516"/>
-            </a:avLst>
-          </a:prstGeom>
-          <a:solidFill>
-            <a:srgbClr val="FFFFFF"/>
-          </a:solidFill>
-          <a:ln w="12700">
-            <a:solidFill>
-              <a:srgbClr val="E2E4E8"/>
-            </a:solidFill>
-            <a:prstDash val="solid"/>
-          </a:ln>
-          <a:effectLst>
-            <a:outerShdw sx="100000" sy="100000" kx="0" ky="0" algn="bl" rotWithShape="0" blurRad="63500" dist="25400" dir="5400000">
-              <a:srgbClr val="888888">
-                <a:alpha val="20000"/>
-              </a:srgbClr>
-            </a:outerShdw>
-          </a:effectLst>
-        </p:spPr>
-      </p:sp>
-      <p:sp>
-        <p:nvSpPr>
-          <p:cNvPr id="5" name="Shape 3"/>
-          <p:cNvSpPr/>
-          <p:nvPr/>
-        </p:nvSpPr>
-        <p:spPr>
-          <a:xfrm>
-            <a:off x="621792" y="1536192"/>
-            <a:ext cx="292608" cy="292608"/>
-          </a:xfrm>
-          <a:prstGeom prst="ellipse">
-            <a:avLst/>
-          </a:prstGeom>
-          <a:solidFill>
-            <a:srgbClr val="D62839"/>
-          </a:solidFill>
-          <a:ln/>
-        </p:spPr>
-      </p:sp>
-      <p:sp>
-        <p:nvSpPr>
-          <p:cNvPr id="6" name="Text 4"/>
-          <p:cNvSpPr txBox="1"/>
-          <p:nvPr/>
-        </p:nvSpPr>
-        <p:spPr>
-          <a:xfrm>
-            <a:off x="621792" y="1536192"/>
-            <a:ext cx="292608" cy="292608"/>
-          </a:xfrm>
-          <a:prstGeom prst="rect">
-            <a:avLst/>
-          </a:prstGeom>
-          <a:noFill/>
-          <a:ln/>
-        </p:spPr>
-        <p:txBody>
-          <a:bodyPr wrap="square" lIns="0" tIns="0" rIns="0" bIns="0" rtlCol="0" anchor="ctr"/>
-          <a:lstStyle/>
-          <a:p>
-            <a:pPr algn="ctr" indent="0" marL="0">
-              <a:buNone/>
-            </a:pPr>
-            <a:r>
-              <a:rPr lang="en-US" sz="1300" b="1" dirty="0">
-                <a:solidFill>
-                  <a:srgbClr val="FFFFFF"/>
-                </a:solidFill>
-                <a:latin typeface="Noto Sans CJK KR" pitchFamily="34" charset="0"/>
-                <a:ea typeface="Noto Sans CJK KR" pitchFamily="34" charset="-122"/>
-                <a:cs typeface="Noto Sans CJK KR" pitchFamily="34" charset="-120"/>
-              </a:rPr>
-              <a:t>1</a:t>
-            </a:r>
-            <a:endParaRPr lang="en-US" sz="1300" dirty="0"/>
-          </a:p>
-        </p:txBody>
-      </p:sp>
-      <p:sp>
-        <p:nvSpPr>
-          <p:cNvPr id="7" name="Text 5"/>
-          <p:cNvSpPr txBox="1"/>
-          <p:nvPr/>
-        </p:nvSpPr>
-        <p:spPr>
-          <a:xfrm>
-            <a:off x="1005840" y="1481328"/>
-            <a:ext cx="2971800" cy="292608"/>
-          </a:xfrm>
-          <a:prstGeom prst="rect">
-            <a:avLst/>
-          </a:prstGeom>
-          <a:noFill/>
-          <a:ln/>
-        </p:spPr>
-        <p:txBody>
-          <a:bodyPr wrap="square" lIns="0" tIns="0" rIns="0" bIns="0" rtlCol="0" anchor="ctr"/>
-          <a:lstStyle/>
-          <a:p>
-            <a:pPr indent="0" marL="0">
-              <a:buNone/>
-            </a:pPr>
-            <a:r>
-              <a:rPr lang="en-US" sz="1300" b="1" dirty="0">
-                <a:solidFill>
-                  <a:srgbClr val="1A2440"/>
-                </a:solidFill>
-                <a:latin typeface="Noto Sans CJK KR" pitchFamily="34" charset="0"/>
-                <a:ea typeface="Noto Sans CJK KR" pitchFamily="34" charset="-122"/>
-                <a:cs typeface="Noto Sans CJK KR" pitchFamily="34" charset="-120"/>
-              </a:rPr>
-              <a:t>드래곤 코스터</a:t>
-            </a:r>
-            <a:endParaRPr lang="en-US" sz="1300" dirty="0"/>
-          </a:p>
-        </p:txBody>
-      </p:sp>
-      <p:sp>
-        <p:nvSpPr>
-          <p:cNvPr id="8" name="Text 6"/>
-          <p:cNvSpPr txBox="1"/>
-          <p:nvPr/>
-        </p:nvSpPr>
-        <p:spPr>
-          <a:xfrm>
-            <a:off x="1005840" y="1755648"/>
-            <a:ext cx="2971800" cy="228600"/>
-          </a:xfrm>
-          <a:prstGeom prst="rect">
-            <a:avLst/>
-          </a:prstGeom>
-          <a:noFill/>
-          <a:ln/>
-        </p:spPr>
-        <p:txBody>
-          <a:bodyPr wrap="square" lIns="0" tIns="0" rIns="0" bIns="0" rtlCol="0" anchor="ctr"/>
-          <a:lstStyle/>
-          <a:p>
-            <a:pPr indent="0" marL="0">
-              <a:buNone/>
-            </a:pPr>
-            <a:r>
-              <a:rPr lang="en-US" sz="1000" i="1" dirty="0">
-                <a:solidFill>
-                  <a:srgbClr val="D62839"/>
-                </a:solidFill>
-                <a:latin typeface="Noto Sans CJK KR" pitchFamily="34" charset="0"/>
-                <a:ea typeface="Noto Sans CJK KR" pitchFamily="34" charset="-122"/>
-                <a:cs typeface="Noto Sans CJK KR" pitchFamily="34" charset="-120"/>
-              </a:rPr>
-              <a:t>LEGO Castle</a:t>
-            </a:r>
-            <a:endParaRPr lang="en-US" sz="1000" dirty="0"/>
-          </a:p>
-        </p:txBody>
-      </p:sp>
-      <p:sp>
-        <p:nvSpPr>
-          <p:cNvPr id="9" name="Text 7"/>
-          <p:cNvSpPr txBox="1"/>
-          <p:nvPr/>
-        </p:nvSpPr>
-        <p:spPr>
-          <a:xfrm>
-            <a:off x="621792" y="2029968"/>
-            <a:ext cx="3328416" cy="713232"/>
-          </a:xfrm>
-          <a:prstGeom prst="rect">
-            <a:avLst/>
-          </a:prstGeom>
-          <a:noFill/>
-          <a:ln/>
-        </p:spPr>
-        <p:txBody>
-          <a:bodyPr wrap="square" lIns="0" tIns="0" rIns="0" bIns="0" rtlCol="0" anchor="t"/>
-          <a:lstStyle/>
-          <a:p>
-            <a:pPr indent="0" marL="0">
-              <a:buNone/>
-            </a:pPr>
-            <a:r>
-              <a:rPr lang="en-US" sz="1000" dirty="0">
-                <a:solidFill>
-                  <a:srgbClr val="5C5749"/>
-                </a:solidFill>
-                <a:latin typeface="Noto Sans CJK KR" pitchFamily="34" charset="0"/>
-                <a:ea typeface="Noto Sans CJK KR" pitchFamily="34" charset="-122"/>
-                <a:cs typeface="Noto Sans CJK KR" pitchFamily="34" charset="-120"/>
-              </a:rPr>
-              <a:t>실내 다크라이드 후 레드 드래곤과 마주치며 급강하. 526m·56km/h. 100~120cm 동반</a:t>
-            </a:r>
-            <a:endParaRPr lang="en-US" sz="1000" dirty="0"/>
-          </a:p>
-        </p:txBody>
-      </p:sp>
-      <p:sp>
-        <p:nvSpPr>
-          <p:cNvPr id="10" name="Shape 8"/>
-          <p:cNvSpPr/>
-          <p:nvPr/>
-        </p:nvSpPr>
-        <p:spPr>
-          <a:xfrm>
-            <a:off x="4251960" y="1371600"/>
-            <a:ext cx="3657600" cy="1417320"/>
-          </a:xfrm>
-          <a:prstGeom prst="roundRect">
-            <a:avLst>
-              <a:gd name="adj" fmla="val 4516"/>
-            </a:avLst>
-          </a:prstGeom>
-          <a:solidFill>
-            <a:srgbClr val="FFFFFF"/>
-          </a:solidFill>
-          <a:ln w="12700">
-            <a:solidFill>
-              <a:srgbClr val="E2E4E8"/>
-            </a:solidFill>
-            <a:prstDash val="solid"/>
-          </a:ln>
-          <a:effectLst>
-            <a:outerShdw sx="100000" sy="100000" kx="0" ky="0" algn="bl" rotWithShape="0" blurRad="63500" dist="25400" dir="5400000">
-              <a:srgbClr val="888888">
-                <a:alpha val="20000"/>
-              </a:srgbClr>
-            </a:outerShdw>
-          </a:effectLst>
-        </p:spPr>
-      </p:sp>
-      <p:sp>
-        <p:nvSpPr>
-          <p:cNvPr id="11" name="Shape 9"/>
-          <p:cNvSpPr/>
-          <p:nvPr/>
-        </p:nvSpPr>
-        <p:spPr>
-          <a:xfrm>
-            <a:off x="4416552" y="1536192"/>
-            <a:ext cx="292608" cy="292608"/>
-          </a:xfrm>
-          <a:prstGeom prst="ellipse">
-            <a:avLst/>
-          </a:prstGeom>
-          <a:solidFill>
-            <a:srgbClr val="D62839"/>
-          </a:solidFill>
-          <a:ln/>
-        </p:spPr>
-      </p:sp>
-      <p:sp>
-        <p:nvSpPr>
-          <p:cNvPr id="12" name="Text 10"/>
-          <p:cNvSpPr txBox="1"/>
-          <p:nvPr/>
-        </p:nvSpPr>
-        <p:spPr>
-          <a:xfrm>
-            <a:off x="4416552" y="1536192"/>
-            <a:ext cx="292608" cy="292608"/>
-          </a:xfrm>
-          <a:prstGeom prst="rect">
-            <a:avLst/>
-          </a:prstGeom>
-          <a:noFill/>
-          <a:ln/>
-        </p:spPr>
-        <p:txBody>
-          <a:bodyPr wrap="square" lIns="0" tIns="0" rIns="0" bIns="0" rtlCol="0" anchor="ctr"/>
-          <a:lstStyle/>
-          <a:p>
-            <a:pPr algn="ctr" indent="0" marL="0">
-              <a:buNone/>
-            </a:pPr>
-            <a:r>
-              <a:rPr lang="en-US" sz="1300" b="1" dirty="0">
-                <a:solidFill>
-                  <a:srgbClr val="FFFFFF"/>
-                </a:solidFill>
-                <a:latin typeface="Noto Sans CJK KR" pitchFamily="34" charset="0"/>
-                <a:ea typeface="Noto Sans CJK KR" pitchFamily="34" charset="-122"/>
-                <a:cs typeface="Noto Sans CJK KR" pitchFamily="34" charset="-120"/>
-              </a:rPr>
-              <a:t>2</a:t>
-            </a:r>
-            <a:endParaRPr lang="en-US" sz="1300" dirty="0"/>
-          </a:p>
-        </p:txBody>
-      </p:sp>
-      <p:sp>
-        <p:nvSpPr>
-          <p:cNvPr id="13" name="Text 11"/>
-          <p:cNvSpPr txBox="1"/>
-          <p:nvPr/>
-        </p:nvSpPr>
-        <p:spPr>
-          <a:xfrm>
-            <a:off x="4800600" y="1481328"/>
-            <a:ext cx="2971800" cy="292608"/>
-          </a:xfrm>
-          <a:prstGeom prst="rect">
-            <a:avLst/>
-          </a:prstGeom>
-          <a:noFill/>
-          <a:ln/>
-        </p:spPr>
-        <p:txBody>
-          <a:bodyPr wrap="square" lIns="0" tIns="0" rIns="0" bIns="0" rtlCol="0" anchor="ctr"/>
-          <a:lstStyle/>
-          <a:p>
-            <a:pPr indent="0" marL="0">
-              <a:buNone/>
-            </a:pPr>
-            <a:r>
-              <a:rPr lang="en-US" sz="1300" b="1" dirty="0">
-                <a:solidFill>
-                  <a:srgbClr val="1A2440"/>
-                </a:solidFill>
-                <a:latin typeface="Noto Sans CJK KR" pitchFamily="34" charset="0"/>
-                <a:ea typeface="Noto Sans CJK KR" pitchFamily="34" charset="-122"/>
-                <a:cs typeface="Noto Sans CJK KR" pitchFamily="34" charset="-120"/>
-              </a:rPr>
-              <a:t>Masters of Spinjitzu</a:t>
-            </a:r>
-            <a:endParaRPr lang="en-US" sz="1300" dirty="0"/>
-          </a:p>
-        </p:txBody>
-      </p:sp>
-      <p:sp>
-        <p:nvSpPr>
-          <p:cNvPr id="14" name="Text 12"/>
-          <p:cNvSpPr txBox="1"/>
-          <p:nvPr/>
-        </p:nvSpPr>
-        <p:spPr>
-          <a:xfrm>
-            <a:off x="4800600" y="1755648"/>
-            <a:ext cx="2971800" cy="228600"/>
-          </a:xfrm>
-          <a:prstGeom prst="rect">
-            <a:avLst/>
-          </a:prstGeom>
-          <a:noFill/>
-          <a:ln/>
-        </p:spPr>
-        <p:txBody>
-          <a:bodyPr wrap="square" lIns="0" tIns="0" rIns="0" bIns="0" rtlCol="0" anchor="ctr"/>
-          <a:lstStyle/>
-          <a:p>
-            <a:pPr indent="0" marL="0">
-              <a:buNone/>
-            </a:pPr>
-            <a:r>
-              <a:rPr lang="en-US" sz="1000" i="1" dirty="0">
-                <a:solidFill>
-                  <a:srgbClr val="D62839"/>
-                </a:solidFill>
-                <a:latin typeface="Noto Sans CJK KR" pitchFamily="34" charset="0"/>
-                <a:ea typeface="Noto Sans CJK KR" pitchFamily="34" charset="-122"/>
-                <a:cs typeface="Noto Sans CJK KR" pitchFamily="34" charset="-120"/>
-              </a:rPr>
-              <a:t>NINJAGO World</a:t>
-            </a:r>
-            <a:endParaRPr lang="en-US" sz="1000" dirty="0"/>
-          </a:p>
-        </p:txBody>
-      </p:sp>
-      <p:sp>
-        <p:nvSpPr>
-          <p:cNvPr id="15" name="Text 13"/>
-          <p:cNvSpPr txBox="1"/>
-          <p:nvPr/>
-        </p:nvSpPr>
-        <p:spPr>
-          <a:xfrm>
-            <a:off x="4416552" y="2029968"/>
-            <a:ext cx="3328416" cy="713232"/>
-          </a:xfrm>
-          <a:prstGeom prst="rect">
-            <a:avLst/>
-          </a:prstGeom>
-          <a:noFill/>
-          <a:ln/>
-        </p:spPr>
-        <p:txBody>
-          <a:bodyPr wrap="square" lIns="0" tIns="0" rIns="0" bIns="0" rtlCol="0" anchor="t"/>
-          <a:lstStyle/>
-          <a:p>
-            <a:pPr indent="0" marL="0">
-              <a:buNone/>
-            </a:pPr>
-            <a:r>
-              <a:rPr lang="en-US" sz="1000" dirty="0">
-                <a:solidFill>
-                  <a:srgbClr val="5C5749"/>
-                </a:solidFill>
-                <a:latin typeface="Noto Sans CJK KR" pitchFamily="34" charset="0"/>
-                <a:ea typeface="Noto Sans CJK KR" pitchFamily="34" charset="-122"/>
-                <a:cs typeface="Noto Sans CJK KR" pitchFamily="34" charset="-120"/>
-              </a:rPr>
-              <a:t>핸들로 회전 속도 조절하는 360도 스핀 라이드</a:t>
-            </a:r>
-            <a:endParaRPr lang="en-US" sz="1000" dirty="0"/>
-          </a:p>
-        </p:txBody>
-      </p:sp>
-      <p:sp>
-        <p:nvSpPr>
-          <p:cNvPr id="16" name="Shape 14"/>
-          <p:cNvSpPr/>
-          <p:nvPr/>
-        </p:nvSpPr>
-        <p:spPr>
-          <a:xfrm>
-            <a:off x="8046720" y="1371600"/>
-            <a:ext cx="3657600" cy="1417320"/>
-          </a:xfrm>
-          <a:prstGeom prst="roundRect">
-            <a:avLst>
-              <a:gd name="adj" fmla="val 4516"/>
-            </a:avLst>
-          </a:prstGeom>
-          <a:solidFill>
-            <a:srgbClr val="FFFFFF"/>
-          </a:solidFill>
-          <a:ln w="12700">
-            <a:solidFill>
-              <a:srgbClr val="E2E4E8"/>
-            </a:solidFill>
-            <a:prstDash val="solid"/>
-          </a:ln>
-          <a:effectLst>
-            <a:outerShdw sx="100000" sy="100000" kx="0" ky="0" algn="bl" rotWithShape="0" blurRad="63500" dist="25400" dir="5400000">
-              <a:srgbClr val="888888">
-                <a:alpha val="20000"/>
-              </a:srgbClr>
-            </a:outerShdw>
-          </a:effectLst>
-        </p:spPr>
-      </p:sp>
-      <p:sp>
-        <p:nvSpPr>
-          <p:cNvPr id="17" name="Shape 15"/>
-          <p:cNvSpPr/>
-          <p:nvPr/>
-        </p:nvSpPr>
-        <p:spPr>
-          <a:xfrm>
-            <a:off x="8211312" y="1536192"/>
-            <a:ext cx="292608" cy="292608"/>
-          </a:xfrm>
-          <a:prstGeom prst="ellipse">
-            <a:avLst/>
-          </a:prstGeom>
-          <a:solidFill>
-            <a:srgbClr val="D62839"/>
-          </a:solidFill>
-          <a:ln/>
-        </p:spPr>
-      </p:sp>
-      <p:sp>
-        <p:nvSpPr>
-          <p:cNvPr id="18" name="Text 16"/>
-          <p:cNvSpPr txBox="1"/>
-          <p:nvPr/>
-        </p:nvSpPr>
-        <p:spPr>
-          <a:xfrm>
-            <a:off x="8211312" y="1536192"/>
-            <a:ext cx="292608" cy="292608"/>
-          </a:xfrm>
-          <a:prstGeom prst="rect">
-            <a:avLst/>
-          </a:prstGeom>
-          <a:noFill/>
-          <a:ln/>
-        </p:spPr>
-        <p:txBody>
-          <a:bodyPr wrap="square" lIns="0" tIns="0" rIns="0" bIns="0" rtlCol="0" anchor="ctr"/>
-          <a:lstStyle/>
-          <a:p>
-            <a:pPr algn="ctr" indent="0" marL="0">
-              <a:buNone/>
-            </a:pPr>
-            <a:r>
-              <a:rPr lang="en-US" sz="1300" b="1" dirty="0">
-                <a:solidFill>
-                  <a:srgbClr val="FFFFFF"/>
-                </a:solidFill>
-                <a:latin typeface="Noto Sans CJK KR" pitchFamily="34" charset="0"/>
-                <a:ea typeface="Noto Sans CJK KR" pitchFamily="34" charset="-122"/>
-                <a:cs typeface="Noto Sans CJK KR" pitchFamily="34" charset="-120"/>
-              </a:rPr>
-              <a:t>3</a:t>
-            </a:r>
-            <a:endParaRPr lang="en-US" sz="1300" dirty="0"/>
-          </a:p>
-        </p:txBody>
-      </p:sp>
-      <p:sp>
-        <p:nvSpPr>
-          <p:cNvPr id="19" name="Text 17"/>
-          <p:cNvSpPr txBox="1"/>
-          <p:nvPr/>
-        </p:nvSpPr>
-        <p:spPr>
-          <a:xfrm>
-            <a:off x="8595360" y="1481328"/>
-            <a:ext cx="2971800" cy="292608"/>
-          </a:xfrm>
-          <a:prstGeom prst="rect">
-            <a:avLst/>
-          </a:prstGeom>
-          <a:noFill/>
-          <a:ln/>
-        </p:spPr>
-        <p:txBody>
-          <a:bodyPr wrap="square" lIns="0" tIns="0" rIns="0" bIns="0" rtlCol="0" anchor="ctr"/>
-          <a:lstStyle/>
-          <a:p>
-            <a:pPr indent="0" marL="0">
-              <a:buNone/>
-            </a:pPr>
-            <a:r>
-              <a:rPr lang="en-US" sz="1300" b="1" dirty="0">
-                <a:solidFill>
-                  <a:srgbClr val="1A2440"/>
-                </a:solidFill>
-                <a:latin typeface="Noto Sans CJK KR" pitchFamily="34" charset="0"/>
-                <a:ea typeface="Noto Sans CJK KR" pitchFamily="34" charset="-122"/>
-                <a:cs typeface="Noto Sans CJK KR" pitchFamily="34" charset="-120"/>
-              </a:rPr>
-              <a:t>NINJAGO The Ride</a:t>
-            </a:r>
-            <a:endParaRPr lang="en-US" sz="1300" dirty="0"/>
-          </a:p>
-        </p:txBody>
-      </p:sp>
-      <p:sp>
-        <p:nvSpPr>
-          <p:cNvPr id="20" name="Text 18"/>
-          <p:cNvSpPr txBox="1"/>
-          <p:nvPr/>
-        </p:nvSpPr>
-        <p:spPr>
-          <a:xfrm>
-            <a:off x="8595360" y="1755648"/>
-            <a:ext cx="2971800" cy="228600"/>
-          </a:xfrm>
-          <a:prstGeom prst="rect">
-            <a:avLst/>
-          </a:prstGeom>
-          <a:noFill/>
-          <a:ln/>
-        </p:spPr>
-        <p:txBody>
-          <a:bodyPr wrap="square" lIns="0" tIns="0" rIns="0" bIns="0" rtlCol="0" anchor="ctr"/>
-          <a:lstStyle/>
-          <a:p>
-            <a:pPr indent="0" marL="0">
-              <a:buNone/>
-            </a:pPr>
-            <a:r>
-              <a:rPr lang="en-US" sz="1000" i="1" dirty="0">
-                <a:solidFill>
-                  <a:srgbClr val="D62839"/>
-                </a:solidFill>
-                <a:latin typeface="Noto Sans CJK KR" pitchFamily="34" charset="0"/>
-                <a:ea typeface="Noto Sans CJK KR" pitchFamily="34" charset="-122"/>
-                <a:cs typeface="Noto Sans CJK KR" pitchFamily="34" charset="-120"/>
-              </a:rPr>
-              <a:t>NINJAGO World</a:t>
-            </a:r>
-            <a:endParaRPr lang="en-US" sz="1000" dirty="0"/>
-          </a:p>
-        </p:txBody>
-      </p:sp>
-      <p:sp>
-        <p:nvSpPr>
-          <p:cNvPr id="21" name="Text 19"/>
-          <p:cNvSpPr txBox="1"/>
-          <p:nvPr/>
-        </p:nvSpPr>
-        <p:spPr>
-          <a:xfrm>
-            <a:off x="8211312" y="2029968"/>
-            <a:ext cx="3328416" cy="713232"/>
-          </a:xfrm>
-          <a:prstGeom prst="rect">
-            <a:avLst/>
-          </a:prstGeom>
-          <a:noFill/>
-          <a:ln/>
-        </p:spPr>
-        <p:txBody>
-          <a:bodyPr wrap="square" lIns="0" tIns="0" rIns="0" bIns="0" rtlCol="0" anchor="t"/>
-          <a:lstStyle/>
-          <a:p>
-            <a:pPr indent="0" marL="0">
-              <a:buNone/>
-            </a:pPr>
-            <a:r>
-              <a:rPr lang="en-US" sz="1000" dirty="0">
-                <a:solidFill>
-                  <a:srgbClr val="5C5749"/>
-                </a:solidFill>
-                <a:latin typeface="Noto Sans CJK KR" pitchFamily="34" charset="0"/>
-                <a:ea typeface="Noto Sans CJK KR" pitchFamily="34" charset="-122"/>
-                <a:cs typeface="Noto Sans CJK KR" pitchFamily="34" charset="-120"/>
-              </a:rPr>
-              <a:t>4D — 손으로 불·얼음·번개·대지 파워를 쏘는 대모험</a:t>
-            </a:r>
-            <a:endParaRPr lang="en-US" sz="1000" dirty="0"/>
-          </a:p>
-        </p:txBody>
-      </p:sp>
-      <p:sp>
-        <p:nvSpPr>
-          <p:cNvPr id="22" name="Shape 20"/>
-          <p:cNvSpPr/>
-          <p:nvPr/>
-        </p:nvSpPr>
-        <p:spPr>
-          <a:xfrm>
-            <a:off x="457200" y="2953512"/>
-            <a:ext cx="3657600" cy="1417320"/>
-          </a:xfrm>
-          <a:prstGeom prst="roundRect">
-            <a:avLst>
-              <a:gd name="adj" fmla="val 4516"/>
-            </a:avLst>
-          </a:prstGeom>
-          <a:solidFill>
-            <a:srgbClr val="FFFFFF"/>
-          </a:solidFill>
-          <a:ln w="12700">
-            <a:solidFill>
-              <a:srgbClr val="E2E4E8"/>
-            </a:solidFill>
-            <a:prstDash val="solid"/>
-          </a:ln>
-          <a:effectLst>
-            <a:outerShdw sx="100000" sy="100000" kx="0" ky="0" algn="bl" rotWithShape="0" blurRad="63500" dist="25400" dir="5400000">
-              <a:srgbClr val="888888">
-                <a:alpha val="20000"/>
-              </a:srgbClr>
-            </a:outerShdw>
-          </a:effectLst>
-        </p:spPr>
-      </p:sp>
-      <p:sp>
-        <p:nvSpPr>
-          <p:cNvPr id="23" name="Shape 21"/>
-          <p:cNvSpPr/>
-          <p:nvPr/>
-        </p:nvSpPr>
-        <p:spPr>
-          <a:xfrm>
-            <a:off x="621792" y="3118104"/>
-            <a:ext cx="292608" cy="292608"/>
-          </a:xfrm>
-          <a:prstGeom prst="ellipse">
-            <a:avLst/>
-          </a:prstGeom>
-          <a:solidFill>
-            <a:srgbClr val="D62839"/>
-          </a:solidFill>
-          <a:ln/>
-        </p:spPr>
-      </p:sp>
-      <p:sp>
-        <p:nvSpPr>
-          <p:cNvPr id="24" name="Text 22"/>
-          <p:cNvSpPr txBox="1"/>
-          <p:nvPr/>
-        </p:nvSpPr>
-        <p:spPr>
-          <a:xfrm>
-            <a:off x="621792" y="3118104"/>
-            <a:ext cx="292608" cy="292608"/>
-          </a:xfrm>
-          <a:prstGeom prst="rect">
-            <a:avLst/>
-          </a:prstGeom>
-          <a:noFill/>
-          <a:ln/>
-        </p:spPr>
-        <p:txBody>
-          <a:bodyPr wrap="square" lIns="0" tIns="0" rIns="0" bIns="0" rtlCol="0" anchor="ctr"/>
-          <a:lstStyle/>
-          <a:p>
-            <a:pPr algn="ctr" indent="0" marL="0">
-              <a:buNone/>
-            </a:pPr>
-            <a:r>
-              <a:rPr lang="en-US" sz="1300" b="1" dirty="0">
-                <a:solidFill>
-                  <a:srgbClr val="FFFFFF"/>
-                </a:solidFill>
-                <a:latin typeface="Noto Sans CJK KR" pitchFamily="34" charset="0"/>
-                <a:ea typeface="Noto Sans CJK KR" pitchFamily="34" charset="-122"/>
-                <a:cs typeface="Noto Sans CJK KR" pitchFamily="34" charset="-120"/>
-              </a:rPr>
-              <a:t>4</a:t>
-            </a:r>
-            <a:endParaRPr lang="en-US" sz="1300" dirty="0"/>
-          </a:p>
-        </p:txBody>
-      </p:sp>
-      <p:sp>
-        <p:nvSpPr>
-          <p:cNvPr id="25" name="Text 23"/>
-          <p:cNvSpPr txBox="1"/>
-          <p:nvPr/>
-        </p:nvSpPr>
-        <p:spPr>
-          <a:xfrm>
-            <a:off x="1005840" y="3063240"/>
-            <a:ext cx="2971800" cy="292608"/>
-          </a:xfrm>
-          <a:prstGeom prst="rect">
-            <a:avLst/>
-          </a:prstGeom>
-          <a:noFill/>
-          <a:ln/>
-        </p:spPr>
-        <p:txBody>
-          <a:bodyPr wrap="square" lIns="0" tIns="0" rIns="0" bIns="0" rtlCol="0" anchor="ctr"/>
-          <a:lstStyle/>
-          <a:p>
-            <a:pPr indent="0" marL="0">
-              <a:buNone/>
-            </a:pPr>
-            <a:r>
-              <a:rPr lang="en-US" sz="1300" b="1" dirty="0">
-                <a:solidFill>
-                  <a:srgbClr val="1A2440"/>
-                </a:solidFill>
-                <a:latin typeface="Noto Sans CJK KR" pitchFamily="34" charset="0"/>
-                <a:ea typeface="Noto Sans CJK KR" pitchFamily="34" charset="-122"/>
-                <a:cs typeface="Noto Sans CJK KR" pitchFamily="34" charset="-120"/>
-              </a:rPr>
-              <a:t>LEGOLAND Lookout</a:t>
-            </a:r>
-            <a:endParaRPr lang="en-US" sz="1300" dirty="0"/>
-          </a:p>
-        </p:txBody>
-      </p:sp>
-      <p:sp>
-        <p:nvSpPr>
-          <p:cNvPr id="26" name="Text 24"/>
-          <p:cNvSpPr txBox="1"/>
-          <p:nvPr/>
-        </p:nvSpPr>
-        <p:spPr>
-          <a:xfrm>
-            <a:off x="1005840" y="3337560"/>
-            <a:ext cx="2971800" cy="228600"/>
-          </a:xfrm>
-          <a:prstGeom prst="rect">
-            <a:avLst/>
-          </a:prstGeom>
-          <a:noFill/>
-          <a:ln/>
-        </p:spPr>
-        <p:txBody>
-          <a:bodyPr wrap="square" lIns="0" tIns="0" rIns="0" bIns="0" rtlCol="0" anchor="ctr"/>
-          <a:lstStyle/>
-          <a:p>
-            <a:pPr indent="0" marL="0">
-              <a:buNone/>
-            </a:pPr>
-            <a:r>
-              <a:rPr lang="en-US" sz="1000" i="1" dirty="0">
-                <a:solidFill>
-                  <a:srgbClr val="D62839"/>
-                </a:solidFill>
-                <a:latin typeface="Noto Sans CJK KR" pitchFamily="34" charset="0"/>
-                <a:ea typeface="Noto Sans CJK KR" pitchFamily="34" charset="-122"/>
-                <a:cs typeface="Noto Sans CJK KR" pitchFamily="34" charset="-120"/>
-              </a:rPr>
-              <a:t>Bricktopia</a:t>
-            </a:r>
-            <a:endParaRPr lang="en-US" sz="1000" dirty="0"/>
-          </a:p>
-        </p:txBody>
-      </p:sp>
-      <p:sp>
-        <p:nvSpPr>
-          <p:cNvPr id="27" name="Text 25"/>
-          <p:cNvSpPr txBox="1"/>
-          <p:nvPr/>
-        </p:nvSpPr>
-        <p:spPr>
-          <a:xfrm>
-            <a:off x="621792" y="3611880"/>
-            <a:ext cx="3328416" cy="713232"/>
-          </a:xfrm>
-          <a:prstGeom prst="rect">
-            <a:avLst/>
-          </a:prstGeom>
-          <a:noFill/>
-          <a:ln/>
-        </p:spPr>
-        <p:txBody>
-          <a:bodyPr wrap="square" lIns="0" tIns="0" rIns="0" bIns="0" rtlCol="0" anchor="t"/>
-          <a:lstStyle/>
-          <a:p>
-            <a:pPr indent="0" marL="0">
-              <a:buNone/>
-            </a:pPr>
-            <a:r>
-              <a:rPr lang="en-US" sz="1000" dirty="0">
-                <a:solidFill>
-                  <a:srgbClr val="5C5749"/>
-                </a:solidFill>
-                <a:latin typeface="Noto Sans CJK KR" pitchFamily="34" charset="0"/>
-                <a:ea typeface="Noto Sans CJK KR" pitchFamily="34" charset="-122"/>
-                <a:cs typeface="Noto Sans CJK KR" pitchFamily="34" charset="-120"/>
-              </a:rPr>
-              <a:t>약 43m 전망대. 스릴 없이 파크 전경 조망</a:t>
-            </a:r>
-            <a:endParaRPr lang="en-US" sz="1000" dirty="0"/>
-          </a:p>
-        </p:txBody>
-      </p:sp>
-      <p:sp>
-        <p:nvSpPr>
-          <p:cNvPr id="28" name="Shape 26"/>
-          <p:cNvSpPr/>
-          <p:nvPr/>
-        </p:nvSpPr>
-        <p:spPr>
-          <a:xfrm>
-            <a:off x="4251960" y="2953512"/>
-            <a:ext cx="3657600" cy="1417320"/>
-          </a:xfrm>
-          <a:prstGeom prst="roundRect">
-            <a:avLst>
-              <a:gd name="adj" fmla="val 4516"/>
-            </a:avLst>
-          </a:prstGeom>
-          <a:solidFill>
-            <a:srgbClr val="FFFFFF"/>
-          </a:solidFill>
-          <a:ln w="12700">
-            <a:solidFill>
-              <a:srgbClr val="E2E4E8"/>
-            </a:solidFill>
-            <a:prstDash val="solid"/>
-          </a:ln>
-          <a:effectLst>
-            <a:outerShdw sx="100000" sy="100000" kx="0" ky="0" algn="bl" rotWithShape="0" blurRad="63500" dist="25400" dir="5400000">
-              <a:srgbClr val="888888">
-                <a:alpha val="20000"/>
-              </a:srgbClr>
-            </a:outerShdw>
-          </a:effectLst>
-        </p:spPr>
-      </p:sp>
-      <p:sp>
-        <p:nvSpPr>
-          <p:cNvPr id="29" name="Shape 27"/>
-          <p:cNvSpPr/>
-          <p:nvPr/>
-        </p:nvSpPr>
-        <p:spPr>
-          <a:xfrm>
-            <a:off x="4416552" y="3118104"/>
-            <a:ext cx="292608" cy="292608"/>
-          </a:xfrm>
-          <a:prstGeom prst="ellipse">
-            <a:avLst/>
-          </a:prstGeom>
-          <a:solidFill>
-            <a:srgbClr val="D62839"/>
-          </a:solidFill>
-          <a:ln/>
-        </p:spPr>
-      </p:sp>
-      <p:sp>
-        <p:nvSpPr>
-          <p:cNvPr id="30" name="Text 28"/>
-          <p:cNvSpPr txBox="1"/>
-          <p:nvPr/>
-        </p:nvSpPr>
-        <p:spPr>
-          <a:xfrm>
-            <a:off x="4416552" y="3118104"/>
-            <a:ext cx="292608" cy="292608"/>
-          </a:xfrm>
-          <a:prstGeom prst="rect">
-            <a:avLst/>
-          </a:prstGeom>
-          <a:noFill/>
-          <a:ln/>
-        </p:spPr>
-        <p:txBody>
-          <a:bodyPr wrap="square" lIns="0" tIns="0" rIns="0" bIns="0" rtlCol="0" anchor="ctr"/>
-          <a:lstStyle/>
-          <a:p>
-            <a:pPr algn="ctr" indent="0" marL="0">
-              <a:buNone/>
-            </a:pPr>
-            <a:r>
-              <a:rPr lang="en-US" sz="1300" b="1" dirty="0">
-                <a:solidFill>
-                  <a:srgbClr val="FFFFFF"/>
-                </a:solidFill>
-                <a:latin typeface="Noto Sans CJK KR" pitchFamily="34" charset="0"/>
-                <a:ea typeface="Noto Sans CJK KR" pitchFamily="34" charset="-122"/>
-                <a:cs typeface="Noto Sans CJK KR" pitchFamily="34" charset="-120"/>
-              </a:rPr>
-              <a:t>5</a:t>
-            </a:r>
-            <a:endParaRPr lang="en-US" sz="1300" dirty="0"/>
-          </a:p>
-        </p:txBody>
-      </p:sp>
-      <p:sp>
-        <p:nvSpPr>
-          <p:cNvPr id="31" name="Text 29"/>
-          <p:cNvSpPr txBox="1"/>
-          <p:nvPr/>
-        </p:nvSpPr>
-        <p:spPr>
-          <a:xfrm>
-            <a:off x="4800600" y="3063240"/>
-            <a:ext cx="2971800" cy="292608"/>
-          </a:xfrm>
-          <a:prstGeom prst="rect">
-            <a:avLst/>
-          </a:prstGeom>
-          <a:noFill/>
-          <a:ln/>
-        </p:spPr>
-        <p:txBody>
-          <a:bodyPr wrap="square" lIns="0" tIns="0" rIns="0" bIns="0" rtlCol="0" anchor="ctr"/>
-          <a:lstStyle/>
-          <a:p>
-            <a:pPr indent="0" marL="0">
-              <a:buNone/>
-            </a:pPr>
-            <a:r>
-              <a:rPr lang="en-US" sz="1300" b="1" dirty="0">
-                <a:solidFill>
-                  <a:srgbClr val="1A2440"/>
-                </a:solidFill>
-                <a:latin typeface="Noto Sans CJK KR" pitchFamily="34" charset="0"/>
-                <a:ea typeface="Noto Sans CJK KR" pitchFamily="34" charset="-122"/>
-                <a:cs typeface="Noto Sans CJK KR" pitchFamily="34" charset="-120"/>
-              </a:rPr>
-              <a:t>Monkey Climb</a:t>
-            </a:r>
-            <a:endParaRPr lang="en-US" sz="1300" dirty="0"/>
-          </a:p>
-        </p:txBody>
-      </p:sp>
-      <p:sp>
-        <p:nvSpPr>
-          <p:cNvPr id="32" name="Text 30"/>
-          <p:cNvSpPr txBox="1"/>
-          <p:nvPr/>
-        </p:nvSpPr>
-        <p:spPr>
-          <a:xfrm>
-            <a:off x="4800600" y="3337560"/>
-            <a:ext cx="2971800" cy="228600"/>
-          </a:xfrm>
-          <a:prstGeom prst="rect">
-            <a:avLst/>
-          </a:prstGeom>
-          <a:noFill/>
-          <a:ln/>
-        </p:spPr>
-        <p:txBody>
-          <a:bodyPr wrap="square" lIns="0" tIns="0" rIns="0" bIns="0" rtlCol="0" anchor="ctr"/>
-          <a:lstStyle/>
-          <a:p>
-            <a:pPr indent="0" marL="0">
-              <a:buNone/>
-            </a:pPr>
-            <a:r>
-              <a:rPr lang="en-US" sz="1000" i="1" dirty="0">
-                <a:solidFill>
-                  <a:srgbClr val="D62839"/>
-                </a:solidFill>
-                <a:latin typeface="Noto Sans CJK KR" pitchFamily="34" charset="0"/>
-                <a:ea typeface="Noto Sans CJK KR" pitchFamily="34" charset="-122"/>
-                <a:cs typeface="Noto Sans CJK KR" pitchFamily="34" charset="-120"/>
-              </a:rPr>
-              <a:t>Bricktopia</a:t>
-            </a:r>
-            <a:endParaRPr lang="en-US" sz="1000" dirty="0"/>
-          </a:p>
-        </p:txBody>
-      </p:sp>
-      <p:sp>
-        <p:nvSpPr>
-          <p:cNvPr id="33" name="Text 31"/>
-          <p:cNvSpPr txBox="1"/>
-          <p:nvPr/>
-        </p:nvSpPr>
-        <p:spPr>
-          <a:xfrm>
-            <a:off x="4416552" y="3611880"/>
-            <a:ext cx="3328416" cy="713232"/>
-          </a:xfrm>
-          <a:prstGeom prst="rect">
-            <a:avLst/>
-          </a:prstGeom>
-          <a:noFill/>
-          <a:ln/>
-        </p:spPr>
-        <p:txBody>
-          <a:bodyPr wrap="square" lIns="0" tIns="0" rIns="0" bIns="0" rtlCol="0" anchor="t"/>
-          <a:lstStyle/>
-          <a:p>
-            <a:pPr indent="0" marL="0">
-              <a:buNone/>
-            </a:pPr>
-            <a:r>
-              <a:rPr lang="en-US" sz="1000" dirty="0">
-                <a:solidFill>
-                  <a:srgbClr val="5C5749"/>
-                </a:solidFill>
-                <a:latin typeface="Noto Sans CJK KR" pitchFamily="34" charset="0"/>
-                <a:ea typeface="Noto Sans CJK KR" pitchFamily="34" charset="-122"/>
-                <a:cs typeface="Noto Sans CJK KR" pitchFamily="34" charset="-120"/>
-              </a:rPr>
-              <a:t>그물 정글짐 등반 후 자유낙하 하강</a:t>
-            </a:r>
-            <a:endParaRPr lang="en-US" sz="1000" dirty="0"/>
-          </a:p>
-        </p:txBody>
-      </p:sp>
-      <p:sp>
-        <p:nvSpPr>
-          <p:cNvPr id="34" name="Shape 32"/>
-          <p:cNvSpPr/>
-          <p:nvPr/>
-        </p:nvSpPr>
-        <p:spPr>
-          <a:xfrm>
-            <a:off x="8046720" y="2953512"/>
-            <a:ext cx="3657600" cy="1417320"/>
-          </a:xfrm>
-          <a:prstGeom prst="roundRect">
-            <a:avLst>
-              <a:gd name="adj" fmla="val 4516"/>
-            </a:avLst>
-          </a:prstGeom>
-          <a:solidFill>
-            <a:srgbClr val="FFFFFF"/>
-          </a:solidFill>
-          <a:ln w="12700">
-            <a:solidFill>
-              <a:srgbClr val="E2E4E8"/>
-            </a:solidFill>
-            <a:prstDash val="solid"/>
-          </a:ln>
-          <a:effectLst>
-            <a:outerShdw sx="100000" sy="100000" kx="0" ky="0" algn="bl" rotWithShape="0" blurRad="63500" dist="25400" dir="5400000">
-              <a:srgbClr val="888888">
-                <a:alpha val="20000"/>
-              </a:srgbClr>
-            </a:outerShdw>
-          </a:effectLst>
-        </p:spPr>
-      </p:sp>
-      <p:sp>
-        <p:nvSpPr>
-          <p:cNvPr id="35" name="Shape 33"/>
-          <p:cNvSpPr/>
-          <p:nvPr/>
-        </p:nvSpPr>
-        <p:spPr>
-          <a:xfrm>
-            <a:off x="8211312" y="3118104"/>
-            <a:ext cx="292608" cy="292608"/>
-          </a:xfrm>
-          <a:prstGeom prst="ellipse">
-            <a:avLst/>
-          </a:prstGeom>
-          <a:solidFill>
-            <a:srgbClr val="D62839"/>
-          </a:solidFill>
-          <a:ln/>
-        </p:spPr>
-      </p:sp>
-      <p:sp>
-        <p:nvSpPr>
-          <p:cNvPr id="36" name="Text 34"/>
-          <p:cNvSpPr txBox="1"/>
-          <p:nvPr/>
-        </p:nvSpPr>
-        <p:spPr>
-          <a:xfrm>
-            <a:off x="8211312" y="3118104"/>
-            <a:ext cx="292608" cy="292608"/>
-          </a:xfrm>
-          <a:prstGeom prst="rect">
-            <a:avLst/>
-          </a:prstGeom>
-          <a:noFill/>
-          <a:ln/>
-        </p:spPr>
-        <p:txBody>
-          <a:bodyPr wrap="square" lIns="0" tIns="0" rIns="0" bIns="0" rtlCol="0" anchor="ctr"/>
-          <a:lstStyle/>
-          <a:p>
-            <a:pPr algn="ctr" indent="0" marL="0">
-              <a:buNone/>
-            </a:pPr>
-            <a:r>
-              <a:rPr lang="en-US" sz="1300" b="1" dirty="0">
-                <a:solidFill>
-                  <a:srgbClr val="FFFFFF"/>
-                </a:solidFill>
-                <a:latin typeface="Noto Sans CJK KR" pitchFamily="34" charset="0"/>
-                <a:ea typeface="Noto Sans CJK KR" pitchFamily="34" charset="-122"/>
-                <a:cs typeface="Noto Sans CJK KR" pitchFamily="34" charset="-120"/>
-              </a:rPr>
-              <a:t>6</a:t>
-            </a:r>
-            <a:endParaRPr lang="en-US" sz="1300" dirty="0"/>
-          </a:p>
-        </p:txBody>
-      </p:sp>
-      <p:sp>
-        <p:nvSpPr>
-          <p:cNvPr id="37" name="Text 35"/>
-          <p:cNvSpPr txBox="1"/>
-          <p:nvPr/>
-        </p:nvSpPr>
-        <p:spPr>
-          <a:xfrm>
-            <a:off x="8595360" y="3063240"/>
-            <a:ext cx="2971800" cy="292608"/>
-          </a:xfrm>
-          <a:prstGeom prst="rect">
-            <a:avLst/>
-          </a:prstGeom>
-          <a:noFill/>
-          <a:ln/>
-        </p:spPr>
-        <p:txBody>
-          <a:bodyPr wrap="square" lIns="0" tIns="0" rIns="0" bIns="0" rtlCol="0" anchor="ctr"/>
-          <a:lstStyle/>
-          <a:p>
-            <a:pPr indent="0" marL="0">
-              <a:buNone/>
-            </a:pPr>
-            <a:r>
-              <a:rPr lang="en-US" sz="1300" b="1" dirty="0">
-                <a:solidFill>
-                  <a:srgbClr val="1A2440"/>
-                </a:solidFill>
-                <a:latin typeface="Noto Sans CJK KR" pitchFamily="34" charset="0"/>
-                <a:ea typeface="Noto Sans CJK KR" pitchFamily="34" charset="-122"/>
-                <a:cs typeface="Noto Sans CJK KR" pitchFamily="34" charset="-120"/>
-              </a:rPr>
-              <a:t>Wave Racers</a:t>
-            </a:r>
-            <a:endParaRPr lang="en-US" sz="1300" dirty="0"/>
-          </a:p>
-        </p:txBody>
-      </p:sp>
-      <p:sp>
-        <p:nvSpPr>
-          <p:cNvPr id="38" name="Text 36"/>
-          <p:cNvSpPr txBox="1"/>
-          <p:nvPr/>
-        </p:nvSpPr>
-        <p:spPr>
-          <a:xfrm>
-            <a:off x="8595360" y="3337560"/>
-            <a:ext cx="2971800" cy="228600"/>
-          </a:xfrm>
-          <a:prstGeom prst="rect">
-            <a:avLst/>
-          </a:prstGeom>
-          <a:noFill/>
-          <a:ln/>
-        </p:spPr>
-        <p:txBody>
-          <a:bodyPr wrap="square" lIns="0" tIns="0" rIns="0" bIns="0" rtlCol="0" anchor="ctr"/>
-          <a:lstStyle/>
-          <a:p>
-            <a:pPr indent="0" marL="0">
-              <a:buNone/>
-            </a:pPr>
-            <a:r>
-              <a:rPr lang="en-US" sz="1000" i="1" dirty="0">
-                <a:solidFill>
-                  <a:srgbClr val="D62839"/>
-                </a:solidFill>
-                <a:latin typeface="Noto Sans CJK KR" pitchFamily="34" charset="0"/>
-                <a:ea typeface="Noto Sans CJK KR" pitchFamily="34" charset="-122"/>
-                <a:cs typeface="Noto Sans CJK KR" pitchFamily="34" charset="-120"/>
-              </a:rPr>
-              <a:t>LEGO City</a:t>
-            </a:r>
-            <a:endParaRPr lang="en-US" sz="1000" dirty="0"/>
-          </a:p>
-        </p:txBody>
-      </p:sp>
-      <p:sp>
-        <p:nvSpPr>
-          <p:cNvPr id="39" name="Text 37"/>
-          <p:cNvSpPr txBox="1"/>
-          <p:nvPr/>
-        </p:nvSpPr>
-        <p:spPr>
-          <a:xfrm>
-            <a:off x="8211312" y="3611880"/>
-            <a:ext cx="3328416" cy="713232"/>
-          </a:xfrm>
-          <a:prstGeom prst="rect">
-            <a:avLst/>
-          </a:prstGeom>
-          <a:noFill/>
-          <a:ln/>
-        </p:spPr>
-        <p:txBody>
-          <a:bodyPr wrap="square" lIns="0" tIns="0" rIns="0" bIns="0" rtlCol="0" anchor="t"/>
-          <a:lstStyle/>
-          <a:p>
-            <a:pPr indent="0" marL="0">
-              <a:buNone/>
-            </a:pPr>
-            <a:r>
-              <a:rPr lang="en-US" sz="1000" dirty="0">
-                <a:solidFill>
-                  <a:srgbClr val="5C5749"/>
-                </a:solidFill>
-                <a:latin typeface="Noto Sans CJK KR" pitchFamily="34" charset="0"/>
-                <a:ea typeface="Noto Sans CJK KR" pitchFamily="34" charset="-122"/>
-                <a:cs typeface="Noto Sans CJK KR" pitchFamily="34" charset="-120"/>
-              </a:rPr>
-              <a:t>보트로 파도·물대포 회피. 확실히 젖음</a:t>
-            </a:r>
-            <a:endParaRPr lang="en-US" sz="1000" dirty="0"/>
-          </a:p>
-        </p:txBody>
-      </p:sp>
-      <p:sp>
-        <p:nvSpPr>
-          <p:cNvPr id="40" name="Shape 38"/>
-          <p:cNvSpPr/>
-          <p:nvPr/>
-        </p:nvSpPr>
-        <p:spPr>
-          <a:xfrm>
-            <a:off x="457200" y="4535424"/>
-            <a:ext cx="3657600" cy="1417320"/>
-          </a:xfrm>
-          <a:prstGeom prst="roundRect">
-            <a:avLst>
-              <a:gd name="adj" fmla="val 4516"/>
-            </a:avLst>
-          </a:prstGeom>
-          <a:solidFill>
-            <a:srgbClr val="FFFFFF"/>
-          </a:solidFill>
-          <a:ln w="12700">
-            <a:solidFill>
-              <a:srgbClr val="E2E4E8"/>
-            </a:solidFill>
-            <a:prstDash val="solid"/>
-          </a:ln>
-          <a:effectLst>
-            <a:outerShdw sx="100000" sy="100000" kx="0" ky="0" algn="bl" rotWithShape="0" blurRad="63500" dist="25400" dir="5400000">
-              <a:srgbClr val="888888">
-                <a:alpha val="20000"/>
-              </a:srgbClr>
-            </a:outerShdw>
-          </a:effectLst>
-        </p:spPr>
-      </p:sp>
-      <p:sp>
-        <p:nvSpPr>
-          <p:cNvPr id="41" name="Shape 39"/>
-          <p:cNvSpPr/>
-          <p:nvPr/>
-        </p:nvSpPr>
-        <p:spPr>
-          <a:xfrm>
-            <a:off x="621792" y="4700016"/>
-            <a:ext cx="292608" cy="292608"/>
-          </a:xfrm>
-          <a:prstGeom prst="ellipse">
-            <a:avLst/>
-          </a:prstGeom>
-          <a:solidFill>
-            <a:srgbClr val="D62839"/>
-          </a:solidFill>
-          <a:ln/>
-        </p:spPr>
-      </p:sp>
-      <p:sp>
-        <p:nvSpPr>
-          <p:cNvPr id="42" name="Text 40"/>
-          <p:cNvSpPr txBox="1"/>
-          <p:nvPr/>
-        </p:nvSpPr>
-        <p:spPr>
-          <a:xfrm>
-            <a:off x="621792" y="4700016"/>
-            <a:ext cx="292608" cy="292608"/>
-          </a:xfrm>
-          <a:prstGeom prst="rect">
-            <a:avLst/>
-          </a:prstGeom>
-          <a:noFill/>
-          <a:ln/>
-        </p:spPr>
-        <p:txBody>
-          <a:bodyPr wrap="square" lIns="0" tIns="0" rIns="0" bIns="0" rtlCol="0" anchor="ctr"/>
-          <a:lstStyle/>
-          <a:p>
-            <a:pPr algn="ctr" indent="0" marL="0">
-              <a:buNone/>
-            </a:pPr>
-            <a:r>
-              <a:rPr lang="en-US" sz="1300" b="1" dirty="0">
-                <a:solidFill>
-                  <a:srgbClr val="FFFFFF"/>
-                </a:solidFill>
-                <a:latin typeface="Noto Sans CJK KR" pitchFamily="34" charset="0"/>
-                <a:ea typeface="Noto Sans CJK KR" pitchFamily="34" charset="-122"/>
-                <a:cs typeface="Noto Sans CJK KR" pitchFamily="34" charset="-120"/>
-              </a:rPr>
-              <a:t>7</a:t>
-            </a:r>
-            <a:endParaRPr lang="en-US" sz="1300" dirty="0"/>
-          </a:p>
-        </p:txBody>
-      </p:sp>
-      <p:sp>
-        <p:nvSpPr>
-          <p:cNvPr id="43" name="Text 41"/>
-          <p:cNvSpPr txBox="1"/>
-          <p:nvPr/>
-        </p:nvSpPr>
-        <p:spPr>
-          <a:xfrm>
-            <a:off x="1005840" y="4645152"/>
-            <a:ext cx="2971800" cy="292608"/>
-          </a:xfrm>
-          <a:prstGeom prst="rect">
-            <a:avLst/>
-          </a:prstGeom>
-          <a:noFill/>
-          <a:ln/>
-        </p:spPr>
-        <p:txBody>
-          <a:bodyPr wrap="square" lIns="0" tIns="0" rIns="0" bIns="0" rtlCol="0" anchor="ctr"/>
-          <a:lstStyle/>
-          <a:p>
-            <a:pPr indent="0" marL="0">
-              <a:buNone/>
-            </a:pPr>
-            <a:r>
-              <a:rPr lang="en-US" sz="1300" b="1" dirty="0">
-                <a:solidFill>
-                  <a:srgbClr val="1A2440"/>
-                </a:solidFill>
-                <a:latin typeface="Noto Sans CJK KR" pitchFamily="34" charset="0"/>
-                <a:ea typeface="Noto Sans CJK KR" pitchFamily="34" charset="-122"/>
-                <a:cs typeface="Noto Sans CJK KR" pitchFamily="34" charset="-120"/>
-              </a:rPr>
-              <a:t>Coast Guard Academy</a:t>
-            </a:r>
-            <a:endParaRPr lang="en-US" sz="1300" dirty="0"/>
-          </a:p>
-        </p:txBody>
-      </p:sp>
-      <p:sp>
-        <p:nvSpPr>
-          <p:cNvPr id="44" name="Text 42"/>
-          <p:cNvSpPr txBox="1"/>
-          <p:nvPr/>
-        </p:nvSpPr>
-        <p:spPr>
-          <a:xfrm>
-            <a:off x="1005840" y="4919472"/>
-            <a:ext cx="2971800" cy="228600"/>
-          </a:xfrm>
-          <a:prstGeom prst="rect">
-            <a:avLst/>
-          </a:prstGeom>
-          <a:noFill/>
-          <a:ln/>
-        </p:spPr>
-        <p:txBody>
-          <a:bodyPr wrap="square" lIns="0" tIns="0" rIns="0" bIns="0" rtlCol="0" anchor="ctr"/>
-          <a:lstStyle/>
-          <a:p>
-            <a:pPr indent="0" marL="0">
-              <a:buNone/>
-            </a:pPr>
-            <a:r>
-              <a:rPr lang="en-US" sz="1000" i="1" dirty="0">
-                <a:solidFill>
-                  <a:srgbClr val="D62839"/>
-                </a:solidFill>
-                <a:latin typeface="Noto Sans CJK KR" pitchFamily="34" charset="0"/>
-                <a:ea typeface="Noto Sans CJK KR" pitchFamily="34" charset="-122"/>
-                <a:cs typeface="Noto Sans CJK KR" pitchFamily="34" charset="-120"/>
-              </a:rPr>
-              <a:t>LEGO City</a:t>
-            </a:r>
-            <a:endParaRPr lang="en-US" sz="1000" dirty="0"/>
-          </a:p>
-        </p:txBody>
-      </p:sp>
-      <p:sp>
-        <p:nvSpPr>
-          <p:cNvPr id="45" name="Text 43"/>
-          <p:cNvSpPr txBox="1"/>
-          <p:nvPr/>
-        </p:nvSpPr>
-        <p:spPr>
-          <a:xfrm>
-            <a:off x="621792" y="5193792"/>
-            <a:ext cx="3328416" cy="713232"/>
-          </a:xfrm>
-          <a:prstGeom prst="rect">
-            <a:avLst/>
-          </a:prstGeom>
-          <a:noFill/>
-          <a:ln/>
-        </p:spPr>
-        <p:txBody>
-          <a:bodyPr wrap="square" lIns="0" tIns="0" rIns="0" bIns="0" rtlCol="0" anchor="t"/>
-          <a:lstStyle/>
-          <a:p>
-            <a:pPr indent="0" marL="0">
-              <a:buNone/>
-            </a:pPr>
-            <a:r>
-              <a:rPr lang="en-US" sz="1000" dirty="0">
-                <a:solidFill>
-                  <a:srgbClr val="5C5749"/>
-                </a:solidFill>
-                <a:latin typeface="Noto Sans CJK KR" pitchFamily="34" charset="0"/>
-                <a:ea typeface="Noto Sans CJK KR" pitchFamily="34" charset="-122"/>
-                <a:cs typeface="Noto Sans CJK KR" pitchFamily="34" charset="-120"/>
-              </a:rPr>
-              <a:t>보트로 부둣가 순찰. Wave Racers보다 덜 젖음</a:t>
-            </a:r>
-            <a:endParaRPr lang="en-US" sz="1000" dirty="0"/>
-          </a:p>
-        </p:txBody>
-      </p:sp>
-      <p:sp>
-        <p:nvSpPr>
-          <p:cNvPr id="46" name="Shape 44"/>
-          <p:cNvSpPr/>
-          <p:nvPr/>
-        </p:nvSpPr>
-        <p:spPr>
-          <a:xfrm>
-            <a:off x="4251960" y="4535424"/>
-            <a:ext cx="3657600" cy="1417320"/>
-          </a:xfrm>
-          <a:prstGeom prst="roundRect">
-            <a:avLst>
-              <a:gd name="adj" fmla="val 4516"/>
-            </a:avLst>
-          </a:prstGeom>
-          <a:solidFill>
-            <a:srgbClr val="FFFFFF"/>
-          </a:solidFill>
-          <a:ln w="12700">
-            <a:solidFill>
-              <a:srgbClr val="E2E4E8"/>
-            </a:solidFill>
-            <a:prstDash val="solid"/>
-          </a:ln>
-          <a:effectLst>
-            <a:outerShdw sx="100000" sy="100000" kx="0" ky="0" algn="bl" rotWithShape="0" blurRad="63500" dist="25400" dir="5400000">
-              <a:srgbClr val="888888">
-                <a:alpha val="20000"/>
-              </a:srgbClr>
-            </a:outerShdw>
-          </a:effectLst>
-        </p:spPr>
-      </p:sp>
-      <p:sp>
-        <p:nvSpPr>
-          <p:cNvPr id="47" name="Shape 45"/>
-          <p:cNvSpPr/>
-          <p:nvPr/>
-        </p:nvSpPr>
-        <p:spPr>
-          <a:xfrm>
-            <a:off x="4416552" y="4700016"/>
-            <a:ext cx="292608" cy="292608"/>
-          </a:xfrm>
-          <a:prstGeom prst="ellipse">
-            <a:avLst/>
-          </a:prstGeom>
-          <a:solidFill>
-            <a:srgbClr val="D62839"/>
-          </a:solidFill>
-          <a:ln/>
-        </p:spPr>
-      </p:sp>
-      <p:sp>
-        <p:nvSpPr>
-          <p:cNvPr id="48" name="Text 46"/>
-          <p:cNvSpPr txBox="1"/>
-          <p:nvPr/>
-        </p:nvSpPr>
-        <p:spPr>
-          <a:xfrm>
-            <a:off x="4416552" y="4700016"/>
-            <a:ext cx="292608" cy="292608"/>
-          </a:xfrm>
-          <a:prstGeom prst="rect">
-            <a:avLst/>
-          </a:prstGeom>
-          <a:noFill/>
-          <a:ln/>
-        </p:spPr>
-        <p:txBody>
-          <a:bodyPr wrap="square" lIns="0" tIns="0" rIns="0" bIns="0" rtlCol="0" anchor="ctr"/>
-          <a:lstStyle/>
-          <a:p>
-            <a:pPr algn="ctr" indent="0" marL="0">
-              <a:buNone/>
-            </a:pPr>
-            <a:r>
-              <a:rPr lang="en-US" sz="1300" b="1" dirty="0">
-                <a:solidFill>
-                  <a:srgbClr val="FFFFFF"/>
-                </a:solidFill>
-                <a:latin typeface="Noto Sans CJK KR" pitchFamily="34" charset="0"/>
-                <a:ea typeface="Noto Sans CJK KR" pitchFamily="34" charset="-122"/>
-                <a:cs typeface="Noto Sans CJK KR" pitchFamily="34" charset="-120"/>
-              </a:rPr>
-              <a:t>8</a:t>
-            </a:r>
-            <a:endParaRPr lang="en-US" sz="1300" dirty="0"/>
-          </a:p>
-        </p:txBody>
-      </p:sp>
-      <p:sp>
-        <p:nvSpPr>
-          <p:cNvPr id="49" name="Text 47"/>
-          <p:cNvSpPr txBox="1"/>
-          <p:nvPr/>
-        </p:nvSpPr>
-        <p:spPr>
-          <a:xfrm>
-            <a:off x="4800600" y="4645152"/>
-            <a:ext cx="2971800" cy="292608"/>
-          </a:xfrm>
-          <a:prstGeom prst="rect">
-            <a:avLst/>
-          </a:prstGeom>
-          <a:noFill/>
-          <a:ln/>
-        </p:spPr>
-        <p:txBody>
-          <a:bodyPr wrap="square" lIns="0" tIns="0" rIns="0" bIns="0" rtlCol="0" anchor="ctr"/>
-          <a:lstStyle/>
-          <a:p>
-            <a:pPr indent="0" marL="0">
-              <a:buNone/>
-            </a:pPr>
-            <a:r>
-              <a:rPr lang="en-US" sz="1300" b="1" dirty="0">
-                <a:solidFill>
-                  <a:srgbClr val="1A2440"/>
-                </a:solidFill>
-                <a:latin typeface="Noto Sans CJK KR" pitchFamily="34" charset="0"/>
-                <a:ea typeface="Noto Sans CJK KR" pitchFamily="34" charset="-122"/>
-                <a:cs typeface="Noto Sans CJK KR" pitchFamily="34" charset="-120"/>
-              </a:rPr>
-              <a:t>Merlin's Flying Machines</a:t>
-            </a:r>
-            <a:endParaRPr lang="en-US" sz="1300" dirty="0"/>
-          </a:p>
-        </p:txBody>
-      </p:sp>
-      <p:sp>
-        <p:nvSpPr>
-          <p:cNvPr id="50" name="Text 48"/>
-          <p:cNvSpPr txBox="1"/>
-          <p:nvPr/>
-        </p:nvSpPr>
-        <p:spPr>
-          <a:xfrm>
-            <a:off x="4800600" y="4919472"/>
-            <a:ext cx="2971800" cy="228600"/>
-          </a:xfrm>
-          <a:prstGeom prst="rect">
-            <a:avLst/>
-          </a:prstGeom>
-          <a:noFill/>
-          <a:ln/>
-        </p:spPr>
-        <p:txBody>
-          <a:bodyPr wrap="square" lIns="0" tIns="0" rIns="0" bIns="0" rtlCol="0" anchor="ctr"/>
-          <a:lstStyle/>
-          <a:p>
-            <a:pPr indent="0" marL="0">
-              <a:buNone/>
-            </a:pPr>
-            <a:r>
-              <a:rPr lang="en-US" sz="1000" i="1" dirty="0">
-                <a:solidFill>
-                  <a:srgbClr val="D62839"/>
-                </a:solidFill>
-                <a:latin typeface="Noto Sans CJK KR" pitchFamily="34" charset="0"/>
-                <a:ea typeface="Noto Sans CJK KR" pitchFamily="34" charset="-122"/>
-                <a:cs typeface="Noto Sans CJK KR" pitchFamily="34" charset="-120"/>
-              </a:rPr>
-              <a:t>LEGO Castle</a:t>
-            </a:r>
-            <a:endParaRPr lang="en-US" sz="1000" dirty="0"/>
-          </a:p>
-        </p:txBody>
-      </p:sp>
-      <p:sp>
-        <p:nvSpPr>
-          <p:cNvPr id="51" name="Text 49"/>
-          <p:cNvSpPr txBox="1"/>
-          <p:nvPr/>
-        </p:nvSpPr>
-        <p:spPr>
-          <a:xfrm>
-            <a:off x="4416552" y="5193792"/>
-            <a:ext cx="3328416" cy="713232"/>
-          </a:xfrm>
-          <a:prstGeom prst="rect">
-            <a:avLst/>
-          </a:prstGeom>
-          <a:noFill/>
-          <a:ln/>
-        </p:spPr>
-        <p:txBody>
-          <a:bodyPr wrap="square" lIns="0" tIns="0" rIns="0" bIns="0" rtlCol="0" anchor="t"/>
-          <a:lstStyle/>
-          <a:p>
-            <a:pPr indent="0" marL="0">
-              <a:buNone/>
-            </a:pPr>
-            <a:r>
-              <a:rPr lang="en-US" sz="1000" dirty="0">
-                <a:solidFill>
-                  <a:srgbClr val="5C5749"/>
-                </a:solidFill>
-                <a:latin typeface="Noto Sans CJK KR" pitchFamily="34" charset="0"/>
-                <a:ea typeface="Noto Sans CJK KR" pitchFamily="34" charset="-122"/>
-                <a:cs typeface="Noto Sans CJK KR" pitchFamily="34" charset="-120"/>
-              </a:rPr>
-              <a:t>직접 힘을 줘 비행 높이를 겨루는 라이드</a:t>
-            </a:r>
-            <a:endParaRPr lang="en-US" sz="1000" dirty="0"/>
-          </a:p>
-        </p:txBody>
-      </p:sp>
-      <p:sp>
-        <p:nvSpPr>
-          <p:cNvPr id="52" name="Shape 50"/>
-          <p:cNvSpPr/>
-          <p:nvPr/>
-        </p:nvSpPr>
-        <p:spPr>
-          <a:xfrm>
-            <a:off x="8046720" y="4535424"/>
-            <a:ext cx="3657600" cy="1417320"/>
-          </a:xfrm>
-          <a:prstGeom prst="roundRect">
-            <a:avLst>
-              <a:gd name="adj" fmla="val 4516"/>
-            </a:avLst>
-          </a:prstGeom>
-          <a:solidFill>
-            <a:srgbClr val="FFFFFF"/>
-          </a:solidFill>
-          <a:ln w="12700">
-            <a:solidFill>
-              <a:srgbClr val="E2E4E8"/>
-            </a:solidFill>
-            <a:prstDash val="solid"/>
-          </a:ln>
-          <a:effectLst>
-            <a:outerShdw sx="100000" sy="100000" kx="0" ky="0" algn="bl" rotWithShape="0" blurRad="63500" dist="25400" dir="5400000">
-              <a:srgbClr val="888888">
-                <a:alpha val="20000"/>
-              </a:srgbClr>
-            </a:outerShdw>
-          </a:effectLst>
-        </p:spPr>
-      </p:sp>
-      <p:sp>
-        <p:nvSpPr>
-          <p:cNvPr id="53" name="Shape 51"/>
-          <p:cNvSpPr/>
-          <p:nvPr/>
-        </p:nvSpPr>
-        <p:spPr>
-          <a:xfrm>
-            <a:off x="8211312" y="4700016"/>
-            <a:ext cx="292608" cy="292608"/>
-          </a:xfrm>
-          <a:prstGeom prst="ellipse">
-            <a:avLst/>
-          </a:prstGeom>
-          <a:solidFill>
-            <a:srgbClr val="D62839"/>
-          </a:solidFill>
-          <a:ln/>
-        </p:spPr>
-      </p:sp>
-      <p:sp>
-        <p:nvSpPr>
-          <p:cNvPr id="54" name="Text 52"/>
-          <p:cNvSpPr txBox="1"/>
-          <p:nvPr/>
-        </p:nvSpPr>
-        <p:spPr>
-          <a:xfrm>
-            <a:off x="8211312" y="4700016"/>
-            <a:ext cx="292608" cy="292608"/>
-          </a:xfrm>
-          <a:prstGeom prst="rect">
-            <a:avLst/>
-          </a:prstGeom>
-          <a:noFill/>
-          <a:ln/>
-        </p:spPr>
-        <p:txBody>
-          <a:bodyPr wrap="square" lIns="0" tIns="0" rIns="0" bIns="0" rtlCol="0" anchor="ctr"/>
-          <a:lstStyle/>
-          <a:p>
-            <a:pPr algn="ctr" indent="0" marL="0">
-              <a:buNone/>
-            </a:pPr>
-            <a:r>
-              <a:rPr lang="en-US" sz="1300" b="1" dirty="0">
-                <a:solidFill>
-                  <a:srgbClr val="FFFFFF"/>
-                </a:solidFill>
-                <a:latin typeface="Noto Sans CJK KR" pitchFamily="34" charset="0"/>
-                <a:ea typeface="Noto Sans CJK KR" pitchFamily="34" charset="-122"/>
-                <a:cs typeface="Noto Sans CJK KR" pitchFamily="34" charset="-120"/>
-              </a:rPr>
-              <a:t>9</a:t>
-            </a:r>
-            <a:endParaRPr lang="en-US" sz="1300" dirty="0"/>
-          </a:p>
-        </p:txBody>
-      </p:sp>
-      <p:sp>
-        <p:nvSpPr>
-          <p:cNvPr id="55" name="Text 53"/>
-          <p:cNvSpPr txBox="1"/>
-          <p:nvPr/>
-        </p:nvSpPr>
-        <p:spPr>
-          <a:xfrm>
-            <a:off x="8595360" y="4645152"/>
-            <a:ext cx="2971800" cy="292608"/>
-          </a:xfrm>
-          <a:prstGeom prst="rect">
-            <a:avLst/>
-          </a:prstGeom>
-          <a:noFill/>
-          <a:ln/>
-        </p:spPr>
-        <p:txBody>
-          <a:bodyPr wrap="square" lIns="0" tIns="0" rIns="0" bIns="0" rtlCol="0" anchor="ctr"/>
-          <a:lstStyle/>
-          <a:p>
-            <a:pPr indent="0" marL="0">
-              <a:buNone/>
-            </a:pPr>
-            <a:r>
-              <a:rPr lang="en-US" sz="1300" b="1" dirty="0">
-                <a:solidFill>
-                  <a:srgbClr val="1A2440"/>
-                </a:solidFill>
-                <a:latin typeface="Noto Sans CJK KR" pitchFamily="34" charset="0"/>
-                <a:ea typeface="Noto Sans CJK KR" pitchFamily="34" charset="-122"/>
-                <a:cs typeface="Noto Sans CJK KR" pitchFamily="34" charset="-120"/>
-              </a:rPr>
-              <a:t>LEGO Factory Adventure</a:t>
-            </a:r>
-            <a:endParaRPr lang="en-US" sz="1300" dirty="0"/>
-          </a:p>
-        </p:txBody>
-      </p:sp>
-      <p:sp>
-        <p:nvSpPr>
-          <p:cNvPr id="56" name="Text 54"/>
-          <p:cNvSpPr txBox="1"/>
-          <p:nvPr/>
-        </p:nvSpPr>
-        <p:spPr>
-          <a:xfrm>
-            <a:off x="8595360" y="4919472"/>
-            <a:ext cx="2971800" cy="228600"/>
-          </a:xfrm>
-          <a:prstGeom prst="rect">
-            <a:avLst/>
-          </a:prstGeom>
-          <a:noFill/>
-          <a:ln/>
-        </p:spPr>
-        <p:txBody>
-          <a:bodyPr wrap="square" lIns="0" tIns="0" rIns="0" bIns="0" rtlCol="0" anchor="ctr"/>
-          <a:lstStyle/>
-          <a:p>
-            <a:pPr indent="0" marL="0">
-              <a:buNone/>
-            </a:pPr>
-            <a:r>
-              <a:rPr lang="en-US" sz="1000" i="1" dirty="0">
-                <a:solidFill>
-                  <a:srgbClr val="D62839"/>
-                </a:solidFill>
-                <a:latin typeface="Noto Sans CJK KR" pitchFamily="34" charset="0"/>
-                <a:ea typeface="Noto Sans CJK KR" pitchFamily="34" charset="-122"/>
-                <a:cs typeface="Noto Sans CJK KR" pitchFamily="34" charset="-120"/>
-              </a:rPr>
-              <a:t>Brick Street</a:t>
-            </a:r>
-            <a:endParaRPr lang="en-US" sz="1000" dirty="0"/>
-          </a:p>
-        </p:txBody>
-      </p:sp>
-      <p:sp>
-        <p:nvSpPr>
-          <p:cNvPr id="57" name="Text 55"/>
-          <p:cNvSpPr txBox="1"/>
-          <p:nvPr/>
-        </p:nvSpPr>
-        <p:spPr>
-          <a:xfrm>
-            <a:off x="8211312" y="5193792"/>
-            <a:ext cx="3328416" cy="713232"/>
-          </a:xfrm>
-          <a:prstGeom prst="rect">
-            <a:avLst/>
-          </a:prstGeom>
-          <a:noFill/>
-          <a:ln/>
-        </p:spPr>
-        <p:txBody>
-          <a:bodyPr wrap="square" lIns="0" tIns="0" rIns="0" bIns="0" rtlCol="0" anchor="t"/>
-          <a:lstStyle/>
-          <a:p>
-            <a:pPr indent="0" marL="0">
-              <a:buNone/>
-            </a:pPr>
-            <a:r>
-              <a:rPr lang="en-US" sz="1000" dirty="0">
-                <a:solidFill>
-                  <a:srgbClr val="5C5749"/>
-                </a:solidFill>
-                <a:latin typeface="Noto Sans CJK KR" pitchFamily="34" charset="0"/>
-                <a:ea typeface="Noto Sans CJK KR" pitchFamily="34" charset="-122"/>
-                <a:cs typeface="Noto Sans CJK KR" pitchFamily="34" charset="-120"/>
-              </a:rPr>
-              <a:t>미니피겨 크기로 LEGO 생산 과정 견학. 이 파크 전용</a:t>
-            </a:r>
-            <a:endParaRPr lang="en-US" sz="1000" dirty="0"/>
-          </a:p>
-        </p:txBody>
-      </p:sp>
-      <p:sp>
-        <p:nvSpPr>
-          <p:cNvPr id="58" name="Text 56"/>
-          <p:cNvSpPr txBox="1"/>
-          <p:nvPr/>
-        </p:nvSpPr>
-        <p:spPr>
-          <a:xfrm>
-            <a:off x="457200" y="6537960"/>
-            <a:ext cx="10515600" cy="274320"/>
-          </a:xfrm>
-          <a:prstGeom prst="rect">
-            <a:avLst/>
-          </a:prstGeom>
-          <a:noFill/>
-          <a:ln/>
-        </p:spPr>
-        <p:txBody>
-          <a:bodyPr wrap="square" lIns="0" tIns="0" rIns="0" bIns="0" rtlCol="0" anchor="ctr"/>
-          <a:lstStyle/>
-          <a:p>
-            <a:pPr indent="0" marL="0">
-              <a:buNone/>
-            </a:pPr>
-            <a:r>
-              <a:rPr lang="en-US" sz="900" dirty="0">
-                <a:solidFill>
-                  <a:srgbClr val="5C5749"/>
-                </a:solidFill>
-                <a:latin typeface="Noto Sans CJK KR" pitchFamily="34" charset="0"/>
-                <a:ea typeface="Noto Sans CJK KR" pitchFamily="34" charset="-122"/>
-                <a:cs typeface="Noto Sans CJK KR" pitchFamily="34" charset="-120"/>
-              </a:rPr>
-              <a:t>레고랜드 코리아 · 2026-09-23(수) · 아빠+첫째(8세·130cm)+둘째(3세후반·101cm)</a:t>
-            </a:r>
-            <a:endParaRPr lang="en-US" sz="900" dirty="0"/>
-          </a:p>
-        </p:txBody>
-      </p:sp>
-      <p:sp>
-        <p:nvSpPr>
-          <p:cNvPr id="59" name="Text 57"/>
-          <p:cNvSpPr txBox="1"/>
-          <p:nvPr/>
-        </p:nvSpPr>
-        <p:spPr>
-          <a:xfrm>
-            <a:off x="11430000" y="6537960"/>
-            <a:ext cx="365760" cy="274320"/>
-          </a:xfrm>
-          <a:prstGeom prst="rect">
-            <a:avLst/>
-          </a:prstGeom>
-          <a:noFill/>
-          <a:ln/>
-        </p:spPr>
-        <p:txBody>
-          <a:bodyPr wrap="square" lIns="0" tIns="0" rIns="0" bIns="0" rtlCol="0" anchor="ctr"/>
-          <a:lstStyle/>
-          <a:p>
-            <a:pPr algn="r" indent="0" marL="0">
-              <a:buNone/>
-            </a:pPr>
-            <a:r>
-              <a:rPr lang="en-US" sz="900" dirty="0">
-                <a:solidFill>
-                  <a:srgbClr val="5C5749"/>
-                </a:solidFill>
-                <a:latin typeface="Noto Sans CJK KR" pitchFamily="34" charset="0"/>
-                <a:ea typeface="Noto Sans CJK KR" pitchFamily="34" charset="-122"/>
-                <a:cs typeface="Noto Sans CJK KR" pitchFamily="34" charset="-120"/>
-              </a:rPr>
               <a:t>6</a:t>
             </a:r>
             <a:endParaRPr lang="en-US" sz="900" dirty="0"/>
@@ -10217,6 +10779,2084 @@
                 <a:ea typeface="Noto Sans CJK KR" pitchFamily="34" charset="-122"/>
                 <a:cs typeface="Noto Sans CJK KR" pitchFamily="34" charset="-120"/>
               </a:rPr>
+              <a:t>ATTRACTIONS</a:t>
+            </a:r>
+            <a:endParaRPr lang="en-US" sz="1200" dirty="0"/>
+          </a:p>
+        </p:txBody>
+      </p:sp>
+      <p:sp>
+        <p:nvSpPr>
+          <p:cNvPr id="3" name="Text 1"/>
+          <p:cNvSpPr txBox="1"/>
+          <p:nvPr/>
+        </p:nvSpPr>
+        <p:spPr>
+          <a:xfrm>
+            <a:off x="457200" y="594360"/>
+            <a:ext cx="11247120" cy="548640"/>
+          </a:xfrm>
+          <a:prstGeom prst="rect">
+            <a:avLst/>
+          </a:prstGeom>
+          <a:noFill/>
+          <a:ln/>
+        </p:spPr>
+        <p:txBody>
+          <a:bodyPr wrap="square" lIns="0" tIns="0" rIns="0" bIns="0" rtlCol="0" anchor="ctr"/>
+          <a:lstStyle/>
+          <a:p>
+            <a:pPr indent="0" marL="0">
+              <a:buNone/>
+            </a:pPr>
+            <a:r>
+              <a:rPr lang="en-US" sz="2600" b="1" dirty="0">
+                <a:solidFill>
+                  <a:srgbClr val="1A2440"/>
+                </a:solidFill>
+                <a:latin typeface="Noto Sans CJK KR" pitchFamily="34" charset="0"/>
+                <a:ea typeface="Noto Sans CJK KR" pitchFamily="34" charset="-122"/>
+                <a:cs typeface="Noto Sans CJK KR" pitchFamily="34" charset="-120"/>
+              </a:rPr>
+              <a:t>오늘 탈 어트랙션 9종</a:t>
+            </a:r>
+            <a:endParaRPr lang="en-US" sz="2600" dirty="0"/>
+          </a:p>
+        </p:txBody>
+      </p:sp>
+      <p:sp>
+        <p:nvSpPr>
+          <p:cNvPr id="4" name="Shape 2"/>
+          <p:cNvSpPr/>
+          <p:nvPr/>
+        </p:nvSpPr>
+        <p:spPr>
+          <a:xfrm>
+            <a:off x="457200" y="1371600"/>
+            <a:ext cx="3657600" cy="1417320"/>
+          </a:xfrm>
+          <a:prstGeom prst="roundRect">
+            <a:avLst>
+              <a:gd name="adj" fmla="val 4516"/>
+            </a:avLst>
+          </a:prstGeom>
+          <a:solidFill>
+            <a:srgbClr val="FFFFFF"/>
+          </a:solidFill>
+          <a:ln w="12700">
+            <a:solidFill>
+              <a:srgbClr val="E2E4E8"/>
+            </a:solidFill>
+            <a:prstDash val="solid"/>
+          </a:ln>
+          <a:effectLst>
+            <a:outerShdw sx="100000" sy="100000" kx="0" ky="0" algn="bl" rotWithShape="0" blurRad="63500" dist="25400" dir="5400000">
+              <a:srgbClr val="888888">
+                <a:alpha val="20000"/>
+              </a:srgbClr>
+            </a:outerShdw>
+          </a:effectLst>
+        </p:spPr>
+      </p:sp>
+      <p:sp>
+        <p:nvSpPr>
+          <p:cNvPr id="5" name="Shape 3"/>
+          <p:cNvSpPr/>
+          <p:nvPr/>
+        </p:nvSpPr>
+        <p:spPr>
+          <a:xfrm>
+            <a:off x="621792" y="1536192"/>
+            <a:ext cx="292608" cy="292608"/>
+          </a:xfrm>
+          <a:prstGeom prst="ellipse">
+            <a:avLst/>
+          </a:prstGeom>
+          <a:solidFill>
+            <a:srgbClr val="D62839"/>
+          </a:solidFill>
+          <a:ln/>
+        </p:spPr>
+      </p:sp>
+      <p:sp>
+        <p:nvSpPr>
+          <p:cNvPr id="6" name="Text 4"/>
+          <p:cNvSpPr txBox="1"/>
+          <p:nvPr/>
+        </p:nvSpPr>
+        <p:spPr>
+          <a:xfrm>
+            <a:off x="621792" y="1536192"/>
+            <a:ext cx="292608" cy="292608"/>
+          </a:xfrm>
+          <a:prstGeom prst="rect">
+            <a:avLst/>
+          </a:prstGeom>
+          <a:noFill/>
+          <a:ln/>
+        </p:spPr>
+        <p:txBody>
+          <a:bodyPr wrap="square" lIns="0" tIns="0" rIns="0" bIns="0" rtlCol="0" anchor="ctr"/>
+          <a:lstStyle/>
+          <a:p>
+            <a:pPr algn="ctr" indent="0" marL="0">
+              <a:buNone/>
+            </a:pPr>
+            <a:r>
+              <a:rPr lang="en-US" sz="1300" b="1" dirty="0">
+                <a:solidFill>
+                  <a:srgbClr val="FFFFFF"/>
+                </a:solidFill>
+                <a:latin typeface="Noto Sans CJK KR" pitchFamily="34" charset="0"/>
+                <a:ea typeface="Noto Sans CJK KR" pitchFamily="34" charset="-122"/>
+                <a:cs typeface="Noto Sans CJK KR" pitchFamily="34" charset="-120"/>
+              </a:rPr>
+              <a:t>1</a:t>
+            </a:r>
+            <a:endParaRPr lang="en-US" sz="1300" dirty="0"/>
+          </a:p>
+        </p:txBody>
+      </p:sp>
+      <p:sp>
+        <p:nvSpPr>
+          <p:cNvPr id="7" name="Text 5"/>
+          <p:cNvSpPr txBox="1"/>
+          <p:nvPr/>
+        </p:nvSpPr>
+        <p:spPr>
+          <a:xfrm>
+            <a:off x="1005840" y="1481328"/>
+            <a:ext cx="2971800" cy="292608"/>
+          </a:xfrm>
+          <a:prstGeom prst="rect">
+            <a:avLst/>
+          </a:prstGeom>
+          <a:noFill/>
+          <a:ln/>
+        </p:spPr>
+        <p:txBody>
+          <a:bodyPr wrap="square" lIns="0" tIns="0" rIns="0" bIns="0" rtlCol="0" anchor="ctr"/>
+          <a:lstStyle/>
+          <a:p>
+            <a:pPr indent="0" marL="0">
+              <a:buNone/>
+            </a:pPr>
+            <a:r>
+              <a:rPr lang="en-US" sz="1300" b="1" dirty="0">
+                <a:solidFill>
+                  <a:srgbClr val="1A2440"/>
+                </a:solidFill>
+                <a:latin typeface="Noto Sans CJK KR" pitchFamily="34" charset="0"/>
+                <a:ea typeface="Noto Sans CJK KR" pitchFamily="34" charset="-122"/>
+                <a:cs typeface="Noto Sans CJK KR" pitchFamily="34" charset="-120"/>
+              </a:rPr>
+              <a:t>드래곤 코스터</a:t>
+            </a:r>
+            <a:endParaRPr lang="en-US" sz="1300" dirty="0"/>
+          </a:p>
+        </p:txBody>
+      </p:sp>
+      <p:sp>
+        <p:nvSpPr>
+          <p:cNvPr id="8" name="Text 6"/>
+          <p:cNvSpPr txBox="1"/>
+          <p:nvPr/>
+        </p:nvSpPr>
+        <p:spPr>
+          <a:xfrm>
+            <a:off x="1005840" y="1755648"/>
+            <a:ext cx="2971800" cy="228600"/>
+          </a:xfrm>
+          <a:prstGeom prst="rect">
+            <a:avLst/>
+          </a:prstGeom>
+          <a:noFill/>
+          <a:ln/>
+        </p:spPr>
+        <p:txBody>
+          <a:bodyPr wrap="square" lIns="0" tIns="0" rIns="0" bIns="0" rtlCol="0" anchor="ctr"/>
+          <a:lstStyle/>
+          <a:p>
+            <a:pPr indent="0" marL="0">
+              <a:buNone/>
+            </a:pPr>
+            <a:r>
+              <a:rPr lang="en-US" sz="1000" i="1" dirty="0">
+                <a:solidFill>
+                  <a:srgbClr val="D62839"/>
+                </a:solidFill>
+                <a:latin typeface="Noto Sans CJK KR" pitchFamily="34" charset="0"/>
+                <a:ea typeface="Noto Sans CJK KR" pitchFamily="34" charset="-122"/>
+                <a:cs typeface="Noto Sans CJK KR" pitchFamily="34" charset="-120"/>
+              </a:rPr>
+              <a:t>LEGO Castle</a:t>
+            </a:r>
+            <a:endParaRPr lang="en-US" sz="1000" dirty="0"/>
+          </a:p>
+        </p:txBody>
+      </p:sp>
+      <p:sp>
+        <p:nvSpPr>
+          <p:cNvPr id="9" name="Text 7"/>
+          <p:cNvSpPr txBox="1"/>
+          <p:nvPr/>
+        </p:nvSpPr>
+        <p:spPr>
+          <a:xfrm>
+            <a:off x="621792" y="2029968"/>
+            <a:ext cx="3328416" cy="713232"/>
+          </a:xfrm>
+          <a:prstGeom prst="rect">
+            <a:avLst/>
+          </a:prstGeom>
+          <a:noFill/>
+          <a:ln/>
+        </p:spPr>
+        <p:txBody>
+          <a:bodyPr wrap="square" lIns="0" tIns="0" rIns="0" bIns="0" rtlCol="0" anchor="t"/>
+          <a:lstStyle/>
+          <a:p>
+            <a:pPr indent="0" marL="0">
+              <a:buNone/>
+            </a:pPr>
+            <a:r>
+              <a:rPr lang="en-US" sz="1000" dirty="0">
+                <a:solidFill>
+                  <a:srgbClr val="5C5749"/>
+                </a:solidFill>
+                <a:latin typeface="Noto Sans CJK KR" pitchFamily="34" charset="0"/>
+                <a:ea typeface="Noto Sans CJK KR" pitchFamily="34" charset="-122"/>
+                <a:cs typeface="Noto Sans CJK KR" pitchFamily="34" charset="-120"/>
+              </a:rPr>
+              <a:t>실내 다크라이드 후 레드 드래곤과 마주치며 급강하. 526m·56km/h. 100~120cm 동반</a:t>
+            </a:r>
+            <a:endParaRPr lang="en-US" sz="1000" dirty="0"/>
+          </a:p>
+        </p:txBody>
+      </p:sp>
+      <p:sp>
+        <p:nvSpPr>
+          <p:cNvPr id="10" name="Shape 8"/>
+          <p:cNvSpPr/>
+          <p:nvPr/>
+        </p:nvSpPr>
+        <p:spPr>
+          <a:xfrm>
+            <a:off x="4251960" y="1371600"/>
+            <a:ext cx="3657600" cy="1417320"/>
+          </a:xfrm>
+          <a:prstGeom prst="roundRect">
+            <a:avLst>
+              <a:gd name="adj" fmla="val 4516"/>
+            </a:avLst>
+          </a:prstGeom>
+          <a:solidFill>
+            <a:srgbClr val="FFFFFF"/>
+          </a:solidFill>
+          <a:ln w="12700">
+            <a:solidFill>
+              <a:srgbClr val="E2E4E8"/>
+            </a:solidFill>
+            <a:prstDash val="solid"/>
+          </a:ln>
+          <a:effectLst>
+            <a:outerShdw sx="100000" sy="100000" kx="0" ky="0" algn="bl" rotWithShape="0" blurRad="63500" dist="25400" dir="5400000">
+              <a:srgbClr val="888888">
+                <a:alpha val="20000"/>
+              </a:srgbClr>
+            </a:outerShdw>
+          </a:effectLst>
+        </p:spPr>
+      </p:sp>
+      <p:sp>
+        <p:nvSpPr>
+          <p:cNvPr id="11" name="Shape 9"/>
+          <p:cNvSpPr/>
+          <p:nvPr/>
+        </p:nvSpPr>
+        <p:spPr>
+          <a:xfrm>
+            <a:off x="4416552" y="1536192"/>
+            <a:ext cx="292608" cy="292608"/>
+          </a:xfrm>
+          <a:prstGeom prst="ellipse">
+            <a:avLst/>
+          </a:prstGeom>
+          <a:solidFill>
+            <a:srgbClr val="D62839"/>
+          </a:solidFill>
+          <a:ln/>
+        </p:spPr>
+      </p:sp>
+      <p:sp>
+        <p:nvSpPr>
+          <p:cNvPr id="12" name="Text 10"/>
+          <p:cNvSpPr txBox="1"/>
+          <p:nvPr/>
+        </p:nvSpPr>
+        <p:spPr>
+          <a:xfrm>
+            <a:off x="4416552" y="1536192"/>
+            <a:ext cx="292608" cy="292608"/>
+          </a:xfrm>
+          <a:prstGeom prst="rect">
+            <a:avLst/>
+          </a:prstGeom>
+          <a:noFill/>
+          <a:ln/>
+        </p:spPr>
+        <p:txBody>
+          <a:bodyPr wrap="square" lIns="0" tIns="0" rIns="0" bIns="0" rtlCol="0" anchor="ctr"/>
+          <a:lstStyle/>
+          <a:p>
+            <a:pPr algn="ctr" indent="0" marL="0">
+              <a:buNone/>
+            </a:pPr>
+            <a:r>
+              <a:rPr lang="en-US" sz="1300" b="1" dirty="0">
+                <a:solidFill>
+                  <a:srgbClr val="FFFFFF"/>
+                </a:solidFill>
+                <a:latin typeface="Noto Sans CJK KR" pitchFamily="34" charset="0"/>
+                <a:ea typeface="Noto Sans CJK KR" pitchFamily="34" charset="-122"/>
+                <a:cs typeface="Noto Sans CJK KR" pitchFamily="34" charset="-120"/>
+              </a:rPr>
+              <a:t>2</a:t>
+            </a:r>
+            <a:endParaRPr lang="en-US" sz="1300" dirty="0"/>
+          </a:p>
+        </p:txBody>
+      </p:sp>
+      <p:sp>
+        <p:nvSpPr>
+          <p:cNvPr id="13" name="Text 11"/>
+          <p:cNvSpPr txBox="1"/>
+          <p:nvPr/>
+        </p:nvSpPr>
+        <p:spPr>
+          <a:xfrm>
+            <a:off x="4800600" y="1481328"/>
+            <a:ext cx="2971800" cy="292608"/>
+          </a:xfrm>
+          <a:prstGeom prst="rect">
+            <a:avLst/>
+          </a:prstGeom>
+          <a:noFill/>
+          <a:ln/>
+        </p:spPr>
+        <p:txBody>
+          <a:bodyPr wrap="square" lIns="0" tIns="0" rIns="0" bIns="0" rtlCol="0" anchor="ctr"/>
+          <a:lstStyle/>
+          <a:p>
+            <a:pPr indent="0" marL="0">
+              <a:buNone/>
+            </a:pPr>
+            <a:r>
+              <a:rPr lang="en-US" sz="1300" b="1" dirty="0">
+                <a:solidFill>
+                  <a:srgbClr val="1A2440"/>
+                </a:solidFill>
+                <a:latin typeface="Noto Sans CJK KR" pitchFamily="34" charset="0"/>
+                <a:ea typeface="Noto Sans CJK KR" pitchFamily="34" charset="-122"/>
+                <a:cs typeface="Noto Sans CJK KR" pitchFamily="34" charset="-120"/>
+              </a:rPr>
+              <a:t>Masters of Spinjitzu</a:t>
+            </a:r>
+            <a:endParaRPr lang="en-US" sz="1300" dirty="0"/>
+          </a:p>
+        </p:txBody>
+      </p:sp>
+      <p:sp>
+        <p:nvSpPr>
+          <p:cNvPr id="14" name="Text 12"/>
+          <p:cNvSpPr txBox="1"/>
+          <p:nvPr/>
+        </p:nvSpPr>
+        <p:spPr>
+          <a:xfrm>
+            <a:off x="4800600" y="1755648"/>
+            <a:ext cx="2971800" cy="228600"/>
+          </a:xfrm>
+          <a:prstGeom prst="rect">
+            <a:avLst/>
+          </a:prstGeom>
+          <a:noFill/>
+          <a:ln/>
+        </p:spPr>
+        <p:txBody>
+          <a:bodyPr wrap="square" lIns="0" tIns="0" rIns="0" bIns="0" rtlCol="0" anchor="ctr"/>
+          <a:lstStyle/>
+          <a:p>
+            <a:pPr indent="0" marL="0">
+              <a:buNone/>
+            </a:pPr>
+            <a:r>
+              <a:rPr lang="en-US" sz="1000" i="1" dirty="0">
+                <a:solidFill>
+                  <a:srgbClr val="D62839"/>
+                </a:solidFill>
+                <a:latin typeface="Noto Sans CJK KR" pitchFamily="34" charset="0"/>
+                <a:ea typeface="Noto Sans CJK KR" pitchFamily="34" charset="-122"/>
+                <a:cs typeface="Noto Sans CJK KR" pitchFamily="34" charset="-120"/>
+              </a:rPr>
+              <a:t>NINJAGO World</a:t>
+            </a:r>
+            <a:endParaRPr lang="en-US" sz="1000" dirty="0"/>
+          </a:p>
+        </p:txBody>
+      </p:sp>
+      <p:sp>
+        <p:nvSpPr>
+          <p:cNvPr id="15" name="Text 13"/>
+          <p:cNvSpPr txBox="1"/>
+          <p:nvPr/>
+        </p:nvSpPr>
+        <p:spPr>
+          <a:xfrm>
+            <a:off x="4416552" y="2029968"/>
+            <a:ext cx="3328416" cy="713232"/>
+          </a:xfrm>
+          <a:prstGeom prst="rect">
+            <a:avLst/>
+          </a:prstGeom>
+          <a:noFill/>
+          <a:ln/>
+        </p:spPr>
+        <p:txBody>
+          <a:bodyPr wrap="square" lIns="0" tIns="0" rIns="0" bIns="0" rtlCol="0" anchor="t"/>
+          <a:lstStyle/>
+          <a:p>
+            <a:pPr indent="0" marL="0">
+              <a:buNone/>
+            </a:pPr>
+            <a:r>
+              <a:rPr lang="en-US" sz="1000" dirty="0">
+                <a:solidFill>
+                  <a:srgbClr val="5C5749"/>
+                </a:solidFill>
+                <a:latin typeface="Noto Sans CJK KR" pitchFamily="34" charset="0"/>
+                <a:ea typeface="Noto Sans CJK KR" pitchFamily="34" charset="-122"/>
+                <a:cs typeface="Noto Sans CJK KR" pitchFamily="34" charset="-120"/>
+              </a:rPr>
+              <a:t>핸들로 회전 속도 조절하는 360도 스핀 라이드</a:t>
+            </a:r>
+            <a:endParaRPr lang="en-US" sz="1000" dirty="0"/>
+          </a:p>
+        </p:txBody>
+      </p:sp>
+      <p:sp>
+        <p:nvSpPr>
+          <p:cNvPr id="16" name="Shape 14"/>
+          <p:cNvSpPr/>
+          <p:nvPr/>
+        </p:nvSpPr>
+        <p:spPr>
+          <a:xfrm>
+            <a:off x="8046720" y="1371600"/>
+            <a:ext cx="3657600" cy="1417320"/>
+          </a:xfrm>
+          <a:prstGeom prst="roundRect">
+            <a:avLst>
+              <a:gd name="adj" fmla="val 4516"/>
+            </a:avLst>
+          </a:prstGeom>
+          <a:solidFill>
+            <a:srgbClr val="FFFFFF"/>
+          </a:solidFill>
+          <a:ln w="12700">
+            <a:solidFill>
+              <a:srgbClr val="E2E4E8"/>
+            </a:solidFill>
+            <a:prstDash val="solid"/>
+          </a:ln>
+          <a:effectLst>
+            <a:outerShdw sx="100000" sy="100000" kx="0" ky="0" algn="bl" rotWithShape="0" blurRad="63500" dist="25400" dir="5400000">
+              <a:srgbClr val="888888">
+                <a:alpha val="20000"/>
+              </a:srgbClr>
+            </a:outerShdw>
+          </a:effectLst>
+        </p:spPr>
+      </p:sp>
+      <p:sp>
+        <p:nvSpPr>
+          <p:cNvPr id="17" name="Shape 15"/>
+          <p:cNvSpPr/>
+          <p:nvPr/>
+        </p:nvSpPr>
+        <p:spPr>
+          <a:xfrm>
+            <a:off x="8211312" y="1536192"/>
+            <a:ext cx="292608" cy="292608"/>
+          </a:xfrm>
+          <a:prstGeom prst="ellipse">
+            <a:avLst/>
+          </a:prstGeom>
+          <a:solidFill>
+            <a:srgbClr val="D62839"/>
+          </a:solidFill>
+          <a:ln/>
+        </p:spPr>
+      </p:sp>
+      <p:sp>
+        <p:nvSpPr>
+          <p:cNvPr id="18" name="Text 16"/>
+          <p:cNvSpPr txBox="1"/>
+          <p:nvPr/>
+        </p:nvSpPr>
+        <p:spPr>
+          <a:xfrm>
+            <a:off x="8211312" y="1536192"/>
+            <a:ext cx="292608" cy="292608"/>
+          </a:xfrm>
+          <a:prstGeom prst="rect">
+            <a:avLst/>
+          </a:prstGeom>
+          <a:noFill/>
+          <a:ln/>
+        </p:spPr>
+        <p:txBody>
+          <a:bodyPr wrap="square" lIns="0" tIns="0" rIns="0" bIns="0" rtlCol="0" anchor="ctr"/>
+          <a:lstStyle/>
+          <a:p>
+            <a:pPr algn="ctr" indent="0" marL="0">
+              <a:buNone/>
+            </a:pPr>
+            <a:r>
+              <a:rPr lang="en-US" sz="1300" b="1" dirty="0">
+                <a:solidFill>
+                  <a:srgbClr val="FFFFFF"/>
+                </a:solidFill>
+                <a:latin typeface="Noto Sans CJK KR" pitchFamily="34" charset="0"/>
+                <a:ea typeface="Noto Sans CJK KR" pitchFamily="34" charset="-122"/>
+                <a:cs typeface="Noto Sans CJK KR" pitchFamily="34" charset="-120"/>
+              </a:rPr>
+              <a:t>3</a:t>
+            </a:r>
+            <a:endParaRPr lang="en-US" sz="1300" dirty="0"/>
+          </a:p>
+        </p:txBody>
+      </p:sp>
+      <p:sp>
+        <p:nvSpPr>
+          <p:cNvPr id="19" name="Text 17"/>
+          <p:cNvSpPr txBox="1"/>
+          <p:nvPr/>
+        </p:nvSpPr>
+        <p:spPr>
+          <a:xfrm>
+            <a:off x="8595360" y="1481328"/>
+            <a:ext cx="2971800" cy="292608"/>
+          </a:xfrm>
+          <a:prstGeom prst="rect">
+            <a:avLst/>
+          </a:prstGeom>
+          <a:noFill/>
+          <a:ln/>
+        </p:spPr>
+        <p:txBody>
+          <a:bodyPr wrap="square" lIns="0" tIns="0" rIns="0" bIns="0" rtlCol="0" anchor="ctr"/>
+          <a:lstStyle/>
+          <a:p>
+            <a:pPr indent="0" marL="0">
+              <a:buNone/>
+            </a:pPr>
+            <a:r>
+              <a:rPr lang="en-US" sz="1300" b="1" dirty="0">
+                <a:solidFill>
+                  <a:srgbClr val="1A2440"/>
+                </a:solidFill>
+                <a:latin typeface="Noto Sans CJK KR" pitchFamily="34" charset="0"/>
+                <a:ea typeface="Noto Sans CJK KR" pitchFamily="34" charset="-122"/>
+                <a:cs typeface="Noto Sans CJK KR" pitchFamily="34" charset="-120"/>
+              </a:rPr>
+              <a:t>NINJAGO The Ride</a:t>
+            </a:r>
+            <a:endParaRPr lang="en-US" sz="1300" dirty="0"/>
+          </a:p>
+        </p:txBody>
+      </p:sp>
+      <p:sp>
+        <p:nvSpPr>
+          <p:cNvPr id="20" name="Text 18"/>
+          <p:cNvSpPr txBox="1"/>
+          <p:nvPr/>
+        </p:nvSpPr>
+        <p:spPr>
+          <a:xfrm>
+            <a:off x="8595360" y="1755648"/>
+            <a:ext cx="2971800" cy="228600"/>
+          </a:xfrm>
+          <a:prstGeom prst="rect">
+            <a:avLst/>
+          </a:prstGeom>
+          <a:noFill/>
+          <a:ln/>
+        </p:spPr>
+        <p:txBody>
+          <a:bodyPr wrap="square" lIns="0" tIns="0" rIns="0" bIns="0" rtlCol="0" anchor="ctr"/>
+          <a:lstStyle/>
+          <a:p>
+            <a:pPr indent="0" marL="0">
+              <a:buNone/>
+            </a:pPr>
+            <a:r>
+              <a:rPr lang="en-US" sz="1000" i="1" dirty="0">
+                <a:solidFill>
+                  <a:srgbClr val="D62839"/>
+                </a:solidFill>
+                <a:latin typeface="Noto Sans CJK KR" pitchFamily="34" charset="0"/>
+                <a:ea typeface="Noto Sans CJK KR" pitchFamily="34" charset="-122"/>
+                <a:cs typeface="Noto Sans CJK KR" pitchFamily="34" charset="-120"/>
+              </a:rPr>
+              <a:t>NINJAGO World</a:t>
+            </a:r>
+            <a:endParaRPr lang="en-US" sz="1000" dirty="0"/>
+          </a:p>
+        </p:txBody>
+      </p:sp>
+      <p:sp>
+        <p:nvSpPr>
+          <p:cNvPr id="21" name="Text 19"/>
+          <p:cNvSpPr txBox="1"/>
+          <p:nvPr/>
+        </p:nvSpPr>
+        <p:spPr>
+          <a:xfrm>
+            <a:off x="8211312" y="2029968"/>
+            <a:ext cx="3328416" cy="713232"/>
+          </a:xfrm>
+          <a:prstGeom prst="rect">
+            <a:avLst/>
+          </a:prstGeom>
+          <a:noFill/>
+          <a:ln/>
+        </p:spPr>
+        <p:txBody>
+          <a:bodyPr wrap="square" lIns="0" tIns="0" rIns="0" bIns="0" rtlCol="0" anchor="t"/>
+          <a:lstStyle/>
+          <a:p>
+            <a:pPr indent="0" marL="0">
+              <a:buNone/>
+            </a:pPr>
+            <a:r>
+              <a:rPr lang="en-US" sz="1000" dirty="0">
+                <a:solidFill>
+                  <a:srgbClr val="5C5749"/>
+                </a:solidFill>
+                <a:latin typeface="Noto Sans CJK KR" pitchFamily="34" charset="0"/>
+                <a:ea typeface="Noto Sans CJK KR" pitchFamily="34" charset="-122"/>
+                <a:cs typeface="Noto Sans CJK KR" pitchFamily="34" charset="-120"/>
+              </a:rPr>
+              <a:t>4D — 손으로 불·얼음·번개·대지 파워를 쏘는 대모험</a:t>
+            </a:r>
+            <a:endParaRPr lang="en-US" sz="1000" dirty="0"/>
+          </a:p>
+        </p:txBody>
+      </p:sp>
+      <p:sp>
+        <p:nvSpPr>
+          <p:cNvPr id="22" name="Shape 20"/>
+          <p:cNvSpPr/>
+          <p:nvPr/>
+        </p:nvSpPr>
+        <p:spPr>
+          <a:xfrm>
+            <a:off x="457200" y="2953512"/>
+            <a:ext cx="3657600" cy="1417320"/>
+          </a:xfrm>
+          <a:prstGeom prst="roundRect">
+            <a:avLst>
+              <a:gd name="adj" fmla="val 4516"/>
+            </a:avLst>
+          </a:prstGeom>
+          <a:solidFill>
+            <a:srgbClr val="FFFFFF"/>
+          </a:solidFill>
+          <a:ln w="12700">
+            <a:solidFill>
+              <a:srgbClr val="E2E4E8"/>
+            </a:solidFill>
+            <a:prstDash val="solid"/>
+          </a:ln>
+          <a:effectLst>
+            <a:outerShdw sx="100000" sy="100000" kx="0" ky="0" algn="bl" rotWithShape="0" blurRad="63500" dist="25400" dir="5400000">
+              <a:srgbClr val="888888">
+                <a:alpha val="20000"/>
+              </a:srgbClr>
+            </a:outerShdw>
+          </a:effectLst>
+        </p:spPr>
+      </p:sp>
+      <p:sp>
+        <p:nvSpPr>
+          <p:cNvPr id="23" name="Shape 21"/>
+          <p:cNvSpPr/>
+          <p:nvPr/>
+        </p:nvSpPr>
+        <p:spPr>
+          <a:xfrm>
+            <a:off x="621792" y="3118104"/>
+            <a:ext cx="292608" cy="292608"/>
+          </a:xfrm>
+          <a:prstGeom prst="ellipse">
+            <a:avLst/>
+          </a:prstGeom>
+          <a:solidFill>
+            <a:srgbClr val="D62839"/>
+          </a:solidFill>
+          <a:ln/>
+        </p:spPr>
+      </p:sp>
+      <p:sp>
+        <p:nvSpPr>
+          <p:cNvPr id="24" name="Text 22"/>
+          <p:cNvSpPr txBox="1"/>
+          <p:nvPr/>
+        </p:nvSpPr>
+        <p:spPr>
+          <a:xfrm>
+            <a:off x="621792" y="3118104"/>
+            <a:ext cx="292608" cy="292608"/>
+          </a:xfrm>
+          <a:prstGeom prst="rect">
+            <a:avLst/>
+          </a:prstGeom>
+          <a:noFill/>
+          <a:ln/>
+        </p:spPr>
+        <p:txBody>
+          <a:bodyPr wrap="square" lIns="0" tIns="0" rIns="0" bIns="0" rtlCol="0" anchor="ctr"/>
+          <a:lstStyle/>
+          <a:p>
+            <a:pPr algn="ctr" indent="0" marL="0">
+              <a:buNone/>
+            </a:pPr>
+            <a:r>
+              <a:rPr lang="en-US" sz="1300" b="1" dirty="0">
+                <a:solidFill>
+                  <a:srgbClr val="FFFFFF"/>
+                </a:solidFill>
+                <a:latin typeface="Noto Sans CJK KR" pitchFamily="34" charset="0"/>
+                <a:ea typeface="Noto Sans CJK KR" pitchFamily="34" charset="-122"/>
+                <a:cs typeface="Noto Sans CJK KR" pitchFamily="34" charset="-120"/>
+              </a:rPr>
+              <a:t>4</a:t>
+            </a:r>
+            <a:endParaRPr lang="en-US" sz="1300" dirty="0"/>
+          </a:p>
+        </p:txBody>
+      </p:sp>
+      <p:sp>
+        <p:nvSpPr>
+          <p:cNvPr id="25" name="Text 23"/>
+          <p:cNvSpPr txBox="1"/>
+          <p:nvPr/>
+        </p:nvSpPr>
+        <p:spPr>
+          <a:xfrm>
+            <a:off x="1005840" y="3063240"/>
+            <a:ext cx="2971800" cy="292608"/>
+          </a:xfrm>
+          <a:prstGeom prst="rect">
+            <a:avLst/>
+          </a:prstGeom>
+          <a:noFill/>
+          <a:ln/>
+        </p:spPr>
+        <p:txBody>
+          <a:bodyPr wrap="square" lIns="0" tIns="0" rIns="0" bIns="0" rtlCol="0" anchor="ctr"/>
+          <a:lstStyle/>
+          <a:p>
+            <a:pPr indent="0" marL="0">
+              <a:buNone/>
+            </a:pPr>
+            <a:r>
+              <a:rPr lang="en-US" sz="1300" b="1" dirty="0">
+                <a:solidFill>
+                  <a:srgbClr val="1A2440"/>
+                </a:solidFill>
+                <a:latin typeface="Noto Sans CJK KR" pitchFamily="34" charset="0"/>
+                <a:ea typeface="Noto Sans CJK KR" pitchFamily="34" charset="-122"/>
+                <a:cs typeface="Noto Sans CJK KR" pitchFamily="34" charset="-120"/>
+              </a:rPr>
+              <a:t>LEGOLAND Lookout</a:t>
+            </a:r>
+            <a:endParaRPr lang="en-US" sz="1300" dirty="0"/>
+          </a:p>
+        </p:txBody>
+      </p:sp>
+      <p:sp>
+        <p:nvSpPr>
+          <p:cNvPr id="26" name="Text 24"/>
+          <p:cNvSpPr txBox="1"/>
+          <p:nvPr/>
+        </p:nvSpPr>
+        <p:spPr>
+          <a:xfrm>
+            <a:off x="1005840" y="3337560"/>
+            <a:ext cx="2971800" cy="228600"/>
+          </a:xfrm>
+          <a:prstGeom prst="rect">
+            <a:avLst/>
+          </a:prstGeom>
+          <a:noFill/>
+          <a:ln/>
+        </p:spPr>
+        <p:txBody>
+          <a:bodyPr wrap="square" lIns="0" tIns="0" rIns="0" bIns="0" rtlCol="0" anchor="ctr"/>
+          <a:lstStyle/>
+          <a:p>
+            <a:pPr indent="0" marL="0">
+              <a:buNone/>
+            </a:pPr>
+            <a:r>
+              <a:rPr lang="en-US" sz="1000" i="1" dirty="0">
+                <a:solidFill>
+                  <a:srgbClr val="D62839"/>
+                </a:solidFill>
+                <a:latin typeface="Noto Sans CJK KR" pitchFamily="34" charset="0"/>
+                <a:ea typeface="Noto Sans CJK KR" pitchFamily="34" charset="-122"/>
+                <a:cs typeface="Noto Sans CJK KR" pitchFamily="34" charset="-120"/>
+              </a:rPr>
+              <a:t>Bricktopia</a:t>
+            </a:r>
+            <a:endParaRPr lang="en-US" sz="1000" dirty="0"/>
+          </a:p>
+        </p:txBody>
+      </p:sp>
+      <p:sp>
+        <p:nvSpPr>
+          <p:cNvPr id="27" name="Text 25"/>
+          <p:cNvSpPr txBox="1"/>
+          <p:nvPr/>
+        </p:nvSpPr>
+        <p:spPr>
+          <a:xfrm>
+            <a:off x="621792" y="3611880"/>
+            <a:ext cx="3328416" cy="713232"/>
+          </a:xfrm>
+          <a:prstGeom prst="rect">
+            <a:avLst/>
+          </a:prstGeom>
+          <a:noFill/>
+          <a:ln/>
+        </p:spPr>
+        <p:txBody>
+          <a:bodyPr wrap="square" lIns="0" tIns="0" rIns="0" bIns="0" rtlCol="0" anchor="t"/>
+          <a:lstStyle/>
+          <a:p>
+            <a:pPr indent="0" marL="0">
+              <a:buNone/>
+            </a:pPr>
+            <a:r>
+              <a:rPr lang="en-US" sz="1000" dirty="0">
+                <a:solidFill>
+                  <a:srgbClr val="5C5749"/>
+                </a:solidFill>
+                <a:latin typeface="Noto Sans CJK KR" pitchFamily="34" charset="0"/>
+                <a:ea typeface="Noto Sans CJK KR" pitchFamily="34" charset="-122"/>
+                <a:cs typeface="Noto Sans CJK KR" pitchFamily="34" charset="-120"/>
+              </a:rPr>
+              <a:t>약 43m 전망대. 스릴 없이 파크 전경 조망</a:t>
+            </a:r>
+            <a:endParaRPr lang="en-US" sz="1000" dirty="0"/>
+          </a:p>
+        </p:txBody>
+      </p:sp>
+      <p:sp>
+        <p:nvSpPr>
+          <p:cNvPr id="28" name="Shape 26"/>
+          <p:cNvSpPr/>
+          <p:nvPr/>
+        </p:nvSpPr>
+        <p:spPr>
+          <a:xfrm>
+            <a:off x="4251960" y="2953512"/>
+            <a:ext cx="3657600" cy="1417320"/>
+          </a:xfrm>
+          <a:prstGeom prst="roundRect">
+            <a:avLst>
+              <a:gd name="adj" fmla="val 4516"/>
+            </a:avLst>
+          </a:prstGeom>
+          <a:solidFill>
+            <a:srgbClr val="FFFFFF"/>
+          </a:solidFill>
+          <a:ln w="12700">
+            <a:solidFill>
+              <a:srgbClr val="E2E4E8"/>
+            </a:solidFill>
+            <a:prstDash val="solid"/>
+          </a:ln>
+          <a:effectLst>
+            <a:outerShdw sx="100000" sy="100000" kx="0" ky="0" algn="bl" rotWithShape="0" blurRad="63500" dist="25400" dir="5400000">
+              <a:srgbClr val="888888">
+                <a:alpha val="20000"/>
+              </a:srgbClr>
+            </a:outerShdw>
+          </a:effectLst>
+        </p:spPr>
+      </p:sp>
+      <p:sp>
+        <p:nvSpPr>
+          <p:cNvPr id="29" name="Shape 27"/>
+          <p:cNvSpPr/>
+          <p:nvPr/>
+        </p:nvSpPr>
+        <p:spPr>
+          <a:xfrm>
+            <a:off x="4416552" y="3118104"/>
+            <a:ext cx="292608" cy="292608"/>
+          </a:xfrm>
+          <a:prstGeom prst="ellipse">
+            <a:avLst/>
+          </a:prstGeom>
+          <a:solidFill>
+            <a:srgbClr val="D62839"/>
+          </a:solidFill>
+          <a:ln/>
+        </p:spPr>
+      </p:sp>
+      <p:sp>
+        <p:nvSpPr>
+          <p:cNvPr id="30" name="Text 28"/>
+          <p:cNvSpPr txBox="1"/>
+          <p:nvPr/>
+        </p:nvSpPr>
+        <p:spPr>
+          <a:xfrm>
+            <a:off x="4416552" y="3118104"/>
+            <a:ext cx="292608" cy="292608"/>
+          </a:xfrm>
+          <a:prstGeom prst="rect">
+            <a:avLst/>
+          </a:prstGeom>
+          <a:noFill/>
+          <a:ln/>
+        </p:spPr>
+        <p:txBody>
+          <a:bodyPr wrap="square" lIns="0" tIns="0" rIns="0" bIns="0" rtlCol="0" anchor="ctr"/>
+          <a:lstStyle/>
+          <a:p>
+            <a:pPr algn="ctr" indent="0" marL="0">
+              <a:buNone/>
+            </a:pPr>
+            <a:r>
+              <a:rPr lang="en-US" sz="1300" b="1" dirty="0">
+                <a:solidFill>
+                  <a:srgbClr val="FFFFFF"/>
+                </a:solidFill>
+                <a:latin typeface="Noto Sans CJK KR" pitchFamily="34" charset="0"/>
+                <a:ea typeface="Noto Sans CJK KR" pitchFamily="34" charset="-122"/>
+                <a:cs typeface="Noto Sans CJK KR" pitchFamily="34" charset="-120"/>
+              </a:rPr>
+              <a:t>5</a:t>
+            </a:r>
+            <a:endParaRPr lang="en-US" sz="1300" dirty="0"/>
+          </a:p>
+        </p:txBody>
+      </p:sp>
+      <p:sp>
+        <p:nvSpPr>
+          <p:cNvPr id="31" name="Text 29"/>
+          <p:cNvSpPr txBox="1"/>
+          <p:nvPr/>
+        </p:nvSpPr>
+        <p:spPr>
+          <a:xfrm>
+            <a:off x="4800600" y="3063240"/>
+            <a:ext cx="2971800" cy="292608"/>
+          </a:xfrm>
+          <a:prstGeom prst="rect">
+            <a:avLst/>
+          </a:prstGeom>
+          <a:noFill/>
+          <a:ln/>
+        </p:spPr>
+        <p:txBody>
+          <a:bodyPr wrap="square" lIns="0" tIns="0" rIns="0" bIns="0" rtlCol="0" anchor="ctr"/>
+          <a:lstStyle/>
+          <a:p>
+            <a:pPr indent="0" marL="0">
+              <a:buNone/>
+            </a:pPr>
+            <a:r>
+              <a:rPr lang="en-US" sz="1300" b="1" dirty="0">
+                <a:solidFill>
+                  <a:srgbClr val="1A2440"/>
+                </a:solidFill>
+                <a:latin typeface="Noto Sans CJK KR" pitchFamily="34" charset="0"/>
+                <a:ea typeface="Noto Sans CJK KR" pitchFamily="34" charset="-122"/>
+                <a:cs typeface="Noto Sans CJK KR" pitchFamily="34" charset="-120"/>
+              </a:rPr>
+              <a:t>Monkey Climb</a:t>
+            </a:r>
+            <a:endParaRPr lang="en-US" sz="1300" dirty="0"/>
+          </a:p>
+        </p:txBody>
+      </p:sp>
+      <p:sp>
+        <p:nvSpPr>
+          <p:cNvPr id="32" name="Text 30"/>
+          <p:cNvSpPr txBox="1"/>
+          <p:nvPr/>
+        </p:nvSpPr>
+        <p:spPr>
+          <a:xfrm>
+            <a:off x="4800600" y="3337560"/>
+            <a:ext cx="2971800" cy="228600"/>
+          </a:xfrm>
+          <a:prstGeom prst="rect">
+            <a:avLst/>
+          </a:prstGeom>
+          <a:noFill/>
+          <a:ln/>
+        </p:spPr>
+        <p:txBody>
+          <a:bodyPr wrap="square" lIns="0" tIns="0" rIns="0" bIns="0" rtlCol="0" anchor="ctr"/>
+          <a:lstStyle/>
+          <a:p>
+            <a:pPr indent="0" marL="0">
+              <a:buNone/>
+            </a:pPr>
+            <a:r>
+              <a:rPr lang="en-US" sz="1000" i="1" dirty="0">
+                <a:solidFill>
+                  <a:srgbClr val="D62839"/>
+                </a:solidFill>
+                <a:latin typeface="Noto Sans CJK KR" pitchFamily="34" charset="0"/>
+                <a:ea typeface="Noto Sans CJK KR" pitchFamily="34" charset="-122"/>
+                <a:cs typeface="Noto Sans CJK KR" pitchFamily="34" charset="-120"/>
+              </a:rPr>
+              <a:t>Bricktopia</a:t>
+            </a:r>
+            <a:endParaRPr lang="en-US" sz="1000" dirty="0"/>
+          </a:p>
+        </p:txBody>
+      </p:sp>
+      <p:sp>
+        <p:nvSpPr>
+          <p:cNvPr id="33" name="Text 31"/>
+          <p:cNvSpPr txBox="1"/>
+          <p:nvPr/>
+        </p:nvSpPr>
+        <p:spPr>
+          <a:xfrm>
+            <a:off x="4416552" y="3611880"/>
+            <a:ext cx="3328416" cy="713232"/>
+          </a:xfrm>
+          <a:prstGeom prst="rect">
+            <a:avLst/>
+          </a:prstGeom>
+          <a:noFill/>
+          <a:ln/>
+        </p:spPr>
+        <p:txBody>
+          <a:bodyPr wrap="square" lIns="0" tIns="0" rIns="0" bIns="0" rtlCol="0" anchor="t"/>
+          <a:lstStyle/>
+          <a:p>
+            <a:pPr indent="0" marL="0">
+              <a:buNone/>
+            </a:pPr>
+            <a:r>
+              <a:rPr lang="en-US" sz="1000" dirty="0">
+                <a:solidFill>
+                  <a:srgbClr val="5C5749"/>
+                </a:solidFill>
+                <a:latin typeface="Noto Sans CJK KR" pitchFamily="34" charset="0"/>
+                <a:ea typeface="Noto Sans CJK KR" pitchFamily="34" charset="-122"/>
+                <a:cs typeface="Noto Sans CJK KR" pitchFamily="34" charset="-120"/>
+              </a:rPr>
+              <a:t>그물 정글짐 등반 후 자유낙하 하강</a:t>
+            </a:r>
+            <a:endParaRPr lang="en-US" sz="1000" dirty="0"/>
+          </a:p>
+        </p:txBody>
+      </p:sp>
+      <p:sp>
+        <p:nvSpPr>
+          <p:cNvPr id="34" name="Shape 32"/>
+          <p:cNvSpPr/>
+          <p:nvPr/>
+        </p:nvSpPr>
+        <p:spPr>
+          <a:xfrm>
+            <a:off x="8046720" y="2953512"/>
+            <a:ext cx="3657600" cy="1417320"/>
+          </a:xfrm>
+          <a:prstGeom prst="roundRect">
+            <a:avLst>
+              <a:gd name="adj" fmla="val 4516"/>
+            </a:avLst>
+          </a:prstGeom>
+          <a:solidFill>
+            <a:srgbClr val="FFFFFF"/>
+          </a:solidFill>
+          <a:ln w="12700">
+            <a:solidFill>
+              <a:srgbClr val="E2E4E8"/>
+            </a:solidFill>
+            <a:prstDash val="solid"/>
+          </a:ln>
+          <a:effectLst>
+            <a:outerShdw sx="100000" sy="100000" kx="0" ky="0" algn="bl" rotWithShape="0" blurRad="63500" dist="25400" dir="5400000">
+              <a:srgbClr val="888888">
+                <a:alpha val="20000"/>
+              </a:srgbClr>
+            </a:outerShdw>
+          </a:effectLst>
+        </p:spPr>
+      </p:sp>
+      <p:sp>
+        <p:nvSpPr>
+          <p:cNvPr id="35" name="Shape 33"/>
+          <p:cNvSpPr/>
+          <p:nvPr/>
+        </p:nvSpPr>
+        <p:spPr>
+          <a:xfrm>
+            <a:off x="8211312" y="3118104"/>
+            <a:ext cx="292608" cy="292608"/>
+          </a:xfrm>
+          <a:prstGeom prst="ellipse">
+            <a:avLst/>
+          </a:prstGeom>
+          <a:solidFill>
+            <a:srgbClr val="D62839"/>
+          </a:solidFill>
+          <a:ln/>
+        </p:spPr>
+      </p:sp>
+      <p:sp>
+        <p:nvSpPr>
+          <p:cNvPr id="36" name="Text 34"/>
+          <p:cNvSpPr txBox="1"/>
+          <p:nvPr/>
+        </p:nvSpPr>
+        <p:spPr>
+          <a:xfrm>
+            <a:off x="8211312" y="3118104"/>
+            <a:ext cx="292608" cy="292608"/>
+          </a:xfrm>
+          <a:prstGeom prst="rect">
+            <a:avLst/>
+          </a:prstGeom>
+          <a:noFill/>
+          <a:ln/>
+        </p:spPr>
+        <p:txBody>
+          <a:bodyPr wrap="square" lIns="0" tIns="0" rIns="0" bIns="0" rtlCol="0" anchor="ctr"/>
+          <a:lstStyle/>
+          <a:p>
+            <a:pPr algn="ctr" indent="0" marL="0">
+              <a:buNone/>
+            </a:pPr>
+            <a:r>
+              <a:rPr lang="en-US" sz="1300" b="1" dirty="0">
+                <a:solidFill>
+                  <a:srgbClr val="FFFFFF"/>
+                </a:solidFill>
+                <a:latin typeface="Noto Sans CJK KR" pitchFamily="34" charset="0"/>
+                <a:ea typeface="Noto Sans CJK KR" pitchFamily="34" charset="-122"/>
+                <a:cs typeface="Noto Sans CJK KR" pitchFamily="34" charset="-120"/>
+              </a:rPr>
+              <a:t>6</a:t>
+            </a:r>
+            <a:endParaRPr lang="en-US" sz="1300" dirty="0"/>
+          </a:p>
+        </p:txBody>
+      </p:sp>
+      <p:sp>
+        <p:nvSpPr>
+          <p:cNvPr id="37" name="Text 35"/>
+          <p:cNvSpPr txBox="1"/>
+          <p:nvPr/>
+        </p:nvSpPr>
+        <p:spPr>
+          <a:xfrm>
+            <a:off x="8595360" y="3063240"/>
+            <a:ext cx="2971800" cy="292608"/>
+          </a:xfrm>
+          <a:prstGeom prst="rect">
+            <a:avLst/>
+          </a:prstGeom>
+          <a:noFill/>
+          <a:ln/>
+        </p:spPr>
+        <p:txBody>
+          <a:bodyPr wrap="square" lIns="0" tIns="0" rIns="0" bIns="0" rtlCol="0" anchor="ctr"/>
+          <a:lstStyle/>
+          <a:p>
+            <a:pPr indent="0" marL="0">
+              <a:buNone/>
+            </a:pPr>
+            <a:r>
+              <a:rPr lang="en-US" sz="1300" b="1" dirty="0">
+                <a:solidFill>
+                  <a:srgbClr val="1A2440"/>
+                </a:solidFill>
+                <a:latin typeface="Noto Sans CJK KR" pitchFamily="34" charset="0"/>
+                <a:ea typeface="Noto Sans CJK KR" pitchFamily="34" charset="-122"/>
+                <a:cs typeface="Noto Sans CJK KR" pitchFamily="34" charset="-120"/>
+              </a:rPr>
+              <a:t>Wave Racers</a:t>
+            </a:r>
+            <a:endParaRPr lang="en-US" sz="1300" dirty="0"/>
+          </a:p>
+        </p:txBody>
+      </p:sp>
+      <p:sp>
+        <p:nvSpPr>
+          <p:cNvPr id="38" name="Text 36"/>
+          <p:cNvSpPr txBox="1"/>
+          <p:nvPr/>
+        </p:nvSpPr>
+        <p:spPr>
+          <a:xfrm>
+            <a:off x="8595360" y="3337560"/>
+            <a:ext cx="2971800" cy="228600"/>
+          </a:xfrm>
+          <a:prstGeom prst="rect">
+            <a:avLst/>
+          </a:prstGeom>
+          <a:noFill/>
+          <a:ln/>
+        </p:spPr>
+        <p:txBody>
+          <a:bodyPr wrap="square" lIns="0" tIns="0" rIns="0" bIns="0" rtlCol="0" anchor="ctr"/>
+          <a:lstStyle/>
+          <a:p>
+            <a:pPr indent="0" marL="0">
+              <a:buNone/>
+            </a:pPr>
+            <a:r>
+              <a:rPr lang="en-US" sz="1000" i="1" dirty="0">
+                <a:solidFill>
+                  <a:srgbClr val="D62839"/>
+                </a:solidFill>
+                <a:latin typeface="Noto Sans CJK KR" pitchFamily="34" charset="0"/>
+                <a:ea typeface="Noto Sans CJK KR" pitchFamily="34" charset="-122"/>
+                <a:cs typeface="Noto Sans CJK KR" pitchFamily="34" charset="-120"/>
+              </a:rPr>
+              <a:t>LEGO City</a:t>
+            </a:r>
+            <a:endParaRPr lang="en-US" sz="1000" dirty="0"/>
+          </a:p>
+        </p:txBody>
+      </p:sp>
+      <p:sp>
+        <p:nvSpPr>
+          <p:cNvPr id="39" name="Text 37"/>
+          <p:cNvSpPr txBox="1"/>
+          <p:nvPr/>
+        </p:nvSpPr>
+        <p:spPr>
+          <a:xfrm>
+            <a:off x="8211312" y="3611880"/>
+            <a:ext cx="3328416" cy="713232"/>
+          </a:xfrm>
+          <a:prstGeom prst="rect">
+            <a:avLst/>
+          </a:prstGeom>
+          <a:noFill/>
+          <a:ln/>
+        </p:spPr>
+        <p:txBody>
+          <a:bodyPr wrap="square" lIns="0" tIns="0" rIns="0" bIns="0" rtlCol="0" anchor="t"/>
+          <a:lstStyle/>
+          <a:p>
+            <a:pPr indent="0" marL="0">
+              <a:buNone/>
+            </a:pPr>
+            <a:r>
+              <a:rPr lang="en-US" sz="1000" dirty="0">
+                <a:solidFill>
+                  <a:srgbClr val="5C5749"/>
+                </a:solidFill>
+                <a:latin typeface="Noto Sans CJK KR" pitchFamily="34" charset="0"/>
+                <a:ea typeface="Noto Sans CJK KR" pitchFamily="34" charset="-122"/>
+                <a:cs typeface="Noto Sans CJK KR" pitchFamily="34" charset="-120"/>
+              </a:rPr>
+              <a:t>보트로 파도·물대포 회피. 확실히 젖음</a:t>
+            </a:r>
+            <a:endParaRPr lang="en-US" sz="1000" dirty="0"/>
+          </a:p>
+        </p:txBody>
+      </p:sp>
+      <p:sp>
+        <p:nvSpPr>
+          <p:cNvPr id="40" name="Shape 38"/>
+          <p:cNvSpPr/>
+          <p:nvPr/>
+        </p:nvSpPr>
+        <p:spPr>
+          <a:xfrm>
+            <a:off x="457200" y="4535424"/>
+            <a:ext cx="3657600" cy="1417320"/>
+          </a:xfrm>
+          <a:prstGeom prst="roundRect">
+            <a:avLst>
+              <a:gd name="adj" fmla="val 4516"/>
+            </a:avLst>
+          </a:prstGeom>
+          <a:solidFill>
+            <a:srgbClr val="FFFFFF"/>
+          </a:solidFill>
+          <a:ln w="12700">
+            <a:solidFill>
+              <a:srgbClr val="E2E4E8"/>
+            </a:solidFill>
+            <a:prstDash val="solid"/>
+          </a:ln>
+          <a:effectLst>
+            <a:outerShdw sx="100000" sy="100000" kx="0" ky="0" algn="bl" rotWithShape="0" blurRad="63500" dist="25400" dir="5400000">
+              <a:srgbClr val="888888">
+                <a:alpha val="20000"/>
+              </a:srgbClr>
+            </a:outerShdw>
+          </a:effectLst>
+        </p:spPr>
+      </p:sp>
+      <p:sp>
+        <p:nvSpPr>
+          <p:cNvPr id="41" name="Shape 39"/>
+          <p:cNvSpPr/>
+          <p:nvPr/>
+        </p:nvSpPr>
+        <p:spPr>
+          <a:xfrm>
+            <a:off x="621792" y="4700016"/>
+            <a:ext cx="292608" cy="292608"/>
+          </a:xfrm>
+          <a:prstGeom prst="ellipse">
+            <a:avLst/>
+          </a:prstGeom>
+          <a:solidFill>
+            <a:srgbClr val="D62839"/>
+          </a:solidFill>
+          <a:ln/>
+        </p:spPr>
+      </p:sp>
+      <p:sp>
+        <p:nvSpPr>
+          <p:cNvPr id="42" name="Text 40"/>
+          <p:cNvSpPr txBox="1"/>
+          <p:nvPr/>
+        </p:nvSpPr>
+        <p:spPr>
+          <a:xfrm>
+            <a:off x="621792" y="4700016"/>
+            <a:ext cx="292608" cy="292608"/>
+          </a:xfrm>
+          <a:prstGeom prst="rect">
+            <a:avLst/>
+          </a:prstGeom>
+          <a:noFill/>
+          <a:ln/>
+        </p:spPr>
+        <p:txBody>
+          <a:bodyPr wrap="square" lIns="0" tIns="0" rIns="0" bIns="0" rtlCol="0" anchor="ctr"/>
+          <a:lstStyle/>
+          <a:p>
+            <a:pPr algn="ctr" indent="0" marL="0">
+              <a:buNone/>
+            </a:pPr>
+            <a:r>
+              <a:rPr lang="en-US" sz="1300" b="1" dirty="0">
+                <a:solidFill>
+                  <a:srgbClr val="FFFFFF"/>
+                </a:solidFill>
+                <a:latin typeface="Noto Sans CJK KR" pitchFamily="34" charset="0"/>
+                <a:ea typeface="Noto Sans CJK KR" pitchFamily="34" charset="-122"/>
+                <a:cs typeface="Noto Sans CJK KR" pitchFamily="34" charset="-120"/>
+              </a:rPr>
+              <a:t>7</a:t>
+            </a:r>
+            <a:endParaRPr lang="en-US" sz="1300" dirty="0"/>
+          </a:p>
+        </p:txBody>
+      </p:sp>
+      <p:sp>
+        <p:nvSpPr>
+          <p:cNvPr id="43" name="Text 41"/>
+          <p:cNvSpPr txBox="1"/>
+          <p:nvPr/>
+        </p:nvSpPr>
+        <p:spPr>
+          <a:xfrm>
+            <a:off x="1005840" y="4645152"/>
+            <a:ext cx="2971800" cy="292608"/>
+          </a:xfrm>
+          <a:prstGeom prst="rect">
+            <a:avLst/>
+          </a:prstGeom>
+          <a:noFill/>
+          <a:ln/>
+        </p:spPr>
+        <p:txBody>
+          <a:bodyPr wrap="square" lIns="0" tIns="0" rIns="0" bIns="0" rtlCol="0" anchor="ctr"/>
+          <a:lstStyle/>
+          <a:p>
+            <a:pPr indent="0" marL="0">
+              <a:buNone/>
+            </a:pPr>
+            <a:r>
+              <a:rPr lang="en-US" sz="1300" b="1" dirty="0">
+                <a:solidFill>
+                  <a:srgbClr val="1A2440"/>
+                </a:solidFill>
+                <a:latin typeface="Noto Sans CJK KR" pitchFamily="34" charset="0"/>
+                <a:ea typeface="Noto Sans CJK KR" pitchFamily="34" charset="-122"/>
+                <a:cs typeface="Noto Sans CJK KR" pitchFamily="34" charset="-120"/>
+              </a:rPr>
+              <a:t>Coast Guard Academy</a:t>
+            </a:r>
+            <a:endParaRPr lang="en-US" sz="1300" dirty="0"/>
+          </a:p>
+        </p:txBody>
+      </p:sp>
+      <p:sp>
+        <p:nvSpPr>
+          <p:cNvPr id="44" name="Text 42"/>
+          <p:cNvSpPr txBox="1"/>
+          <p:nvPr/>
+        </p:nvSpPr>
+        <p:spPr>
+          <a:xfrm>
+            <a:off x="1005840" y="4919472"/>
+            <a:ext cx="2971800" cy="228600"/>
+          </a:xfrm>
+          <a:prstGeom prst="rect">
+            <a:avLst/>
+          </a:prstGeom>
+          <a:noFill/>
+          <a:ln/>
+        </p:spPr>
+        <p:txBody>
+          <a:bodyPr wrap="square" lIns="0" tIns="0" rIns="0" bIns="0" rtlCol="0" anchor="ctr"/>
+          <a:lstStyle/>
+          <a:p>
+            <a:pPr indent="0" marL="0">
+              <a:buNone/>
+            </a:pPr>
+            <a:r>
+              <a:rPr lang="en-US" sz="1000" i="1" dirty="0">
+                <a:solidFill>
+                  <a:srgbClr val="D62839"/>
+                </a:solidFill>
+                <a:latin typeface="Noto Sans CJK KR" pitchFamily="34" charset="0"/>
+                <a:ea typeface="Noto Sans CJK KR" pitchFamily="34" charset="-122"/>
+                <a:cs typeface="Noto Sans CJK KR" pitchFamily="34" charset="-120"/>
+              </a:rPr>
+              <a:t>LEGO City</a:t>
+            </a:r>
+            <a:endParaRPr lang="en-US" sz="1000" dirty="0"/>
+          </a:p>
+        </p:txBody>
+      </p:sp>
+      <p:sp>
+        <p:nvSpPr>
+          <p:cNvPr id="45" name="Text 43"/>
+          <p:cNvSpPr txBox="1"/>
+          <p:nvPr/>
+        </p:nvSpPr>
+        <p:spPr>
+          <a:xfrm>
+            <a:off x="621792" y="5193792"/>
+            <a:ext cx="3328416" cy="713232"/>
+          </a:xfrm>
+          <a:prstGeom prst="rect">
+            <a:avLst/>
+          </a:prstGeom>
+          <a:noFill/>
+          <a:ln/>
+        </p:spPr>
+        <p:txBody>
+          <a:bodyPr wrap="square" lIns="0" tIns="0" rIns="0" bIns="0" rtlCol="0" anchor="t"/>
+          <a:lstStyle/>
+          <a:p>
+            <a:pPr indent="0" marL="0">
+              <a:buNone/>
+            </a:pPr>
+            <a:r>
+              <a:rPr lang="en-US" sz="1000" dirty="0">
+                <a:solidFill>
+                  <a:srgbClr val="5C5749"/>
+                </a:solidFill>
+                <a:latin typeface="Noto Sans CJK KR" pitchFamily="34" charset="0"/>
+                <a:ea typeface="Noto Sans CJK KR" pitchFamily="34" charset="-122"/>
+                <a:cs typeface="Noto Sans CJK KR" pitchFamily="34" charset="-120"/>
+              </a:rPr>
+              <a:t>보트로 부둣가 순찰. Wave Racers보다 덜 젖음</a:t>
+            </a:r>
+            <a:endParaRPr lang="en-US" sz="1000" dirty="0"/>
+          </a:p>
+        </p:txBody>
+      </p:sp>
+      <p:sp>
+        <p:nvSpPr>
+          <p:cNvPr id="46" name="Shape 44"/>
+          <p:cNvSpPr/>
+          <p:nvPr/>
+        </p:nvSpPr>
+        <p:spPr>
+          <a:xfrm>
+            <a:off x="4251960" y="4535424"/>
+            <a:ext cx="3657600" cy="1417320"/>
+          </a:xfrm>
+          <a:prstGeom prst="roundRect">
+            <a:avLst>
+              <a:gd name="adj" fmla="val 4516"/>
+            </a:avLst>
+          </a:prstGeom>
+          <a:solidFill>
+            <a:srgbClr val="FFFFFF"/>
+          </a:solidFill>
+          <a:ln w="12700">
+            <a:solidFill>
+              <a:srgbClr val="E2E4E8"/>
+            </a:solidFill>
+            <a:prstDash val="solid"/>
+          </a:ln>
+          <a:effectLst>
+            <a:outerShdw sx="100000" sy="100000" kx="0" ky="0" algn="bl" rotWithShape="0" blurRad="63500" dist="25400" dir="5400000">
+              <a:srgbClr val="888888">
+                <a:alpha val="20000"/>
+              </a:srgbClr>
+            </a:outerShdw>
+          </a:effectLst>
+        </p:spPr>
+      </p:sp>
+      <p:sp>
+        <p:nvSpPr>
+          <p:cNvPr id="47" name="Shape 45"/>
+          <p:cNvSpPr/>
+          <p:nvPr/>
+        </p:nvSpPr>
+        <p:spPr>
+          <a:xfrm>
+            <a:off x="4416552" y="4700016"/>
+            <a:ext cx="292608" cy="292608"/>
+          </a:xfrm>
+          <a:prstGeom prst="ellipse">
+            <a:avLst/>
+          </a:prstGeom>
+          <a:solidFill>
+            <a:srgbClr val="D62839"/>
+          </a:solidFill>
+          <a:ln/>
+        </p:spPr>
+      </p:sp>
+      <p:sp>
+        <p:nvSpPr>
+          <p:cNvPr id="48" name="Text 46"/>
+          <p:cNvSpPr txBox="1"/>
+          <p:nvPr/>
+        </p:nvSpPr>
+        <p:spPr>
+          <a:xfrm>
+            <a:off x="4416552" y="4700016"/>
+            <a:ext cx="292608" cy="292608"/>
+          </a:xfrm>
+          <a:prstGeom prst="rect">
+            <a:avLst/>
+          </a:prstGeom>
+          <a:noFill/>
+          <a:ln/>
+        </p:spPr>
+        <p:txBody>
+          <a:bodyPr wrap="square" lIns="0" tIns="0" rIns="0" bIns="0" rtlCol="0" anchor="ctr"/>
+          <a:lstStyle/>
+          <a:p>
+            <a:pPr algn="ctr" indent="0" marL="0">
+              <a:buNone/>
+            </a:pPr>
+            <a:r>
+              <a:rPr lang="en-US" sz="1300" b="1" dirty="0">
+                <a:solidFill>
+                  <a:srgbClr val="FFFFFF"/>
+                </a:solidFill>
+                <a:latin typeface="Noto Sans CJK KR" pitchFamily="34" charset="0"/>
+                <a:ea typeface="Noto Sans CJK KR" pitchFamily="34" charset="-122"/>
+                <a:cs typeface="Noto Sans CJK KR" pitchFamily="34" charset="-120"/>
+              </a:rPr>
+              <a:t>8</a:t>
+            </a:r>
+            <a:endParaRPr lang="en-US" sz="1300" dirty="0"/>
+          </a:p>
+        </p:txBody>
+      </p:sp>
+      <p:sp>
+        <p:nvSpPr>
+          <p:cNvPr id="49" name="Text 47"/>
+          <p:cNvSpPr txBox="1"/>
+          <p:nvPr/>
+        </p:nvSpPr>
+        <p:spPr>
+          <a:xfrm>
+            <a:off x="4800600" y="4645152"/>
+            <a:ext cx="2971800" cy="292608"/>
+          </a:xfrm>
+          <a:prstGeom prst="rect">
+            <a:avLst/>
+          </a:prstGeom>
+          <a:noFill/>
+          <a:ln/>
+        </p:spPr>
+        <p:txBody>
+          <a:bodyPr wrap="square" lIns="0" tIns="0" rIns="0" bIns="0" rtlCol="0" anchor="ctr"/>
+          <a:lstStyle/>
+          <a:p>
+            <a:pPr indent="0" marL="0">
+              <a:buNone/>
+            </a:pPr>
+            <a:r>
+              <a:rPr lang="en-US" sz="1300" b="1" dirty="0">
+                <a:solidFill>
+                  <a:srgbClr val="1A2440"/>
+                </a:solidFill>
+                <a:latin typeface="Noto Sans CJK KR" pitchFamily="34" charset="0"/>
+                <a:ea typeface="Noto Sans CJK KR" pitchFamily="34" charset="-122"/>
+                <a:cs typeface="Noto Sans CJK KR" pitchFamily="34" charset="-120"/>
+              </a:rPr>
+              <a:t>Merlin's Flying Machines</a:t>
+            </a:r>
+            <a:endParaRPr lang="en-US" sz="1300" dirty="0"/>
+          </a:p>
+        </p:txBody>
+      </p:sp>
+      <p:sp>
+        <p:nvSpPr>
+          <p:cNvPr id="50" name="Text 48"/>
+          <p:cNvSpPr txBox="1"/>
+          <p:nvPr/>
+        </p:nvSpPr>
+        <p:spPr>
+          <a:xfrm>
+            <a:off x="4800600" y="4919472"/>
+            <a:ext cx="2971800" cy="228600"/>
+          </a:xfrm>
+          <a:prstGeom prst="rect">
+            <a:avLst/>
+          </a:prstGeom>
+          <a:noFill/>
+          <a:ln/>
+        </p:spPr>
+        <p:txBody>
+          <a:bodyPr wrap="square" lIns="0" tIns="0" rIns="0" bIns="0" rtlCol="0" anchor="ctr"/>
+          <a:lstStyle/>
+          <a:p>
+            <a:pPr indent="0" marL="0">
+              <a:buNone/>
+            </a:pPr>
+            <a:r>
+              <a:rPr lang="en-US" sz="1000" i="1" dirty="0">
+                <a:solidFill>
+                  <a:srgbClr val="D62839"/>
+                </a:solidFill>
+                <a:latin typeface="Noto Sans CJK KR" pitchFamily="34" charset="0"/>
+                <a:ea typeface="Noto Sans CJK KR" pitchFamily="34" charset="-122"/>
+                <a:cs typeface="Noto Sans CJK KR" pitchFamily="34" charset="-120"/>
+              </a:rPr>
+              <a:t>LEGO Castle</a:t>
+            </a:r>
+            <a:endParaRPr lang="en-US" sz="1000" dirty="0"/>
+          </a:p>
+        </p:txBody>
+      </p:sp>
+      <p:sp>
+        <p:nvSpPr>
+          <p:cNvPr id="51" name="Text 49"/>
+          <p:cNvSpPr txBox="1"/>
+          <p:nvPr/>
+        </p:nvSpPr>
+        <p:spPr>
+          <a:xfrm>
+            <a:off x="4416552" y="5193792"/>
+            <a:ext cx="3328416" cy="713232"/>
+          </a:xfrm>
+          <a:prstGeom prst="rect">
+            <a:avLst/>
+          </a:prstGeom>
+          <a:noFill/>
+          <a:ln/>
+        </p:spPr>
+        <p:txBody>
+          <a:bodyPr wrap="square" lIns="0" tIns="0" rIns="0" bIns="0" rtlCol="0" anchor="t"/>
+          <a:lstStyle/>
+          <a:p>
+            <a:pPr indent="0" marL="0">
+              <a:buNone/>
+            </a:pPr>
+            <a:r>
+              <a:rPr lang="en-US" sz="1000" dirty="0">
+                <a:solidFill>
+                  <a:srgbClr val="5C5749"/>
+                </a:solidFill>
+                <a:latin typeface="Noto Sans CJK KR" pitchFamily="34" charset="0"/>
+                <a:ea typeface="Noto Sans CJK KR" pitchFamily="34" charset="-122"/>
+                <a:cs typeface="Noto Sans CJK KR" pitchFamily="34" charset="-120"/>
+              </a:rPr>
+              <a:t>직접 힘을 줘 비행 높이를 겨루는 라이드</a:t>
+            </a:r>
+            <a:endParaRPr lang="en-US" sz="1000" dirty="0"/>
+          </a:p>
+        </p:txBody>
+      </p:sp>
+      <p:sp>
+        <p:nvSpPr>
+          <p:cNvPr id="52" name="Shape 50"/>
+          <p:cNvSpPr/>
+          <p:nvPr/>
+        </p:nvSpPr>
+        <p:spPr>
+          <a:xfrm>
+            <a:off x="8046720" y="4535424"/>
+            <a:ext cx="3657600" cy="1417320"/>
+          </a:xfrm>
+          <a:prstGeom prst="roundRect">
+            <a:avLst>
+              <a:gd name="adj" fmla="val 4516"/>
+            </a:avLst>
+          </a:prstGeom>
+          <a:solidFill>
+            <a:srgbClr val="FFFFFF"/>
+          </a:solidFill>
+          <a:ln w="12700">
+            <a:solidFill>
+              <a:srgbClr val="E2E4E8"/>
+            </a:solidFill>
+            <a:prstDash val="solid"/>
+          </a:ln>
+          <a:effectLst>
+            <a:outerShdw sx="100000" sy="100000" kx="0" ky="0" algn="bl" rotWithShape="0" blurRad="63500" dist="25400" dir="5400000">
+              <a:srgbClr val="888888">
+                <a:alpha val="20000"/>
+              </a:srgbClr>
+            </a:outerShdw>
+          </a:effectLst>
+        </p:spPr>
+      </p:sp>
+      <p:sp>
+        <p:nvSpPr>
+          <p:cNvPr id="53" name="Shape 51"/>
+          <p:cNvSpPr/>
+          <p:nvPr/>
+        </p:nvSpPr>
+        <p:spPr>
+          <a:xfrm>
+            <a:off x="8211312" y="4700016"/>
+            <a:ext cx="292608" cy="292608"/>
+          </a:xfrm>
+          <a:prstGeom prst="ellipse">
+            <a:avLst/>
+          </a:prstGeom>
+          <a:solidFill>
+            <a:srgbClr val="D62839"/>
+          </a:solidFill>
+          <a:ln/>
+        </p:spPr>
+      </p:sp>
+      <p:sp>
+        <p:nvSpPr>
+          <p:cNvPr id="54" name="Text 52"/>
+          <p:cNvSpPr txBox="1"/>
+          <p:nvPr/>
+        </p:nvSpPr>
+        <p:spPr>
+          <a:xfrm>
+            <a:off x="8211312" y="4700016"/>
+            <a:ext cx="292608" cy="292608"/>
+          </a:xfrm>
+          <a:prstGeom prst="rect">
+            <a:avLst/>
+          </a:prstGeom>
+          <a:noFill/>
+          <a:ln/>
+        </p:spPr>
+        <p:txBody>
+          <a:bodyPr wrap="square" lIns="0" tIns="0" rIns="0" bIns="0" rtlCol="0" anchor="ctr"/>
+          <a:lstStyle/>
+          <a:p>
+            <a:pPr algn="ctr" indent="0" marL="0">
+              <a:buNone/>
+            </a:pPr>
+            <a:r>
+              <a:rPr lang="en-US" sz="1300" b="1" dirty="0">
+                <a:solidFill>
+                  <a:srgbClr val="FFFFFF"/>
+                </a:solidFill>
+                <a:latin typeface="Noto Sans CJK KR" pitchFamily="34" charset="0"/>
+                <a:ea typeface="Noto Sans CJK KR" pitchFamily="34" charset="-122"/>
+                <a:cs typeface="Noto Sans CJK KR" pitchFamily="34" charset="-120"/>
+              </a:rPr>
+              <a:t>9</a:t>
+            </a:r>
+            <a:endParaRPr lang="en-US" sz="1300" dirty="0"/>
+          </a:p>
+        </p:txBody>
+      </p:sp>
+      <p:sp>
+        <p:nvSpPr>
+          <p:cNvPr id="55" name="Text 53"/>
+          <p:cNvSpPr txBox="1"/>
+          <p:nvPr/>
+        </p:nvSpPr>
+        <p:spPr>
+          <a:xfrm>
+            <a:off x="8595360" y="4645152"/>
+            <a:ext cx="2971800" cy="292608"/>
+          </a:xfrm>
+          <a:prstGeom prst="rect">
+            <a:avLst/>
+          </a:prstGeom>
+          <a:noFill/>
+          <a:ln/>
+        </p:spPr>
+        <p:txBody>
+          <a:bodyPr wrap="square" lIns="0" tIns="0" rIns="0" bIns="0" rtlCol="0" anchor="ctr"/>
+          <a:lstStyle/>
+          <a:p>
+            <a:pPr indent="0" marL="0">
+              <a:buNone/>
+            </a:pPr>
+            <a:r>
+              <a:rPr lang="en-US" sz="1300" b="1" dirty="0">
+                <a:solidFill>
+                  <a:srgbClr val="1A2440"/>
+                </a:solidFill>
+                <a:latin typeface="Noto Sans CJK KR" pitchFamily="34" charset="0"/>
+                <a:ea typeface="Noto Sans CJK KR" pitchFamily="34" charset="-122"/>
+                <a:cs typeface="Noto Sans CJK KR" pitchFamily="34" charset="-120"/>
+              </a:rPr>
+              <a:t>LEGO Factory Adventure</a:t>
+            </a:r>
+            <a:endParaRPr lang="en-US" sz="1300" dirty="0"/>
+          </a:p>
+        </p:txBody>
+      </p:sp>
+      <p:sp>
+        <p:nvSpPr>
+          <p:cNvPr id="56" name="Text 54"/>
+          <p:cNvSpPr txBox="1"/>
+          <p:nvPr/>
+        </p:nvSpPr>
+        <p:spPr>
+          <a:xfrm>
+            <a:off x="8595360" y="4919472"/>
+            <a:ext cx="2971800" cy="228600"/>
+          </a:xfrm>
+          <a:prstGeom prst="rect">
+            <a:avLst/>
+          </a:prstGeom>
+          <a:noFill/>
+          <a:ln/>
+        </p:spPr>
+        <p:txBody>
+          <a:bodyPr wrap="square" lIns="0" tIns="0" rIns="0" bIns="0" rtlCol="0" anchor="ctr"/>
+          <a:lstStyle/>
+          <a:p>
+            <a:pPr indent="0" marL="0">
+              <a:buNone/>
+            </a:pPr>
+            <a:r>
+              <a:rPr lang="en-US" sz="1000" i="1" dirty="0">
+                <a:solidFill>
+                  <a:srgbClr val="D62839"/>
+                </a:solidFill>
+                <a:latin typeface="Noto Sans CJK KR" pitchFamily="34" charset="0"/>
+                <a:ea typeface="Noto Sans CJK KR" pitchFamily="34" charset="-122"/>
+                <a:cs typeface="Noto Sans CJK KR" pitchFamily="34" charset="-120"/>
+              </a:rPr>
+              <a:t>Brick Street</a:t>
+            </a:r>
+            <a:endParaRPr lang="en-US" sz="1000" dirty="0"/>
+          </a:p>
+        </p:txBody>
+      </p:sp>
+      <p:sp>
+        <p:nvSpPr>
+          <p:cNvPr id="57" name="Text 55"/>
+          <p:cNvSpPr txBox="1"/>
+          <p:nvPr/>
+        </p:nvSpPr>
+        <p:spPr>
+          <a:xfrm>
+            <a:off x="8211312" y="5193792"/>
+            <a:ext cx="3328416" cy="713232"/>
+          </a:xfrm>
+          <a:prstGeom prst="rect">
+            <a:avLst/>
+          </a:prstGeom>
+          <a:noFill/>
+          <a:ln/>
+        </p:spPr>
+        <p:txBody>
+          <a:bodyPr wrap="square" lIns="0" tIns="0" rIns="0" bIns="0" rtlCol="0" anchor="t"/>
+          <a:lstStyle/>
+          <a:p>
+            <a:pPr indent="0" marL="0">
+              <a:buNone/>
+            </a:pPr>
+            <a:r>
+              <a:rPr lang="en-US" sz="1000" dirty="0">
+                <a:solidFill>
+                  <a:srgbClr val="5C5749"/>
+                </a:solidFill>
+                <a:latin typeface="Noto Sans CJK KR" pitchFamily="34" charset="0"/>
+                <a:ea typeface="Noto Sans CJK KR" pitchFamily="34" charset="-122"/>
+                <a:cs typeface="Noto Sans CJK KR" pitchFamily="34" charset="-120"/>
+              </a:rPr>
+              <a:t>미니피겨 크기로 LEGO 생산 과정 견학. 이 파크 전용</a:t>
+            </a:r>
+            <a:endParaRPr lang="en-US" sz="1000" dirty="0"/>
+          </a:p>
+        </p:txBody>
+      </p:sp>
+      <p:sp>
+        <p:nvSpPr>
+          <p:cNvPr id="58" name="Text 56"/>
+          <p:cNvSpPr txBox="1"/>
+          <p:nvPr/>
+        </p:nvSpPr>
+        <p:spPr>
+          <a:xfrm>
+            <a:off x="457200" y="6537960"/>
+            <a:ext cx="10515600" cy="274320"/>
+          </a:xfrm>
+          <a:prstGeom prst="rect">
+            <a:avLst/>
+          </a:prstGeom>
+          <a:noFill/>
+          <a:ln/>
+        </p:spPr>
+        <p:txBody>
+          <a:bodyPr wrap="square" lIns="0" tIns="0" rIns="0" bIns="0" rtlCol="0" anchor="ctr"/>
+          <a:lstStyle/>
+          <a:p>
+            <a:pPr indent="0" marL="0">
+              <a:buNone/>
+            </a:pPr>
+            <a:r>
+              <a:rPr lang="en-US" sz="900" dirty="0">
+                <a:solidFill>
+                  <a:srgbClr val="5C5749"/>
+                </a:solidFill>
+                <a:latin typeface="Noto Sans CJK KR" pitchFamily="34" charset="0"/>
+                <a:ea typeface="Noto Sans CJK KR" pitchFamily="34" charset="-122"/>
+                <a:cs typeface="Noto Sans CJK KR" pitchFamily="34" charset="-120"/>
+              </a:rPr>
+              <a:t>레고랜드 코리아 · 2026-09-23(수) · 아빠+첫째(8세·130cm)+둘째(3세후반·101cm)</a:t>
+            </a:r>
+            <a:endParaRPr lang="en-US" sz="900" dirty="0"/>
+          </a:p>
+        </p:txBody>
+      </p:sp>
+      <p:sp>
+        <p:nvSpPr>
+          <p:cNvPr id="59" name="Text 57"/>
+          <p:cNvSpPr txBox="1"/>
+          <p:nvPr/>
+        </p:nvSpPr>
+        <p:spPr>
+          <a:xfrm>
+            <a:off x="11430000" y="6537960"/>
+            <a:ext cx="365760" cy="274320"/>
+          </a:xfrm>
+          <a:prstGeom prst="rect">
+            <a:avLst/>
+          </a:prstGeom>
+          <a:noFill/>
+          <a:ln/>
+        </p:spPr>
+        <p:txBody>
+          <a:bodyPr wrap="square" lIns="0" tIns="0" rIns="0" bIns="0" rtlCol="0" anchor="ctr"/>
+          <a:lstStyle/>
+          <a:p>
+            <a:pPr algn="r" indent="0" marL="0">
+              <a:buNone/>
+            </a:pPr>
+            <a:r>
+              <a:rPr lang="en-US" sz="900" dirty="0">
+                <a:solidFill>
+                  <a:srgbClr val="5C5749"/>
+                </a:solidFill>
+                <a:latin typeface="Noto Sans CJK KR" pitchFamily="34" charset="0"/>
+                <a:ea typeface="Noto Sans CJK KR" pitchFamily="34" charset="-122"/>
+                <a:cs typeface="Noto Sans CJK KR" pitchFamily="34" charset="-120"/>
+              </a:rPr>
+              <a:t>7</a:t>
+            </a:r>
+            <a:endParaRPr lang="en-US" sz="900" dirty="0"/>
+          </a:p>
+        </p:txBody>
+      </p:sp>
+    </p:spTree>
+  </p:cSld>
+  <p:clrMapOvr>
+    <a:masterClrMapping/>
+  </p:clrMapOvr>
+</p:sld>
+</file>
+
+<file path=ppt/slides/slide8.xml><?xml version="1.0" encoding="utf-8"?>
+<p:sld xmlns:a="http://schemas.openxmlformats.org/drawingml/2006/main" xmlns:r="http://schemas.openxmlformats.org/officeDocument/2006/relationships" xmlns:p="http://schemas.openxmlformats.org/presentationml/2006/main">
+  <p:cSld name="Slide 8">
+    <p:bg>
+      <p:bgPr>
+        <a:solidFill>
+          <a:srgbClr val="FFFFFF"/>
+        </a:solidFill>
+      </p:bgPr>
+    </p:bg>
+    <p:spTree>
+      <p:nvGrpSpPr>
+        <p:cNvPr id="1" name=""/>
+        <p:cNvGrpSpPr/>
+        <p:nvPr/>
+      </p:nvGrpSpPr>
+      <p:grpSpPr>
+        <a:xfrm>
+          <a:off x="0" y="0"/>
+          <a:ext cx="0" cy="0"/>
+          <a:chOff x="0" y="0"/>
+          <a:chExt cx="0" cy="0"/>
+        </a:xfrm>
+      </p:grpSpPr>
+      <p:sp>
+        <p:nvSpPr>
+          <p:cNvPr id="2" name="Text 0"/>
+          <p:cNvSpPr txBox="1"/>
+          <p:nvPr/>
+        </p:nvSpPr>
+        <p:spPr>
+          <a:xfrm>
+            <a:off x="457200" y="320040"/>
+            <a:ext cx="11247120" cy="320040"/>
+          </a:xfrm>
+          <a:prstGeom prst="rect">
+            <a:avLst/>
+          </a:prstGeom>
+          <a:noFill/>
+          <a:ln/>
+        </p:spPr>
+        <p:txBody>
+          <a:bodyPr wrap="square" lIns="0" tIns="0" rIns="0" bIns="0" rtlCol="0" anchor="ctr"/>
+          <a:lstStyle/>
+          <a:p>
+            <a:pPr indent="0" marL="0">
+              <a:buNone/>
+            </a:pPr>
+            <a:r>
+              <a:rPr lang="en-US" sz="1200" b="1" dirty="0">
+                <a:solidFill>
+                  <a:srgbClr val="D62839"/>
+                </a:solidFill>
+                <a:latin typeface="Noto Sans CJK KR" pitchFamily="34" charset="0"/>
+                <a:ea typeface="Noto Sans CJK KR" pitchFamily="34" charset="-122"/>
+                <a:cs typeface="Noto Sans CJK KR" pitchFamily="34" charset="-120"/>
+              </a:rPr>
               <a:t>CINEMA — RE-VERIFIED</a:t>
             </a:r>
             <a:endParaRPr lang="en-US" sz="1200" dirty="0"/>
@@ -10433,7 +13073,7 @@
       </p:sp>
       <p:graphicFrame>
         <p:nvGraphicFramePr>
-          <p:cNvPr id="8" name="Table 0"/>
+          <p:cNvPr id="9" name="Table 0"/>
           <p:cNvGraphicFramePr>
             <a:graphicFrameLocks noGrp="1"/>
           </p:cNvGraphicFramePr>
@@ -11937,7 +14577,7 @@
                 <a:ea typeface="Noto Sans CJK KR" pitchFamily="34" charset="-122"/>
                 <a:cs typeface="Noto Sans CJK KR" pitchFamily="34" charset="-120"/>
               </a:rPr>
-              <a:t>→ LEGO City 구간(13:25~14:35) 안에서 도착 즉시 앱으로 상영 시각을 확인하고 그 사이 시간에 맞춰 넣습니다.</a:t>
+              <a:t>→ LEGO City 구간(13:00~14:05) 안에서 도착 즉시 앱으로 상영 시각을 확인하고 그 사이 시간에 맞춰 넣습니다.</a:t>
             </a:r>
             <a:endParaRPr lang="en-US" sz="1300" dirty="0"/>
           </a:p>
@@ -12015,7 +14655,7 @@
                 <a:ea typeface="Noto Sans CJK KR" pitchFamily="34" charset="-122"/>
                 <a:cs typeface="Noto Sans CJK KR" pitchFamily="34" charset="-120"/>
               </a:rPr>
-              <a:t>7</a:t>
+              <a:t>8</a:t>
             </a:r>
             <a:endParaRPr lang="en-US" sz="900" dirty="0"/>
           </a:p>
@@ -12029,9 +14669,9 @@
 </p:sld>
 </file>
 
-<file path=ppt/slides/slide8.xml><?xml version="1.0" encoding="utf-8"?>
+<file path=ppt/slides/slide9.xml><?xml version="1.0" encoding="utf-8"?>
 <p:sld xmlns:a="http://schemas.openxmlformats.org/drawingml/2006/main" xmlns:r="http://schemas.openxmlformats.org/officeDocument/2006/relationships" xmlns:p="http://schemas.openxmlformats.org/presentationml/2006/main">
-  <p:cSld name="Slide 8">
+  <p:cSld name="Slide 9">
     <p:bg>
       <p:bgPr>
         <a:solidFill>
@@ -12599,7 +15239,7 @@
                 <a:ea typeface="Noto Sans CJK KR" pitchFamily="34" charset="-122"/>
                 <a:cs typeface="Noto Sans CJK KR" pitchFamily="34" charset="-120"/>
               </a:rPr>
-              <a:t>완주 시 몬스터 배지 + 젤리 수령 (16:00~16:30, Brick Street)</a:t>
+              <a:t>완주 시 몬스터 배지 + 젤리 수령 (16:20~16:45, Brick Street)</a:t>
             </a:r>
             <a:endParaRPr lang="en-US" sz="1150" dirty="0"/>
           </a:p>
@@ -13046,7 +15686,7 @@
                 <a:ea typeface="Noto Sans CJK KR" pitchFamily="34" charset="-122"/>
                 <a:cs typeface="Noto Sans CJK KR" pitchFamily="34" charset="-120"/>
               </a:rPr>
-              <a:t>8</a:t>
+              <a:t>9</a:t>
             </a:r>
             <a:endParaRPr lang="en-US" sz="900" dirty="0"/>
           </a:p>

--- a/family-outings/assets/legoland_20260923_plan.pptx
+++ b/family-outings/assets/legoland_20260923_plan.pptx
@@ -14,9 +14,10 @@
     <p:sldId id="262" r:id="rId8"/>
     <p:sldId id="263" r:id="rId9"/>
     <p:sldId id="264" r:id="rId10"/>
+    <p:sldId id="265" r:id="rId11"/>
   </p:sldIdLst>
   <p:notesMasterIdLst>
-    <p:notesMasterId r:id="rId11"/>
+    <p:notesMasterId r:id="rId12"/>
   </p:notesMasterIdLst>
   <p:sldSz cx="12192000" cy="6858000"/>
   <p:notesSz cx="6858000" cy="12192000"/>
@@ -534,6 +535,94 @@
             <a:fld id="{F7021451-1387-4CA6-816F-3879F97B5CBC}" type="slidenum">
               <a:rPr lang="en-US"/>
               <a:t>1</a:t>
+            </a:fld>
+            <a:endParaRPr lang="en-US"/>
+          </a:p>
+        </p:txBody>
+      </p:sp>
+    </p:spTree>
+    <p:extLst>
+      <p:ext uri="{BB962C8B-B14F-4D97-AF65-F5344CB8AC3E}">
+        <p14:creationId xmlns:p14="http://schemas.microsoft.com/office/powerpoint/2010/main" val="1024086991"/>
+      </p:ext>
+    </p:extLst>
+  </p:cSld>
+  <p:clrMapOvr>
+    <a:masterClrMapping/>
+  </p:clrMapOvr>
+</p:notes>
+</file>
+
+<file path=ppt/notesSlides/notesSlide10.xml><?xml version="1.0" encoding="utf-8"?>
+<p:notes xmlns:a="http://schemas.openxmlformats.org/drawingml/2006/main" xmlns:r="http://schemas.openxmlformats.org/officeDocument/2006/relationships" xmlns:p="http://schemas.openxmlformats.org/presentationml/2006/main">
+  <p:cSld>
+    <p:spTree>
+      <p:nvGrpSpPr>
+        <p:cNvPr id="1" name=""/>
+        <p:cNvGrpSpPr/>
+        <p:nvPr/>
+      </p:nvGrpSpPr>
+      <p:grpSpPr>
+        <a:xfrm>
+          <a:off x="0" y="0"/>
+          <a:ext cx="0" cy="0"/>
+          <a:chOff x="0" y="0"/>
+          <a:chExt cx="0" cy="0"/>
+        </a:xfrm>
+      </p:grpSpPr>
+      <p:sp>
+        <p:nvSpPr>
+          <p:cNvPr id="2" name="Slide Image Placeholder 1"/>
+          <p:cNvSpPr>
+            <a:spLocks noGrp="1" noRot="1" noChangeAspect="1"/>
+          </p:cNvSpPr>
+          <p:nvPr>
+            <p:ph type="sldImg"/>
+          </p:nvPr>
+        </p:nvSpPr>
+        <p:spPr/>
+      </p:sp>
+      <p:sp>
+        <p:nvSpPr>
+          <p:cNvPr id="3" name="Notes Placeholder 2"/>
+          <p:cNvSpPr>
+            <a:spLocks noGrp="1"/>
+          </p:cNvSpPr>
+          <p:nvPr>
+            <p:ph type="body" idx="1"/>
+          </p:nvPr>
+        </p:nvSpPr>
+        <p:spPr/>
+        <p:txBody>
+          <a:bodyPr/>
+          <a:lstStyle/>
+          <a:p>
+            <a:r>
+              <a:rPr lang="en-US" dirty="0"/>
+              <a:t/>
+            </a:r>
+            <a:endParaRPr lang="en-US" dirty="0"/>
+          </a:p>
+        </p:txBody>
+      </p:sp>
+      <p:sp>
+        <p:nvSpPr>
+          <p:cNvPr id="4" name="Slide Number Placeholder 3"/>
+          <p:cNvSpPr>
+            <a:spLocks noGrp="1"/>
+          </p:cNvSpPr>
+          <p:nvPr>
+            <p:ph type="sldNum" sz="quarter" idx="10"/>
+          </p:nvPr>
+        </p:nvSpPr>
+        <p:spPr/>
+        <p:txBody>
+          <a:bodyPr/>
+          <a:lstStyle/>
+          <a:p>
+            <a:fld id="{F7021451-1387-4CA6-816F-3879F97B5CBC}" type="slidenum">
+              <a:rPr lang="en-US"/>
+              <a:t>10</a:t>
             </a:fld>
             <a:endParaRPr lang="en-US"/>
           </a:p>
@@ -2036,6 +2125,1037 @@
 </p:sld>
 </file>
 
+<file path=ppt/slides/slide10.xml><?xml version="1.0" encoding="utf-8"?>
+<p:sld xmlns:a="http://schemas.openxmlformats.org/drawingml/2006/main" xmlns:r="http://schemas.openxmlformats.org/officeDocument/2006/relationships" xmlns:p="http://schemas.openxmlformats.org/presentationml/2006/main">
+  <p:cSld name="Slide 10">
+    <p:bg>
+      <p:bgPr>
+        <a:solidFill>
+          <a:srgbClr val="FFFFFF"/>
+        </a:solidFill>
+      </p:bgPr>
+    </p:bg>
+    <p:spTree>
+      <p:nvGrpSpPr>
+        <p:cNvPr id="1" name=""/>
+        <p:cNvGrpSpPr/>
+        <p:nvPr/>
+      </p:nvGrpSpPr>
+      <p:grpSpPr>
+        <a:xfrm>
+          <a:off x="0" y="0"/>
+          <a:ext cx="0" cy="0"/>
+          <a:chOff x="0" y="0"/>
+          <a:chExt cx="0" cy="0"/>
+        </a:xfrm>
+      </p:grpSpPr>
+      <p:sp>
+        <p:nvSpPr>
+          <p:cNvPr id="2" name="Text 0"/>
+          <p:cNvSpPr txBox="1"/>
+          <p:nvPr/>
+        </p:nvSpPr>
+        <p:spPr>
+          <a:xfrm>
+            <a:off x="457200" y="320040"/>
+            <a:ext cx="11247120" cy="320040"/>
+          </a:xfrm>
+          <a:prstGeom prst="rect">
+            <a:avLst/>
+          </a:prstGeom>
+          <a:noFill/>
+          <a:ln/>
+        </p:spPr>
+        <p:txBody>
+          <a:bodyPr wrap="square" lIns="0" tIns="0" rIns="0" bIns="0" rtlCol="0" anchor="ctr"/>
+          <a:lstStyle/>
+          <a:p>
+            <a:pPr indent="0" marL="0">
+              <a:buNone/>
+            </a:pPr>
+            <a:r>
+              <a:rPr lang="en-US" sz="1200" b="1" dirty="0">
+                <a:solidFill>
+                  <a:srgbClr val="D62839"/>
+                </a:solidFill>
+                <a:latin typeface="Noto Sans CJK KR" pitchFamily="34" charset="0"/>
+                <a:ea typeface="Noto Sans CJK KR" pitchFamily="34" charset="-122"/>
+                <a:cs typeface="Noto Sans CJK KR" pitchFamily="34" charset="-120"/>
+              </a:rPr>
+              <a:t>STAMPS &amp; CHECKLIST</a:t>
+            </a:r>
+            <a:endParaRPr lang="en-US" sz="1200" dirty="0"/>
+          </a:p>
+        </p:txBody>
+      </p:sp>
+      <p:sp>
+        <p:nvSpPr>
+          <p:cNvPr id="3" name="Text 1"/>
+          <p:cNvSpPr txBox="1"/>
+          <p:nvPr/>
+        </p:nvSpPr>
+        <p:spPr>
+          <a:xfrm>
+            <a:off x="457200" y="594360"/>
+            <a:ext cx="11247120" cy="548640"/>
+          </a:xfrm>
+          <a:prstGeom prst="rect">
+            <a:avLst/>
+          </a:prstGeom>
+          <a:noFill/>
+          <a:ln/>
+        </p:spPr>
+        <p:txBody>
+          <a:bodyPr wrap="square" lIns="0" tIns="0" rIns="0" bIns="0" rtlCol="0" anchor="ctr"/>
+          <a:lstStyle/>
+          <a:p>
+            <a:pPr indent="0" marL="0">
+              <a:buNone/>
+            </a:pPr>
+            <a:r>
+              <a:rPr lang="en-US" sz="2600" b="1" dirty="0">
+                <a:solidFill>
+                  <a:srgbClr val="1A2440"/>
+                </a:solidFill>
+                <a:latin typeface="Noto Sans CJK KR" pitchFamily="34" charset="0"/>
+                <a:ea typeface="Noto Sans CJK KR" pitchFamily="34" charset="-122"/>
+                <a:cs typeface="Noto Sans CJK KR" pitchFamily="34" charset="-120"/>
+              </a:rPr>
+              <a:t>몬스터 랠리 스탬프 6곳 · 최종 체크리스트</a:t>
+            </a:r>
+            <a:endParaRPr lang="en-US" sz="2600" dirty="0"/>
+          </a:p>
+        </p:txBody>
+      </p:sp>
+      <p:sp>
+        <p:nvSpPr>
+          <p:cNvPr id="4" name="Text 2"/>
+          <p:cNvSpPr txBox="1"/>
+          <p:nvPr/>
+        </p:nvSpPr>
+        <p:spPr>
+          <a:xfrm>
+            <a:off x="457200" y="1371600"/>
+            <a:ext cx="5486400" cy="365760"/>
+          </a:xfrm>
+          <a:prstGeom prst="rect">
+            <a:avLst/>
+          </a:prstGeom>
+          <a:noFill/>
+          <a:ln/>
+        </p:spPr>
+        <p:txBody>
+          <a:bodyPr wrap="square" lIns="0" tIns="0" rIns="0" bIns="0" rtlCol="0" anchor="ctr"/>
+          <a:lstStyle/>
+          <a:p>
+            <a:pPr indent="0" marL="0">
+              <a:buNone/>
+            </a:pPr>
+            <a:r>
+              <a:rPr lang="en-US" sz="1500" b="1" dirty="0">
+                <a:solidFill>
+                  <a:srgbClr val="1A2440"/>
+                </a:solidFill>
+                <a:latin typeface="Noto Sans CJK KR" pitchFamily="34" charset="0"/>
+                <a:ea typeface="Noto Sans CJK KR" pitchFamily="34" charset="-122"/>
+                <a:cs typeface="Noto Sans CJK KR" pitchFamily="34" charset="-120"/>
+              </a:rPr>
+              <a:t>몬스터 랠리 스탬프 6곳</a:t>
+            </a:r>
+            <a:endParaRPr lang="en-US" sz="1500" dirty="0"/>
+          </a:p>
+        </p:txBody>
+      </p:sp>
+      <p:sp>
+        <p:nvSpPr>
+          <p:cNvPr id="5" name="Shape 3"/>
+          <p:cNvSpPr/>
+          <p:nvPr/>
+        </p:nvSpPr>
+        <p:spPr>
+          <a:xfrm>
+            <a:off x="457200" y="1828800"/>
+            <a:ext cx="5486400" cy="411480"/>
+          </a:xfrm>
+          <a:prstGeom prst="roundRect">
+            <a:avLst>
+              <a:gd name="adj" fmla="val 13333"/>
+            </a:avLst>
+          </a:prstGeom>
+          <a:solidFill>
+            <a:srgbClr val="F5F6F8"/>
+          </a:solidFill>
+          <a:ln w="9525">
+            <a:solidFill>
+              <a:srgbClr val="E2E4E8"/>
+            </a:solidFill>
+            <a:prstDash val="solid"/>
+          </a:ln>
+        </p:spPr>
+      </p:sp>
+      <p:sp>
+        <p:nvSpPr>
+          <p:cNvPr id="6" name="Text 4"/>
+          <p:cNvSpPr txBox="1"/>
+          <p:nvPr/>
+        </p:nvSpPr>
+        <p:spPr>
+          <a:xfrm>
+            <a:off x="685800" y="1828800"/>
+            <a:ext cx="5029200" cy="411480"/>
+          </a:xfrm>
+          <a:prstGeom prst="rect">
+            <a:avLst/>
+          </a:prstGeom>
+          <a:noFill/>
+          <a:ln/>
+        </p:spPr>
+        <p:txBody>
+          <a:bodyPr wrap="square" lIns="0" tIns="0" rIns="0" bIns="0" rtlCol="0" anchor="ctr"/>
+          <a:lstStyle/>
+          <a:p>
+            <a:pPr indent="0" marL="0">
+              <a:buNone/>
+            </a:pPr>
+            <a:r>
+              <a:rPr lang="en-US" sz="1250" dirty="0">
+                <a:solidFill>
+                  <a:srgbClr val="1A2440"/>
+                </a:solidFill>
+                <a:latin typeface="Noto Sans CJK KR" pitchFamily="34" charset="0"/>
+                <a:ea typeface="Noto Sans CJK KR" pitchFamily="34" charset="-122"/>
+                <a:cs typeface="Noto Sans CJK KR" pitchFamily="34" charset="-120"/>
+              </a:rPr>
+              <a:t>① 드래곤 코스터</a:t>
+            </a:r>
+            <a:endParaRPr lang="en-US" sz="1250" dirty="0"/>
+          </a:p>
+        </p:txBody>
+      </p:sp>
+      <p:sp>
+        <p:nvSpPr>
+          <p:cNvPr id="7" name="Shape 5"/>
+          <p:cNvSpPr/>
+          <p:nvPr/>
+        </p:nvSpPr>
+        <p:spPr>
+          <a:xfrm>
+            <a:off x="457200" y="2331720"/>
+            <a:ext cx="5486400" cy="411480"/>
+          </a:xfrm>
+          <a:prstGeom prst="roundRect">
+            <a:avLst>
+              <a:gd name="adj" fmla="val 13333"/>
+            </a:avLst>
+          </a:prstGeom>
+          <a:solidFill>
+            <a:srgbClr val="FFFFFF"/>
+          </a:solidFill>
+          <a:ln w="9525">
+            <a:solidFill>
+              <a:srgbClr val="E2E4E8"/>
+            </a:solidFill>
+            <a:prstDash val="solid"/>
+          </a:ln>
+        </p:spPr>
+      </p:sp>
+      <p:sp>
+        <p:nvSpPr>
+          <p:cNvPr id="8" name="Text 6"/>
+          <p:cNvSpPr txBox="1"/>
+          <p:nvPr/>
+        </p:nvSpPr>
+        <p:spPr>
+          <a:xfrm>
+            <a:off x="685800" y="2331720"/>
+            <a:ext cx="5029200" cy="411480"/>
+          </a:xfrm>
+          <a:prstGeom prst="rect">
+            <a:avLst/>
+          </a:prstGeom>
+          <a:noFill/>
+          <a:ln/>
+        </p:spPr>
+        <p:txBody>
+          <a:bodyPr wrap="square" lIns="0" tIns="0" rIns="0" bIns="0" rtlCol="0" anchor="ctr"/>
+          <a:lstStyle/>
+          <a:p>
+            <a:pPr indent="0" marL="0">
+              <a:buNone/>
+            </a:pPr>
+            <a:r>
+              <a:rPr lang="en-US" sz="1250" dirty="0">
+                <a:solidFill>
+                  <a:srgbClr val="1A2440"/>
+                </a:solidFill>
+                <a:latin typeface="Noto Sans CJK KR" pitchFamily="34" charset="0"/>
+                <a:ea typeface="Noto Sans CJK KR" pitchFamily="34" charset="-122"/>
+                <a:cs typeface="Noto Sans CJK KR" pitchFamily="34" charset="-120"/>
+              </a:rPr>
+              <a:t>② Masters of Spinjitzu</a:t>
+            </a:r>
+            <a:endParaRPr lang="en-US" sz="1250" dirty="0"/>
+          </a:p>
+        </p:txBody>
+      </p:sp>
+      <p:sp>
+        <p:nvSpPr>
+          <p:cNvPr id="9" name="Shape 7"/>
+          <p:cNvSpPr/>
+          <p:nvPr/>
+        </p:nvSpPr>
+        <p:spPr>
+          <a:xfrm>
+            <a:off x="457200" y="2834640"/>
+            <a:ext cx="5486400" cy="411480"/>
+          </a:xfrm>
+          <a:prstGeom prst="roundRect">
+            <a:avLst>
+              <a:gd name="adj" fmla="val 13333"/>
+            </a:avLst>
+          </a:prstGeom>
+          <a:solidFill>
+            <a:srgbClr val="F5F6F8"/>
+          </a:solidFill>
+          <a:ln w="9525">
+            <a:solidFill>
+              <a:srgbClr val="E2E4E8"/>
+            </a:solidFill>
+            <a:prstDash val="solid"/>
+          </a:ln>
+        </p:spPr>
+      </p:sp>
+      <p:sp>
+        <p:nvSpPr>
+          <p:cNvPr id="10" name="Text 8"/>
+          <p:cNvSpPr txBox="1"/>
+          <p:nvPr/>
+        </p:nvSpPr>
+        <p:spPr>
+          <a:xfrm>
+            <a:off x="685800" y="2834640"/>
+            <a:ext cx="5029200" cy="411480"/>
+          </a:xfrm>
+          <a:prstGeom prst="rect">
+            <a:avLst/>
+          </a:prstGeom>
+          <a:noFill/>
+          <a:ln/>
+        </p:spPr>
+        <p:txBody>
+          <a:bodyPr wrap="square" lIns="0" tIns="0" rIns="0" bIns="0" rtlCol="0" anchor="ctr"/>
+          <a:lstStyle/>
+          <a:p>
+            <a:pPr indent="0" marL="0">
+              <a:buNone/>
+            </a:pPr>
+            <a:r>
+              <a:rPr lang="en-US" sz="1250" dirty="0">
+                <a:solidFill>
+                  <a:srgbClr val="1A2440"/>
+                </a:solidFill>
+                <a:latin typeface="Noto Sans CJK KR" pitchFamily="34" charset="0"/>
+                <a:ea typeface="Noto Sans CJK KR" pitchFamily="34" charset="-122"/>
+                <a:cs typeface="Noto Sans CJK KR" pitchFamily="34" charset="-120"/>
+              </a:rPr>
+              <a:t>③ NINJAGO The Ride</a:t>
+            </a:r>
+            <a:endParaRPr lang="en-US" sz="1250" dirty="0"/>
+          </a:p>
+        </p:txBody>
+      </p:sp>
+      <p:sp>
+        <p:nvSpPr>
+          <p:cNvPr id="11" name="Shape 9"/>
+          <p:cNvSpPr/>
+          <p:nvPr/>
+        </p:nvSpPr>
+        <p:spPr>
+          <a:xfrm>
+            <a:off x="457200" y="3337560"/>
+            <a:ext cx="5486400" cy="411480"/>
+          </a:xfrm>
+          <a:prstGeom prst="roundRect">
+            <a:avLst>
+              <a:gd name="adj" fmla="val 13333"/>
+            </a:avLst>
+          </a:prstGeom>
+          <a:solidFill>
+            <a:srgbClr val="FFFFFF"/>
+          </a:solidFill>
+          <a:ln w="9525">
+            <a:solidFill>
+              <a:srgbClr val="E2E4E8"/>
+            </a:solidFill>
+            <a:prstDash val="solid"/>
+          </a:ln>
+        </p:spPr>
+      </p:sp>
+      <p:sp>
+        <p:nvSpPr>
+          <p:cNvPr id="12" name="Text 10"/>
+          <p:cNvSpPr txBox="1"/>
+          <p:nvPr/>
+        </p:nvSpPr>
+        <p:spPr>
+          <a:xfrm>
+            <a:off x="685800" y="3337560"/>
+            <a:ext cx="5029200" cy="411480"/>
+          </a:xfrm>
+          <a:prstGeom prst="rect">
+            <a:avLst/>
+          </a:prstGeom>
+          <a:noFill/>
+          <a:ln/>
+        </p:spPr>
+        <p:txBody>
+          <a:bodyPr wrap="square" lIns="0" tIns="0" rIns="0" bIns="0" rtlCol="0" anchor="ctr"/>
+          <a:lstStyle/>
+          <a:p>
+            <a:pPr indent="0" marL="0">
+              <a:buNone/>
+            </a:pPr>
+            <a:r>
+              <a:rPr lang="en-US" sz="1250" dirty="0">
+                <a:solidFill>
+                  <a:srgbClr val="1A2440"/>
+                </a:solidFill>
+                <a:latin typeface="Noto Sans CJK KR" pitchFamily="34" charset="0"/>
+                <a:ea typeface="Noto Sans CJK KR" pitchFamily="34" charset="-122"/>
+                <a:cs typeface="Noto Sans CJK KR" pitchFamily="34" charset="-120"/>
+              </a:rPr>
+              <a:t>④ LEGOLAND Lookout</a:t>
+            </a:r>
+            <a:endParaRPr lang="en-US" sz="1250" dirty="0"/>
+          </a:p>
+        </p:txBody>
+      </p:sp>
+      <p:sp>
+        <p:nvSpPr>
+          <p:cNvPr id="13" name="Shape 11"/>
+          <p:cNvSpPr/>
+          <p:nvPr/>
+        </p:nvSpPr>
+        <p:spPr>
+          <a:xfrm>
+            <a:off x="457200" y="3840480"/>
+            <a:ext cx="5486400" cy="411480"/>
+          </a:xfrm>
+          <a:prstGeom prst="roundRect">
+            <a:avLst>
+              <a:gd name="adj" fmla="val 13333"/>
+            </a:avLst>
+          </a:prstGeom>
+          <a:solidFill>
+            <a:srgbClr val="F5F6F8"/>
+          </a:solidFill>
+          <a:ln w="9525">
+            <a:solidFill>
+              <a:srgbClr val="E2E4E8"/>
+            </a:solidFill>
+            <a:prstDash val="solid"/>
+          </a:ln>
+        </p:spPr>
+      </p:sp>
+      <p:sp>
+        <p:nvSpPr>
+          <p:cNvPr id="14" name="Text 12"/>
+          <p:cNvSpPr txBox="1"/>
+          <p:nvPr/>
+        </p:nvSpPr>
+        <p:spPr>
+          <a:xfrm>
+            <a:off x="685800" y="3840480"/>
+            <a:ext cx="5029200" cy="411480"/>
+          </a:xfrm>
+          <a:prstGeom prst="rect">
+            <a:avLst/>
+          </a:prstGeom>
+          <a:noFill/>
+          <a:ln/>
+        </p:spPr>
+        <p:txBody>
+          <a:bodyPr wrap="square" lIns="0" tIns="0" rIns="0" bIns="0" rtlCol="0" anchor="ctr"/>
+          <a:lstStyle/>
+          <a:p>
+            <a:pPr indent="0" marL="0">
+              <a:buNone/>
+            </a:pPr>
+            <a:r>
+              <a:rPr lang="en-US" sz="1250" dirty="0">
+                <a:solidFill>
+                  <a:srgbClr val="1A2440"/>
+                </a:solidFill>
+                <a:latin typeface="Noto Sans CJK KR" pitchFamily="34" charset="0"/>
+                <a:ea typeface="Noto Sans CJK KR" pitchFamily="34" charset="-122"/>
+                <a:cs typeface="Noto Sans CJK KR" pitchFamily="34" charset="-120"/>
+              </a:rPr>
+              <a:t>⑤ 브릭토피아 라운지</a:t>
+            </a:r>
+            <a:endParaRPr lang="en-US" sz="1250" dirty="0"/>
+          </a:p>
+        </p:txBody>
+      </p:sp>
+      <p:sp>
+        <p:nvSpPr>
+          <p:cNvPr id="15" name="Shape 13"/>
+          <p:cNvSpPr/>
+          <p:nvPr/>
+        </p:nvSpPr>
+        <p:spPr>
+          <a:xfrm>
+            <a:off x="457200" y="4343400"/>
+            <a:ext cx="5486400" cy="411480"/>
+          </a:xfrm>
+          <a:prstGeom prst="roundRect">
+            <a:avLst>
+              <a:gd name="adj" fmla="val 13333"/>
+            </a:avLst>
+          </a:prstGeom>
+          <a:solidFill>
+            <a:srgbClr val="FFFFFF"/>
+          </a:solidFill>
+          <a:ln w="9525">
+            <a:solidFill>
+              <a:srgbClr val="E2E4E8"/>
+            </a:solidFill>
+            <a:prstDash val="solid"/>
+          </a:ln>
+        </p:spPr>
+      </p:sp>
+      <p:sp>
+        <p:nvSpPr>
+          <p:cNvPr id="16" name="Text 14"/>
+          <p:cNvSpPr txBox="1"/>
+          <p:nvPr/>
+        </p:nvSpPr>
+        <p:spPr>
+          <a:xfrm>
+            <a:off x="685800" y="4343400"/>
+            <a:ext cx="5029200" cy="411480"/>
+          </a:xfrm>
+          <a:prstGeom prst="rect">
+            <a:avLst/>
+          </a:prstGeom>
+          <a:noFill/>
+          <a:ln/>
+        </p:spPr>
+        <p:txBody>
+          <a:bodyPr wrap="square" lIns="0" tIns="0" rIns="0" bIns="0" rtlCol="0" anchor="ctr"/>
+          <a:lstStyle/>
+          <a:p>
+            <a:pPr indent="0" marL="0">
+              <a:buNone/>
+            </a:pPr>
+            <a:r>
+              <a:rPr lang="en-US" sz="1250" dirty="0">
+                <a:solidFill>
+                  <a:srgbClr val="1A2440"/>
+                </a:solidFill>
+                <a:latin typeface="Noto Sans CJK KR" pitchFamily="34" charset="0"/>
+                <a:ea typeface="Noto Sans CJK KR" pitchFamily="34" charset="-122"/>
+                <a:cs typeface="Noto Sans CJK KR" pitchFamily="34" charset="-120"/>
+              </a:rPr>
+              <a:t>⑥ LEGO Factory Adventure</a:t>
+            </a:r>
+            <a:endParaRPr lang="en-US" sz="1250" dirty="0"/>
+          </a:p>
+        </p:txBody>
+      </p:sp>
+      <p:sp>
+        <p:nvSpPr>
+          <p:cNvPr id="17" name="Text 15"/>
+          <p:cNvSpPr txBox="1"/>
+          <p:nvPr/>
+        </p:nvSpPr>
+        <p:spPr>
+          <a:xfrm>
+            <a:off x="457200" y="4937760"/>
+            <a:ext cx="5486400" cy="365760"/>
+          </a:xfrm>
+          <a:prstGeom prst="rect">
+            <a:avLst/>
+          </a:prstGeom>
+          <a:noFill/>
+          <a:ln/>
+        </p:spPr>
+        <p:txBody>
+          <a:bodyPr wrap="square" lIns="0" tIns="0" rIns="0" bIns="0" rtlCol="0" anchor="ctr"/>
+          <a:lstStyle/>
+          <a:p>
+            <a:pPr indent="0" marL="0">
+              <a:buNone/>
+            </a:pPr>
+            <a:r>
+              <a:rPr lang="en-US" sz="1150" i="1" dirty="0">
+                <a:solidFill>
+                  <a:srgbClr val="5C5749"/>
+                </a:solidFill>
+                <a:latin typeface="Noto Sans CJK KR" pitchFamily="34" charset="0"/>
+                <a:ea typeface="Noto Sans CJK KR" pitchFamily="34" charset="-122"/>
+                <a:cs typeface="Noto Sans CJK KR" pitchFamily="34" charset="-120"/>
+              </a:rPr>
+              <a:t>완주 시 몬스터 배지 + 젤리 수령 (16:20~16:45, Brick Street)</a:t>
+            </a:r>
+            <a:endParaRPr lang="en-US" sz="1150" dirty="0"/>
+          </a:p>
+        </p:txBody>
+      </p:sp>
+      <p:sp>
+        <p:nvSpPr>
+          <p:cNvPr id="18" name="Text 16"/>
+          <p:cNvSpPr txBox="1"/>
+          <p:nvPr/>
+        </p:nvSpPr>
+        <p:spPr>
+          <a:xfrm>
+            <a:off x="6309360" y="1371600"/>
+            <a:ext cx="5394960" cy="365760"/>
+          </a:xfrm>
+          <a:prstGeom prst="rect">
+            <a:avLst/>
+          </a:prstGeom>
+          <a:noFill/>
+          <a:ln/>
+        </p:spPr>
+        <p:txBody>
+          <a:bodyPr wrap="square" lIns="0" tIns="0" rIns="0" bIns="0" rtlCol="0" anchor="ctr"/>
+          <a:lstStyle/>
+          <a:p>
+            <a:pPr indent="0" marL="0">
+              <a:buNone/>
+            </a:pPr>
+            <a:r>
+              <a:rPr lang="en-US" sz="1500" b="1" dirty="0">
+                <a:solidFill>
+                  <a:srgbClr val="1A2440"/>
+                </a:solidFill>
+                <a:latin typeface="Noto Sans CJK KR" pitchFamily="34" charset="0"/>
+                <a:ea typeface="Noto Sans CJK KR" pitchFamily="34" charset="-122"/>
+                <a:cs typeface="Noto Sans CJK KR" pitchFamily="34" charset="-120"/>
+              </a:rPr>
+              <a:t>현장에서 마지막으로 확인할 것</a:t>
+            </a:r>
+            <a:endParaRPr lang="en-US" sz="1500" dirty="0"/>
+          </a:p>
+        </p:txBody>
+      </p:sp>
+      <p:sp>
+        <p:nvSpPr>
+          <p:cNvPr id="19" name="Shape 17"/>
+          <p:cNvSpPr/>
+          <p:nvPr/>
+        </p:nvSpPr>
+        <p:spPr>
+          <a:xfrm>
+            <a:off x="6309360" y="1828800"/>
+            <a:ext cx="320040" cy="320040"/>
+          </a:xfrm>
+          <a:prstGeom prst="roundRect">
+            <a:avLst>
+              <a:gd name="adj" fmla="val 14286"/>
+            </a:avLst>
+          </a:prstGeom>
+          <a:solidFill>
+            <a:srgbClr val="FFFFFF"/>
+          </a:solidFill>
+          <a:ln w="19050">
+            <a:solidFill>
+              <a:srgbClr val="D62839"/>
+            </a:solidFill>
+            <a:prstDash val="solid"/>
+          </a:ln>
+        </p:spPr>
+      </p:sp>
+      <p:sp>
+        <p:nvSpPr>
+          <p:cNvPr id="20" name="Text 18"/>
+          <p:cNvSpPr txBox="1"/>
+          <p:nvPr/>
+        </p:nvSpPr>
+        <p:spPr>
+          <a:xfrm>
+            <a:off x="6766560" y="1783080"/>
+            <a:ext cx="4937760" cy="502920"/>
+          </a:xfrm>
+          <a:prstGeom prst="rect">
+            <a:avLst/>
+          </a:prstGeom>
+          <a:noFill/>
+          <a:ln/>
+        </p:spPr>
+        <p:txBody>
+          <a:bodyPr wrap="square" lIns="0" tIns="0" rIns="0" bIns="0" rtlCol="0" anchor="ctr"/>
+          <a:lstStyle/>
+          <a:p>
+            <a:pPr indent="0" marL="0">
+              <a:buNone/>
+            </a:pPr>
+            <a:r>
+              <a:rPr lang="en-US" sz="1200" dirty="0">
+                <a:solidFill>
+                  <a:srgbClr val="1A2440"/>
+                </a:solidFill>
+                <a:latin typeface="Noto Sans CJK KR" pitchFamily="34" charset="0"/>
+                <a:ea typeface="Noto Sans CJK KR" pitchFamily="34" charset="-122"/>
+                <a:cs typeface="Noto Sans CJK KR" pitchFamily="34" charset="-120"/>
+              </a:rPr>
+              <a:t>PINK 구역 배정 가능 여부 (안내 요원에게 요청)</a:t>
+            </a:r>
+            <a:endParaRPr lang="en-US" sz="1200" dirty="0"/>
+          </a:p>
+        </p:txBody>
+      </p:sp>
+      <p:sp>
+        <p:nvSpPr>
+          <p:cNvPr id="21" name="Shape 19"/>
+          <p:cNvSpPr/>
+          <p:nvPr/>
+        </p:nvSpPr>
+        <p:spPr>
+          <a:xfrm>
+            <a:off x="6309360" y="2395728"/>
+            <a:ext cx="320040" cy="320040"/>
+          </a:xfrm>
+          <a:prstGeom prst="roundRect">
+            <a:avLst>
+              <a:gd name="adj" fmla="val 14286"/>
+            </a:avLst>
+          </a:prstGeom>
+          <a:solidFill>
+            <a:srgbClr val="FFFFFF"/>
+          </a:solidFill>
+          <a:ln w="19050">
+            <a:solidFill>
+              <a:srgbClr val="D62839"/>
+            </a:solidFill>
+            <a:prstDash val="solid"/>
+          </a:ln>
+        </p:spPr>
+      </p:sp>
+      <p:sp>
+        <p:nvSpPr>
+          <p:cNvPr id="22" name="Text 20"/>
+          <p:cNvSpPr txBox="1"/>
+          <p:nvPr/>
+        </p:nvSpPr>
+        <p:spPr>
+          <a:xfrm>
+            <a:off x="6766560" y="2350008"/>
+            <a:ext cx="4937760" cy="502920"/>
+          </a:xfrm>
+          <a:prstGeom prst="rect">
+            <a:avLst/>
+          </a:prstGeom>
+          <a:noFill/>
+          <a:ln/>
+        </p:spPr>
+        <p:txBody>
+          <a:bodyPr wrap="square" lIns="0" tIns="0" rIns="0" bIns="0" rtlCol="0" anchor="ctr"/>
+          <a:lstStyle/>
+          <a:p>
+            <a:pPr indent="0" marL="0">
+              <a:buNone/>
+            </a:pPr>
+            <a:r>
+              <a:rPr lang="en-US" sz="1200" dirty="0">
+                <a:solidFill>
+                  <a:srgbClr val="1A2440"/>
+                </a:solidFill>
+                <a:latin typeface="Noto Sans CJK KR" pitchFamily="34" charset="0"/>
+                <a:ea typeface="Noto Sans CJK KR" pitchFamily="34" charset="-122"/>
+                <a:cs typeface="Noto Sans CJK KR" pitchFamily="34" charset="-120"/>
+              </a:rPr>
+              <a:t>몬스터 랠리 전단 — 스탬프 6곳 정확한 목록 재확인</a:t>
+            </a:r>
+            <a:endParaRPr lang="en-US" sz="1200" dirty="0"/>
+          </a:p>
+        </p:txBody>
+      </p:sp>
+      <p:sp>
+        <p:nvSpPr>
+          <p:cNvPr id="23" name="Shape 21"/>
+          <p:cNvSpPr/>
+          <p:nvPr/>
+        </p:nvSpPr>
+        <p:spPr>
+          <a:xfrm>
+            <a:off x="6309360" y="2962656"/>
+            <a:ext cx="320040" cy="320040"/>
+          </a:xfrm>
+          <a:prstGeom prst="roundRect">
+            <a:avLst>
+              <a:gd name="adj" fmla="val 14286"/>
+            </a:avLst>
+          </a:prstGeom>
+          <a:solidFill>
+            <a:srgbClr val="FFFFFF"/>
+          </a:solidFill>
+          <a:ln w="19050">
+            <a:solidFill>
+              <a:srgbClr val="D62839"/>
+            </a:solidFill>
+            <a:prstDash val="solid"/>
+          </a:ln>
+        </p:spPr>
+      </p:sp>
+      <p:sp>
+        <p:nvSpPr>
+          <p:cNvPr id="24" name="Text 22"/>
+          <p:cNvSpPr txBox="1"/>
+          <p:nvPr/>
+        </p:nvSpPr>
+        <p:spPr>
+          <a:xfrm>
+            <a:off x="6766560" y="2916936"/>
+            <a:ext cx="4937760" cy="502920"/>
+          </a:xfrm>
+          <a:prstGeom prst="rect">
+            <a:avLst/>
+          </a:prstGeom>
+          <a:noFill/>
+          <a:ln/>
+        </p:spPr>
+        <p:txBody>
+          <a:bodyPr wrap="square" lIns="0" tIns="0" rIns="0" bIns="0" rtlCol="0" anchor="ctr"/>
+          <a:lstStyle/>
+          <a:p>
+            <a:pPr indent="0" marL="0">
+              <a:buNone/>
+            </a:pPr>
+            <a:r>
+              <a:rPr lang="en-US" sz="1200" dirty="0">
+                <a:solidFill>
+                  <a:srgbClr val="1A2440"/>
+                </a:solidFill>
+                <a:latin typeface="Noto Sans CJK KR" pitchFamily="34" charset="0"/>
+                <a:ea typeface="Noto Sans CJK KR" pitchFamily="34" charset="-122"/>
+                <a:cs typeface="Noto Sans CJK KR" pitchFamily="34" charset="-120"/>
+              </a:rPr>
+              <a:t>Palace 4D Cinema 상영 시각 — 공식 앱</a:t>
+            </a:r>
+            <a:endParaRPr lang="en-US" sz="1200" dirty="0"/>
+          </a:p>
+        </p:txBody>
+      </p:sp>
+      <p:sp>
+        <p:nvSpPr>
+          <p:cNvPr id="25" name="Shape 23"/>
+          <p:cNvSpPr/>
+          <p:nvPr/>
+        </p:nvSpPr>
+        <p:spPr>
+          <a:xfrm>
+            <a:off x="6309360" y="3529584"/>
+            <a:ext cx="320040" cy="320040"/>
+          </a:xfrm>
+          <a:prstGeom prst="roundRect">
+            <a:avLst>
+              <a:gd name="adj" fmla="val 14286"/>
+            </a:avLst>
+          </a:prstGeom>
+          <a:solidFill>
+            <a:srgbClr val="FFFFFF"/>
+          </a:solidFill>
+          <a:ln w="19050">
+            <a:solidFill>
+              <a:srgbClr val="D62839"/>
+            </a:solidFill>
+            <a:prstDash val="solid"/>
+          </a:ln>
+        </p:spPr>
+      </p:sp>
+      <p:sp>
+        <p:nvSpPr>
+          <p:cNvPr id="26" name="Text 24"/>
+          <p:cNvSpPr txBox="1"/>
+          <p:nvPr/>
+        </p:nvSpPr>
+        <p:spPr>
+          <a:xfrm>
+            <a:off x="6766560" y="3483864"/>
+            <a:ext cx="4937760" cy="502920"/>
+          </a:xfrm>
+          <a:prstGeom prst="rect">
+            <a:avLst/>
+          </a:prstGeom>
+          <a:noFill/>
+          <a:ln/>
+        </p:spPr>
+        <p:txBody>
+          <a:bodyPr wrap="square" lIns="0" tIns="0" rIns="0" bIns="0" rtlCol="0" anchor="ctr"/>
+          <a:lstStyle/>
+          <a:p>
+            <a:pPr indent="0" marL="0">
+              <a:buNone/>
+            </a:pPr>
+            <a:r>
+              <a:rPr lang="en-US" sz="1200" dirty="0">
+                <a:solidFill>
+                  <a:srgbClr val="1A2440"/>
+                </a:solidFill>
+                <a:latin typeface="Noto Sans CJK KR" pitchFamily="34" charset="0"/>
+                <a:ea typeface="Noto Sans CJK KR" pitchFamily="34" charset="-122"/>
+                <a:cs typeface="Noto Sans CJK KR" pitchFamily="34" charset="-120"/>
+              </a:rPr>
+              <a:t>드래곤 코스터 대기시간 — 10:05 첫 확인 후 몰아타기 지속 여부 판단</a:t>
+            </a:r>
+            <a:endParaRPr lang="en-US" sz="1200" dirty="0"/>
+          </a:p>
+        </p:txBody>
+      </p:sp>
+      <p:sp>
+        <p:nvSpPr>
+          <p:cNvPr id="27" name="Shape 25"/>
+          <p:cNvSpPr/>
+          <p:nvPr/>
+        </p:nvSpPr>
+        <p:spPr>
+          <a:xfrm>
+            <a:off x="6309360" y="4096512"/>
+            <a:ext cx="320040" cy="320040"/>
+          </a:xfrm>
+          <a:prstGeom prst="roundRect">
+            <a:avLst>
+              <a:gd name="adj" fmla="val 14286"/>
+            </a:avLst>
+          </a:prstGeom>
+          <a:solidFill>
+            <a:srgbClr val="FFFFFF"/>
+          </a:solidFill>
+          <a:ln w="19050">
+            <a:solidFill>
+              <a:srgbClr val="D62839"/>
+            </a:solidFill>
+            <a:prstDash val="solid"/>
+          </a:ln>
+        </p:spPr>
+      </p:sp>
+      <p:sp>
+        <p:nvSpPr>
+          <p:cNvPr id="28" name="Text 26"/>
+          <p:cNvSpPr txBox="1"/>
+          <p:nvPr/>
+        </p:nvSpPr>
+        <p:spPr>
+          <a:xfrm>
+            <a:off x="6766560" y="4050792"/>
+            <a:ext cx="4937760" cy="502920"/>
+          </a:xfrm>
+          <a:prstGeom prst="rect">
+            <a:avLst/>
+          </a:prstGeom>
+          <a:noFill/>
+          <a:ln/>
+        </p:spPr>
+        <p:txBody>
+          <a:bodyPr wrap="square" lIns="0" tIns="0" rIns="0" bIns="0" rtlCol="0" anchor="ctr"/>
+          <a:lstStyle/>
+          <a:p>
+            <a:pPr indent="0" marL="0">
+              <a:buNone/>
+            </a:pPr>
+            <a:r>
+              <a:rPr lang="en-US" sz="1200" dirty="0">
+                <a:solidFill>
+                  <a:srgbClr val="1A2440"/>
+                </a:solidFill>
+                <a:latin typeface="Noto Sans CJK KR" pitchFamily="34" charset="0"/>
+                <a:ea typeface="Noto Sans CJK KR" pitchFamily="34" charset="-122"/>
+                <a:cs typeface="Noto Sans CJK KR" pitchFamily="34" charset="-120"/>
+              </a:rPr>
+              <a:t>웨건 셔틀 탑재 가능 여부(PINK 도보로 대체 시 불필요)</a:t>
+            </a:r>
+            <a:endParaRPr lang="en-US" sz="1200" dirty="0"/>
+          </a:p>
+        </p:txBody>
+      </p:sp>
+      <p:sp>
+        <p:nvSpPr>
+          <p:cNvPr id="29" name="Text 27"/>
+          <p:cNvSpPr txBox="1"/>
+          <p:nvPr/>
+        </p:nvSpPr>
+        <p:spPr>
+          <a:xfrm>
+            <a:off x="457200" y="6537960"/>
+            <a:ext cx="10515600" cy="274320"/>
+          </a:xfrm>
+          <a:prstGeom prst="rect">
+            <a:avLst/>
+          </a:prstGeom>
+          <a:noFill/>
+          <a:ln/>
+        </p:spPr>
+        <p:txBody>
+          <a:bodyPr wrap="square" lIns="0" tIns="0" rIns="0" bIns="0" rtlCol="0" anchor="ctr"/>
+          <a:lstStyle/>
+          <a:p>
+            <a:pPr indent="0" marL="0">
+              <a:buNone/>
+            </a:pPr>
+            <a:r>
+              <a:rPr lang="en-US" sz="900" dirty="0">
+                <a:solidFill>
+                  <a:srgbClr val="5C5749"/>
+                </a:solidFill>
+                <a:latin typeface="Noto Sans CJK KR" pitchFamily="34" charset="0"/>
+                <a:ea typeface="Noto Sans CJK KR" pitchFamily="34" charset="-122"/>
+                <a:cs typeface="Noto Sans CJK KR" pitchFamily="34" charset="-120"/>
+              </a:rPr>
+              <a:t>레고랜드 코리아 · 2026-09-23(수) · 아빠+첫째(8세·130cm)+둘째(3세후반·101cm)</a:t>
+            </a:r>
+            <a:endParaRPr lang="en-US" sz="900" dirty="0"/>
+          </a:p>
+        </p:txBody>
+      </p:sp>
+      <p:sp>
+        <p:nvSpPr>
+          <p:cNvPr id="30" name="Text 28"/>
+          <p:cNvSpPr txBox="1"/>
+          <p:nvPr/>
+        </p:nvSpPr>
+        <p:spPr>
+          <a:xfrm>
+            <a:off x="11430000" y="6537960"/>
+            <a:ext cx="365760" cy="274320"/>
+          </a:xfrm>
+          <a:prstGeom prst="rect">
+            <a:avLst/>
+          </a:prstGeom>
+          <a:noFill/>
+          <a:ln/>
+        </p:spPr>
+        <p:txBody>
+          <a:bodyPr wrap="square" lIns="0" tIns="0" rIns="0" bIns="0" rtlCol="0" anchor="ctr"/>
+          <a:lstStyle/>
+          <a:p>
+            <a:pPr algn="r" indent="0" marL="0">
+              <a:buNone/>
+            </a:pPr>
+            <a:r>
+              <a:rPr lang="en-US" sz="900" dirty="0">
+                <a:solidFill>
+                  <a:srgbClr val="5C5749"/>
+                </a:solidFill>
+                <a:latin typeface="Noto Sans CJK KR" pitchFamily="34" charset="0"/>
+                <a:ea typeface="Noto Sans CJK KR" pitchFamily="34" charset="-122"/>
+                <a:cs typeface="Noto Sans CJK KR" pitchFamily="34" charset="-120"/>
+              </a:rPr>
+              <a:t>10</a:t>
+            </a:r>
+            <a:endParaRPr lang="en-US" sz="900" dirty="0"/>
+          </a:p>
+        </p:txBody>
+      </p:sp>
+    </p:spTree>
+  </p:cSld>
+  <p:clrMapOvr>
+    <a:masterClrMapping/>
+  </p:clrMapOvr>
+</p:sld>
+</file>
+
 <file path=ppt/slides/slide2.xml><?xml version="1.0" encoding="utf-8"?>
 <p:sld xmlns:a="http://schemas.openxmlformats.org/drawingml/2006/main" xmlns:r="http://schemas.openxmlformats.org/officeDocument/2006/relationships" xmlns:p="http://schemas.openxmlformats.org/presentationml/2006/main">
   <p:cSld name="Slide 2">
@@ -10035,6 +11155,426 @@
 <file path=ppt/slides/slide6.xml><?xml version="1.0" encoding="utf-8"?>
 <p:sld xmlns:a="http://schemas.openxmlformats.org/drawingml/2006/main" xmlns:r="http://schemas.openxmlformats.org/officeDocument/2006/relationships" xmlns:p="http://schemas.openxmlformats.org/presentationml/2006/main">
   <p:cSld name="Slide 6">
+    <p:bg>
+      <p:bgPr>
+        <a:solidFill>
+          <a:srgbClr val="FFFFFF"/>
+        </a:solidFill>
+      </p:bgPr>
+    </p:bg>
+    <p:spTree>
+      <p:nvGrpSpPr>
+        <p:cNvPr id="1" name=""/>
+        <p:cNvGrpSpPr/>
+        <p:nvPr/>
+      </p:nvGrpSpPr>
+      <p:grpSpPr>
+        <a:xfrm>
+          <a:off x="0" y="0"/>
+          <a:ext cx="0" cy="0"/>
+          <a:chOff x="0" y="0"/>
+          <a:chExt cx="0" cy="0"/>
+        </a:xfrm>
+      </p:grpSpPr>
+      <p:sp>
+        <p:nvSpPr>
+          <p:cNvPr id="2" name="Text 0"/>
+          <p:cNvSpPr txBox="1"/>
+          <p:nvPr/>
+        </p:nvSpPr>
+        <p:spPr>
+          <a:xfrm>
+            <a:off x="457200" y="320040"/>
+            <a:ext cx="11247120" cy="320040"/>
+          </a:xfrm>
+          <a:prstGeom prst="rect">
+            <a:avLst/>
+          </a:prstGeom>
+          <a:noFill/>
+          <a:ln/>
+        </p:spPr>
+        <p:txBody>
+          <a:bodyPr wrap="square" lIns="0" tIns="0" rIns="0" bIns="0" rtlCol="0" anchor="ctr"/>
+          <a:lstStyle/>
+          <a:p>
+            <a:pPr indent="0" marL="0">
+              <a:buNone/>
+            </a:pPr>
+            <a:r>
+              <a:rPr lang="en-US" sz="1200" b="1" dirty="0">
+                <a:solidFill>
+                  <a:srgbClr val="D62839"/>
+                </a:solidFill>
+                <a:latin typeface="Noto Sans CJK KR" pitchFamily="34" charset="0"/>
+                <a:ea typeface="Noto Sans CJK KR" pitchFamily="34" charset="-122"/>
+                <a:cs typeface="Noto Sans CJK KR" pitchFamily="34" charset="-120"/>
+              </a:rPr>
+              <a:t>ROUTE MAP</a:t>
+            </a:r>
+            <a:endParaRPr lang="en-US" sz="1200" dirty="0"/>
+          </a:p>
+        </p:txBody>
+      </p:sp>
+      <p:sp>
+        <p:nvSpPr>
+          <p:cNvPr id="3" name="Text 1"/>
+          <p:cNvSpPr txBox="1"/>
+          <p:nvPr/>
+        </p:nvSpPr>
+        <p:spPr>
+          <a:xfrm>
+            <a:off x="457200" y="594360"/>
+            <a:ext cx="11247120" cy="548640"/>
+          </a:xfrm>
+          <a:prstGeom prst="rect">
+            <a:avLst/>
+          </a:prstGeom>
+          <a:noFill/>
+          <a:ln/>
+        </p:spPr>
+        <p:txBody>
+          <a:bodyPr wrap="square" lIns="0" tIns="0" rIns="0" bIns="0" rtlCol="0" anchor="ctr"/>
+          <a:lstStyle/>
+          <a:p>
+            <a:pPr indent="0" marL="0">
+              <a:buNone/>
+            </a:pPr>
+            <a:r>
+              <a:rPr lang="en-US" sz="2600" b="1" dirty="0">
+                <a:solidFill>
+                  <a:srgbClr val="1A2440"/>
+                </a:solidFill>
+                <a:latin typeface="Noto Sans CJK KR" pitchFamily="34" charset="0"/>
+                <a:ea typeface="Noto Sans CJK KR" pitchFamily="34" charset="-122"/>
+                <a:cs typeface="Noto Sans CJK KR" pitchFamily="34" charset="-120"/>
+              </a:rPr>
+              <a:t>동선 지도 — 공식 파크맵에 표시</a:t>
+            </a:r>
+            <a:endParaRPr lang="en-US" sz="2600" dirty="0"/>
+          </a:p>
+        </p:txBody>
+      </p:sp>
+      <p:pic>
+        <p:nvPicPr>
+          <p:cNvPr id="4" name="Image 0" descr="../route_final.png">    </p:cNvPr>
+          <p:cNvPicPr>
+            <a:picLocks noChangeAspect="1"/>
+          </p:cNvPicPr>
+          <p:nvPr/>
+        </p:nvPicPr>
+        <p:blipFill>
+          <a:blip r:embed="rId1"/>
+          <a:stretch>
+            <a:fillRect/>
+          </a:stretch>
+        </p:blipFill>
+        <p:spPr>
+          <a:xfrm>
+            <a:off x="457200" y="1234440"/>
+            <a:ext cx="7217664" cy="5074920"/>
+          </a:xfrm>
+          <a:prstGeom prst="rect">
+            <a:avLst/>
+          </a:prstGeom>
+        </p:spPr>
+      </p:pic>
+      <p:sp>
+        <p:nvSpPr>
+          <p:cNvPr id="5" name="Shape 2"/>
+          <p:cNvSpPr/>
+          <p:nvPr/>
+        </p:nvSpPr>
+        <p:spPr>
+          <a:xfrm>
+            <a:off x="7949184" y="1234440"/>
+            <a:ext cx="3755136" cy="5074920"/>
+          </a:xfrm>
+          <a:prstGeom prst="roundRect">
+            <a:avLst>
+              <a:gd name="adj" fmla="val 1948"/>
+            </a:avLst>
+          </a:prstGeom>
+          <a:solidFill>
+            <a:srgbClr val="F5F6F8"/>
+          </a:solidFill>
+          <a:ln w="12700">
+            <a:solidFill>
+              <a:srgbClr val="E2E4E8"/>
+            </a:solidFill>
+            <a:prstDash val="solid"/>
+          </a:ln>
+        </p:spPr>
+      </p:sp>
+      <p:sp>
+        <p:nvSpPr>
+          <p:cNvPr id="6" name="Text 3"/>
+          <p:cNvSpPr txBox="1"/>
+          <p:nvPr/>
+        </p:nvSpPr>
+        <p:spPr>
+          <a:xfrm>
+            <a:off x="8223504" y="1463040"/>
+            <a:ext cx="3206496" cy="365760"/>
+          </a:xfrm>
+          <a:prstGeom prst="rect">
+            <a:avLst/>
+          </a:prstGeom>
+          <a:noFill/>
+          <a:ln/>
+        </p:spPr>
+        <p:txBody>
+          <a:bodyPr wrap="square" lIns="0" tIns="0" rIns="0" bIns="0" rtlCol="0" anchor="ctr"/>
+          <a:lstStyle/>
+          <a:p>
+            <a:pPr indent="0" marL="0">
+              <a:buNone/>
+            </a:pPr>
+            <a:r>
+              <a:rPr lang="en-US" sz="1500" b="1" dirty="0">
+                <a:solidFill>
+                  <a:srgbClr val="1A2440"/>
+                </a:solidFill>
+                <a:latin typeface="Noto Sans CJK KR" pitchFamily="34" charset="0"/>
+                <a:ea typeface="Noto Sans CJK KR" pitchFamily="34" charset="-122"/>
+                <a:cs typeface="Noto Sans CJK KR" pitchFamily="34" charset="-120"/>
+              </a:rPr>
+              <a:t>왜 이 순서인가</a:t>
+            </a:r>
+            <a:endParaRPr lang="en-US" sz="1500" dirty="0"/>
+          </a:p>
+        </p:txBody>
+      </p:sp>
+      <p:sp>
+        <p:nvSpPr>
+          <p:cNvPr id="7" name="Text 4"/>
+          <p:cNvSpPr txBox="1"/>
+          <p:nvPr/>
+        </p:nvSpPr>
+        <p:spPr>
+          <a:xfrm>
+            <a:off x="8223504" y="1920240"/>
+            <a:ext cx="3206496" cy="4160520"/>
+          </a:xfrm>
+          <a:prstGeom prst="rect">
+            <a:avLst/>
+          </a:prstGeom>
+          <a:noFill/>
+          <a:ln/>
+        </p:spPr>
+        <p:txBody>
+          <a:bodyPr wrap="square" lIns="0" tIns="0" rIns="0" bIns="0" rtlCol="0" anchor="t"/>
+          <a:lstStyle/>
+          <a:p>
+            <a:pPr marL="342900" indent="-342900">
+              <a:lnSpc>
+                <a:spcPct val="125000"/>
+              </a:lnSpc>
+              <a:spcAft>
+                <a:spcPts val="1200"/>
+              </a:spcAft>
+              <a:buSzPct val="100000"/>
+              <a:buChar char="•"/>
+            </a:pPr>
+            <a:r>
+              <a:rPr lang="en-US" sz="1250" dirty="0">
+                <a:solidFill>
+                  <a:srgbClr val="1A2440"/>
+                </a:solidFill>
+                <a:latin typeface="Noto Sans CJK KR" pitchFamily="34" charset="0"/>
+                <a:ea typeface="Noto Sans CJK KR" pitchFamily="34" charset="-122"/>
+                <a:cs typeface="Noto Sans CJK KR" pitchFamily="34" charset="-120"/>
+              </a:rPr>
+              <a:t>캐슬(드래곤)과 시티는 루프의 정반대 끝</a:t>
+            </a:r>
+            <a:endParaRPr lang="en-US" sz="1250" dirty="0"/>
+          </a:p>
+          <a:p>
+            <a:pPr marL="342900" indent="-342900">
+              <a:lnSpc>
+                <a:spcPct val="125000"/>
+              </a:lnSpc>
+              <a:spcAft>
+                <a:spcPts val="1200"/>
+              </a:spcAft>
+              <a:buSzPct val="100000"/>
+              <a:buChar char="•"/>
+            </a:pPr>
+            <a:r>
+              <a:rPr lang="en-US" sz="1250" dirty="0">
+                <a:solidFill>
+                  <a:srgbClr val="1A2440"/>
+                </a:solidFill>
+                <a:latin typeface="Noto Sans CJK KR" pitchFamily="34" charset="0"/>
+                <a:ea typeface="Noto Sans CJK KR" pitchFamily="34" charset="-122"/>
+                <a:cs typeface="Noto Sans CJK KR" pitchFamily="34" charset="-120"/>
+              </a:rPr>
+              <a:t>기존안은 이 둘을 3번 오갔음</a:t>
+            </a:r>
+            <a:endParaRPr lang="en-US" sz="1250" dirty="0"/>
+          </a:p>
+          <a:p>
+            <a:pPr marL="342900" indent="-342900">
+              <a:lnSpc>
+                <a:spcPct val="125000"/>
+              </a:lnSpc>
+              <a:spcAft>
+                <a:spcPts val="1200"/>
+              </a:spcAft>
+              <a:buSzPct val="100000"/>
+              <a:buChar char="•"/>
+            </a:pPr>
+            <a:r>
+              <a:rPr lang="en-US" sz="1250" dirty="0">
+                <a:solidFill>
+                  <a:srgbClr val="1A2440"/>
+                </a:solidFill>
+                <a:latin typeface="Noto Sans CJK KR" pitchFamily="34" charset="0"/>
+                <a:ea typeface="Noto Sans CJK KR" pitchFamily="34" charset="-122"/>
+                <a:cs typeface="Noto Sans CJK KR" pitchFamily="34" charset="-120"/>
+              </a:rPr>
+              <a:t>새 순서는 왕복을 1번(④)으로 압축</a:t>
+            </a:r>
+            <a:endParaRPr lang="en-US" sz="1250" dirty="0"/>
+          </a:p>
+          <a:p>
+            <a:pPr marL="342900" indent="-342900">
+              <a:lnSpc>
+                <a:spcPct val="125000"/>
+              </a:lnSpc>
+              <a:spcAft>
+                <a:spcPts val="1200"/>
+              </a:spcAft>
+              <a:buSzPct val="100000"/>
+              <a:buChar char="•"/>
+            </a:pPr>
+            <a:r>
+              <a:rPr lang="en-US" sz="1250" dirty="0">
+                <a:solidFill>
+                  <a:srgbClr val="1A2440"/>
+                </a:solidFill>
+                <a:latin typeface="Noto Sans CJK KR" pitchFamily="34" charset="0"/>
+                <a:ea typeface="Noto Sans CJK KR" pitchFamily="34" charset="-122"/>
+                <a:cs typeface="Noto Sans CJK KR" pitchFamily="34" charset="-120"/>
+              </a:rPr>
+              <a:t>④만 대형 이동, 나머지는 전부 인접 구역</a:t>
+            </a:r>
+            <a:endParaRPr lang="en-US" sz="1250" dirty="0"/>
+          </a:p>
+          <a:p>
+            <a:pPr marL="342900" indent="-342900">
+              <a:lnSpc>
+                <a:spcPct val="125000"/>
+              </a:lnSpc>
+              <a:spcAft>
+                <a:spcPts val="1200"/>
+              </a:spcAft>
+              <a:buSzPct val="100000"/>
+              <a:buChar char="•"/>
+            </a:pPr>
+            <a:r>
+              <a:rPr lang="en-US" sz="1250" dirty="0">
+                <a:solidFill>
+                  <a:srgbClr val="1A2440"/>
+                </a:solidFill>
+                <a:latin typeface="Noto Sans CJK KR" pitchFamily="34" charset="0"/>
+                <a:ea typeface="Noto Sans CJK KR" pitchFamily="34" charset="-122"/>
+                <a:cs typeface="Noto Sans CJK KR" pitchFamily="34" charset="-120"/>
+              </a:rPr>
+              <a:t>거리는 지도 기준 순서일 뿐 — 맵이 스케일을 보증 안 함(D등급)</a:t>
+            </a:r>
+            <a:endParaRPr lang="en-US" sz="1250" dirty="0"/>
+          </a:p>
+        </p:txBody>
+      </p:sp>
+      <p:sp>
+        <p:nvSpPr>
+          <p:cNvPr id="8" name="Text 5"/>
+          <p:cNvSpPr txBox="1"/>
+          <p:nvPr/>
+        </p:nvSpPr>
+        <p:spPr>
+          <a:xfrm>
+            <a:off x="457200" y="6537960"/>
+            <a:ext cx="10515600" cy="274320"/>
+          </a:xfrm>
+          <a:prstGeom prst="rect">
+            <a:avLst/>
+          </a:prstGeom>
+          <a:noFill/>
+          <a:ln/>
+        </p:spPr>
+        <p:txBody>
+          <a:bodyPr wrap="square" lIns="0" tIns="0" rIns="0" bIns="0" rtlCol="0" anchor="ctr"/>
+          <a:lstStyle/>
+          <a:p>
+            <a:pPr indent="0" marL="0">
+              <a:buNone/>
+            </a:pPr>
+            <a:r>
+              <a:rPr lang="en-US" sz="900" dirty="0">
+                <a:solidFill>
+                  <a:srgbClr val="5C5749"/>
+                </a:solidFill>
+                <a:latin typeface="Noto Sans CJK KR" pitchFamily="34" charset="0"/>
+                <a:ea typeface="Noto Sans CJK KR" pitchFamily="34" charset="-122"/>
+                <a:cs typeface="Noto Sans CJK KR" pitchFamily="34" charset="-120"/>
+              </a:rPr>
+              <a:t>레고랜드 코리아 · 2026-09-23(수) · 아빠+첫째(8세·130cm)+둘째(3세후반·101cm)</a:t>
+            </a:r>
+            <a:endParaRPr lang="en-US" sz="900" dirty="0"/>
+          </a:p>
+        </p:txBody>
+      </p:sp>
+      <p:sp>
+        <p:nvSpPr>
+          <p:cNvPr id="9" name="Text 6"/>
+          <p:cNvSpPr txBox="1"/>
+          <p:nvPr/>
+        </p:nvSpPr>
+        <p:spPr>
+          <a:xfrm>
+            <a:off x="11430000" y="6537960"/>
+            <a:ext cx="365760" cy="274320"/>
+          </a:xfrm>
+          <a:prstGeom prst="rect">
+            <a:avLst/>
+          </a:prstGeom>
+          <a:noFill/>
+          <a:ln/>
+        </p:spPr>
+        <p:txBody>
+          <a:bodyPr wrap="square" lIns="0" tIns="0" rIns="0" bIns="0" rtlCol="0" anchor="ctr"/>
+          <a:lstStyle/>
+          <a:p>
+            <a:pPr algn="r" indent="0" marL="0">
+              <a:buNone/>
+            </a:pPr>
+            <a:r>
+              <a:rPr lang="en-US" sz="900" dirty="0">
+                <a:solidFill>
+                  <a:srgbClr val="5C5749"/>
+                </a:solidFill>
+                <a:latin typeface="Noto Sans CJK KR" pitchFamily="34" charset="0"/>
+                <a:ea typeface="Noto Sans CJK KR" pitchFamily="34" charset="-122"/>
+                <a:cs typeface="Noto Sans CJK KR" pitchFamily="34" charset="-120"/>
+              </a:rPr>
+              <a:t>6</a:t>
+            </a:r>
+            <a:endParaRPr lang="en-US" sz="900" dirty="0"/>
+          </a:p>
+        </p:txBody>
+      </p:sp>
+    </p:spTree>
+  </p:cSld>
+  <p:clrMapOvr>
+    <a:masterClrMapping/>
+  </p:clrMapOvr>
+</p:sld>
+</file>
+
+<file path=ppt/slides/slide7.xml><?xml version="1.0" encoding="utf-8"?>
+<p:sld xmlns:a="http://schemas.openxmlformats.org/drawingml/2006/main" xmlns:r="http://schemas.openxmlformats.org/officeDocument/2006/relationships" xmlns:p="http://schemas.openxmlformats.org/presentationml/2006/main">
+  <p:cSld name="Slide 7">
     <p:bg>
       <p:bgPr>
         <a:solidFill>
@@ -10708,2084 +12248,6 @@
                 <a:ea typeface="Noto Sans CJK KR" pitchFamily="34" charset="-122"/>
                 <a:cs typeface="Noto Sans CJK KR" pitchFamily="34" charset="-120"/>
               </a:rPr>
-              <a:t>6</a:t>
-            </a:r>
-            <a:endParaRPr lang="en-US" sz="900" dirty="0"/>
-          </a:p>
-        </p:txBody>
-      </p:sp>
-    </p:spTree>
-  </p:cSld>
-  <p:clrMapOvr>
-    <a:masterClrMapping/>
-  </p:clrMapOvr>
-</p:sld>
-</file>
-
-<file path=ppt/slides/slide7.xml><?xml version="1.0" encoding="utf-8"?>
-<p:sld xmlns:a="http://schemas.openxmlformats.org/drawingml/2006/main" xmlns:r="http://schemas.openxmlformats.org/officeDocument/2006/relationships" xmlns:p="http://schemas.openxmlformats.org/presentationml/2006/main">
-  <p:cSld name="Slide 7">
-    <p:bg>
-      <p:bgPr>
-        <a:solidFill>
-          <a:srgbClr val="FFFFFF"/>
-        </a:solidFill>
-      </p:bgPr>
-    </p:bg>
-    <p:spTree>
-      <p:nvGrpSpPr>
-        <p:cNvPr id="1" name=""/>
-        <p:cNvGrpSpPr/>
-        <p:nvPr/>
-      </p:nvGrpSpPr>
-      <p:grpSpPr>
-        <a:xfrm>
-          <a:off x="0" y="0"/>
-          <a:ext cx="0" cy="0"/>
-          <a:chOff x="0" y="0"/>
-          <a:chExt cx="0" cy="0"/>
-        </a:xfrm>
-      </p:grpSpPr>
-      <p:sp>
-        <p:nvSpPr>
-          <p:cNvPr id="2" name="Text 0"/>
-          <p:cNvSpPr txBox="1"/>
-          <p:nvPr/>
-        </p:nvSpPr>
-        <p:spPr>
-          <a:xfrm>
-            <a:off x="457200" y="320040"/>
-            <a:ext cx="11247120" cy="320040"/>
-          </a:xfrm>
-          <a:prstGeom prst="rect">
-            <a:avLst/>
-          </a:prstGeom>
-          <a:noFill/>
-          <a:ln/>
-        </p:spPr>
-        <p:txBody>
-          <a:bodyPr wrap="square" lIns="0" tIns="0" rIns="0" bIns="0" rtlCol="0" anchor="ctr"/>
-          <a:lstStyle/>
-          <a:p>
-            <a:pPr indent="0" marL="0">
-              <a:buNone/>
-            </a:pPr>
-            <a:r>
-              <a:rPr lang="en-US" sz="1200" b="1" dirty="0">
-                <a:solidFill>
-                  <a:srgbClr val="D62839"/>
-                </a:solidFill>
-                <a:latin typeface="Noto Sans CJK KR" pitchFamily="34" charset="0"/>
-                <a:ea typeface="Noto Sans CJK KR" pitchFamily="34" charset="-122"/>
-                <a:cs typeface="Noto Sans CJK KR" pitchFamily="34" charset="-120"/>
-              </a:rPr>
-              <a:t>ATTRACTIONS</a:t>
-            </a:r>
-            <a:endParaRPr lang="en-US" sz="1200" dirty="0"/>
-          </a:p>
-        </p:txBody>
-      </p:sp>
-      <p:sp>
-        <p:nvSpPr>
-          <p:cNvPr id="3" name="Text 1"/>
-          <p:cNvSpPr txBox="1"/>
-          <p:nvPr/>
-        </p:nvSpPr>
-        <p:spPr>
-          <a:xfrm>
-            <a:off x="457200" y="594360"/>
-            <a:ext cx="11247120" cy="548640"/>
-          </a:xfrm>
-          <a:prstGeom prst="rect">
-            <a:avLst/>
-          </a:prstGeom>
-          <a:noFill/>
-          <a:ln/>
-        </p:spPr>
-        <p:txBody>
-          <a:bodyPr wrap="square" lIns="0" tIns="0" rIns="0" bIns="0" rtlCol="0" anchor="ctr"/>
-          <a:lstStyle/>
-          <a:p>
-            <a:pPr indent="0" marL="0">
-              <a:buNone/>
-            </a:pPr>
-            <a:r>
-              <a:rPr lang="en-US" sz="2600" b="1" dirty="0">
-                <a:solidFill>
-                  <a:srgbClr val="1A2440"/>
-                </a:solidFill>
-                <a:latin typeface="Noto Sans CJK KR" pitchFamily="34" charset="0"/>
-                <a:ea typeface="Noto Sans CJK KR" pitchFamily="34" charset="-122"/>
-                <a:cs typeface="Noto Sans CJK KR" pitchFamily="34" charset="-120"/>
-              </a:rPr>
-              <a:t>오늘 탈 어트랙션 9종</a:t>
-            </a:r>
-            <a:endParaRPr lang="en-US" sz="2600" dirty="0"/>
-          </a:p>
-        </p:txBody>
-      </p:sp>
-      <p:sp>
-        <p:nvSpPr>
-          <p:cNvPr id="4" name="Shape 2"/>
-          <p:cNvSpPr/>
-          <p:nvPr/>
-        </p:nvSpPr>
-        <p:spPr>
-          <a:xfrm>
-            <a:off x="457200" y="1371600"/>
-            <a:ext cx="3657600" cy="1417320"/>
-          </a:xfrm>
-          <a:prstGeom prst="roundRect">
-            <a:avLst>
-              <a:gd name="adj" fmla="val 4516"/>
-            </a:avLst>
-          </a:prstGeom>
-          <a:solidFill>
-            <a:srgbClr val="FFFFFF"/>
-          </a:solidFill>
-          <a:ln w="12700">
-            <a:solidFill>
-              <a:srgbClr val="E2E4E8"/>
-            </a:solidFill>
-            <a:prstDash val="solid"/>
-          </a:ln>
-          <a:effectLst>
-            <a:outerShdw sx="100000" sy="100000" kx="0" ky="0" algn="bl" rotWithShape="0" blurRad="63500" dist="25400" dir="5400000">
-              <a:srgbClr val="888888">
-                <a:alpha val="20000"/>
-              </a:srgbClr>
-            </a:outerShdw>
-          </a:effectLst>
-        </p:spPr>
-      </p:sp>
-      <p:sp>
-        <p:nvSpPr>
-          <p:cNvPr id="5" name="Shape 3"/>
-          <p:cNvSpPr/>
-          <p:nvPr/>
-        </p:nvSpPr>
-        <p:spPr>
-          <a:xfrm>
-            <a:off x="621792" y="1536192"/>
-            <a:ext cx="292608" cy="292608"/>
-          </a:xfrm>
-          <a:prstGeom prst="ellipse">
-            <a:avLst/>
-          </a:prstGeom>
-          <a:solidFill>
-            <a:srgbClr val="D62839"/>
-          </a:solidFill>
-          <a:ln/>
-        </p:spPr>
-      </p:sp>
-      <p:sp>
-        <p:nvSpPr>
-          <p:cNvPr id="6" name="Text 4"/>
-          <p:cNvSpPr txBox="1"/>
-          <p:nvPr/>
-        </p:nvSpPr>
-        <p:spPr>
-          <a:xfrm>
-            <a:off x="621792" y="1536192"/>
-            <a:ext cx="292608" cy="292608"/>
-          </a:xfrm>
-          <a:prstGeom prst="rect">
-            <a:avLst/>
-          </a:prstGeom>
-          <a:noFill/>
-          <a:ln/>
-        </p:spPr>
-        <p:txBody>
-          <a:bodyPr wrap="square" lIns="0" tIns="0" rIns="0" bIns="0" rtlCol="0" anchor="ctr"/>
-          <a:lstStyle/>
-          <a:p>
-            <a:pPr algn="ctr" indent="0" marL="0">
-              <a:buNone/>
-            </a:pPr>
-            <a:r>
-              <a:rPr lang="en-US" sz="1300" b="1" dirty="0">
-                <a:solidFill>
-                  <a:srgbClr val="FFFFFF"/>
-                </a:solidFill>
-                <a:latin typeface="Noto Sans CJK KR" pitchFamily="34" charset="0"/>
-                <a:ea typeface="Noto Sans CJK KR" pitchFamily="34" charset="-122"/>
-                <a:cs typeface="Noto Sans CJK KR" pitchFamily="34" charset="-120"/>
-              </a:rPr>
-              <a:t>1</a:t>
-            </a:r>
-            <a:endParaRPr lang="en-US" sz="1300" dirty="0"/>
-          </a:p>
-        </p:txBody>
-      </p:sp>
-      <p:sp>
-        <p:nvSpPr>
-          <p:cNvPr id="7" name="Text 5"/>
-          <p:cNvSpPr txBox="1"/>
-          <p:nvPr/>
-        </p:nvSpPr>
-        <p:spPr>
-          <a:xfrm>
-            <a:off x="1005840" y="1481328"/>
-            <a:ext cx="2971800" cy="292608"/>
-          </a:xfrm>
-          <a:prstGeom prst="rect">
-            <a:avLst/>
-          </a:prstGeom>
-          <a:noFill/>
-          <a:ln/>
-        </p:spPr>
-        <p:txBody>
-          <a:bodyPr wrap="square" lIns="0" tIns="0" rIns="0" bIns="0" rtlCol="0" anchor="ctr"/>
-          <a:lstStyle/>
-          <a:p>
-            <a:pPr indent="0" marL="0">
-              <a:buNone/>
-            </a:pPr>
-            <a:r>
-              <a:rPr lang="en-US" sz="1300" b="1" dirty="0">
-                <a:solidFill>
-                  <a:srgbClr val="1A2440"/>
-                </a:solidFill>
-                <a:latin typeface="Noto Sans CJK KR" pitchFamily="34" charset="0"/>
-                <a:ea typeface="Noto Sans CJK KR" pitchFamily="34" charset="-122"/>
-                <a:cs typeface="Noto Sans CJK KR" pitchFamily="34" charset="-120"/>
-              </a:rPr>
-              <a:t>드래곤 코스터</a:t>
-            </a:r>
-            <a:endParaRPr lang="en-US" sz="1300" dirty="0"/>
-          </a:p>
-        </p:txBody>
-      </p:sp>
-      <p:sp>
-        <p:nvSpPr>
-          <p:cNvPr id="8" name="Text 6"/>
-          <p:cNvSpPr txBox="1"/>
-          <p:nvPr/>
-        </p:nvSpPr>
-        <p:spPr>
-          <a:xfrm>
-            <a:off x="1005840" y="1755648"/>
-            <a:ext cx="2971800" cy="228600"/>
-          </a:xfrm>
-          <a:prstGeom prst="rect">
-            <a:avLst/>
-          </a:prstGeom>
-          <a:noFill/>
-          <a:ln/>
-        </p:spPr>
-        <p:txBody>
-          <a:bodyPr wrap="square" lIns="0" tIns="0" rIns="0" bIns="0" rtlCol="0" anchor="ctr"/>
-          <a:lstStyle/>
-          <a:p>
-            <a:pPr indent="0" marL="0">
-              <a:buNone/>
-            </a:pPr>
-            <a:r>
-              <a:rPr lang="en-US" sz="1000" i="1" dirty="0">
-                <a:solidFill>
-                  <a:srgbClr val="D62839"/>
-                </a:solidFill>
-                <a:latin typeface="Noto Sans CJK KR" pitchFamily="34" charset="0"/>
-                <a:ea typeface="Noto Sans CJK KR" pitchFamily="34" charset="-122"/>
-                <a:cs typeface="Noto Sans CJK KR" pitchFamily="34" charset="-120"/>
-              </a:rPr>
-              <a:t>LEGO Castle</a:t>
-            </a:r>
-            <a:endParaRPr lang="en-US" sz="1000" dirty="0"/>
-          </a:p>
-        </p:txBody>
-      </p:sp>
-      <p:sp>
-        <p:nvSpPr>
-          <p:cNvPr id="9" name="Text 7"/>
-          <p:cNvSpPr txBox="1"/>
-          <p:nvPr/>
-        </p:nvSpPr>
-        <p:spPr>
-          <a:xfrm>
-            <a:off x="621792" y="2029968"/>
-            <a:ext cx="3328416" cy="713232"/>
-          </a:xfrm>
-          <a:prstGeom prst="rect">
-            <a:avLst/>
-          </a:prstGeom>
-          <a:noFill/>
-          <a:ln/>
-        </p:spPr>
-        <p:txBody>
-          <a:bodyPr wrap="square" lIns="0" tIns="0" rIns="0" bIns="0" rtlCol="0" anchor="t"/>
-          <a:lstStyle/>
-          <a:p>
-            <a:pPr indent="0" marL="0">
-              <a:buNone/>
-            </a:pPr>
-            <a:r>
-              <a:rPr lang="en-US" sz="1000" dirty="0">
-                <a:solidFill>
-                  <a:srgbClr val="5C5749"/>
-                </a:solidFill>
-                <a:latin typeface="Noto Sans CJK KR" pitchFamily="34" charset="0"/>
-                <a:ea typeface="Noto Sans CJK KR" pitchFamily="34" charset="-122"/>
-                <a:cs typeface="Noto Sans CJK KR" pitchFamily="34" charset="-120"/>
-              </a:rPr>
-              <a:t>실내 다크라이드 후 레드 드래곤과 마주치며 급강하. 526m·56km/h. 100~120cm 동반</a:t>
-            </a:r>
-            <a:endParaRPr lang="en-US" sz="1000" dirty="0"/>
-          </a:p>
-        </p:txBody>
-      </p:sp>
-      <p:sp>
-        <p:nvSpPr>
-          <p:cNvPr id="10" name="Shape 8"/>
-          <p:cNvSpPr/>
-          <p:nvPr/>
-        </p:nvSpPr>
-        <p:spPr>
-          <a:xfrm>
-            <a:off x="4251960" y="1371600"/>
-            <a:ext cx="3657600" cy="1417320"/>
-          </a:xfrm>
-          <a:prstGeom prst="roundRect">
-            <a:avLst>
-              <a:gd name="adj" fmla="val 4516"/>
-            </a:avLst>
-          </a:prstGeom>
-          <a:solidFill>
-            <a:srgbClr val="FFFFFF"/>
-          </a:solidFill>
-          <a:ln w="12700">
-            <a:solidFill>
-              <a:srgbClr val="E2E4E8"/>
-            </a:solidFill>
-            <a:prstDash val="solid"/>
-          </a:ln>
-          <a:effectLst>
-            <a:outerShdw sx="100000" sy="100000" kx="0" ky="0" algn="bl" rotWithShape="0" blurRad="63500" dist="25400" dir="5400000">
-              <a:srgbClr val="888888">
-                <a:alpha val="20000"/>
-              </a:srgbClr>
-            </a:outerShdw>
-          </a:effectLst>
-        </p:spPr>
-      </p:sp>
-      <p:sp>
-        <p:nvSpPr>
-          <p:cNvPr id="11" name="Shape 9"/>
-          <p:cNvSpPr/>
-          <p:nvPr/>
-        </p:nvSpPr>
-        <p:spPr>
-          <a:xfrm>
-            <a:off x="4416552" y="1536192"/>
-            <a:ext cx="292608" cy="292608"/>
-          </a:xfrm>
-          <a:prstGeom prst="ellipse">
-            <a:avLst/>
-          </a:prstGeom>
-          <a:solidFill>
-            <a:srgbClr val="D62839"/>
-          </a:solidFill>
-          <a:ln/>
-        </p:spPr>
-      </p:sp>
-      <p:sp>
-        <p:nvSpPr>
-          <p:cNvPr id="12" name="Text 10"/>
-          <p:cNvSpPr txBox="1"/>
-          <p:nvPr/>
-        </p:nvSpPr>
-        <p:spPr>
-          <a:xfrm>
-            <a:off x="4416552" y="1536192"/>
-            <a:ext cx="292608" cy="292608"/>
-          </a:xfrm>
-          <a:prstGeom prst="rect">
-            <a:avLst/>
-          </a:prstGeom>
-          <a:noFill/>
-          <a:ln/>
-        </p:spPr>
-        <p:txBody>
-          <a:bodyPr wrap="square" lIns="0" tIns="0" rIns="0" bIns="0" rtlCol="0" anchor="ctr"/>
-          <a:lstStyle/>
-          <a:p>
-            <a:pPr algn="ctr" indent="0" marL="0">
-              <a:buNone/>
-            </a:pPr>
-            <a:r>
-              <a:rPr lang="en-US" sz="1300" b="1" dirty="0">
-                <a:solidFill>
-                  <a:srgbClr val="FFFFFF"/>
-                </a:solidFill>
-                <a:latin typeface="Noto Sans CJK KR" pitchFamily="34" charset="0"/>
-                <a:ea typeface="Noto Sans CJK KR" pitchFamily="34" charset="-122"/>
-                <a:cs typeface="Noto Sans CJK KR" pitchFamily="34" charset="-120"/>
-              </a:rPr>
-              <a:t>2</a:t>
-            </a:r>
-            <a:endParaRPr lang="en-US" sz="1300" dirty="0"/>
-          </a:p>
-        </p:txBody>
-      </p:sp>
-      <p:sp>
-        <p:nvSpPr>
-          <p:cNvPr id="13" name="Text 11"/>
-          <p:cNvSpPr txBox="1"/>
-          <p:nvPr/>
-        </p:nvSpPr>
-        <p:spPr>
-          <a:xfrm>
-            <a:off x="4800600" y="1481328"/>
-            <a:ext cx="2971800" cy="292608"/>
-          </a:xfrm>
-          <a:prstGeom prst="rect">
-            <a:avLst/>
-          </a:prstGeom>
-          <a:noFill/>
-          <a:ln/>
-        </p:spPr>
-        <p:txBody>
-          <a:bodyPr wrap="square" lIns="0" tIns="0" rIns="0" bIns="0" rtlCol="0" anchor="ctr"/>
-          <a:lstStyle/>
-          <a:p>
-            <a:pPr indent="0" marL="0">
-              <a:buNone/>
-            </a:pPr>
-            <a:r>
-              <a:rPr lang="en-US" sz="1300" b="1" dirty="0">
-                <a:solidFill>
-                  <a:srgbClr val="1A2440"/>
-                </a:solidFill>
-                <a:latin typeface="Noto Sans CJK KR" pitchFamily="34" charset="0"/>
-                <a:ea typeface="Noto Sans CJK KR" pitchFamily="34" charset="-122"/>
-                <a:cs typeface="Noto Sans CJK KR" pitchFamily="34" charset="-120"/>
-              </a:rPr>
-              <a:t>Masters of Spinjitzu</a:t>
-            </a:r>
-            <a:endParaRPr lang="en-US" sz="1300" dirty="0"/>
-          </a:p>
-        </p:txBody>
-      </p:sp>
-      <p:sp>
-        <p:nvSpPr>
-          <p:cNvPr id="14" name="Text 12"/>
-          <p:cNvSpPr txBox="1"/>
-          <p:nvPr/>
-        </p:nvSpPr>
-        <p:spPr>
-          <a:xfrm>
-            <a:off x="4800600" y="1755648"/>
-            <a:ext cx="2971800" cy="228600"/>
-          </a:xfrm>
-          <a:prstGeom prst="rect">
-            <a:avLst/>
-          </a:prstGeom>
-          <a:noFill/>
-          <a:ln/>
-        </p:spPr>
-        <p:txBody>
-          <a:bodyPr wrap="square" lIns="0" tIns="0" rIns="0" bIns="0" rtlCol="0" anchor="ctr"/>
-          <a:lstStyle/>
-          <a:p>
-            <a:pPr indent="0" marL="0">
-              <a:buNone/>
-            </a:pPr>
-            <a:r>
-              <a:rPr lang="en-US" sz="1000" i="1" dirty="0">
-                <a:solidFill>
-                  <a:srgbClr val="D62839"/>
-                </a:solidFill>
-                <a:latin typeface="Noto Sans CJK KR" pitchFamily="34" charset="0"/>
-                <a:ea typeface="Noto Sans CJK KR" pitchFamily="34" charset="-122"/>
-                <a:cs typeface="Noto Sans CJK KR" pitchFamily="34" charset="-120"/>
-              </a:rPr>
-              <a:t>NINJAGO World</a:t>
-            </a:r>
-            <a:endParaRPr lang="en-US" sz="1000" dirty="0"/>
-          </a:p>
-        </p:txBody>
-      </p:sp>
-      <p:sp>
-        <p:nvSpPr>
-          <p:cNvPr id="15" name="Text 13"/>
-          <p:cNvSpPr txBox="1"/>
-          <p:nvPr/>
-        </p:nvSpPr>
-        <p:spPr>
-          <a:xfrm>
-            <a:off x="4416552" y="2029968"/>
-            <a:ext cx="3328416" cy="713232"/>
-          </a:xfrm>
-          <a:prstGeom prst="rect">
-            <a:avLst/>
-          </a:prstGeom>
-          <a:noFill/>
-          <a:ln/>
-        </p:spPr>
-        <p:txBody>
-          <a:bodyPr wrap="square" lIns="0" tIns="0" rIns="0" bIns="0" rtlCol="0" anchor="t"/>
-          <a:lstStyle/>
-          <a:p>
-            <a:pPr indent="0" marL="0">
-              <a:buNone/>
-            </a:pPr>
-            <a:r>
-              <a:rPr lang="en-US" sz="1000" dirty="0">
-                <a:solidFill>
-                  <a:srgbClr val="5C5749"/>
-                </a:solidFill>
-                <a:latin typeface="Noto Sans CJK KR" pitchFamily="34" charset="0"/>
-                <a:ea typeface="Noto Sans CJK KR" pitchFamily="34" charset="-122"/>
-                <a:cs typeface="Noto Sans CJK KR" pitchFamily="34" charset="-120"/>
-              </a:rPr>
-              <a:t>핸들로 회전 속도 조절하는 360도 스핀 라이드</a:t>
-            </a:r>
-            <a:endParaRPr lang="en-US" sz="1000" dirty="0"/>
-          </a:p>
-        </p:txBody>
-      </p:sp>
-      <p:sp>
-        <p:nvSpPr>
-          <p:cNvPr id="16" name="Shape 14"/>
-          <p:cNvSpPr/>
-          <p:nvPr/>
-        </p:nvSpPr>
-        <p:spPr>
-          <a:xfrm>
-            <a:off x="8046720" y="1371600"/>
-            <a:ext cx="3657600" cy="1417320"/>
-          </a:xfrm>
-          <a:prstGeom prst="roundRect">
-            <a:avLst>
-              <a:gd name="adj" fmla="val 4516"/>
-            </a:avLst>
-          </a:prstGeom>
-          <a:solidFill>
-            <a:srgbClr val="FFFFFF"/>
-          </a:solidFill>
-          <a:ln w="12700">
-            <a:solidFill>
-              <a:srgbClr val="E2E4E8"/>
-            </a:solidFill>
-            <a:prstDash val="solid"/>
-          </a:ln>
-          <a:effectLst>
-            <a:outerShdw sx="100000" sy="100000" kx="0" ky="0" algn="bl" rotWithShape="0" blurRad="63500" dist="25400" dir="5400000">
-              <a:srgbClr val="888888">
-                <a:alpha val="20000"/>
-              </a:srgbClr>
-            </a:outerShdw>
-          </a:effectLst>
-        </p:spPr>
-      </p:sp>
-      <p:sp>
-        <p:nvSpPr>
-          <p:cNvPr id="17" name="Shape 15"/>
-          <p:cNvSpPr/>
-          <p:nvPr/>
-        </p:nvSpPr>
-        <p:spPr>
-          <a:xfrm>
-            <a:off x="8211312" y="1536192"/>
-            <a:ext cx="292608" cy="292608"/>
-          </a:xfrm>
-          <a:prstGeom prst="ellipse">
-            <a:avLst/>
-          </a:prstGeom>
-          <a:solidFill>
-            <a:srgbClr val="D62839"/>
-          </a:solidFill>
-          <a:ln/>
-        </p:spPr>
-      </p:sp>
-      <p:sp>
-        <p:nvSpPr>
-          <p:cNvPr id="18" name="Text 16"/>
-          <p:cNvSpPr txBox="1"/>
-          <p:nvPr/>
-        </p:nvSpPr>
-        <p:spPr>
-          <a:xfrm>
-            <a:off x="8211312" y="1536192"/>
-            <a:ext cx="292608" cy="292608"/>
-          </a:xfrm>
-          <a:prstGeom prst="rect">
-            <a:avLst/>
-          </a:prstGeom>
-          <a:noFill/>
-          <a:ln/>
-        </p:spPr>
-        <p:txBody>
-          <a:bodyPr wrap="square" lIns="0" tIns="0" rIns="0" bIns="0" rtlCol="0" anchor="ctr"/>
-          <a:lstStyle/>
-          <a:p>
-            <a:pPr algn="ctr" indent="0" marL="0">
-              <a:buNone/>
-            </a:pPr>
-            <a:r>
-              <a:rPr lang="en-US" sz="1300" b="1" dirty="0">
-                <a:solidFill>
-                  <a:srgbClr val="FFFFFF"/>
-                </a:solidFill>
-                <a:latin typeface="Noto Sans CJK KR" pitchFamily="34" charset="0"/>
-                <a:ea typeface="Noto Sans CJK KR" pitchFamily="34" charset="-122"/>
-                <a:cs typeface="Noto Sans CJK KR" pitchFamily="34" charset="-120"/>
-              </a:rPr>
-              <a:t>3</a:t>
-            </a:r>
-            <a:endParaRPr lang="en-US" sz="1300" dirty="0"/>
-          </a:p>
-        </p:txBody>
-      </p:sp>
-      <p:sp>
-        <p:nvSpPr>
-          <p:cNvPr id="19" name="Text 17"/>
-          <p:cNvSpPr txBox="1"/>
-          <p:nvPr/>
-        </p:nvSpPr>
-        <p:spPr>
-          <a:xfrm>
-            <a:off x="8595360" y="1481328"/>
-            <a:ext cx="2971800" cy="292608"/>
-          </a:xfrm>
-          <a:prstGeom prst="rect">
-            <a:avLst/>
-          </a:prstGeom>
-          <a:noFill/>
-          <a:ln/>
-        </p:spPr>
-        <p:txBody>
-          <a:bodyPr wrap="square" lIns="0" tIns="0" rIns="0" bIns="0" rtlCol="0" anchor="ctr"/>
-          <a:lstStyle/>
-          <a:p>
-            <a:pPr indent="0" marL="0">
-              <a:buNone/>
-            </a:pPr>
-            <a:r>
-              <a:rPr lang="en-US" sz="1300" b="1" dirty="0">
-                <a:solidFill>
-                  <a:srgbClr val="1A2440"/>
-                </a:solidFill>
-                <a:latin typeface="Noto Sans CJK KR" pitchFamily="34" charset="0"/>
-                <a:ea typeface="Noto Sans CJK KR" pitchFamily="34" charset="-122"/>
-                <a:cs typeface="Noto Sans CJK KR" pitchFamily="34" charset="-120"/>
-              </a:rPr>
-              <a:t>NINJAGO The Ride</a:t>
-            </a:r>
-            <a:endParaRPr lang="en-US" sz="1300" dirty="0"/>
-          </a:p>
-        </p:txBody>
-      </p:sp>
-      <p:sp>
-        <p:nvSpPr>
-          <p:cNvPr id="20" name="Text 18"/>
-          <p:cNvSpPr txBox="1"/>
-          <p:nvPr/>
-        </p:nvSpPr>
-        <p:spPr>
-          <a:xfrm>
-            <a:off x="8595360" y="1755648"/>
-            <a:ext cx="2971800" cy="228600"/>
-          </a:xfrm>
-          <a:prstGeom prst="rect">
-            <a:avLst/>
-          </a:prstGeom>
-          <a:noFill/>
-          <a:ln/>
-        </p:spPr>
-        <p:txBody>
-          <a:bodyPr wrap="square" lIns="0" tIns="0" rIns="0" bIns="0" rtlCol="0" anchor="ctr"/>
-          <a:lstStyle/>
-          <a:p>
-            <a:pPr indent="0" marL="0">
-              <a:buNone/>
-            </a:pPr>
-            <a:r>
-              <a:rPr lang="en-US" sz="1000" i="1" dirty="0">
-                <a:solidFill>
-                  <a:srgbClr val="D62839"/>
-                </a:solidFill>
-                <a:latin typeface="Noto Sans CJK KR" pitchFamily="34" charset="0"/>
-                <a:ea typeface="Noto Sans CJK KR" pitchFamily="34" charset="-122"/>
-                <a:cs typeface="Noto Sans CJK KR" pitchFamily="34" charset="-120"/>
-              </a:rPr>
-              <a:t>NINJAGO World</a:t>
-            </a:r>
-            <a:endParaRPr lang="en-US" sz="1000" dirty="0"/>
-          </a:p>
-        </p:txBody>
-      </p:sp>
-      <p:sp>
-        <p:nvSpPr>
-          <p:cNvPr id="21" name="Text 19"/>
-          <p:cNvSpPr txBox="1"/>
-          <p:nvPr/>
-        </p:nvSpPr>
-        <p:spPr>
-          <a:xfrm>
-            <a:off x="8211312" y="2029968"/>
-            <a:ext cx="3328416" cy="713232"/>
-          </a:xfrm>
-          <a:prstGeom prst="rect">
-            <a:avLst/>
-          </a:prstGeom>
-          <a:noFill/>
-          <a:ln/>
-        </p:spPr>
-        <p:txBody>
-          <a:bodyPr wrap="square" lIns="0" tIns="0" rIns="0" bIns="0" rtlCol="0" anchor="t"/>
-          <a:lstStyle/>
-          <a:p>
-            <a:pPr indent="0" marL="0">
-              <a:buNone/>
-            </a:pPr>
-            <a:r>
-              <a:rPr lang="en-US" sz="1000" dirty="0">
-                <a:solidFill>
-                  <a:srgbClr val="5C5749"/>
-                </a:solidFill>
-                <a:latin typeface="Noto Sans CJK KR" pitchFamily="34" charset="0"/>
-                <a:ea typeface="Noto Sans CJK KR" pitchFamily="34" charset="-122"/>
-                <a:cs typeface="Noto Sans CJK KR" pitchFamily="34" charset="-120"/>
-              </a:rPr>
-              <a:t>4D — 손으로 불·얼음·번개·대지 파워를 쏘는 대모험</a:t>
-            </a:r>
-            <a:endParaRPr lang="en-US" sz="1000" dirty="0"/>
-          </a:p>
-        </p:txBody>
-      </p:sp>
-      <p:sp>
-        <p:nvSpPr>
-          <p:cNvPr id="22" name="Shape 20"/>
-          <p:cNvSpPr/>
-          <p:nvPr/>
-        </p:nvSpPr>
-        <p:spPr>
-          <a:xfrm>
-            <a:off x="457200" y="2953512"/>
-            <a:ext cx="3657600" cy="1417320"/>
-          </a:xfrm>
-          <a:prstGeom prst="roundRect">
-            <a:avLst>
-              <a:gd name="adj" fmla="val 4516"/>
-            </a:avLst>
-          </a:prstGeom>
-          <a:solidFill>
-            <a:srgbClr val="FFFFFF"/>
-          </a:solidFill>
-          <a:ln w="12700">
-            <a:solidFill>
-              <a:srgbClr val="E2E4E8"/>
-            </a:solidFill>
-            <a:prstDash val="solid"/>
-          </a:ln>
-          <a:effectLst>
-            <a:outerShdw sx="100000" sy="100000" kx="0" ky="0" algn="bl" rotWithShape="0" blurRad="63500" dist="25400" dir="5400000">
-              <a:srgbClr val="888888">
-                <a:alpha val="20000"/>
-              </a:srgbClr>
-            </a:outerShdw>
-          </a:effectLst>
-        </p:spPr>
-      </p:sp>
-      <p:sp>
-        <p:nvSpPr>
-          <p:cNvPr id="23" name="Shape 21"/>
-          <p:cNvSpPr/>
-          <p:nvPr/>
-        </p:nvSpPr>
-        <p:spPr>
-          <a:xfrm>
-            <a:off x="621792" y="3118104"/>
-            <a:ext cx="292608" cy="292608"/>
-          </a:xfrm>
-          <a:prstGeom prst="ellipse">
-            <a:avLst/>
-          </a:prstGeom>
-          <a:solidFill>
-            <a:srgbClr val="D62839"/>
-          </a:solidFill>
-          <a:ln/>
-        </p:spPr>
-      </p:sp>
-      <p:sp>
-        <p:nvSpPr>
-          <p:cNvPr id="24" name="Text 22"/>
-          <p:cNvSpPr txBox="1"/>
-          <p:nvPr/>
-        </p:nvSpPr>
-        <p:spPr>
-          <a:xfrm>
-            <a:off x="621792" y="3118104"/>
-            <a:ext cx="292608" cy="292608"/>
-          </a:xfrm>
-          <a:prstGeom prst="rect">
-            <a:avLst/>
-          </a:prstGeom>
-          <a:noFill/>
-          <a:ln/>
-        </p:spPr>
-        <p:txBody>
-          <a:bodyPr wrap="square" lIns="0" tIns="0" rIns="0" bIns="0" rtlCol="0" anchor="ctr"/>
-          <a:lstStyle/>
-          <a:p>
-            <a:pPr algn="ctr" indent="0" marL="0">
-              <a:buNone/>
-            </a:pPr>
-            <a:r>
-              <a:rPr lang="en-US" sz="1300" b="1" dirty="0">
-                <a:solidFill>
-                  <a:srgbClr val="FFFFFF"/>
-                </a:solidFill>
-                <a:latin typeface="Noto Sans CJK KR" pitchFamily="34" charset="0"/>
-                <a:ea typeface="Noto Sans CJK KR" pitchFamily="34" charset="-122"/>
-                <a:cs typeface="Noto Sans CJK KR" pitchFamily="34" charset="-120"/>
-              </a:rPr>
-              <a:t>4</a:t>
-            </a:r>
-            <a:endParaRPr lang="en-US" sz="1300" dirty="0"/>
-          </a:p>
-        </p:txBody>
-      </p:sp>
-      <p:sp>
-        <p:nvSpPr>
-          <p:cNvPr id="25" name="Text 23"/>
-          <p:cNvSpPr txBox="1"/>
-          <p:nvPr/>
-        </p:nvSpPr>
-        <p:spPr>
-          <a:xfrm>
-            <a:off x="1005840" y="3063240"/>
-            <a:ext cx="2971800" cy="292608"/>
-          </a:xfrm>
-          <a:prstGeom prst="rect">
-            <a:avLst/>
-          </a:prstGeom>
-          <a:noFill/>
-          <a:ln/>
-        </p:spPr>
-        <p:txBody>
-          <a:bodyPr wrap="square" lIns="0" tIns="0" rIns="0" bIns="0" rtlCol="0" anchor="ctr"/>
-          <a:lstStyle/>
-          <a:p>
-            <a:pPr indent="0" marL="0">
-              <a:buNone/>
-            </a:pPr>
-            <a:r>
-              <a:rPr lang="en-US" sz="1300" b="1" dirty="0">
-                <a:solidFill>
-                  <a:srgbClr val="1A2440"/>
-                </a:solidFill>
-                <a:latin typeface="Noto Sans CJK KR" pitchFamily="34" charset="0"/>
-                <a:ea typeface="Noto Sans CJK KR" pitchFamily="34" charset="-122"/>
-                <a:cs typeface="Noto Sans CJK KR" pitchFamily="34" charset="-120"/>
-              </a:rPr>
-              <a:t>LEGOLAND Lookout</a:t>
-            </a:r>
-            <a:endParaRPr lang="en-US" sz="1300" dirty="0"/>
-          </a:p>
-        </p:txBody>
-      </p:sp>
-      <p:sp>
-        <p:nvSpPr>
-          <p:cNvPr id="26" name="Text 24"/>
-          <p:cNvSpPr txBox="1"/>
-          <p:nvPr/>
-        </p:nvSpPr>
-        <p:spPr>
-          <a:xfrm>
-            <a:off x="1005840" y="3337560"/>
-            <a:ext cx="2971800" cy="228600"/>
-          </a:xfrm>
-          <a:prstGeom prst="rect">
-            <a:avLst/>
-          </a:prstGeom>
-          <a:noFill/>
-          <a:ln/>
-        </p:spPr>
-        <p:txBody>
-          <a:bodyPr wrap="square" lIns="0" tIns="0" rIns="0" bIns="0" rtlCol="0" anchor="ctr"/>
-          <a:lstStyle/>
-          <a:p>
-            <a:pPr indent="0" marL="0">
-              <a:buNone/>
-            </a:pPr>
-            <a:r>
-              <a:rPr lang="en-US" sz="1000" i="1" dirty="0">
-                <a:solidFill>
-                  <a:srgbClr val="D62839"/>
-                </a:solidFill>
-                <a:latin typeface="Noto Sans CJK KR" pitchFamily="34" charset="0"/>
-                <a:ea typeface="Noto Sans CJK KR" pitchFamily="34" charset="-122"/>
-                <a:cs typeface="Noto Sans CJK KR" pitchFamily="34" charset="-120"/>
-              </a:rPr>
-              <a:t>Bricktopia</a:t>
-            </a:r>
-            <a:endParaRPr lang="en-US" sz="1000" dirty="0"/>
-          </a:p>
-        </p:txBody>
-      </p:sp>
-      <p:sp>
-        <p:nvSpPr>
-          <p:cNvPr id="27" name="Text 25"/>
-          <p:cNvSpPr txBox="1"/>
-          <p:nvPr/>
-        </p:nvSpPr>
-        <p:spPr>
-          <a:xfrm>
-            <a:off x="621792" y="3611880"/>
-            <a:ext cx="3328416" cy="713232"/>
-          </a:xfrm>
-          <a:prstGeom prst="rect">
-            <a:avLst/>
-          </a:prstGeom>
-          <a:noFill/>
-          <a:ln/>
-        </p:spPr>
-        <p:txBody>
-          <a:bodyPr wrap="square" lIns="0" tIns="0" rIns="0" bIns="0" rtlCol="0" anchor="t"/>
-          <a:lstStyle/>
-          <a:p>
-            <a:pPr indent="0" marL="0">
-              <a:buNone/>
-            </a:pPr>
-            <a:r>
-              <a:rPr lang="en-US" sz="1000" dirty="0">
-                <a:solidFill>
-                  <a:srgbClr val="5C5749"/>
-                </a:solidFill>
-                <a:latin typeface="Noto Sans CJK KR" pitchFamily="34" charset="0"/>
-                <a:ea typeface="Noto Sans CJK KR" pitchFamily="34" charset="-122"/>
-                <a:cs typeface="Noto Sans CJK KR" pitchFamily="34" charset="-120"/>
-              </a:rPr>
-              <a:t>약 43m 전망대. 스릴 없이 파크 전경 조망</a:t>
-            </a:r>
-            <a:endParaRPr lang="en-US" sz="1000" dirty="0"/>
-          </a:p>
-        </p:txBody>
-      </p:sp>
-      <p:sp>
-        <p:nvSpPr>
-          <p:cNvPr id="28" name="Shape 26"/>
-          <p:cNvSpPr/>
-          <p:nvPr/>
-        </p:nvSpPr>
-        <p:spPr>
-          <a:xfrm>
-            <a:off x="4251960" y="2953512"/>
-            <a:ext cx="3657600" cy="1417320"/>
-          </a:xfrm>
-          <a:prstGeom prst="roundRect">
-            <a:avLst>
-              <a:gd name="adj" fmla="val 4516"/>
-            </a:avLst>
-          </a:prstGeom>
-          <a:solidFill>
-            <a:srgbClr val="FFFFFF"/>
-          </a:solidFill>
-          <a:ln w="12700">
-            <a:solidFill>
-              <a:srgbClr val="E2E4E8"/>
-            </a:solidFill>
-            <a:prstDash val="solid"/>
-          </a:ln>
-          <a:effectLst>
-            <a:outerShdw sx="100000" sy="100000" kx="0" ky="0" algn="bl" rotWithShape="0" blurRad="63500" dist="25400" dir="5400000">
-              <a:srgbClr val="888888">
-                <a:alpha val="20000"/>
-              </a:srgbClr>
-            </a:outerShdw>
-          </a:effectLst>
-        </p:spPr>
-      </p:sp>
-      <p:sp>
-        <p:nvSpPr>
-          <p:cNvPr id="29" name="Shape 27"/>
-          <p:cNvSpPr/>
-          <p:nvPr/>
-        </p:nvSpPr>
-        <p:spPr>
-          <a:xfrm>
-            <a:off x="4416552" y="3118104"/>
-            <a:ext cx="292608" cy="292608"/>
-          </a:xfrm>
-          <a:prstGeom prst="ellipse">
-            <a:avLst/>
-          </a:prstGeom>
-          <a:solidFill>
-            <a:srgbClr val="D62839"/>
-          </a:solidFill>
-          <a:ln/>
-        </p:spPr>
-      </p:sp>
-      <p:sp>
-        <p:nvSpPr>
-          <p:cNvPr id="30" name="Text 28"/>
-          <p:cNvSpPr txBox="1"/>
-          <p:nvPr/>
-        </p:nvSpPr>
-        <p:spPr>
-          <a:xfrm>
-            <a:off x="4416552" y="3118104"/>
-            <a:ext cx="292608" cy="292608"/>
-          </a:xfrm>
-          <a:prstGeom prst="rect">
-            <a:avLst/>
-          </a:prstGeom>
-          <a:noFill/>
-          <a:ln/>
-        </p:spPr>
-        <p:txBody>
-          <a:bodyPr wrap="square" lIns="0" tIns="0" rIns="0" bIns="0" rtlCol="0" anchor="ctr"/>
-          <a:lstStyle/>
-          <a:p>
-            <a:pPr algn="ctr" indent="0" marL="0">
-              <a:buNone/>
-            </a:pPr>
-            <a:r>
-              <a:rPr lang="en-US" sz="1300" b="1" dirty="0">
-                <a:solidFill>
-                  <a:srgbClr val="FFFFFF"/>
-                </a:solidFill>
-                <a:latin typeface="Noto Sans CJK KR" pitchFamily="34" charset="0"/>
-                <a:ea typeface="Noto Sans CJK KR" pitchFamily="34" charset="-122"/>
-                <a:cs typeface="Noto Sans CJK KR" pitchFamily="34" charset="-120"/>
-              </a:rPr>
-              <a:t>5</a:t>
-            </a:r>
-            <a:endParaRPr lang="en-US" sz="1300" dirty="0"/>
-          </a:p>
-        </p:txBody>
-      </p:sp>
-      <p:sp>
-        <p:nvSpPr>
-          <p:cNvPr id="31" name="Text 29"/>
-          <p:cNvSpPr txBox="1"/>
-          <p:nvPr/>
-        </p:nvSpPr>
-        <p:spPr>
-          <a:xfrm>
-            <a:off x="4800600" y="3063240"/>
-            <a:ext cx="2971800" cy="292608"/>
-          </a:xfrm>
-          <a:prstGeom prst="rect">
-            <a:avLst/>
-          </a:prstGeom>
-          <a:noFill/>
-          <a:ln/>
-        </p:spPr>
-        <p:txBody>
-          <a:bodyPr wrap="square" lIns="0" tIns="0" rIns="0" bIns="0" rtlCol="0" anchor="ctr"/>
-          <a:lstStyle/>
-          <a:p>
-            <a:pPr indent="0" marL="0">
-              <a:buNone/>
-            </a:pPr>
-            <a:r>
-              <a:rPr lang="en-US" sz="1300" b="1" dirty="0">
-                <a:solidFill>
-                  <a:srgbClr val="1A2440"/>
-                </a:solidFill>
-                <a:latin typeface="Noto Sans CJK KR" pitchFamily="34" charset="0"/>
-                <a:ea typeface="Noto Sans CJK KR" pitchFamily="34" charset="-122"/>
-                <a:cs typeface="Noto Sans CJK KR" pitchFamily="34" charset="-120"/>
-              </a:rPr>
-              <a:t>Monkey Climb</a:t>
-            </a:r>
-            <a:endParaRPr lang="en-US" sz="1300" dirty="0"/>
-          </a:p>
-        </p:txBody>
-      </p:sp>
-      <p:sp>
-        <p:nvSpPr>
-          <p:cNvPr id="32" name="Text 30"/>
-          <p:cNvSpPr txBox="1"/>
-          <p:nvPr/>
-        </p:nvSpPr>
-        <p:spPr>
-          <a:xfrm>
-            <a:off x="4800600" y="3337560"/>
-            <a:ext cx="2971800" cy="228600"/>
-          </a:xfrm>
-          <a:prstGeom prst="rect">
-            <a:avLst/>
-          </a:prstGeom>
-          <a:noFill/>
-          <a:ln/>
-        </p:spPr>
-        <p:txBody>
-          <a:bodyPr wrap="square" lIns="0" tIns="0" rIns="0" bIns="0" rtlCol="0" anchor="ctr"/>
-          <a:lstStyle/>
-          <a:p>
-            <a:pPr indent="0" marL="0">
-              <a:buNone/>
-            </a:pPr>
-            <a:r>
-              <a:rPr lang="en-US" sz="1000" i="1" dirty="0">
-                <a:solidFill>
-                  <a:srgbClr val="D62839"/>
-                </a:solidFill>
-                <a:latin typeface="Noto Sans CJK KR" pitchFamily="34" charset="0"/>
-                <a:ea typeface="Noto Sans CJK KR" pitchFamily="34" charset="-122"/>
-                <a:cs typeface="Noto Sans CJK KR" pitchFamily="34" charset="-120"/>
-              </a:rPr>
-              <a:t>Bricktopia</a:t>
-            </a:r>
-            <a:endParaRPr lang="en-US" sz="1000" dirty="0"/>
-          </a:p>
-        </p:txBody>
-      </p:sp>
-      <p:sp>
-        <p:nvSpPr>
-          <p:cNvPr id="33" name="Text 31"/>
-          <p:cNvSpPr txBox="1"/>
-          <p:nvPr/>
-        </p:nvSpPr>
-        <p:spPr>
-          <a:xfrm>
-            <a:off x="4416552" y="3611880"/>
-            <a:ext cx="3328416" cy="713232"/>
-          </a:xfrm>
-          <a:prstGeom prst="rect">
-            <a:avLst/>
-          </a:prstGeom>
-          <a:noFill/>
-          <a:ln/>
-        </p:spPr>
-        <p:txBody>
-          <a:bodyPr wrap="square" lIns="0" tIns="0" rIns="0" bIns="0" rtlCol="0" anchor="t"/>
-          <a:lstStyle/>
-          <a:p>
-            <a:pPr indent="0" marL="0">
-              <a:buNone/>
-            </a:pPr>
-            <a:r>
-              <a:rPr lang="en-US" sz="1000" dirty="0">
-                <a:solidFill>
-                  <a:srgbClr val="5C5749"/>
-                </a:solidFill>
-                <a:latin typeface="Noto Sans CJK KR" pitchFamily="34" charset="0"/>
-                <a:ea typeface="Noto Sans CJK KR" pitchFamily="34" charset="-122"/>
-                <a:cs typeface="Noto Sans CJK KR" pitchFamily="34" charset="-120"/>
-              </a:rPr>
-              <a:t>그물 정글짐 등반 후 자유낙하 하강</a:t>
-            </a:r>
-            <a:endParaRPr lang="en-US" sz="1000" dirty="0"/>
-          </a:p>
-        </p:txBody>
-      </p:sp>
-      <p:sp>
-        <p:nvSpPr>
-          <p:cNvPr id="34" name="Shape 32"/>
-          <p:cNvSpPr/>
-          <p:nvPr/>
-        </p:nvSpPr>
-        <p:spPr>
-          <a:xfrm>
-            <a:off x="8046720" y="2953512"/>
-            <a:ext cx="3657600" cy="1417320"/>
-          </a:xfrm>
-          <a:prstGeom prst="roundRect">
-            <a:avLst>
-              <a:gd name="adj" fmla="val 4516"/>
-            </a:avLst>
-          </a:prstGeom>
-          <a:solidFill>
-            <a:srgbClr val="FFFFFF"/>
-          </a:solidFill>
-          <a:ln w="12700">
-            <a:solidFill>
-              <a:srgbClr val="E2E4E8"/>
-            </a:solidFill>
-            <a:prstDash val="solid"/>
-          </a:ln>
-          <a:effectLst>
-            <a:outerShdw sx="100000" sy="100000" kx="0" ky="0" algn="bl" rotWithShape="0" blurRad="63500" dist="25400" dir="5400000">
-              <a:srgbClr val="888888">
-                <a:alpha val="20000"/>
-              </a:srgbClr>
-            </a:outerShdw>
-          </a:effectLst>
-        </p:spPr>
-      </p:sp>
-      <p:sp>
-        <p:nvSpPr>
-          <p:cNvPr id="35" name="Shape 33"/>
-          <p:cNvSpPr/>
-          <p:nvPr/>
-        </p:nvSpPr>
-        <p:spPr>
-          <a:xfrm>
-            <a:off x="8211312" y="3118104"/>
-            <a:ext cx="292608" cy="292608"/>
-          </a:xfrm>
-          <a:prstGeom prst="ellipse">
-            <a:avLst/>
-          </a:prstGeom>
-          <a:solidFill>
-            <a:srgbClr val="D62839"/>
-          </a:solidFill>
-          <a:ln/>
-        </p:spPr>
-      </p:sp>
-      <p:sp>
-        <p:nvSpPr>
-          <p:cNvPr id="36" name="Text 34"/>
-          <p:cNvSpPr txBox="1"/>
-          <p:nvPr/>
-        </p:nvSpPr>
-        <p:spPr>
-          <a:xfrm>
-            <a:off x="8211312" y="3118104"/>
-            <a:ext cx="292608" cy="292608"/>
-          </a:xfrm>
-          <a:prstGeom prst="rect">
-            <a:avLst/>
-          </a:prstGeom>
-          <a:noFill/>
-          <a:ln/>
-        </p:spPr>
-        <p:txBody>
-          <a:bodyPr wrap="square" lIns="0" tIns="0" rIns="0" bIns="0" rtlCol="0" anchor="ctr"/>
-          <a:lstStyle/>
-          <a:p>
-            <a:pPr algn="ctr" indent="0" marL="0">
-              <a:buNone/>
-            </a:pPr>
-            <a:r>
-              <a:rPr lang="en-US" sz="1300" b="1" dirty="0">
-                <a:solidFill>
-                  <a:srgbClr val="FFFFFF"/>
-                </a:solidFill>
-                <a:latin typeface="Noto Sans CJK KR" pitchFamily="34" charset="0"/>
-                <a:ea typeface="Noto Sans CJK KR" pitchFamily="34" charset="-122"/>
-                <a:cs typeface="Noto Sans CJK KR" pitchFamily="34" charset="-120"/>
-              </a:rPr>
-              <a:t>6</a:t>
-            </a:r>
-            <a:endParaRPr lang="en-US" sz="1300" dirty="0"/>
-          </a:p>
-        </p:txBody>
-      </p:sp>
-      <p:sp>
-        <p:nvSpPr>
-          <p:cNvPr id="37" name="Text 35"/>
-          <p:cNvSpPr txBox="1"/>
-          <p:nvPr/>
-        </p:nvSpPr>
-        <p:spPr>
-          <a:xfrm>
-            <a:off x="8595360" y="3063240"/>
-            <a:ext cx="2971800" cy="292608"/>
-          </a:xfrm>
-          <a:prstGeom prst="rect">
-            <a:avLst/>
-          </a:prstGeom>
-          <a:noFill/>
-          <a:ln/>
-        </p:spPr>
-        <p:txBody>
-          <a:bodyPr wrap="square" lIns="0" tIns="0" rIns="0" bIns="0" rtlCol="0" anchor="ctr"/>
-          <a:lstStyle/>
-          <a:p>
-            <a:pPr indent="0" marL="0">
-              <a:buNone/>
-            </a:pPr>
-            <a:r>
-              <a:rPr lang="en-US" sz="1300" b="1" dirty="0">
-                <a:solidFill>
-                  <a:srgbClr val="1A2440"/>
-                </a:solidFill>
-                <a:latin typeface="Noto Sans CJK KR" pitchFamily="34" charset="0"/>
-                <a:ea typeface="Noto Sans CJK KR" pitchFamily="34" charset="-122"/>
-                <a:cs typeface="Noto Sans CJK KR" pitchFamily="34" charset="-120"/>
-              </a:rPr>
-              <a:t>Wave Racers</a:t>
-            </a:r>
-            <a:endParaRPr lang="en-US" sz="1300" dirty="0"/>
-          </a:p>
-        </p:txBody>
-      </p:sp>
-      <p:sp>
-        <p:nvSpPr>
-          <p:cNvPr id="38" name="Text 36"/>
-          <p:cNvSpPr txBox="1"/>
-          <p:nvPr/>
-        </p:nvSpPr>
-        <p:spPr>
-          <a:xfrm>
-            <a:off x="8595360" y="3337560"/>
-            <a:ext cx="2971800" cy="228600"/>
-          </a:xfrm>
-          <a:prstGeom prst="rect">
-            <a:avLst/>
-          </a:prstGeom>
-          <a:noFill/>
-          <a:ln/>
-        </p:spPr>
-        <p:txBody>
-          <a:bodyPr wrap="square" lIns="0" tIns="0" rIns="0" bIns="0" rtlCol="0" anchor="ctr"/>
-          <a:lstStyle/>
-          <a:p>
-            <a:pPr indent="0" marL="0">
-              <a:buNone/>
-            </a:pPr>
-            <a:r>
-              <a:rPr lang="en-US" sz="1000" i="1" dirty="0">
-                <a:solidFill>
-                  <a:srgbClr val="D62839"/>
-                </a:solidFill>
-                <a:latin typeface="Noto Sans CJK KR" pitchFamily="34" charset="0"/>
-                <a:ea typeface="Noto Sans CJK KR" pitchFamily="34" charset="-122"/>
-                <a:cs typeface="Noto Sans CJK KR" pitchFamily="34" charset="-120"/>
-              </a:rPr>
-              <a:t>LEGO City</a:t>
-            </a:r>
-            <a:endParaRPr lang="en-US" sz="1000" dirty="0"/>
-          </a:p>
-        </p:txBody>
-      </p:sp>
-      <p:sp>
-        <p:nvSpPr>
-          <p:cNvPr id="39" name="Text 37"/>
-          <p:cNvSpPr txBox="1"/>
-          <p:nvPr/>
-        </p:nvSpPr>
-        <p:spPr>
-          <a:xfrm>
-            <a:off x="8211312" y="3611880"/>
-            <a:ext cx="3328416" cy="713232"/>
-          </a:xfrm>
-          <a:prstGeom prst="rect">
-            <a:avLst/>
-          </a:prstGeom>
-          <a:noFill/>
-          <a:ln/>
-        </p:spPr>
-        <p:txBody>
-          <a:bodyPr wrap="square" lIns="0" tIns="0" rIns="0" bIns="0" rtlCol="0" anchor="t"/>
-          <a:lstStyle/>
-          <a:p>
-            <a:pPr indent="0" marL="0">
-              <a:buNone/>
-            </a:pPr>
-            <a:r>
-              <a:rPr lang="en-US" sz="1000" dirty="0">
-                <a:solidFill>
-                  <a:srgbClr val="5C5749"/>
-                </a:solidFill>
-                <a:latin typeface="Noto Sans CJK KR" pitchFamily="34" charset="0"/>
-                <a:ea typeface="Noto Sans CJK KR" pitchFamily="34" charset="-122"/>
-                <a:cs typeface="Noto Sans CJK KR" pitchFamily="34" charset="-120"/>
-              </a:rPr>
-              <a:t>보트로 파도·물대포 회피. 확실히 젖음</a:t>
-            </a:r>
-            <a:endParaRPr lang="en-US" sz="1000" dirty="0"/>
-          </a:p>
-        </p:txBody>
-      </p:sp>
-      <p:sp>
-        <p:nvSpPr>
-          <p:cNvPr id="40" name="Shape 38"/>
-          <p:cNvSpPr/>
-          <p:nvPr/>
-        </p:nvSpPr>
-        <p:spPr>
-          <a:xfrm>
-            <a:off x="457200" y="4535424"/>
-            <a:ext cx="3657600" cy="1417320"/>
-          </a:xfrm>
-          <a:prstGeom prst="roundRect">
-            <a:avLst>
-              <a:gd name="adj" fmla="val 4516"/>
-            </a:avLst>
-          </a:prstGeom>
-          <a:solidFill>
-            <a:srgbClr val="FFFFFF"/>
-          </a:solidFill>
-          <a:ln w="12700">
-            <a:solidFill>
-              <a:srgbClr val="E2E4E8"/>
-            </a:solidFill>
-            <a:prstDash val="solid"/>
-          </a:ln>
-          <a:effectLst>
-            <a:outerShdw sx="100000" sy="100000" kx="0" ky="0" algn="bl" rotWithShape="0" blurRad="63500" dist="25400" dir="5400000">
-              <a:srgbClr val="888888">
-                <a:alpha val="20000"/>
-              </a:srgbClr>
-            </a:outerShdw>
-          </a:effectLst>
-        </p:spPr>
-      </p:sp>
-      <p:sp>
-        <p:nvSpPr>
-          <p:cNvPr id="41" name="Shape 39"/>
-          <p:cNvSpPr/>
-          <p:nvPr/>
-        </p:nvSpPr>
-        <p:spPr>
-          <a:xfrm>
-            <a:off x="621792" y="4700016"/>
-            <a:ext cx="292608" cy="292608"/>
-          </a:xfrm>
-          <a:prstGeom prst="ellipse">
-            <a:avLst/>
-          </a:prstGeom>
-          <a:solidFill>
-            <a:srgbClr val="D62839"/>
-          </a:solidFill>
-          <a:ln/>
-        </p:spPr>
-      </p:sp>
-      <p:sp>
-        <p:nvSpPr>
-          <p:cNvPr id="42" name="Text 40"/>
-          <p:cNvSpPr txBox="1"/>
-          <p:nvPr/>
-        </p:nvSpPr>
-        <p:spPr>
-          <a:xfrm>
-            <a:off x="621792" y="4700016"/>
-            <a:ext cx="292608" cy="292608"/>
-          </a:xfrm>
-          <a:prstGeom prst="rect">
-            <a:avLst/>
-          </a:prstGeom>
-          <a:noFill/>
-          <a:ln/>
-        </p:spPr>
-        <p:txBody>
-          <a:bodyPr wrap="square" lIns="0" tIns="0" rIns="0" bIns="0" rtlCol="0" anchor="ctr"/>
-          <a:lstStyle/>
-          <a:p>
-            <a:pPr algn="ctr" indent="0" marL="0">
-              <a:buNone/>
-            </a:pPr>
-            <a:r>
-              <a:rPr lang="en-US" sz="1300" b="1" dirty="0">
-                <a:solidFill>
-                  <a:srgbClr val="FFFFFF"/>
-                </a:solidFill>
-                <a:latin typeface="Noto Sans CJK KR" pitchFamily="34" charset="0"/>
-                <a:ea typeface="Noto Sans CJK KR" pitchFamily="34" charset="-122"/>
-                <a:cs typeface="Noto Sans CJK KR" pitchFamily="34" charset="-120"/>
-              </a:rPr>
-              <a:t>7</a:t>
-            </a:r>
-            <a:endParaRPr lang="en-US" sz="1300" dirty="0"/>
-          </a:p>
-        </p:txBody>
-      </p:sp>
-      <p:sp>
-        <p:nvSpPr>
-          <p:cNvPr id="43" name="Text 41"/>
-          <p:cNvSpPr txBox="1"/>
-          <p:nvPr/>
-        </p:nvSpPr>
-        <p:spPr>
-          <a:xfrm>
-            <a:off x="1005840" y="4645152"/>
-            <a:ext cx="2971800" cy="292608"/>
-          </a:xfrm>
-          <a:prstGeom prst="rect">
-            <a:avLst/>
-          </a:prstGeom>
-          <a:noFill/>
-          <a:ln/>
-        </p:spPr>
-        <p:txBody>
-          <a:bodyPr wrap="square" lIns="0" tIns="0" rIns="0" bIns="0" rtlCol="0" anchor="ctr"/>
-          <a:lstStyle/>
-          <a:p>
-            <a:pPr indent="0" marL="0">
-              <a:buNone/>
-            </a:pPr>
-            <a:r>
-              <a:rPr lang="en-US" sz="1300" b="1" dirty="0">
-                <a:solidFill>
-                  <a:srgbClr val="1A2440"/>
-                </a:solidFill>
-                <a:latin typeface="Noto Sans CJK KR" pitchFamily="34" charset="0"/>
-                <a:ea typeface="Noto Sans CJK KR" pitchFamily="34" charset="-122"/>
-                <a:cs typeface="Noto Sans CJK KR" pitchFamily="34" charset="-120"/>
-              </a:rPr>
-              <a:t>Coast Guard Academy</a:t>
-            </a:r>
-            <a:endParaRPr lang="en-US" sz="1300" dirty="0"/>
-          </a:p>
-        </p:txBody>
-      </p:sp>
-      <p:sp>
-        <p:nvSpPr>
-          <p:cNvPr id="44" name="Text 42"/>
-          <p:cNvSpPr txBox="1"/>
-          <p:nvPr/>
-        </p:nvSpPr>
-        <p:spPr>
-          <a:xfrm>
-            <a:off x="1005840" y="4919472"/>
-            <a:ext cx="2971800" cy="228600"/>
-          </a:xfrm>
-          <a:prstGeom prst="rect">
-            <a:avLst/>
-          </a:prstGeom>
-          <a:noFill/>
-          <a:ln/>
-        </p:spPr>
-        <p:txBody>
-          <a:bodyPr wrap="square" lIns="0" tIns="0" rIns="0" bIns="0" rtlCol="0" anchor="ctr"/>
-          <a:lstStyle/>
-          <a:p>
-            <a:pPr indent="0" marL="0">
-              <a:buNone/>
-            </a:pPr>
-            <a:r>
-              <a:rPr lang="en-US" sz="1000" i="1" dirty="0">
-                <a:solidFill>
-                  <a:srgbClr val="D62839"/>
-                </a:solidFill>
-                <a:latin typeface="Noto Sans CJK KR" pitchFamily="34" charset="0"/>
-                <a:ea typeface="Noto Sans CJK KR" pitchFamily="34" charset="-122"/>
-                <a:cs typeface="Noto Sans CJK KR" pitchFamily="34" charset="-120"/>
-              </a:rPr>
-              <a:t>LEGO City</a:t>
-            </a:r>
-            <a:endParaRPr lang="en-US" sz="1000" dirty="0"/>
-          </a:p>
-        </p:txBody>
-      </p:sp>
-      <p:sp>
-        <p:nvSpPr>
-          <p:cNvPr id="45" name="Text 43"/>
-          <p:cNvSpPr txBox="1"/>
-          <p:nvPr/>
-        </p:nvSpPr>
-        <p:spPr>
-          <a:xfrm>
-            <a:off x="621792" y="5193792"/>
-            <a:ext cx="3328416" cy="713232"/>
-          </a:xfrm>
-          <a:prstGeom prst="rect">
-            <a:avLst/>
-          </a:prstGeom>
-          <a:noFill/>
-          <a:ln/>
-        </p:spPr>
-        <p:txBody>
-          <a:bodyPr wrap="square" lIns="0" tIns="0" rIns="0" bIns="0" rtlCol="0" anchor="t"/>
-          <a:lstStyle/>
-          <a:p>
-            <a:pPr indent="0" marL="0">
-              <a:buNone/>
-            </a:pPr>
-            <a:r>
-              <a:rPr lang="en-US" sz="1000" dirty="0">
-                <a:solidFill>
-                  <a:srgbClr val="5C5749"/>
-                </a:solidFill>
-                <a:latin typeface="Noto Sans CJK KR" pitchFamily="34" charset="0"/>
-                <a:ea typeface="Noto Sans CJK KR" pitchFamily="34" charset="-122"/>
-                <a:cs typeface="Noto Sans CJK KR" pitchFamily="34" charset="-120"/>
-              </a:rPr>
-              <a:t>보트로 부둣가 순찰. Wave Racers보다 덜 젖음</a:t>
-            </a:r>
-            <a:endParaRPr lang="en-US" sz="1000" dirty="0"/>
-          </a:p>
-        </p:txBody>
-      </p:sp>
-      <p:sp>
-        <p:nvSpPr>
-          <p:cNvPr id="46" name="Shape 44"/>
-          <p:cNvSpPr/>
-          <p:nvPr/>
-        </p:nvSpPr>
-        <p:spPr>
-          <a:xfrm>
-            <a:off x="4251960" y="4535424"/>
-            <a:ext cx="3657600" cy="1417320"/>
-          </a:xfrm>
-          <a:prstGeom prst="roundRect">
-            <a:avLst>
-              <a:gd name="adj" fmla="val 4516"/>
-            </a:avLst>
-          </a:prstGeom>
-          <a:solidFill>
-            <a:srgbClr val="FFFFFF"/>
-          </a:solidFill>
-          <a:ln w="12700">
-            <a:solidFill>
-              <a:srgbClr val="E2E4E8"/>
-            </a:solidFill>
-            <a:prstDash val="solid"/>
-          </a:ln>
-          <a:effectLst>
-            <a:outerShdw sx="100000" sy="100000" kx="0" ky="0" algn="bl" rotWithShape="0" blurRad="63500" dist="25400" dir="5400000">
-              <a:srgbClr val="888888">
-                <a:alpha val="20000"/>
-              </a:srgbClr>
-            </a:outerShdw>
-          </a:effectLst>
-        </p:spPr>
-      </p:sp>
-      <p:sp>
-        <p:nvSpPr>
-          <p:cNvPr id="47" name="Shape 45"/>
-          <p:cNvSpPr/>
-          <p:nvPr/>
-        </p:nvSpPr>
-        <p:spPr>
-          <a:xfrm>
-            <a:off x="4416552" y="4700016"/>
-            <a:ext cx="292608" cy="292608"/>
-          </a:xfrm>
-          <a:prstGeom prst="ellipse">
-            <a:avLst/>
-          </a:prstGeom>
-          <a:solidFill>
-            <a:srgbClr val="D62839"/>
-          </a:solidFill>
-          <a:ln/>
-        </p:spPr>
-      </p:sp>
-      <p:sp>
-        <p:nvSpPr>
-          <p:cNvPr id="48" name="Text 46"/>
-          <p:cNvSpPr txBox="1"/>
-          <p:nvPr/>
-        </p:nvSpPr>
-        <p:spPr>
-          <a:xfrm>
-            <a:off x="4416552" y="4700016"/>
-            <a:ext cx="292608" cy="292608"/>
-          </a:xfrm>
-          <a:prstGeom prst="rect">
-            <a:avLst/>
-          </a:prstGeom>
-          <a:noFill/>
-          <a:ln/>
-        </p:spPr>
-        <p:txBody>
-          <a:bodyPr wrap="square" lIns="0" tIns="0" rIns="0" bIns="0" rtlCol="0" anchor="ctr"/>
-          <a:lstStyle/>
-          <a:p>
-            <a:pPr algn="ctr" indent="0" marL="0">
-              <a:buNone/>
-            </a:pPr>
-            <a:r>
-              <a:rPr lang="en-US" sz="1300" b="1" dirty="0">
-                <a:solidFill>
-                  <a:srgbClr val="FFFFFF"/>
-                </a:solidFill>
-                <a:latin typeface="Noto Sans CJK KR" pitchFamily="34" charset="0"/>
-                <a:ea typeface="Noto Sans CJK KR" pitchFamily="34" charset="-122"/>
-                <a:cs typeface="Noto Sans CJK KR" pitchFamily="34" charset="-120"/>
-              </a:rPr>
-              <a:t>8</a:t>
-            </a:r>
-            <a:endParaRPr lang="en-US" sz="1300" dirty="0"/>
-          </a:p>
-        </p:txBody>
-      </p:sp>
-      <p:sp>
-        <p:nvSpPr>
-          <p:cNvPr id="49" name="Text 47"/>
-          <p:cNvSpPr txBox="1"/>
-          <p:nvPr/>
-        </p:nvSpPr>
-        <p:spPr>
-          <a:xfrm>
-            <a:off x="4800600" y="4645152"/>
-            <a:ext cx="2971800" cy="292608"/>
-          </a:xfrm>
-          <a:prstGeom prst="rect">
-            <a:avLst/>
-          </a:prstGeom>
-          <a:noFill/>
-          <a:ln/>
-        </p:spPr>
-        <p:txBody>
-          <a:bodyPr wrap="square" lIns="0" tIns="0" rIns="0" bIns="0" rtlCol="0" anchor="ctr"/>
-          <a:lstStyle/>
-          <a:p>
-            <a:pPr indent="0" marL="0">
-              <a:buNone/>
-            </a:pPr>
-            <a:r>
-              <a:rPr lang="en-US" sz="1300" b="1" dirty="0">
-                <a:solidFill>
-                  <a:srgbClr val="1A2440"/>
-                </a:solidFill>
-                <a:latin typeface="Noto Sans CJK KR" pitchFamily="34" charset="0"/>
-                <a:ea typeface="Noto Sans CJK KR" pitchFamily="34" charset="-122"/>
-                <a:cs typeface="Noto Sans CJK KR" pitchFamily="34" charset="-120"/>
-              </a:rPr>
-              <a:t>Merlin's Flying Machines</a:t>
-            </a:r>
-            <a:endParaRPr lang="en-US" sz="1300" dirty="0"/>
-          </a:p>
-        </p:txBody>
-      </p:sp>
-      <p:sp>
-        <p:nvSpPr>
-          <p:cNvPr id="50" name="Text 48"/>
-          <p:cNvSpPr txBox="1"/>
-          <p:nvPr/>
-        </p:nvSpPr>
-        <p:spPr>
-          <a:xfrm>
-            <a:off x="4800600" y="4919472"/>
-            <a:ext cx="2971800" cy="228600"/>
-          </a:xfrm>
-          <a:prstGeom prst="rect">
-            <a:avLst/>
-          </a:prstGeom>
-          <a:noFill/>
-          <a:ln/>
-        </p:spPr>
-        <p:txBody>
-          <a:bodyPr wrap="square" lIns="0" tIns="0" rIns="0" bIns="0" rtlCol="0" anchor="ctr"/>
-          <a:lstStyle/>
-          <a:p>
-            <a:pPr indent="0" marL="0">
-              <a:buNone/>
-            </a:pPr>
-            <a:r>
-              <a:rPr lang="en-US" sz="1000" i="1" dirty="0">
-                <a:solidFill>
-                  <a:srgbClr val="D62839"/>
-                </a:solidFill>
-                <a:latin typeface="Noto Sans CJK KR" pitchFamily="34" charset="0"/>
-                <a:ea typeface="Noto Sans CJK KR" pitchFamily="34" charset="-122"/>
-                <a:cs typeface="Noto Sans CJK KR" pitchFamily="34" charset="-120"/>
-              </a:rPr>
-              <a:t>LEGO Castle</a:t>
-            </a:r>
-            <a:endParaRPr lang="en-US" sz="1000" dirty="0"/>
-          </a:p>
-        </p:txBody>
-      </p:sp>
-      <p:sp>
-        <p:nvSpPr>
-          <p:cNvPr id="51" name="Text 49"/>
-          <p:cNvSpPr txBox="1"/>
-          <p:nvPr/>
-        </p:nvSpPr>
-        <p:spPr>
-          <a:xfrm>
-            <a:off x="4416552" y="5193792"/>
-            <a:ext cx="3328416" cy="713232"/>
-          </a:xfrm>
-          <a:prstGeom prst="rect">
-            <a:avLst/>
-          </a:prstGeom>
-          <a:noFill/>
-          <a:ln/>
-        </p:spPr>
-        <p:txBody>
-          <a:bodyPr wrap="square" lIns="0" tIns="0" rIns="0" bIns="0" rtlCol="0" anchor="t"/>
-          <a:lstStyle/>
-          <a:p>
-            <a:pPr indent="0" marL="0">
-              <a:buNone/>
-            </a:pPr>
-            <a:r>
-              <a:rPr lang="en-US" sz="1000" dirty="0">
-                <a:solidFill>
-                  <a:srgbClr val="5C5749"/>
-                </a:solidFill>
-                <a:latin typeface="Noto Sans CJK KR" pitchFamily="34" charset="0"/>
-                <a:ea typeface="Noto Sans CJK KR" pitchFamily="34" charset="-122"/>
-                <a:cs typeface="Noto Sans CJK KR" pitchFamily="34" charset="-120"/>
-              </a:rPr>
-              <a:t>직접 힘을 줘 비행 높이를 겨루는 라이드</a:t>
-            </a:r>
-            <a:endParaRPr lang="en-US" sz="1000" dirty="0"/>
-          </a:p>
-        </p:txBody>
-      </p:sp>
-      <p:sp>
-        <p:nvSpPr>
-          <p:cNvPr id="52" name="Shape 50"/>
-          <p:cNvSpPr/>
-          <p:nvPr/>
-        </p:nvSpPr>
-        <p:spPr>
-          <a:xfrm>
-            <a:off x="8046720" y="4535424"/>
-            <a:ext cx="3657600" cy="1417320"/>
-          </a:xfrm>
-          <a:prstGeom prst="roundRect">
-            <a:avLst>
-              <a:gd name="adj" fmla="val 4516"/>
-            </a:avLst>
-          </a:prstGeom>
-          <a:solidFill>
-            <a:srgbClr val="FFFFFF"/>
-          </a:solidFill>
-          <a:ln w="12700">
-            <a:solidFill>
-              <a:srgbClr val="E2E4E8"/>
-            </a:solidFill>
-            <a:prstDash val="solid"/>
-          </a:ln>
-          <a:effectLst>
-            <a:outerShdw sx="100000" sy="100000" kx="0" ky="0" algn="bl" rotWithShape="0" blurRad="63500" dist="25400" dir="5400000">
-              <a:srgbClr val="888888">
-                <a:alpha val="20000"/>
-              </a:srgbClr>
-            </a:outerShdw>
-          </a:effectLst>
-        </p:spPr>
-      </p:sp>
-      <p:sp>
-        <p:nvSpPr>
-          <p:cNvPr id="53" name="Shape 51"/>
-          <p:cNvSpPr/>
-          <p:nvPr/>
-        </p:nvSpPr>
-        <p:spPr>
-          <a:xfrm>
-            <a:off x="8211312" y="4700016"/>
-            <a:ext cx="292608" cy="292608"/>
-          </a:xfrm>
-          <a:prstGeom prst="ellipse">
-            <a:avLst/>
-          </a:prstGeom>
-          <a:solidFill>
-            <a:srgbClr val="D62839"/>
-          </a:solidFill>
-          <a:ln/>
-        </p:spPr>
-      </p:sp>
-      <p:sp>
-        <p:nvSpPr>
-          <p:cNvPr id="54" name="Text 52"/>
-          <p:cNvSpPr txBox="1"/>
-          <p:nvPr/>
-        </p:nvSpPr>
-        <p:spPr>
-          <a:xfrm>
-            <a:off x="8211312" y="4700016"/>
-            <a:ext cx="292608" cy="292608"/>
-          </a:xfrm>
-          <a:prstGeom prst="rect">
-            <a:avLst/>
-          </a:prstGeom>
-          <a:noFill/>
-          <a:ln/>
-        </p:spPr>
-        <p:txBody>
-          <a:bodyPr wrap="square" lIns="0" tIns="0" rIns="0" bIns="0" rtlCol="0" anchor="ctr"/>
-          <a:lstStyle/>
-          <a:p>
-            <a:pPr algn="ctr" indent="0" marL="0">
-              <a:buNone/>
-            </a:pPr>
-            <a:r>
-              <a:rPr lang="en-US" sz="1300" b="1" dirty="0">
-                <a:solidFill>
-                  <a:srgbClr val="FFFFFF"/>
-                </a:solidFill>
-                <a:latin typeface="Noto Sans CJK KR" pitchFamily="34" charset="0"/>
-                <a:ea typeface="Noto Sans CJK KR" pitchFamily="34" charset="-122"/>
-                <a:cs typeface="Noto Sans CJK KR" pitchFamily="34" charset="-120"/>
-              </a:rPr>
-              <a:t>9</a:t>
-            </a:r>
-            <a:endParaRPr lang="en-US" sz="1300" dirty="0"/>
-          </a:p>
-        </p:txBody>
-      </p:sp>
-      <p:sp>
-        <p:nvSpPr>
-          <p:cNvPr id="55" name="Text 53"/>
-          <p:cNvSpPr txBox="1"/>
-          <p:nvPr/>
-        </p:nvSpPr>
-        <p:spPr>
-          <a:xfrm>
-            <a:off x="8595360" y="4645152"/>
-            <a:ext cx="2971800" cy="292608"/>
-          </a:xfrm>
-          <a:prstGeom prst="rect">
-            <a:avLst/>
-          </a:prstGeom>
-          <a:noFill/>
-          <a:ln/>
-        </p:spPr>
-        <p:txBody>
-          <a:bodyPr wrap="square" lIns="0" tIns="0" rIns="0" bIns="0" rtlCol="0" anchor="ctr"/>
-          <a:lstStyle/>
-          <a:p>
-            <a:pPr indent="0" marL="0">
-              <a:buNone/>
-            </a:pPr>
-            <a:r>
-              <a:rPr lang="en-US" sz="1300" b="1" dirty="0">
-                <a:solidFill>
-                  <a:srgbClr val="1A2440"/>
-                </a:solidFill>
-                <a:latin typeface="Noto Sans CJK KR" pitchFamily="34" charset="0"/>
-                <a:ea typeface="Noto Sans CJK KR" pitchFamily="34" charset="-122"/>
-                <a:cs typeface="Noto Sans CJK KR" pitchFamily="34" charset="-120"/>
-              </a:rPr>
-              <a:t>LEGO Factory Adventure</a:t>
-            </a:r>
-            <a:endParaRPr lang="en-US" sz="1300" dirty="0"/>
-          </a:p>
-        </p:txBody>
-      </p:sp>
-      <p:sp>
-        <p:nvSpPr>
-          <p:cNvPr id="56" name="Text 54"/>
-          <p:cNvSpPr txBox="1"/>
-          <p:nvPr/>
-        </p:nvSpPr>
-        <p:spPr>
-          <a:xfrm>
-            <a:off x="8595360" y="4919472"/>
-            <a:ext cx="2971800" cy="228600"/>
-          </a:xfrm>
-          <a:prstGeom prst="rect">
-            <a:avLst/>
-          </a:prstGeom>
-          <a:noFill/>
-          <a:ln/>
-        </p:spPr>
-        <p:txBody>
-          <a:bodyPr wrap="square" lIns="0" tIns="0" rIns="0" bIns="0" rtlCol="0" anchor="ctr"/>
-          <a:lstStyle/>
-          <a:p>
-            <a:pPr indent="0" marL="0">
-              <a:buNone/>
-            </a:pPr>
-            <a:r>
-              <a:rPr lang="en-US" sz="1000" i="1" dirty="0">
-                <a:solidFill>
-                  <a:srgbClr val="D62839"/>
-                </a:solidFill>
-                <a:latin typeface="Noto Sans CJK KR" pitchFamily="34" charset="0"/>
-                <a:ea typeface="Noto Sans CJK KR" pitchFamily="34" charset="-122"/>
-                <a:cs typeface="Noto Sans CJK KR" pitchFamily="34" charset="-120"/>
-              </a:rPr>
-              <a:t>Brick Street</a:t>
-            </a:r>
-            <a:endParaRPr lang="en-US" sz="1000" dirty="0"/>
-          </a:p>
-        </p:txBody>
-      </p:sp>
-      <p:sp>
-        <p:nvSpPr>
-          <p:cNvPr id="57" name="Text 55"/>
-          <p:cNvSpPr txBox="1"/>
-          <p:nvPr/>
-        </p:nvSpPr>
-        <p:spPr>
-          <a:xfrm>
-            <a:off x="8211312" y="5193792"/>
-            <a:ext cx="3328416" cy="713232"/>
-          </a:xfrm>
-          <a:prstGeom prst="rect">
-            <a:avLst/>
-          </a:prstGeom>
-          <a:noFill/>
-          <a:ln/>
-        </p:spPr>
-        <p:txBody>
-          <a:bodyPr wrap="square" lIns="0" tIns="0" rIns="0" bIns="0" rtlCol="0" anchor="t"/>
-          <a:lstStyle/>
-          <a:p>
-            <a:pPr indent="0" marL="0">
-              <a:buNone/>
-            </a:pPr>
-            <a:r>
-              <a:rPr lang="en-US" sz="1000" dirty="0">
-                <a:solidFill>
-                  <a:srgbClr val="5C5749"/>
-                </a:solidFill>
-                <a:latin typeface="Noto Sans CJK KR" pitchFamily="34" charset="0"/>
-                <a:ea typeface="Noto Sans CJK KR" pitchFamily="34" charset="-122"/>
-                <a:cs typeface="Noto Sans CJK KR" pitchFamily="34" charset="-120"/>
-              </a:rPr>
-              <a:t>미니피겨 크기로 LEGO 생산 과정 견학. 이 파크 전용</a:t>
-            </a:r>
-            <a:endParaRPr lang="en-US" sz="1000" dirty="0"/>
-          </a:p>
-        </p:txBody>
-      </p:sp>
-      <p:sp>
-        <p:nvSpPr>
-          <p:cNvPr id="58" name="Text 56"/>
-          <p:cNvSpPr txBox="1"/>
-          <p:nvPr/>
-        </p:nvSpPr>
-        <p:spPr>
-          <a:xfrm>
-            <a:off x="457200" y="6537960"/>
-            <a:ext cx="10515600" cy="274320"/>
-          </a:xfrm>
-          <a:prstGeom prst="rect">
-            <a:avLst/>
-          </a:prstGeom>
-          <a:noFill/>
-          <a:ln/>
-        </p:spPr>
-        <p:txBody>
-          <a:bodyPr wrap="square" lIns="0" tIns="0" rIns="0" bIns="0" rtlCol="0" anchor="ctr"/>
-          <a:lstStyle/>
-          <a:p>
-            <a:pPr indent="0" marL="0">
-              <a:buNone/>
-            </a:pPr>
-            <a:r>
-              <a:rPr lang="en-US" sz="900" dirty="0">
-                <a:solidFill>
-                  <a:srgbClr val="5C5749"/>
-                </a:solidFill>
-                <a:latin typeface="Noto Sans CJK KR" pitchFamily="34" charset="0"/>
-                <a:ea typeface="Noto Sans CJK KR" pitchFamily="34" charset="-122"/>
-                <a:cs typeface="Noto Sans CJK KR" pitchFamily="34" charset="-120"/>
-              </a:rPr>
-              <a:t>레고랜드 코리아 · 2026-09-23(수) · 아빠+첫째(8세·130cm)+둘째(3세후반·101cm)</a:t>
-            </a:r>
-            <a:endParaRPr lang="en-US" sz="900" dirty="0"/>
-          </a:p>
-        </p:txBody>
-      </p:sp>
-      <p:sp>
-        <p:nvSpPr>
-          <p:cNvPr id="59" name="Text 57"/>
-          <p:cNvSpPr txBox="1"/>
-          <p:nvPr/>
-        </p:nvSpPr>
-        <p:spPr>
-          <a:xfrm>
-            <a:off x="11430000" y="6537960"/>
-            <a:ext cx="365760" cy="274320"/>
-          </a:xfrm>
-          <a:prstGeom prst="rect">
-            <a:avLst/>
-          </a:prstGeom>
-          <a:noFill/>
-          <a:ln/>
-        </p:spPr>
-        <p:txBody>
-          <a:bodyPr wrap="square" lIns="0" tIns="0" rIns="0" bIns="0" rtlCol="0" anchor="ctr"/>
-          <a:lstStyle/>
-          <a:p>
-            <a:pPr algn="r" indent="0" marL="0">
-              <a:buNone/>
-            </a:pPr>
-            <a:r>
-              <a:rPr lang="en-US" sz="900" dirty="0">
-                <a:solidFill>
-                  <a:srgbClr val="5C5749"/>
-                </a:solidFill>
-                <a:latin typeface="Noto Sans CJK KR" pitchFamily="34" charset="0"/>
-                <a:ea typeface="Noto Sans CJK KR" pitchFamily="34" charset="-122"/>
-                <a:cs typeface="Noto Sans CJK KR" pitchFamily="34" charset="-120"/>
-              </a:rPr>
               <a:t>7</a:t>
             </a:r>
             <a:endParaRPr lang="en-US" sz="900" dirty="0"/>
@@ -12857,6 +12319,2111 @@
                 <a:ea typeface="Noto Sans CJK KR" pitchFamily="34" charset="-122"/>
                 <a:cs typeface="Noto Sans CJK KR" pitchFamily="34" charset="-120"/>
               </a:rPr>
+              <a:t>ATTRACTIONS</a:t>
+            </a:r>
+            <a:endParaRPr lang="en-US" sz="1200" dirty="0"/>
+          </a:p>
+        </p:txBody>
+      </p:sp>
+      <p:sp>
+        <p:nvSpPr>
+          <p:cNvPr id="3" name="Text 1"/>
+          <p:cNvSpPr txBox="1"/>
+          <p:nvPr/>
+        </p:nvSpPr>
+        <p:spPr>
+          <a:xfrm>
+            <a:off x="457200" y="594360"/>
+            <a:ext cx="11247120" cy="548640"/>
+          </a:xfrm>
+          <a:prstGeom prst="rect">
+            <a:avLst/>
+          </a:prstGeom>
+          <a:noFill/>
+          <a:ln/>
+        </p:spPr>
+        <p:txBody>
+          <a:bodyPr wrap="square" lIns="0" tIns="0" rIns="0" bIns="0" rtlCol="0" anchor="ctr"/>
+          <a:lstStyle/>
+          <a:p>
+            <a:pPr indent="0" marL="0">
+              <a:buNone/>
+            </a:pPr>
+            <a:r>
+              <a:rPr lang="en-US" sz="2600" b="1" dirty="0">
+                <a:solidFill>
+                  <a:srgbClr val="1A2440"/>
+                </a:solidFill>
+                <a:latin typeface="Noto Sans CJK KR" pitchFamily="34" charset="0"/>
+                <a:ea typeface="Noto Sans CJK KR" pitchFamily="34" charset="-122"/>
+                <a:cs typeface="Noto Sans CJK KR" pitchFamily="34" charset="-120"/>
+              </a:rPr>
+              <a:t>오늘 탈 어트랙션 9종</a:t>
+            </a:r>
+            <a:endParaRPr lang="en-US" sz="2600" dirty="0"/>
+          </a:p>
+        </p:txBody>
+      </p:sp>
+      <p:sp>
+        <p:nvSpPr>
+          <p:cNvPr id="4" name="Shape 2"/>
+          <p:cNvSpPr/>
+          <p:nvPr/>
+        </p:nvSpPr>
+        <p:spPr>
+          <a:xfrm>
+            <a:off x="457200" y="1325880"/>
+            <a:ext cx="3657600" cy="1536192"/>
+          </a:xfrm>
+          <a:prstGeom prst="roundRect">
+            <a:avLst>
+              <a:gd name="adj" fmla="val 4167"/>
+            </a:avLst>
+          </a:prstGeom>
+          <a:solidFill>
+            <a:srgbClr val="FFFFFF"/>
+          </a:solidFill>
+          <a:ln w="12700">
+            <a:solidFill>
+              <a:srgbClr val="E2E4E8"/>
+            </a:solidFill>
+            <a:prstDash val="solid"/>
+          </a:ln>
+          <a:effectLst>
+            <a:outerShdw sx="100000" sy="100000" kx="0" ky="0" algn="bl" rotWithShape="0" blurRad="63500" dist="25400" dir="5400000">
+              <a:srgbClr val="888888">
+                <a:alpha val="20000"/>
+              </a:srgbClr>
+            </a:outerShdw>
+          </a:effectLst>
+        </p:spPr>
+      </p:sp>
+      <p:sp>
+        <p:nvSpPr>
+          <p:cNvPr id="5" name="Shape 3"/>
+          <p:cNvSpPr/>
+          <p:nvPr/>
+        </p:nvSpPr>
+        <p:spPr>
+          <a:xfrm>
+            <a:off x="621792" y="1490472"/>
+            <a:ext cx="292608" cy="292608"/>
+          </a:xfrm>
+          <a:prstGeom prst="ellipse">
+            <a:avLst/>
+          </a:prstGeom>
+          <a:solidFill>
+            <a:srgbClr val="D62839"/>
+          </a:solidFill>
+          <a:ln/>
+        </p:spPr>
+      </p:sp>
+      <p:sp>
+        <p:nvSpPr>
+          <p:cNvPr id="6" name="Text 4"/>
+          <p:cNvSpPr txBox="1"/>
+          <p:nvPr/>
+        </p:nvSpPr>
+        <p:spPr>
+          <a:xfrm>
+            <a:off x="621792" y="1490472"/>
+            <a:ext cx="292608" cy="292608"/>
+          </a:xfrm>
+          <a:prstGeom prst="rect">
+            <a:avLst/>
+          </a:prstGeom>
+          <a:noFill/>
+          <a:ln/>
+        </p:spPr>
+        <p:txBody>
+          <a:bodyPr wrap="square" lIns="0" tIns="0" rIns="0" bIns="0" rtlCol="0" anchor="ctr"/>
+          <a:lstStyle/>
+          <a:p>
+            <a:pPr algn="ctr" indent="0" marL="0">
+              <a:buNone/>
+            </a:pPr>
+            <a:r>
+              <a:rPr lang="en-US" sz="1300" b="1" dirty="0">
+                <a:solidFill>
+                  <a:srgbClr val="FFFFFF"/>
+                </a:solidFill>
+                <a:latin typeface="Noto Sans CJK KR" pitchFamily="34" charset="0"/>
+                <a:ea typeface="Noto Sans CJK KR" pitchFamily="34" charset="-122"/>
+                <a:cs typeface="Noto Sans CJK KR" pitchFamily="34" charset="-120"/>
+              </a:rPr>
+              <a:t>1</a:t>
+            </a:r>
+            <a:endParaRPr lang="en-US" sz="1300" dirty="0"/>
+          </a:p>
+        </p:txBody>
+      </p:sp>
+      <p:sp>
+        <p:nvSpPr>
+          <p:cNvPr id="7" name="Text 5"/>
+          <p:cNvSpPr txBox="1"/>
+          <p:nvPr/>
+        </p:nvSpPr>
+        <p:spPr>
+          <a:xfrm>
+            <a:off x="1005840" y="1435608"/>
+            <a:ext cx="2971800" cy="292608"/>
+          </a:xfrm>
+          <a:prstGeom prst="rect">
+            <a:avLst/>
+          </a:prstGeom>
+          <a:noFill/>
+          <a:ln/>
+        </p:spPr>
+        <p:txBody>
+          <a:bodyPr wrap="square" lIns="0" tIns="0" rIns="0" bIns="0" rtlCol="0" anchor="ctr"/>
+          <a:lstStyle/>
+          <a:p>
+            <a:pPr indent="0" marL="0">
+              <a:buNone/>
+            </a:pPr>
+            <a:r>
+              <a:rPr lang="en-US" sz="1300" b="1" dirty="0">
+                <a:solidFill>
+                  <a:srgbClr val="1A2440"/>
+                </a:solidFill>
+                <a:latin typeface="Noto Sans CJK KR" pitchFamily="34" charset="0"/>
+                <a:ea typeface="Noto Sans CJK KR" pitchFamily="34" charset="-122"/>
+                <a:cs typeface="Noto Sans CJK KR" pitchFamily="34" charset="-120"/>
+              </a:rPr>
+              <a:t>드래곤 코스터</a:t>
+            </a:r>
+            <a:endParaRPr lang="en-US" sz="1300" dirty="0"/>
+          </a:p>
+        </p:txBody>
+      </p:sp>
+      <p:sp>
+        <p:nvSpPr>
+          <p:cNvPr id="8" name="Text 6"/>
+          <p:cNvSpPr txBox="1"/>
+          <p:nvPr/>
+        </p:nvSpPr>
+        <p:spPr>
+          <a:xfrm>
+            <a:off x="1005840" y="1709928"/>
+            <a:ext cx="2971800" cy="228600"/>
+          </a:xfrm>
+          <a:prstGeom prst="rect">
+            <a:avLst/>
+          </a:prstGeom>
+          <a:noFill/>
+          <a:ln/>
+        </p:spPr>
+        <p:txBody>
+          <a:bodyPr wrap="square" lIns="0" tIns="0" rIns="0" bIns="0" rtlCol="0" anchor="ctr"/>
+          <a:lstStyle/>
+          <a:p>
+            <a:pPr indent="0" marL="0">
+              <a:buNone/>
+            </a:pPr>
+            <a:r>
+              <a:rPr lang="en-US" sz="1000" i="1" dirty="0">
+                <a:solidFill>
+                  <a:srgbClr val="D62839"/>
+                </a:solidFill>
+                <a:latin typeface="Noto Sans CJK KR" pitchFamily="34" charset="0"/>
+                <a:ea typeface="Noto Sans CJK KR" pitchFamily="34" charset="-122"/>
+                <a:cs typeface="Noto Sans CJK KR" pitchFamily="34" charset="-120"/>
+              </a:rPr>
+              <a:t>LEGO Castle</a:t>
+            </a:r>
+            <a:endParaRPr lang="en-US" sz="1000" dirty="0"/>
+          </a:p>
+        </p:txBody>
+      </p:sp>
+      <p:sp>
+        <p:nvSpPr>
+          <p:cNvPr id="9" name="Text 7"/>
+          <p:cNvSpPr txBox="1"/>
+          <p:nvPr/>
+        </p:nvSpPr>
+        <p:spPr>
+          <a:xfrm>
+            <a:off x="621792" y="1984248"/>
+            <a:ext cx="3328416" cy="850392"/>
+          </a:xfrm>
+          <a:prstGeom prst="rect">
+            <a:avLst/>
+          </a:prstGeom>
+          <a:noFill/>
+          <a:ln/>
+        </p:spPr>
+        <p:txBody>
+          <a:bodyPr wrap="square" lIns="0" tIns="0" rIns="0" bIns="0" rtlCol="0" anchor="t"/>
+          <a:lstStyle/>
+          <a:p>
+            <a:pPr indent="0" marL="0">
+              <a:lnSpc>
+                <a:spcPct val="112000"/>
+              </a:lnSpc>
+              <a:buNone/>
+            </a:pPr>
+            <a:r>
+              <a:rPr lang="en-US" sz="950" dirty="0">
+                <a:solidFill>
+                  <a:srgbClr val="5C5749"/>
+                </a:solidFill>
+                <a:latin typeface="Noto Sans CJK KR" pitchFamily="34" charset="0"/>
+                <a:ea typeface="Noto Sans CJK KR" pitchFamily="34" charset="-122"/>
+                <a:cs typeface="Noto Sans CJK KR" pitchFamily="34" charset="-120"/>
+              </a:rPr>
+              <a:t>실내 다크라이드로 성 내부를 둘러보다 레드 드래곤과 마주치며 급강하·급발진. 526m·최고 56km/h, 번쩍이는 조명 연출. 100~120cm 보호자 동반</a:t>
+            </a:r>
+            <a:endParaRPr lang="en-US" sz="950" dirty="0"/>
+          </a:p>
+        </p:txBody>
+      </p:sp>
+      <p:sp>
+        <p:nvSpPr>
+          <p:cNvPr id="10" name="Shape 8"/>
+          <p:cNvSpPr/>
+          <p:nvPr/>
+        </p:nvSpPr>
+        <p:spPr>
+          <a:xfrm>
+            <a:off x="4251960" y="1325880"/>
+            <a:ext cx="3657600" cy="1536192"/>
+          </a:xfrm>
+          <a:prstGeom prst="roundRect">
+            <a:avLst>
+              <a:gd name="adj" fmla="val 4167"/>
+            </a:avLst>
+          </a:prstGeom>
+          <a:solidFill>
+            <a:srgbClr val="FFFFFF"/>
+          </a:solidFill>
+          <a:ln w="12700">
+            <a:solidFill>
+              <a:srgbClr val="E2E4E8"/>
+            </a:solidFill>
+            <a:prstDash val="solid"/>
+          </a:ln>
+          <a:effectLst>
+            <a:outerShdw sx="100000" sy="100000" kx="0" ky="0" algn="bl" rotWithShape="0" blurRad="63500" dist="25400" dir="5400000">
+              <a:srgbClr val="888888">
+                <a:alpha val="20000"/>
+              </a:srgbClr>
+            </a:outerShdw>
+          </a:effectLst>
+        </p:spPr>
+      </p:sp>
+      <p:sp>
+        <p:nvSpPr>
+          <p:cNvPr id="11" name="Shape 9"/>
+          <p:cNvSpPr/>
+          <p:nvPr/>
+        </p:nvSpPr>
+        <p:spPr>
+          <a:xfrm>
+            <a:off x="4416552" y="1490472"/>
+            <a:ext cx="292608" cy="292608"/>
+          </a:xfrm>
+          <a:prstGeom prst="ellipse">
+            <a:avLst/>
+          </a:prstGeom>
+          <a:solidFill>
+            <a:srgbClr val="D62839"/>
+          </a:solidFill>
+          <a:ln/>
+        </p:spPr>
+      </p:sp>
+      <p:sp>
+        <p:nvSpPr>
+          <p:cNvPr id="12" name="Text 10"/>
+          <p:cNvSpPr txBox="1"/>
+          <p:nvPr/>
+        </p:nvSpPr>
+        <p:spPr>
+          <a:xfrm>
+            <a:off x="4416552" y="1490472"/>
+            <a:ext cx="292608" cy="292608"/>
+          </a:xfrm>
+          <a:prstGeom prst="rect">
+            <a:avLst/>
+          </a:prstGeom>
+          <a:noFill/>
+          <a:ln/>
+        </p:spPr>
+        <p:txBody>
+          <a:bodyPr wrap="square" lIns="0" tIns="0" rIns="0" bIns="0" rtlCol="0" anchor="ctr"/>
+          <a:lstStyle/>
+          <a:p>
+            <a:pPr algn="ctr" indent="0" marL="0">
+              <a:buNone/>
+            </a:pPr>
+            <a:r>
+              <a:rPr lang="en-US" sz="1300" b="1" dirty="0">
+                <a:solidFill>
+                  <a:srgbClr val="FFFFFF"/>
+                </a:solidFill>
+                <a:latin typeface="Noto Sans CJK KR" pitchFamily="34" charset="0"/>
+                <a:ea typeface="Noto Sans CJK KR" pitchFamily="34" charset="-122"/>
+                <a:cs typeface="Noto Sans CJK KR" pitchFamily="34" charset="-120"/>
+              </a:rPr>
+              <a:t>2</a:t>
+            </a:r>
+            <a:endParaRPr lang="en-US" sz="1300" dirty="0"/>
+          </a:p>
+        </p:txBody>
+      </p:sp>
+      <p:sp>
+        <p:nvSpPr>
+          <p:cNvPr id="13" name="Text 11"/>
+          <p:cNvSpPr txBox="1"/>
+          <p:nvPr/>
+        </p:nvSpPr>
+        <p:spPr>
+          <a:xfrm>
+            <a:off x="4800600" y="1435608"/>
+            <a:ext cx="2971800" cy="292608"/>
+          </a:xfrm>
+          <a:prstGeom prst="rect">
+            <a:avLst/>
+          </a:prstGeom>
+          <a:noFill/>
+          <a:ln/>
+        </p:spPr>
+        <p:txBody>
+          <a:bodyPr wrap="square" lIns="0" tIns="0" rIns="0" bIns="0" rtlCol="0" anchor="ctr"/>
+          <a:lstStyle/>
+          <a:p>
+            <a:pPr indent="0" marL="0">
+              <a:buNone/>
+            </a:pPr>
+            <a:r>
+              <a:rPr lang="en-US" sz="1300" b="1" dirty="0">
+                <a:solidFill>
+                  <a:srgbClr val="1A2440"/>
+                </a:solidFill>
+                <a:latin typeface="Noto Sans CJK KR" pitchFamily="34" charset="0"/>
+                <a:ea typeface="Noto Sans CJK KR" pitchFamily="34" charset="-122"/>
+                <a:cs typeface="Noto Sans CJK KR" pitchFamily="34" charset="-120"/>
+              </a:rPr>
+              <a:t>Masters of Spinjitzu</a:t>
+            </a:r>
+            <a:endParaRPr lang="en-US" sz="1300" dirty="0"/>
+          </a:p>
+        </p:txBody>
+      </p:sp>
+      <p:sp>
+        <p:nvSpPr>
+          <p:cNvPr id="14" name="Text 12"/>
+          <p:cNvSpPr txBox="1"/>
+          <p:nvPr/>
+        </p:nvSpPr>
+        <p:spPr>
+          <a:xfrm>
+            <a:off x="4800600" y="1709928"/>
+            <a:ext cx="2971800" cy="228600"/>
+          </a:xfrm>
+          <a:prstGeom prst="rect">
+            <a:avLst/>
+          </a:prstGeom>
+          <a:noFill/>
+          <a:ln/>
+        </p:spPr>
+        <p:txBody>
+          <a:bodyPr wrap="square" lIns="0" tIns="0" rIns="0" bIns="0" rtlCol="0" anchor="ctr"/>
+          <a:lstStyle/>
+          <a:p>
+            <a:pPr indent="0" marL="0">
+              <a:buNone/>
+            </a:pPr>
+            <a:r>
+              <a:rPr lang="en-US" sz="1000" i="1" dirty="0">
+                <a:solidFill>
+                  <a:srgbClr val="D62839"/>
+                </a:solidFill>
+                <a:latin typeface="Noto Sans CJK KR" pitchFamily="34" charset="0"/>
+                <a:ea typeface="Noto Sans CJK KR" pitchFamily="34" charset="-122"/>
+                <a:cs typeface="Noto Sans CJK KR" pitchFamily="34" charset="-120"/>
+              </a:rPr>
+              <a:t>NINJAGO World</a:t>
+            </a:r>
+            <a:endParaRPr lang="en-US" sz="1000" dirty="0"/>
+          </a:p>
+        </p:txBody>
+      </p:sp>
+      <p:sp>
+        <p:nvSpPr>
+          <p:cNvPr id="15" name="Text 13"/>
+          <p:cNvSpPr txBox="1"/>
+          <p:nvPr/>
+        </p:nvSpPr>
+        <p:spPr>
+          <a:xfrm>
+            <a:off x="4416552" y="1984248"/>
+            <a:ext cx="3328416" cy="850392"/>
+          </a:xfrm>
+          <a:prstGeom prst="rect">
+            <a:avLst/>
+          </a:prstGeom>
+          <a:noFill/>
+          <a:ln/>
+        </p:spPr>
+        <p:txBody>
+          <a:bodyPr wrap="square" lIns="0" tIns="0" rIns="0" bIns="0" rtlCol="0" anchor="t"/>
+          <a:lstStyle/>
+          <a:p>
+            <a:pPr indent="0" marL="0">
+              <a:lnSpc>
+                <a:spcPct val="112000"/>
+              </a:lnSpc>
+              <a:buNone/>
+            </a:pPr>
+            <a:r>
+              <a:rPr lang="en-US" sz="950" dirty="0">
+                <a:solidFill>
+                  <a:srgbClr val="5C5749"/>
+                </a:solidFill>
+                <a:latin typeface="Noto Sans CJK KR" pitchFamily="34" charset="0"/>
+                <a:ea typeface="Noto Sans CJK KR" pitchFamily="34" charset="-122"/>
+                <a:cs typeface="Noto Sans CJK KR" pitchFamily="34" charset="-120"/>
+              </a:rPr>
+              <a:t>닌자 원소의 힘을 깨워 즐기는 360도 스핀 액션. 핸들을 직접 돌려 회전 속도 조절</a:t>
+            </a:r>
+            <a:endParaRPr lang="en-US" sz="950" dirty="0"/>
+          </a:p>
+        </p:txBody>
+      </p:sp>
+      <p:sp>
+        <p:nvSpPr>
+          <p:cNvPr id="16" name="Shape 14"/>
+          <p:cNvSpPr/>
+          <p:nvPr/>
+        </p:nvSpPr>
+        <p:spPr>
+          <a:xfrm>
+            <a:off x="8046720" y="1325880"/>
+            <a:ext cx="3657600" cy="1536192"/>
+          </a:xfrm>
+          <a:prstGeom prst="roundRect">
+            <a:avLst>
+              <a:gd name="adj" fmla="val 4167"/>
+            </a:avLst>
+          </a:prstGeom>
+          <a:solidFill>
+            <a:srgbClr val="FFFFFF"/>
+          </a:solidFill>
+          <a:ln w="12700">
+            <a:solidFill>
+              <a:srgbClr val="E2E4E8"/>
+            </a:solidFill>
+            <a:prstDash val="solid"/>
+          </a:ln>
+          <a:effectLst>
+            <a:outerShdw sx="100000" sy="100000" kx="0" ky="0" algn="bl" rotWithShape="0" blurRad="63500" dist="25400" dir="5400000">
+              <a:srgbClr val="888888">
+                <a:alpha val="20000"/>
+              </a:srgbClr>
+            </a:outerShdw>
+          </a:effectLst>
+        </p:spPr>
+      </p:sp>
+      <p:sp>
+        <p:nvSpPr>
+          <p:cNvPr id="17" name="Shape 15"/>
+          <p:cNvSpPr/>
+          <p:nvPr/>
+        </p:nvSpPr>
+        <p:spPr>
+          <a:xfrm>
+            <a:off x="8211312" y="1490472"/>
+            <a:ext cx="292608" cy="292608"/>
+          </a:xfrm>
+          <a:prstGeom prst="ellipse">
+            <a:avLst/>
+          </a:prstGeom>
+          <a:solidFill>
+            <a:srgbClr val="D62839"/>
+          </a:solidFill>
+          <a:ln/>
+        </p:spPr>
+      </p:sp>
+      <p:sp>
+        <p:nvSpPr>
+          <p:cNvPr id="18" name="Text 16"/>
+          <p:cNvSpPr txBox="1"/>
+          <p:nvPr/>
+        </p:nvSpPr>
+        <p:spPr>
+          <a:xfrm>
+            <a:off x="8211312" y="1490472"/>
+            <a:ext cx="292608" cy="292608"/>
+          </a:xfrm>
+          <a:prstGeom prst="rect">
+            <a:avLst/>
+          </a:prstGeom>
+          <a:noFill/>
+          <a:ln/>
+        </p:spPr>
+        <p:txBody>
+          <a:bodyPr wrap="square" lIns="0" tIns="0" rIns="0" bIns="0" rtlCol="0" anchor="ctr"/>
+          <a:lstStyle/>
+          <a:p>
+            <a:pPr algn="ctr" indent="0" marL="0">
+              <a:buNone/>
+            </a:pPr>
+            <a:r>
+              <a:rPr lang="en-US" sz="1300" b="1" dirty="0">
+                <a:solidFill>
+                  <a:srgbClr val="FFFFFF"/>
+                </a:solidFill>
+                <a:latin typeface="Noto Sans CJK KR" pitchFamily="34" charset="0"/>
+                <a:ea typeface="Noto Sans CJK KR" pitchFamily="34" charset="-122"/>
+                <a:cs typeface="Noto Sans CJK KR" pitchFamily="34" charset="-120"/>
+              </a:rPr>
+              <a:t>3</a:t>
+            </a:r>
+            <a:endParaRPr lang="en-US" sz="1300" dirty="0"/>
+          </a:p>
+        </p:txBody>
+      </p:sp>
+      <p:sp>
+        <p:nvSpPr>
+          <p:cNvPr id="19" name="Text 17"/>
+          <p:cNvSpPr txBox="1"/>
+          <p:nvPr/>
+        </p:nvSpPr>
+        <p:spPr>
+          <a:xfrm>
+            <a:off x="8595360" y="1435608"/>
+            <a:ext cx="2971800" cy="292608"/>
+          </a:xfrm>
+          <a:prstGeom prst="rect">
+            <a:avLst/>
+          </a:prstGeom>
+          <a:noFill/>
+          <a:ln/>
+        </p:spPr>
+        <p:txBody>
+          <a:bodyPr wrap="square" lIns="0" tIns="0" rIns="0" bIns="0" rtlCol="0" anchor="ctr"/>
+          <a:lstStyle/>
+          <a:p>
+            <a:pPr indent="0" marL="0">
+              <a:buNone/>
+            </a:pPr>
+            <a:r>
+              <a:rPr lang="en-US" sz="1300" b="1" dirty="0">
+                <a:solidFill>
+                  <a:srgbClr val="1A2440"/>
+                </a:solidFill>
+                <a:latin typeface="Noto Sans CJK KR" pitchFamily="34" charset="0"/>
+                <a:ea typeface="Noto Sans CJK KR" pitchFamily="34" charset="-122"/>
+                <a:cs typeface="Noto Sans CJK KR" pitchFamily="34" charset="-120"/>
+              </a:rPr>
+              <a:t>NINJAGO The Ride</a:t>
+            </a:r>
+            <a:endParaRPr lang="en-US" sz="1300" dirty="0"/>
+          </a:p>
+        </p:txBody>
+      </p:sp>
+      <p:sp>
+        <p:nvSpPr>
+          <p:cNvPr id="20" name="Text 18"/>
+          <p:cNvSpPr txBox="1"/>
+          <p:nvPr/>
+        </p:nvSpPr>
+        <p:spPr>
+          <a:xfrm>
+            <a:off x="8595360" y="1709928"/>
+            <a:ext cx="2971800" cy="228600"/>
+          </a:xfrm>
+          <a:prstGeom prst="rect">
+            <a:avLst/>
+          </a:prstGeom>
+          <a:noFill/>
+          <a:ln/>
+        </p:spPr>
+        <p:txBody>
+          <a:bodyPr wrap="square" lIns="0" tIns="0" rIns="0" bIns="0" rtlCol="0" anchor="ctr"/>
+          <a:lstStyle/>
+          <a:p>
+            <a:pPr indent="0" marL="0">
+              <a:buNone/>
+            </a:pPr>
+            <a:r>
+              <a:rPr lang="en-US" sz="1000" i="1" dirty="0">
+                <a:solidFill>
+                  <a:srgbClr val="D62839"/>
+                </a:solidFill>
+                <a:latin typeface="Noto Sans CJK KR" pitchFamily="34" charset="0"/>
+                <a:ea typeface="Noto Sans CJK KR" pitchFamily="34" charset="-122"/>
+                <a:cs typeface="Noto Sans CJK KR" pitchFamily="34" charset="-120"/>
+              </a:rPr>
+              <a:t>NINJAGO World</a:t>
+            </a:r>
+            <a:endParaRPr lang="en-US" sz="1000" dirty="0"/>
+          </a:p>
+        </p:txBody>
+      </p:sp>
+      <p:sp>
+        <p:nvSpPr>
+          <p:cNvPr id="21" name="Text 19"/>
+          <p:cNvSpPr txBox="1"/>
+          <p:nvPr/>
+        </p:nvSpPr>
+        <p:spPr>
+          <a:xfrm>
+            <a:off x="8211312" y="1984248"/>
+            <a:ext cx="3328416" cy="850392"/>
+          </a:xfrm>
+          <a:prstGeom prst="rect">
+            <a:avLst/>
+          </a:prstGeom>
+          <a:noFill/>
+          <a:ln/>
+        </p:spPr>
+        <p:txBody>
+          <a:bodyPr wrap="square" lIns="0" tIns="0" rIns="0" bIns="0" rtlCol="0" anchor="t"/>
+          <a:lstStyle/>
+          <a:p>
+            <a:pPr indent="0" marL="0">
+              <a:lnSpc>
+                <a:spcPct val="112000"/>
+              </a:lnSpc>
+              <a:buNone/>
+            </a:pPr>
+            <a:r>
+              <a:rPr lang="en-US" sz="950" dirty="0">
+                <a:solidFill>
+                  <a:srgbClr val="5C5749"/>
+                </a:solidFill>
+                <a:latin typeface="Noto Sans CJK KR" pitchFamily="34" charset="0"/>
+                <a:ea typeface="Noto Sans CJK KR" pitchFamily="34" charset="-122"/>
+                <a:cs typeface="Noto Sans CJK KR" pitchFamily="34" charset="-120"/>
+              </a:rPr>
+              <a:t>4D 라이드 — 손으로 불·얼음·번개·대지 파워를 쏘며 스크린 속 대모험. 총 쏘는 동작이라 8세가 좋아할 만함</a:t>
+            </a:r>
+            <a:endParaRPr lang="en-US" sz="950" dirty="0"/>
+          </a:p>
+        </p:txBody>
+      </p:sp>
+      <p:sp>
+        <p:nvSpPr>
+          <p:cNvPr id="22" name="Shape 20"/>
+          <p:cNvSpPr/>
+          <p:nvPr/>
+        </p:nvSpPr>
+        <p:spPr>
+          <a:xfrm>
+            <a:off x="457200" y="3008376"/>
+            <a:ext cx="3657600" cy="1536192"/>
+          </a:xfrm>
+          <a:prstGeom prst="roundRect">
+            <a:avLst>
+              <a:gd name="adj" fmla="val 4167"/>
+            </a:avLst>
+          </a:prstGeom>
+          <a:solidFill>
+            <a:srgbClr val="FFFFFF"/>
+          </a:solidFill>
+          <a:ln w="12700">
+            <a:solidFill>
+              <a:srgbClr val="E2E4E8"/>
+            </a:solidFill>
+            <a:prstDash val="solid"/>
+          </a:ln>
+          <a:effectLst>
+            <a:outerShdw sx="100000" sy="100000" kx="0" ky="0" algn="bl" rotWithShape="0" blurRad="63500" dist="25400" dir="5400000">
+              <a:srgbClr val="888888">
+                <a:alpha val="20000"/>
+              </a:srgbClr>
+            </a:outerShdw>
+          </a:effectLst>
+        </p:spPr>
+      </p:sp>
+      <p:sp>
+        <p:nvSpPr>
+          <p:cNvPr id="23" name="Shape 21"/>
+          <p:cNvSpPr/>
+          <p:nvPr/>
+        </p:nvSpPr>
+        <p:spPr>
+          <a:xfrm>
+            <a:off x="621792" y="3172968"/>
+            <a:ext cx="292608" cy="292608"/>
+          </a:xfrm>
+          <a:prstGeom prst="ellipse">
+            <a:avLst/>
+          </a:prstGeom>
+          <a:solidFill>
+            <a:srgbClr val="D62839"/>
+          </a:solidFill>
+          <a:ln/>
+        </p:spPr>
+      </p:sp>
+      <p:sp>
+        <p:nvSpPr>
+          <p:cNvPr id="24" name="Text 22"/>
+          <p:cNvSpPr txBox="1"/>
+          <p:nvPr/>
+        </p:nvSpPr>
+        <p:spPr>
+          <a:xfrm>
+            <a:off x="621792" y="3172968"/>
+            <a:ext cx="292608" cy="292608"/>
+          </a:xfrm>
+          <a:prstGeom prst="rect">
+            <a:avLst/>
+          </a:prstGeom>
+          <a:noFill/>
+          <a:ln/>
+        </p:spPr>
+        <p:txBody>
+          <a:bodyPr wrap="square" lIns="0" tIns="0" rIns="0" bIns="0" rtlCol="0" anchor="ctr"/>
+          <a:lstStyle/>
+          <a:p>
+            <a:pPr algn="ctr" indent="0" marL="0">
+              <a:buNone/>
+            </a:pPr>
+            <a:r>
+              <a:rPr lang="en-US" sz="1300" b="1" dirty="0">
+                <a:solidFill>
+                  <a:srgbClr val="FFFFFF"/>
+                </a:solidFill>
+                <a:latin typeface="Noto Sans CJK KR" pitchFamily="34" charset="0"/>
+                <a:ea typeface="Noto Sans CJK KR" pitchFamily="34" charset="-122"/>
+                <a:cs typeface="Noto Sans CJK KR" pitchFamily="34" charset="-120"/>
+              </a:rPr>
+              <a:t>4</a:t>
+            </a:r>
+            <a:endParaRPr lang="en-US" sz="1300" dirty="0"/>
+          </a:p>
+        </p:txBody>
+      </p:sp>
+      <p:sp>
+        <p:nvSpPr>
+          <p:cNvPr id="25" name="Text 23"/>
+          <p:cNvSpPr txBox="1"/>
+          <p:nvPr/>
+        </p:nvSpPr>
+        <p:spPr>
+          <a:xfrm>
+            <a:off x="1005840" y="3118104"/>
+            <a:ext cx="2971800" cy="292608"/>
+          </a:xfrm>
+          <a:prstGeom prst="rect">
+            <a:avLst/>
+          </a:prstGeom>
+          <a:noFill/>
+          <a:ln/>
+        </p:spPr>
+        <p:txBody>
+          <a:bodyPr wrap="square" lIns="0" tIns="0" rIns="0" bIns="0" rtlCol="0" anchor="ctr"/>
+          <a:lstStyle/>
+          <a:p>
+            <a:pPr indent="0" marL="0">
+              <a:buNone/>
+            </a:pPr>
+            <a:r>
+              <a:rPr lang="en-US" sz="1300" b="1" dirty="0">
+                <a:solidFill>
+                  <a:srgbClr val="1A2440"/>
+                </a:solidFill>
+                <a:latin typeface="Noto Sans CJK KR" pitchFamily="34" charset="0"/>
+                <a:ea typeface="Noto Sans CJK KR" pitchFamily="34" charset="-122"/>
+                <a:cs typeface="Noto Sans CJK KR" pitchFamily="34" charset="-120"/>
+              </a:rPr>
+              <a:t>LEGOLAND Lookout</a:t>
+            </a:r>
+            <a:endParaRPr lang="en-US" sz="1300" dirty="0"/>
+          </a:p>
+        </p:txBody>
+      </p:sp>
+      <p:sp>
+        <p:nvSpPr>
+          <p:cNvPr id="26" name="Text 24"/>
+          <p:cNvSpPr txBox="1"/>
+          <p:nvPr/>
+        </p:nvSpPr>
+        <p:spPr>
+          <a:xfrm>
+            <a:off x="1005840" y="3392424"/>
+            <a:ext cx="2971800" cy="228600"/>
+          </a:xfrm>
+          <a:prstGeom prst="rect">
+            <a:avLst/>
+          </a:prstGeom>
+          <a:noFill/>
+          <a:ln/>
+        </p:spPr>
+        <p:txBody>
+          <a:bodyPr wrap="square" lIns="0" tIns="0" rIns="0" bIns="0" rtlCol="0" anchor="ctr"/>
+          <a:lstStyle/>
+          <a:p>
+            <a:pPr indent="0" marL="0">
+              <a:buNone/>
+            </a:pPr>
+            <a:r>
+              <a:rPr lang="en-US" sz="1000" i="1" dirty="0">
+                <a:solidFill>
+                  <a:srgbClr val="D62839"/>
+                </a:solidFill>
+                <a:latin typeface="Noto Sans CJK KR" pitchFamily="34" charset="0"/>
+                <a:ea typeface="Noto Sans CJK KR" pitchFamily="34" charset="-122"/>
+                <a:cs typeface="Noto Sans CJK KR" pitchFamily="34" charset="-120"/>
+              </a:rPr>
+              <a:t>Bricktopia</a:t>
+            </a:r>
+            <a:endParaRPr lang="en-US" sz="1000" dirty="0"/>
+          </a:p>
+        </p:txBody>
+      </p:sp>
+      <p:sp>
+        <p:nvSpPr>
+          <p:cNvPr id="27" name="Text 25"/>
+          <p:cNvSpPr txBox="1"/>
+          <p:nvPr/>
+        </p:nvSpPr>
+        <p:spPr>
+          <a:xfrm>
+            <a:off x="621792" y="3666744"/>
+            <a:ext cx="3328416" cy="850392"/>
+          </a:xfrm>
+          <a:prstGeom prst="rect">
+            <a:avLst/>
+          </a:prstGeom>
+          <a:noFill/>
+          <a:ln/>
+        </p:spPr>
+        <p:txBody>
+          <a:bodyPr wrap="square" lIns="0" tIns="0" rIns="0" bIns="0" rtlCol="0" anchor="t"/>
+          <a:lstStyle/>
+          <a:p>
+            <a:pPr indent="0" marL="0">
+              <a:lnSpc>
+                <a:spcPct val="112000"/>
+              </a:lnSpc>
+              <a:buNone/>
+            </a:pPr>
+            <a:r>
+              <a:rPr lang="en-US" sz="950" dirty="0">
+                <a:solidFill>
+                  <a:srgbClr val="5C5749"/>
+                </a:solidFill>
+                <a:latin typeface="Noto Sans CJK KR" pitchFamily="34" charset="0"/>
+                <a:ea typeface="Noto Sans CJK KR" pitchFamily="34" charset="-122"/>
+                <a:cs typeface="Noto Sans CJK KR" pitchFamily="34" charset="-120"/>
+              </a:rPr>
+              <a:t>약 43m 높이 전망대. 파크 전체와 호수 조망. 스릴 없음</a:t>
+            </a:r>
+            <a:endParaRPr lang="en-US" sz="950" dirty="0"/>
+          </a:p>
+        </p:txBody>
+      </p:sp>
+      <p:sp>
+        <p:nvSpPr>
+          <p:cNvPr id="28" name="Shape 26"/>
+          <p:cNvSpPr/>
+          <p:nvPr/>
+        </p:nvSpPr>
+        <p:spPr>
+          <a:xfrm>
+            <a:off x="4251960" y="3008376"/>
+            <a:ext cx="3657600" cy="1536192"/>
+          </a:xfrm>
+          <a:prstGeom prst="roundRect">
+            <a:avLst>
+              <a:gd name="adj" fmla="val 4167"/>
+            </a:avLst>
+          </a:prstGeom>
+          <a:solidFill>
+            <a:srgbClr val="FFFFFF"/>
+          </a:solidFill>
+          <a:ln w="12700">
+            <a:solidFill>
+              <a:srgbClr val="E2E4E8"/>
+            </a:solidFill>
+            <a:prstDash val="solid"/>
+          </a:ln>
+          <a:effectLst>
+            <a:outerShdw sx="100000" sy="100000" kx="0" ky="0" algn="bl" rotWithShape="0" blurRad="63500" dist="25400" dir="5400000">
+              <a:srgbClr val="888888">
+                <a:alpha val="20000"/>
+              </a:srgbClr>
+            </a:outerShdw>
+          </a:effectLst>
+        </p:spPr>
+      </p:sp>
+      <p:sp>
+        <p:nvSpPr>
+          <p:cNvPr id="29" name="Shape 27"/>
+          <p:cNvSpPr/>
+          <p:nvPr/>
+        </p:nvSpPr>
+        <p:spPr>
+          <a:xfrm>
+            <a:off x="4416552" y="3172968"/>
+            <a:ext cx="292608" cy="292608"/>
+          </a:xfrm>
+          <a:prstGeom prst="ellipse">
+            <a:avLst/>
+          </a:prstGeom>
+          <a:solidFill>
+            <a:srgbClr val="D62839"/>
+          </a:solidFill>
+          <a:ln/>
+        </p:spPr>
+      </p:sp>
+      <p:sp>
+        <p:nvSpPr>
+          <p:cNvPr id="30" name="Text 28"/>
+          <p:cNvSpPr txBox="1"/>
+          <p:nvPr/>
+        </p:nvSpPr>
+        <p:spPr>
+          <a:xfrm>
+            <a:off x="4416552" y="3172968"/>
+            <a:ext cx="292608" cy="292608"/>
+          </a:xfrm>
+          <a:prstGeom prst="rect">
+            <a:avLst/>
+          </a:prstGeom>
+          <a:noFill/>
+          <a:ln/>
+        </p:spPr>
+        <p:txBody>
+          <a:bodyPr wrap="square" lIns="0" tIns="0" rIns="0" bIns="0" rtlCol="0" anchor="ctr"/>
+          <a:lstStyle/>
+          <a:p>
+            <a:pPr algn="ctr" indent="0" marL="0">
+              <a:buNone/>
+            </a:pPr>
+            <a:r>
+              <a:rPr lang="en-US" sz="1300" b="1" dirty="0">
+                <a:solidFill>
+                  <a:srgbClr val="FFFFFF"/>
+                </a:solidFill>
+                <a:latin typeface="Noto Sans CJK KR" pitchFamily="34" charset="0"/>
+                <a:ea typeface="Noto Sans CJK KR" pitchFamily="34" charset="-122"/>
+                <a:cs typeface="Noto Sans CJK KR" pitchFamily="34" charset="-120"/>
+              </a:rPr>
+              <a:t>5</a:t>
+            </a:r>
+            <a:endParaRPr lang="en-US" sz="1300" dirty="0"/>
+          </a:p>
+        </p:txBody>
+      </p:sp>
+      <p:sp>
+        <p:nvSpPr>
+          <p:cNvPr id="31" name="Text 29"/>
+          <p:cNvSpPr txBox="1"/>
+          <p:nvPr/>
+        </p:nvSpPr>
+        <p:spPr>
+          <a:xfrm>
+            <a:off x="4800600" y="3118104"/>
+            <a:ext cx="2971800" cy="292608"/>
+          </a:xfrm>
+          <a:prstGeom prst="rect">
+            <a:avLst/>
+          </a:prstGeom>
+          <a:noFill/>
+          <a:ln/>
+        </p:spPr>
+        <p:txBody>
+          <a:bodyPr wrap="square" lIns="0" tIns="0" rIns="0" bIns="0" rtlCol="0" anchor="ctr"/>
+          <a:lstStyle/>
+          <a:p>
+            <a:pPr indent="0" marL="0">
+              <a:buNone/>
+            </a:pPr>
+            <a:r>
+              <a:rPr lang="en-US" sz="1300" b="1" dirty="0">
+                <a:solidFill>
+                  <a:srgbClr val="1A2440"/>
+                </a:solidFill>
+                <a:latin typeface="Noto Sans CJK KR" pitchFamily="34" charset="0"/>
+                <a:ea typeface="Noto Sans CJK KR" pitchFamily="34" charset="-122"/>
+                <a:cs typeface="Noto Sans CJK KR" pitchFamily="34" charset="-120"/>
+              </a:rPr>
+              <a:t>Monkey Climb</a:t>
+            </a:r>
+            <a:endParaRPr lang="en-US" sz="1300" dirty="0"/>
+          </a:p>
+        </p:txBody>
+      </p:sp>
+      <p:sp>
+        <p:nvSpPr>
+          <p:cNvPr id="32" name="Text 30"/>
+          <p:cNvSpPr txBox="1"/>
+          <p:nvPr/>
+        </p:nvSpPr>
+        <p:spPr>
+          <a:xfrm>
+            <a:off x="4800600" y="3392424"/>
+            <a:ext cx="2971800" cy="228600"/>
+          </a:xfrm>
+          <a:prstGeom prst="rect">
+            <a:avLst/>
+          </a:prstGeom>
+          <a:noFill/>
+          <a:ln/>
+        </p:spPr>
+        <p:txBody>
+          <a:bodyPr wrap="square" lIns="0" tIns="0" rIns="0" bIns="0" rtlCol="0" anchor="ctr"/>
+          <a:lstStyle/>
+          <a:p>
+            <a:pPr indent="0" marL="0">
+              <a:buNone/>
+            </a:pPr>
+            <a:r>
+              <a:rPr lang="en-US" sz="1000" i="1" dirty="0">
+                <a:solidFill>
+                  <a:srgbClr val="D62839"/>
+                </a:solidFill>
+                <a:latin typeface="Noto Sans CJK KR" pitchFamily="34" charset="0"/>
+                <a:ea typeface="Noto Sans CJK KR" pitchFamily="34" charset="-122"/>
+                <a:cs typeface="Noto Sans CJK KR" pitchFamily="34" charset="-120"/>
+              </a:rPr>
+              <a:t>Bricktopia</a:t>
+            </a:r>
+            <a:endParaRPr lang="en-US" sz="1000" dirty="0"/>
+          </a:p>
+        </p:txBody>
+      </p:sp>
+      <p:sp>
+        <p:nvSpPr>
+          <p:cNvPr id="33" name="Text 31"/>
+          <p:cNvSpPr txBox="1"/>
+          <p:nvPr/>
+        </p:nvSpPr>
+        <p:spPr>
+          <a:xfrm>
+            <a:off x="4416552" y="3666744"/>
+            <a:ext cx="3328416" cy="850392"/>
+          </a:xfrm>
+          <a:prstGeom prst="rect">
+            <a:avLst/>
+          </a:prstGeom>
+          <a:noFill/>
+          <a:ln/>
+        </p:spPr>
+        <p:txBody>
+          <a:bodyPr wrap="square" lIns="0" tIns="0" rIns="0" bIns="0" rtlCol="0" anchor="t"/>
+          <a:lstStyle/>
+          <a:p>
+            <a:pPr indent="0" marL="0">
+              <a:lnSpc>
+                <a:spcPct val="112000"/>
+              </a:lnSpc>
+              <a:buNone/>
+            </a:pPr>
+            <a:r>
+              <a:rPr lang="en-US" sz="950" dirty="0">
+                <a:solidFill>
+                  <a:srgbClr val="5C5749"/>
+                </a:solidFill>
+                <a:latin typeface="Noto Sans CJK KR" pitchFamily="34" charset="0"/>
+                <a:ea typeface="Noto Sans CJK KR" pitchFamily="34" charset="-122"/>
+                <a:cs typeface="Noto Sans CJK KR" pitchFamily="34" charset="-120"/>
+              </a:rPr>
+              <a:t>그물 정글짐을 등반한 뒤 자유낙하로 하강. 반복 탑승하는 아이들 많음</a:t>
+            </a:r>
+            <a:endParaRPr lang="en-US" sz="950" dirty="0"/>
+          </a:p>
+        </p:txBody>
+      </p:sp>
+      <p:sp>
+        <p:nvSpPr>
+          <p:cNvPr id="34" name="Shape 32"/>
+          <p:cNvSpPr/>
+          <p:nvPr/>
+        </p:nvSpPr>
+        <p:spPr>
+          <a:xfrm>
+            <a:off x="8046720" y="3008376"/>
+            <a:ext cx="3657600" cy="1536192"/>
+          </a:xfrm>
+          <a:prstGeom prst="roundRect">
+            <a:avLst>
+              <a:gd name="adj" fmla="val 4167"/>
+            </a:avLst>
+          </a:prstGeom>
+          <a:solidFill>
+            <a:srgbClr val="FFFFFF"/>
+          </a:solidFill>
+          <a:ln w="12700">
+            <a:solidFill>
+              <a:srgbClr val="E2E4E8"/>
+            </a:solidFill>
+            <a:prstDash val="solid"/>
+          </a:ln>
+          <a:effectLst>
+            <a:outerShdw sx="100000" sy="100000" kx="0" ky="0" algn="bl" rotWithShape="0" blurRad="63500" dist="25400" dir="5400000">
+              <a:srgbClr val="888888">
+                <a:alpha val="20000"/>
+              </a:srgbClr>
+            </a:outerShdw>
+          </a:effectLst>
+        </p:spPr>
+      </p:sp>
+      <p:sp>
+        <p:nvSpPr>
+          <p:cNvPr id="35" name="Shape 33"/>
+          <p:cNvSpPr/>
+          <p:nvPr/>
+        </p:nvSpPr>
+        <p:spPr>
+          <a:xfrm>
+            <a:off x="8211312" y="3172968"/>
+            <a:ext cx="292608" cy="292608"/>
+          </a:xfrm>
+          <a:prstGeom prst="ellipse">
+            <a:avLst/>
+          </a:prstGeom>
+          <a:solidFill>
+            <a:srgbClr val="D62839"/>
+          </a:solidFill>
+          <a:ln/>
+        </p:spPr>
+      </p:sp>
+      <p:sp>
+        <p:nvSpPr>
+          <p:cNvPr id="36" name="Text 34"/>
+          <p:cNvSpPr txBox="1"/>
+          <p:nvPr/>
+        </p:nvSpPr>
+        <p:spPr>
+          <a:xfrm>
+            <a:off x="8211312" y="3172968"/>
+            <a:ext cx="292608" cy="292608"/>
+          </a:xfrm>
+          <a:prstGeom prst="rect">
+            <a:avLst/>
+          </a:prstGeom>
+          <a:noFill/>
+          <a:ln/>
+        </p:spPr>
+        <p:txBody>
+          <a:bodyPr wrap="square" lIns="0" tIns="0" rIns="0" bIns="0" rtlCol="0" anchor="ctr"/>
+          <a:lstStyle/>
+          <a:p>
+            <a:pPr algn="ctr" indent="0" marL="0">
+              <a:buNone/>
+            </a:pPr>
+            <a:r>
+              <a:rPr lang="en-US" sz="1300" b="1" dirty="0">
+                <a:solidFill>
+                  <a:srgbClr val="FFFFFF"/>
+                </a:solidFill>
+                <a:latin typeface="Noto Sans CJK KR" pitchFamily="34" charset="0"/>
+                <a:ea typeface="Noto Sans CJK KR" pitchFamily="34" charset="-122"/>
+                <a:cs typeface="Noto Sans CJK KR" pitchFamily="34" charset="-120"/>
+              </a:rPr>
+              <a:t>6</a:t>
+            </a:r>
+            <a:endParaRPr lang="en-US" sz="1300" dirty="0"/>
+          </a:p>
+        </p:txBody>
+      </p:sp>
+      <p:sp>
+        <p:nvSpPr>
+          <p:cNvPr id="37" name="Text 35"/>
+          <p:cNvSpPr txBox="1"/>
+          <p:nvPr/>
+        </p:nvSpPr>
+        <p:spPr>
+          <a:xfrm>
+            <a:off x="8595360" y="3118104"/>
+            <a:ext cx="2971800" cy="292608"/>
+          </a:xfrm>
+          <a:prstGeom prst="rect">
+            <a:avLst/>
+          </a:prstGeom>
+          <a:noFill/>
+          <a:ln/>
+        </p:spPr>
+        <p:txBody>
+          <a:bodyPr wrap="square" lIns="0" tIns="0" rIns="0" bIns="0" rtlCol="0" anchor="ctr"/>
+          <a:lstStyle/>
+          <a:p>
+            <a:pPr indent="0" marL="0">
+              <a:buNone/>
+            </a:pPr>
+            <a:r>
+              <a:rPr lang="en-US" sz="1300" b="1" dirty="0">
+                <a:solidFill>
+                  <a:srgbClr val="1A2440"/>
+                </a:solidFill>
+                <a:latin typeface="Noto Sans CJK KR" pitchFamily="34" charset="0"/>
+                <a:ea typeface="Noto Sans CJK KR" pitchFamily="34" charset="-122"/>
+                <a:cs typeface="Noto Sans CJK KR" pitchFamily="34" charset="-120"/>
+              </a:rPr>
+              <a:t>Wave Racers</a:t>
+            </a:r>
+            <a:endParaRPr lang="en-US" sz="1300" dirty="0"/>
+          </a:p>
+        </p:txBody>
+      </p:sp>
+      <p:sp>
+        <p:nvSpPr>
+          <p:cNvPr id="38" name="Text 36"/>
+          <p:cNvSpPr txBox="1"/>
+          <p:nvPr/>
+        </p:nvSpPr>
+        <p:spPr>
+          <a:xfrm>
+            <a:off x="8595360" y="3392424"/>
+            <a:ext cx="2971800" cy="228600"/>
+          </a:xfrm>
+          <a:prstGeom prst="rect">
+            <a:avLst/>
+          </a:prstGeom>
+          <a:noFill/>
+          <a:ln/>
+        </p:spPr>
+        <p:txBody>
+          <a:bodyPr wrap="square" lIns="0" tIns="0" rIns="0" bIns="0" rtlCol="0" anchor="ctr"/>
+          <a:lstStyle/>
+          <a:p>
+            <a:pPr indent="0" marL="0">
+              <a:buNone/>
+            </a:pPr>
+            <a:r>
+              <a:rPr lang="en-US" sz="1000" i="1" dirty="0">
+                <a:solidFill>
+                  <a:srgbClr val="D62839"/>
+                </a:solidFill>
+                <a:latin typeface="Noto Sans CJK KR" pitchFamily="34" charset="0"/>
+                <a:ea typeface="Noto Sans CJK KR" pitchFamily="34" charset="-122"/>
+                <a:cs typeface="Noto Sans CJK KR" pitchFamily="34" charset="-120"/>
+              </a:rPr>
+              <a:t>LEGO City</a:t>
+            </a:r>
+            <a:endParaRPr lang="en-US" sz="1000" dirty="0"/>
+          </a:p>
+        </p:txBody>
+      </p:sp>
+      <p:sp>
+        <p:nvSpPr>
+          <p:cNvPr id="39" name="Text 37"/>
+          <p:cNvSpPr txBox="1"/>
+          <p:nvPr/>
+        </p:nvSpPr>
+        <p:spPr>
+          <a:xfrm>
+            <a:off x="8211312" y="3666744"/>
+            <a:ext cx="3328416" cy="850392"/>
+          </a:xfrm>
+          <a:prstGeom prst="rect">
+            <a:avLst/>
+          </a:prstGeom>
+          <a:noFill/>
+          <a:ln/>
+        </p:spPr>
+        <p:txBody>
+          <a:bodyPr wrap="square" lIns="0" tIns="0" rIns="0" bIns="0" rtlCol="0" anchor="t"/>
+          <a:lstStyle/>
+          <a:p>
+            <a:pPr indent="0" marL="0">
+              <a:lnSpc>
+                <a:spcPct val="112000"/>
+              </a:lnSpc>
+              <a:buNone/>
+            </a:pPr>
+            <a:r>
+              <a:rPr lang="en-US" sz="950" dirty="0">
+                <a:solidFill>
+                  <a:srgbClr val="5C5749"/>
+                </a:solidFill>
+                <a:latin typeface="Noto Sans CJK KR" pitchFamily="34" charset="0"/>
+                <a:ea typeface="Noto Sans CJK KR" pitchFamily="34" charset="-122"/>
+                <a:cs typeface="Noto Sans CJK KR" pitchFamily="34" charset="-120"/>
+              </a:rPr>
+              <a:t>보트를 조종하며 파도와 물대포를 회피·명중. 확실히 젖음</a:t>
+            </a:r>
+            <a:endParaRPr lang="en-US" sz="950" dirty="0"/>
+          </a:p>
+        </p:txBody>
+      </p:sp>
+      <p:sp>
+        <p:nvSpPr>
+          <p:cNvPr id="40" name="Shape 38"/>
+          <p:cNvSpPr/>
+          <p:nvPr/>
+        </p:nvSpPr>
+        <p:spPr>
+          <a:xfrm>
+            <a:off x="457200" y="4690872"/>
+            <a:ext cx="3657600" cy="1536192"/>
+          </a:xfrm>
+          <a:prstGeom prst="roundRect">
+            <a:avLst>
+              <a:gd name="adj" fmla="val 4167"/>
+            </a:avLst>
+          </a:prstGeom>
+          <a:solidFill>
+            <a:srgbClr val="FFFFFF"/>
+          </a:solidFill>
+          <a:ln w="12700">
+            <a:solidFill>
+              <a:srgbClr val="E2E4E8"/>
+            </a:solidFill>
+            <a:prstDash val="solid"/>
+          </a:ln>
+          <a:effectLst>
+            <a:outerShdw sx="100000" sy="100000" kx="0" ky="0" algn="bl" rotWithShape="0" blurRad="63500" dist="25400" dir="5400000">
+              <a:srgbClr val="888888">
+                <a:alpha val="20000"/>
+              </a:srgbClr>
+            </a:outerShdw>
+          </a:effectLst>
+        </p:spPr>
+      </p:sp>
+      <p:sp>
+        <p:nvSpPr>
+          <p:cNvPr id="41" name="Shape 39"/>
+          <p:cNvSpPr/>
+          <p:nvPr/>
+        </p:nvSpPr>
+        <p:spPr>
+          <a:xfrm>
+            <a:off x="621792" y="4855464"/>
+            <a:ext cx="292608" cy="292608"/>
+          </a:xfrm>
+          <a:prstGeom prst="ellipse">
+            <a:avLst/>
+          </a:prstGeom>
+          <a:solidFill>
+            <a:srgbClr val="D62839"/>
+          </a:solidFill>
+          <a:ln/>
+        </p:spPr>
+      </p:sp>
+      <p:sp>
+        <p:nvSpPr>
+          <p:cNvPr id="42" name="Text 40"/>
+          <p:cNvSpPr txBox="1"/>
+          <p:nvPr/>
+        </p:nvSpPr>
+        <p:spPr>
+          <a:xfrm>
+            <a:off x="621792" y="4855464"/>
+            <a:ext cx="292608" cy="292608"/>
+          </a:xfrm>
+          <a:prstGeom prst="rect">
+            <a:avLst/>
+          </a:prstGeom>
+          <a:noFill/>
+          <a:ln/>
+        </p:spPr>
+        <p:txBody>
+          <a:bodyPr wrap="square" lIns="0" tIns="0" rIns="0" bIns="0" rtlCol="0" anchor="ctr"/>
+          <a:lstStyle/>
+          <a:p>
+            <a:pPr algn="ctr" indent="0" marL="0">
+              <a:buNone/>
+            </a:pPr>
+            <a:r>
+              <a:rPr lang="en-US" sz="1300" b="1" dirty="0">
+                <a:solidFill>
+                  <a:srgbClr val="FFFFFF"/>
+                </a:solidFill>
+                <a:latin typeface="Noto Sans CJK KR" pitchFamily="34" charset="0"/>
+                <a:ea typeface="Noto Sans CJK KR" pitchFamily="34" charset="-122"/>
+                <a:cs typeface="Noto Sans CJK KR" pitchFamily="34" charset="-120"/>
+              </a:rPr>
+              <a:t>7</a:t>
+            </a:r>
+            <a:endParaRPr lang="en-US" sz="1300" dirty="0"/>
+          </a:p>
+        </p:txBody>
+      </p:sp>
+      <p:sp>
+        <p:nvSpPr>
+          <p:cNvPr id="43" name="Text 41"/>
+          <p:cNvSpPr txBox="1"/>
+          <p:nvPr/>
+        </p:nvSpPr>
+        <p:spPr>
+          <a:xfrm>
+            <a:off x="1005840" y="4800600"/>
+            <a:ext cx="2971800" cy="292608"/>
+          </a:xfrm>
+          <a:prstGeom prst="rect">
+            <a:avLst/>
+          </a:prstGeom>
+          <a:noFill/>
+          <a:ln/>
+        </p:spPr>
+        <p:txBody>
+          <a:bodyPr wrap="square" lIns="0" tIns="0" rIns="0" bIns="0" rtlCol="0" anchor="ctr"/>
+          <a:lstStyle/>
+          <a:p>
+            <a:pPr indent="0" marL="0">
+              <a:buNone/>
+            </a:pPr>
+            <a:r>
+              <a:rPr lang="en-US" sz="1300" b="1" dirty="0">
+                <a:solidFill>
+                  <a:srgbClr val="1A2440"/>
+                </a:solidFill>
+                <a:latin typeface="Noto Sans CJK KR" pitchFamily="34" charset="0"/>
+                <a:ea typeface="Noto Sans CJK KR" pitchFamily="34" charset="-122"/>
+                <a:cs typeface="Noto Sans CJK KR" pitchFamily="34" charset="-120"/>
+              </a:rPr>
+              <a:t>Coast Guard Academy</a:t>
+            </a:r>
+            <a:endParaRPr lang="en-US" sz="1300" dirty="0"/>
+          </a:p>
+        </p:txBody>
+      </p:sp>
+      <p:sp>
+        <p:nvSpPr>
+          <p:cNvPr id="44" name="Text 42"/>
+          <p:cNvSpPr txBox="1"/>
+          <p:nvPr/>
+        </p:nvSpPr>
+        <p:spPr>
+          <a:xfrm>
+            <a:off x="1005840" y="5074920"/>
+            <a:ext cx="2971800" cy="228600"/>
+          </a:xfrm>
+          <a:prstGeom prst="rect">
+            <a:avLst/>
+          </a:prstGeom>
+          <a:noFill/>
+          <a:ln/>
+        </p:spPr>
+        <p:txBody>
+          <a:bodyPr wrap="square" lIns="0" tIns="0" rIns="0" bIns="0" rtlCol="0" anchor="ctr"/>
+          <a:lstStyle/>
+          <a:p>
+            <a:pPr indent="0" marL="0">
+              <a:buNone/>
+            </a:pPr>
+            <a:r>
+              <a:rPr lang="en-US" sz="1000" i="1" dirty="0">
+                <a:solidFill>
+                  <a:srgbClr val="D62839"/>
+                </a:solidFill>
+                <a:latin typeface="Noto Sans CJK KR" pitchFamily="34" charset="0"/>
+                <a:ea typeface="Noto Sans CJK KR" pitchFamily="34" charset="-122"/>
+                <a:cs typeface="Noto Sans CJK KR" pitchFamily="34" charset="-120"/>
+              </a:rPr>
+              <a:t>LEGO City</a:t>
+            </a:r>
+            <a:endParaRPr lang="en-US" sz="1000" dirty="0"/>
+          </a:p>
+        </p:txBody>
+      </p:sp>
+      <p:sp>
+        <p:nvSpPr>
+          <p:cNvPr id="45" name="Text 43"/>
+          <p:cNvSpPr txBox="1"/>
+          <p:nvPr/>
+        </p:nvSpPr>
+        <p:spPr>
+          <a:xfrm>
+            <a:off x="621792" y="5349240"/>
+            <a:ext cx="3328416" cy="850392"/>
+          </a:xfrm>
+          <a:prstGeom prst="rect">
+            <a:avLst/>
+          </a:prstGeom>
+          <a:noFill/>
+          <a:ln/>
+        </p:spPr>
+        <p:txBody>
+          <a:bodyPr wrap="square" lIns="0" tIns="0" rIns="0" bIns="0" rtlCol="0" anchor="t"/>
+          <a:lstStyle/>
+          <a:p>
+            <a:pPr indent="0" marL="0">
+              <a:lnSpc>
+                <a:spcPct val="112000"/>
+              </a:lnSpc>
+              <a:buNone/>
+            </a:pPr>
+            <a:r>
+              <a:rPr lang="en-US" sz="950" dirty="0">
+                <a:solidFill>
+                  <a:srgbClr val="5C5749"/>
+                </a:solidFill>
+                <a:latin typeface="Noto Sans CJK KR" pitchFamily="34" charset="0"/>
+                <a:ea typeface="Noto Sans CJK KR" pitchFamily="34" charset="-122"/>
+                <a:cs typeface="Noto Sans CJK KR" pitchFamily="34" charset="-120"/>
+              </a:rPr>
+              <a:t>해상 경비대 보트로 부둣가를 순찰하며 장애물 회피. Wave Racers보다 덜 젖음</a:t>
+            </a:r>
+            <a:endParaRPr lang="en-US" sz="950" dirty="0"/>
+          </a:p>
+        </p:txBody>
+      </p:sp>
+      <p:sp>
+        <p:nvSpPr>
+          <p:cNvPr id="46" name="Shape 44"/>
+          <p:cNvSpPr/>
+          <p:nvPr/>
+        </p:nvSpPr>
+        <p:spPr>
+          <a:xfrm>
+            <a:off x="4251960" y="4690872"/>
+            <a:ext cx="3657600" cy="1536192"/>
+          </a:xfrm>
+          <a:prstGeom prst="roundRect">
+            <a:avLst>
+              <a:gd name="adj" fmla="val 4167"/>
+            </a:avLst>
+          </a:prstGeom>
+          <a:solidFill>
+            <a:srgbClr val="FFFFFF"/>
+          </a:solidFill>
+          <a:ln w="12700">
+            <a:solidFill>
+              <a:srgbClr val="E2E4E8"/>
+            </a:solidFill>
+            <a:prstDash val="solid"/>
+          </a:ln>
+          <a:effectLst>
+            <a:outerShdw sx="100000" sy="100000" kx="0" ky="0" algn="bl" rotWithShape="0" blurRad="63500" dist="25400" dir="5400000">
+              <a:srgbClr val="888888">
+                <a:alpha val="20000"/>
+              </a:srgbClr>
+            </a:outerShdw>
+          </a:effectLst>
+        </p:spPr>
+      </p:sp>
+      <p:sp>
+        <p:nvSpPr>
+          <p:cNvPr id="47" name="Shape 45"/>
+          <p:cNvSpPr/>
+          <p:nvPr/>
+        </p:nvSpPr>
+        <p:spPr>
+          <a:xfrm>
+            <a:off x="4416552" y="4855464"/>
+            <a:ext cx="292608" cy="292608"/>
+          </a:xfrm>
+          <a:prstGeom prst="ellipse">
+            <a:avLst/>
+          </a:prstGeom>
+          <a:solidFill>
+            <a:srgbClr val="D62839"/>
+          </a:solidFill>
+          <a:ln/>
+        </p:spPr>
+      </p:sp>
+      <p:sp>
+        <p:nvSpPr>
+          <p:cNvPr id="48" name="Text 46"/>
+          <p:cNvSpPr txBox="1"/>
+          <p:nvPr/>
+        </p:nvSpPr>
+        <p:spPr>
+          <a:xfrm>
+            <a:off x="4416552" y="4855464"/>
+            <a:ext cx="292608" cy="292608"/>
+          </a:xfrm>
+          <a:prstGeom prst="rect">
+            <a:avLst/>
+          </a:prstGeom>
+          <a:noFill/>
+          <a:ln/>
+        </p:spPr>
+        <p:txBody>
+          <a:bodyPr wrap="square" lIns="0" tIns="0" rIns="0" bIns="0" rtlCol="0" anchor="ctr"/>
+          <a:lstStyle/>
+          <a:p>
+            <a:pPr algn="ctr" indent="0" marL="0">
+              <a:buNone/>
+            </a:pPr>
+            <a:r>
+              <a:rPr lang="en-US" sz="1300" b="1" dirty="0">
+                <a:solidFill>
+                  <a:srgbClr val="FFFFFF"/>
+                </a:solidFill>
+                <a:latin typeface="Noto Sans CJK KR" pitchFamily="34" charset="0"/>
+                <a:ea typeface="Noto Sans CJK KR" pitchFamily="34" charset="-122"/>
+                <a:cs typeface="Noto Sans CJK KR" pitchFamily="34" charset="-120"/>
+              </a:rPr>
+              <a:t>8</a:t>
+            </a:r>
+            <a:endParaRPr lang="en-US" sz="1300" dirty="0"/>
+          </a:p>
+        </p:txBody>
+      </p:sp>
+      <p:sp>
+        <p:nvSpPr>
+          <p:cNvPr id="49" name="Text 47"/>
+          <p:cNvSpPr txBox="1"/>
+          <p:nvPr/>
+        </p:nvSpPr>
+        <p:spPr>
+          <a:xfrm>
+            <a:off x="4800600" y="4800600"/>
+            <a:ext cx="2971800" cy="292608"/>
+          </a:xfrm>
+          <a:prstGeom prst="rect">
+            <a:avLst/>
+          </a:prstGeom>
+          <a:noFill/>
+          <a:ln/>
+        </p:spPr>
+        <p:txBody>
+          <a:bodyPr wrap="square" lIns="0" tIns="0" rIns="0" bIns="0" rtlCol="0" anchor="ctr"/>
+          <a:lstStyle/>
+          <a:p>
+            <a:pPr indent="0" marL="0">
+              <a:buNone/>
+            </a:pPr>
+            <a:r>
+              <a:rPr lang="en-US" sz="1300" b="1" dirty="0">
+                <a:solidFill>
+                  <a:srgbClr val="1A2440"/>
+                </a:solidFill>
+                <a:latin typeface="Noto Sans CJK KR" pitchFamily="34" charset="0"/>
+                <a:ea typeface="Noto Sans CJK KR" pitchFamily="34" charset="-122"/>
+                <a:cs typeface="Noto Sans CJK KR" pitchFamily="34" charset="-120"/>
+              </a:rPr>
+              <a:t>Merlin's Flying Machines</a:t>
+            </a:r>
+            <a:endParaRPr lang="en-US" sz="1300" dirty="0"/>
+          </a:p>
+        </p:txBody>
+      </p:sp>
+      <p:sp>
+        <p:nvSpPr>
+          <p:cNvPr id="50" name="Text 48"/>
+          <p:cNvSpPr txBox="1"/>
+          <p:nvPr/>
+        </p:nvSpPr>
+        <p:spPr>
+          <a:xfrm>
+            <a:off x="4800600" y="5074920"/>
+            <a:ext cx="2971800" cy="228600"/>
+          </a:xfrm>
+          <a:prstGeom prst="rect">
+            <a:avLst/>
+          </a:prstGeom>
+          <a:noFill/>
+          <a:ln/>
+        </p:spPr>
+        <p:txBody>
+          <a:bodyPr wrap="square" lIns="0" tIns="0" rIns="0" bIns="0" rtlCol="0" anchor="ctr"/>
+          <a:lstStyle/>
+          <a:p>
+            <a:pPr indent="0" marL="0">
+              <a:buNone/>
+            </a:pPr>
+            <a:r>
+              <a:rPr lang="en-US" sz="1000" i="1" dirty="0">
+                <a:solidFill>
+                  <a:srgbClr val="D62839"/>
+                </a:solidFill>
+                <a:latin typeface="Noto Sans CJK KR" pitchFamily="34" charset="0"/>
+                <a:ea typeface="Noto Sans CJK KR" pitchFamily="34" charset="-122"/>
+                <a:cs typeface="Noto Sans CJK KR" pitchFamily="34" charset="-120"/>
+              </a:rPr>
+              <a:t>LEGO Castle</a:t>
+            </a:r>
+            <a:endParaRPr lang="en-US" sz="1000" dirty="0"/>
+          </a:p>
+        </p:txBody>
+      </p:sp>
+      <p:sp>
+        <p:nvSpPr>
+          <p:cNvPr id="51" name="Text 49"/>
+          <p:cNvSpPr txBox="1"/>
+          <p:nvPr/>
+        </p:nvSpPr>
+        <p:spPr>
+          <a:xfrm>
+            <a:off x="4416552" y="5349240"/>
+            <a:ext cx="3328416" cy="850392"/>
+          </a:xfrm>
+          <a:prstGeom prst="rect">
+            <a:avLst/>
+          </a:prstGeom>
+          <a:noFill/>
+          <a:ln/>
+        </p:spPr>
+        <p:txBody>
+          <a:bodyPr wrap="square" lIns="0" tIns="0" rIns="0" bIns="0" rtlCol="0" anchor="t"/>
+          <a:lstStyle/>
+          <a:p>
+            <a:pPr indent="0" marL="0">
+              <a:lnSpc>
+                <a:spcPct val="112000"/>
+              </a:lnSpc>
+              <a:buNone/>
+            </a:pPr>
+            <a:r>
+              <a:rPr lang="en-US" sz="950" dirty="0">
+                <a:solidFill>
+                  <a:srgbClr val="5C5749"/>
+                </a:solidFill>
+                <a:latin typeface="Noto Sans CJK KR" pitchFamily="34" charset="0"/>
+                <a:ea typeface="Noto Sans CJK KR" pitchFamily="34" charset="-122"/>
+                <a:cs typeface="Noto Sans CJK KR" pitchFamily="34" charset="-120"/>
+              </a:rPr>
+              <a:t>페달·핸들로 직접 힘을 줘 얼마나 높이 나는지 겨루는 라이드. 체력 소모 있음</a:t>
+            </a:r>
+            <a:endParaRPr lang="en-US" sz="950" dirty="0"/>
+          </a:p>
+        </p:txBody>
+      </p:sp>
+      <p:sp>
+        <p:nvSpPr>
+          <p:cNvPr id="52" name="Shape 50"/>
+          <p:cNvSpPr/>
+          <p:nvPr/>
+        </p:nvSpPr>
+        <p:spPr>
+          <a:xfrm>
+            <a:off x="8046720" y="4690872"/>
+            <a:ext cx="3657600" cy="1536192"/>
+          </a:xfrm>
+          <a:prstGeom prst="roundRect">
+            <a:avLst>
+              <a:gd name="adj" fmla="val 4167"/>
+            </a:avLst>
+          </a:prstGeom>
+          <a:solidFill>
+            <a:srgbClr val="FFFFFF"/>
+          </a:solidFill>
+          <a:ln w="12700">
+            <a:solidFill>
+              <a:srgbClr val="E2E4E8"/>
+            </a:solidFill>
+            <a:prstDash val="solid"/>
+          </a:ln>
+          <a:effectLst>
+            <a:outerShdw sx="100000" sy="100000" kx="0" ky="0" algn="bl" rotWithShape="0" blurRad="63500" dist="25400" dir="5400000">
+              <a:srgbClr val="888888">
+                <a:alpha val="20000"/>
+              </a:srgbClr>
+            </a:outerShdw>
+          </a:effectLst>
+        </p:spPr>
+      </p:sp>
+      <p:sp>
+        <p:nvSpPr>
+          <p:cNvPr id="53" name="Shape 51"/>
+          <p:cNvSpPr/>
+          <p:nvPr/>
+        </p:nvSpPr>
+        <p:spPr>
+          <a:xfrm>
+            <a:off x="8211312" y="4855464"/>
+            <a:ext cx="292608" cy="292608"/>
+          </a:xfrm>
+          <a:prstGeom prst="ellipse">
+            <a:avLst/>
+          </a:prstGeom>
+          <a:solidFill>
+            <a:srgbClr val="D62839"/>
+          </a:solidFill>
+          <a:ln/>
+        </p:spPr>
+      </p:sp>
+      <p:sp>
+        <p:nvSpPr>
+          <p:cNvPr id="54" name="Text 52"/>
+          <p:cNvSpPr txBox="1"/>
+          <p:nvPr/>
+        </p:nvSpPr>
+        <p:spPr>
+          <a:xfrm>
+            <a:off x="8211312" y="4855464"/>
+            <a:ext cx="292608" cy="292608"/>
+          </a:xfrm>
+          <a:prstGeom prst="rect">
+            <a:avLst/>
+          </a:prstGeom>
+          <a:noFill/>
+          <a:ln/>
+        </p:spPr>
+        <p:txBody>
+          <a:bodyPr wrap="square" lIns="0" tIns="0" rIns="0" bIns="0" rtlCol="0" anchor="ctr"/>
+          <a:lstStyle/>
+          <a:p>
+            <a:pPr algn="ctr" indent="0" marL="0">
+              <a:buNone/>
+            </a:pPr>
+            <a:r>
+              <a:rPr lang="en-US" sz="1300" b="1" dirty="0">
+                <a:solidFill>
+                  <a:srgbClr val="FFFFFF"/>
+                </a:solidFill>
+                <a:latin typeface="Noto Sans CJK KR" pitchFamily="34" charset="0"/>
+                <a:ea typeface="Noto Sans CJK KR" pitchFamily="34" charset="-122"/>
+                <a:cs typeface="Noto Sans CJK KR" pitchFamily="34" charset="-120"/>
+              </a:rPr>
+              <a:t>9</a:t>
+            </a:r>
+            <a:endParaRPr lang="en-US" sz="1300" dirty="0"/>
+          </a:p>
+        </p:txBody>
+      </p:sp>
+      <p:sp>
+        <p:nvSpPr>
+          <p:cNvPr id="55" name="Text 53"/>
+          <p:cNvSpPr txBox="1"/>
+          <p:nvPr/>
+        </p:nvSpPr>
+        <p:spPr>
+          <a:xfrm>
+            <a:off x="8595360" y="4800600"/>
+            <a:ext cx="2971800" cy="292608"/>
+          </a:xfrm>
+          <a:prstGeom prst="rect">
+            <a:avLst/>
+          </a:prstGeom>
+          <a:noFill/>
+          <a:ln/>
+        </p:spPr>
+        <p:txBody>
+          <a:bodyPr wrap="square" lIns="0" tIns="0" rIns="0" bIns="0" rtlCol="0" anchor="ctr"/>
+          <a:lstStyle/>
+          <a:p>
+            <a:pPr indent="0" marL="0">
+              <a:buNone/>
+            </a:pPr>
+            <a:r>
+              <a:rPr lang="en-US" sz="1300" b="1" dirty="0">
+                <a:solidFill>
+                  <a:srgbClr val="1A2440"/>
+                </a:solidFill>
+                <a:latin typeface="Noto Sans CJK KR" pitchFamily="34" charset="0"/>
+                <a:ea typeface="Noto Sans CJK KR" pitchFamily="34" charset="-122"/>
+                <a:cs typeface="Noto Sans CJK KR" pitchFamily="34" charset="-120"/>
+              </a:rPr>
+              <a:t>LEGO Factory Adventure</a:t>
+            </a:r>
+            <a:endParaRPr lang="en-US" sz="1300" dirty="0"/>
+          </a:p>
+        </p:txBody>
+      </p:sp>
+      <p:sp>
+        <p:nvSpPr>
+          <p:cNvPr id="56" name="Text 54"/>
+          <p:cNvSpPr txBox="1"/>
+          <p:nvPr/>
+        </p:nvSpPr>
+        <p:spPr>
+          <a:xfrm>
+            <a:off x="8595360" y="5074920"/>
+            <a:ext cx="2971800" cy="228600"/>
+          </a:xfrm>
+          <a:prstGeom prst="rect">
+            <a:avLst/>
+          </a:prstGeom>
+          <a:noFill/>
+          <a:ln/>
+        </p:spPr>
+        <p:txBody>
+          <a:bodyPr wrap="square" lIns="0" tIns="0" rIns="0" bIns="0" rtlCol="0" anchor="ctr"/>
+          <a:lstStyle/>
+          <a:p>
+            <a:pPr indent="0" marL="0">
+              <a:buNone/>
+            </a:pPr>
+            <a:r>
+              <a:rPr lang="en-US" sz="1000" i="1" dirty="0">
+                <a:solidFill>
+                  <a:srgbClr val="D62839"/>
+                </a:solidFill>
+                <a:latin typeface="Noto Sans CJK KR" pitchFamily="34" charset="0"/>
+                <a:ea typeface="Noto Sans CJK KR" pitchFamily="34" charset="-122"/>
+                <a:cs typeface="Noto Sans CJK KR" pitchFamily="34" charset="-120"/>
+              </a:rPr>
+              <a:t>Brick Street</a:t>
+            </a:r>
+            <a:endParaRPr lang="en-US" sz="1000" dirty="0"/>
+          </a:p>
+        </p:txBody>
+      </p:sp>
+      <p:sp>
+        <p:nvSpPr>
+          <p:cNvPr id="57" name="Text 55"/>
+          <p:cNvSpPr txBox="1"/>
+          <p:nvPr/>
+        </p:nvSpPr>
+        <p:spPr>
+          <a:xfrm>
+            <a:off x="8211312" y="5349240"/>
+            <a:ext cx="3328416" cy="850392"/>
+          </a:xfrm>
+          <a:prstGeom prst="rect">
+            <a:avLst/>
+          </a:prstGeom>
+          <a:noFill/>
+          <a:ln/>
+        </p:spPr>
+        <p:txBody>
+          <a:bodyPr wrap="square" lIns="0" tIns="0" rIns="0" bIns="0" rtlCol="0" anchor="t"/>
+          <a:lstStyle/>
+          <a:p>
+            <a:pPr indent="0" marL="0">
+              <a:lnSpc>
+                <a:spcPct val="112000"/>
+              </a:lnSpc>
+              <a:buNone/>
+            </a:pPr>
+            <a:r>
+              <a:rPr lang="en-US" sz="950" dirty="0">
+                <a:solidFill>
+                  <a:srgbClr val="5C5749"/>
+                </a:solidFill>
+                <a:latin typeface="Noto Sans CJK KR" pitchFamily="34" charset="0"/>
+                <a:ea typeface="Noto Sans CJK KR" pitchFamily="34" charset="-122"/>
+                <a:cs typeface="Noto Sans CJK KR" pitchFamily="34" charset="-120"/>
+              </a:rPr>
+              <a:t>미니피겨 크기로 작아져 LEGO 생산 과정을 구경하는 다크라이드. 아시아 레고랜드 중 이 파크 전용</a:t>
+            </a:r>
+            <a:endParaRPr lang="en-US" sz="950" dirty="0"/>
+          </a:p>
+        </p:txBody>
+      </p:sp>
+      <p:sp>
+        <p:nvSpPr>
+          <p:cNvPr id="58" name="Text 56"/>
+          <p:cNvSpPr txBox="1"/>
+          <p:nvPr/>
+        </p:nvSpPr>
+        <p:spPr>
+          <a:xfrm>
+            <a:off x="457200" y="6537960"/>
+            <a:ext cx="10515600" cy="274320"/>
+          </a:xfrm>
+          <a:prstGeom prst="rect">
+            <a:avLst/>
+          </a:prstGeom>
+          <a:noFill/>
+          <a:ln/>
+        </p:spPr>
+        <p:txBody>
+          <a:bodyPr wrap="square" lIns="0" tIns="0" rIns="0" bIns="0" rtlCol="0" anchor="ctr"/>
+          <a:lstStyle/>
+          <a:p>
+            <a:pPr indent="0" marL="0">
+              <a:buNone/>
+            </a:pPr>
+            <a:r>
+              <a:rPr lang="en-US" sz="900" dirty="0">
+                <a:solidFill>
+                  <a:srgbClr val="5C5749"/>
+                </a:solidFill>
+                <a:latin typeface="Noto Sans CJK KR" pitchFamily="34" charset="0"/>
+                <a:ea typeface="Noto Sans CJK KR" pitchFamily="34" charset="-122"/>
+                <a:cs typeface="Noto Sans CJK KR" pitchFamily="34" charset="-120"/>
+              </a:rPr>
+              <a:t>레고랜드 코리아 · 2026-09-23(수) · 아빠+첫째(8세·130cm)+둘째(3세후반·101cm)</a:t>
+            </a:r>
+            <a:endParaRPr lang="en-US" sz="900" dirty="0"/>
+          </a:p>
+        </p:txBody>
+      </p:sp>
+      <p:sp>
+        <p:nvSpPr>
+          <p:cNvPr id="59" name="Text 57"/>
+          <p:cNvSpPr txBox="1"/>
+          <p:nvPr/>
+        </p:nvSpPr>
+        <p:spPr>
+          <a:xfrm>
+            <a:off x="11430000" y="6537960"/>
+            <a:ext cx="365760" cy="274320"/>
+          </a:xfrm>
+          <a:prstGeom prst="rect">
+            <a:avLst/>
+          </a:prstGeom>
+          <a:noFill/>
+          <a:ln/>
+        </p:spPr>
+        <p:txBody>
+          <a:bodyPr wrap="square" lIns="0" tIns="0" rIns="0" bIns="0" rtlCol="0" anchor="ctr"/>
+          <a:lstStyle/>
+          <a:p>
+            <a:pPr algn="r" indent="0" marL="0">
+              <a:buNone/>
+            </a:pPr>
+            <a:r>
+              <a:rPr lang="en-US" sz="900" dirty="0">
+                <a:solidFill>
+                  <a:srgbClr val="5C5749"/>
+                </a:solidFill>
+                <a:latin typeface="Noto Sans CJK KR" pitchFamily="34" charset="0"/>
+                <a:ea typeface="Noto Sans CJK KR" pitchFamily="34" charset="-122"/>
+                <a:cs typeface="Noto Sans CJK KR" pitchFamily="34" charset="-120"/>
+              </a:rPr>
+              <a:t>8</a:t>
+            </a:r>
+            <a:endParaRPr lang="en-US" sz="900" dirty="0"/>
+          </a:p>
+        </p:txBody>
+      </p:sp>
+    </p:spTree>
+  </p:cSld>
+  <p:clrMapOvr>
+    <a:masterClrMapping/>
+  </p:clrMapOvr>
+</p:sld>
+</file>
+
+<file path=ppt/slides/slide9.xml><?xml version="1.0" encoding="utf-8"?>
+<p:sld xmlns:a="http://schemas.openxmlformats.org/drawingml/2006/main" xmlns:r="http://schemas.openxmlformats.org/officeDocument/2006/relationships" xmlns:p="http://schemas.openxmlformats.org/presentationml/2006/main">
+  <p:cSld name="Slide 9">
+    <p:bg>
+      <p:bgPr>
+        <a:solidFill>
+          <a:srgbClr val="FFFFFF"/>
+        </a:solidFill>
+      </p:bgPr>
+    </p:bg>
+    <p:spTree>
+      <p:nvGrpSpPr>
+        <p:cNvPr id="1" name=""/>
+        <p:cNvGrpSpPr/>
+        <p:nvPr/>
+      </p:nvGrpSpPr>
+      <p:grpSpPr>
+        <a:xfrm>
+          <a:off x="0" y="0"/>
+          <a:ext cx="0" cy="0"/>
+          <a:chOff x="0" y="0"/>
+          <a:chExt cx="0" cy="0"/>
+        </a:xfrm>
+      </p:grpSpPr>
+      <p:sp>
+        <p:nvSpPr>
+          <p:cNvPr id="2" name="Text 0"/>
+          <p:cNvSpPr txBox="1"/>
+          <p:nvPr/>
+        </p:nvSpPr>
+        <p:spPr>
+          <a:xfrm>
+            <a:off x="457200" y="320040"/>
+            <a:ext cx="11247120" cy="320040"/>
+          </a:xfrm>
+          <a:prstGeom prst="rect">
+            <a:avLst/>
+          </a:prstGeom>
+          <a:noFill/>
+          <a:ln/>
+        </p:spPr>
+        <p:txBody>
+          <a:bodyPr wrap="square" lIns="0" tIns="0" rIns="0" bIns="0" rtlCol="0" anchor="ctr"/>
+          <a:lstStyle/>
+          <a:p>
+            <a:pPr indent="0" marL="0">
+              <a:buNone/>
+            </a:pPr>
+            <a:r>
+              <a:rPr lang="en-US" sz="1200" b="1" dirty="0">
+                <a:solidFill>
+                  <a:srgbClr val="D62839"/>
+                </a:solidFill>
+                <a:latin typeface="Noto Sans CJK KR" pitchFamily="34" charset="0"/>
+                <a:ea typeface="Noto Sans CJK KR" pitchFamily="34" charset="-122"/>
+                <a:cs typeface="Noto Sans CJK KR" pitchFamily="34" charset="-120"/>
+              </a:rPr>
               <a:t>CINEMA — RE-VERIFIED</a:t>
             </a:r>
             <a:endParaRPr lang="en-US" sz="1200" dirty="0"/>
@@ -13073,7 +14640,7 @@
       </p:sp>
       <p:graphicFrame>
         <p:nvGraphicFramePr>
-          <p:cNvPr id="9" name="Table 0"/>
+          <p:cNvPr id="10" name="Table 0"/>
           <p:cNvGraphicFramePr>
             <a:graphicFrameLocks noGrp="1"/>
           </p:cNvGraphicFramePr>
@@ -14625,1037 +16192,6 @@
       <p:sp>
         <p:nvSpPr>
           <p:cNvPr id="12" name="Text 9"/>
-          <p:cNvSpPr txBox="1"/>
-          <p:nvPr/>
-        </p:nvSpPr>
-        <p:spPr>
-          <a:xfrm>
-            <a:off x="11430000" y="6537960"/>
-            <a:ext cx="365760" cy="274320"/>
-          </a:xfrm>
-          <a:prstGeom prst="rect">
-            <a:avLst/>
-          </a:prstGeom>
-          <a:noFill/>
-          <a:ln/>
-        </p:spPr>
-        <p:txBody>
-          <a:bodyPr wrap="square" lIns="0" tIns="0" rIns="0" bIns="0" rtlCol="0" anchor="ctr"/>
-          <a:lstStyle/>
-          <a:p>
-            <a:pPr algn="r" indent="0" marL="0">
-              <a:buNone/>
-            </a:pPr>
-            <a:r>
-              <a:rPr lang="en-US" sz="900" dirty="0">
-                <a:solidFill>
-                  <a:srgbClr val="5C5749"/>
-                </a:solidFill>
-                <a:latin typeface="Noto Sans CJK KR" pitchFamily="34" charset="0"/>
-                <a:ea typeface="Noto Sans CJK KR" pitchFamily="34" charset="-122"/>
-                <a:cs typeface="Noto Sans CJK KR" pitchFamily="34" charset="-120"/>
-              </a:rPr>
-              <a:t>8</a:t>
-            </a:r>
-            <a:endParaRPr lang="en-US" sz="900" dirty="0"/>
-          </a:p>
-        </p:txBody>
-      </p:sp>
-    </p:spTree>
-  </p:cSld>
-  <p:clrMapOvr>
-    <a:masterClrMapping/>
-  </p:clrMapOvr>
-</p:sld>
-</file>
-
-<file path=ppt/slides/slide9.xml><?xml version="1.0" encoding="utf-8"?>
-<p:sld xmlns:a="http://schemas.openxmlformats.org/drawingml/2006/main" xmlns:r="http://schemas.openxmlformats.org/officeDocument/2006/relationships" xmlns:p="http://schemas.openxmlformats.org/presentationml/2006/main">
-  <p:cSld name="Slide 9">
-    <p:bg>
-      <p:bgPr>
-        <a:solidFill>
-          <a:srgbClr val="FFFFFF"/>
-        </a:solidFill>
-      </p:bgPr>
-    </p:bg>
-    <p:spTree>
-      <p:nvGrpSpPr>
-        <p:cNvPr id="1" name=""/>
-        <p:cNvGrpSpPr/>
-        <p:nvPr/>
-      </p:nvGrpSpPr>
-      <p:grpSpPr>
-        <a:xfrm>
-          <a:off x="0" y="0"/>
-          <a:ext cx="0" cy="0"/>
-          <a:chOff x="0" y="0"/>
-          <a:chExt cx="0" cy="0"/>
-        </a:xfrm>
-      </p:grpSpPr>
-      <p:sp>
-        <p:nvSpPr>
-          <p:cNvPr id="2" name="Text 0"/>
-          <p:cNvSpPr txBox="1"/>
-          <p:nvPr/>
-        </p:nvSpPr>
-        <p:spPr>
-          <a:xfrm>
-            <a:off x="457200" y="320040"/>
-            <a:ext cx="11247120" cy="320040"/>
-          </a:xfrm>
-          <a:prstGeom prst="rect">
-            <a:avLst/>
-          </a:prstGeom>
-          <a:noFill/>
-          <a:ln/>
-        </p:spPr>
-        <p:txBody>
-          <a:bodyPr wrap="square" lIns="0" tIns="0" rIns="0" bIns="0" rtlCol="0" anchor="ctr"/>
-          <a:lstStyle/>
-          <a:p>
-            <a:pPr indent="0" marL="0">
-              <a:buNone/>
-            </a:pPr>
-            <a:r>
-              <a:rPr lang="en-US" sz="1200" b="1" dirty="0">
-                <a:solidFill>
-                  <a:srgbClr val="D62839"/>
-                </a:solidFill>
-                <a:latin typeface="Noto Sans CJK KR" pitchFamily="34" charset="0"/>
-                <a:ea typeface="Noto Sans CJK KR" pitchFamily="34" charset="-122"/>
-                <a:cs typeface="Noto Sans CJK KR" pitchFamily="34" charset="-120"/>
-              </a:rPr>
-              <a:t>STAMPS &amp; CHECKLIST</a:t>
-            </a:r>
-            <a:endParaRPr lang="en-US" sz="1200" dirty="0"/>
-          </a:p>
-        </p:txBody>
-      </p:sp>
-      <p:sp>
-        <p:nvSpPr>
-          <p:cNvPr id="3" name="Text 1"/>
-          <p:cNvSpPr txBox="1"/>
-          <p:nvPr/>
-        </p:nvSpPr>
-        <p:spPr>
-          <a:xfrm>
-            <a:off x="457200" y="594360"/>
-            <a:ext cx="11247120" cy="548640"/>
-          </a:xfrm>
-          <a:prstGeom prst="rect">
-            <a:avLst/>
-          </a:prstGeom>
-          <a:noFill/>
-          <a:ln/>
-        </p:spPr>
-        <p:txBody>
-          <a:bodyPr wrap="square" lIns="0" tIns="0" rIns="0" bIns="0" rtlCol="0" anchor="ctr"/>
-          <a:lstStyle/>
-          <a:p>
-            <a:pPr indent="0" marL="0">
-              <a:buNone/>
-            </a:pPr>
-            <a:r>
-              <a:rPr lang="en-US" sz="2600" b="1" dirty="0">
-                <a:solidFill>
-                  <a:srgbClr val="1A2440"/>
-                </a:solidFill>
-                <a:latin typeface="Noto Sans CJK KR" pitchFamily="34" charset="0"/>
-                <a:ea typeface="Noto Sans CJK KR" pitchFamily="34" charset="-122"/>
-                <a:cs typeface="Noto Sans CJK KR" pitchFamily="34" charset="-120"/>
-              </a:rPr>
-              <a:t>몬스터 랠리 스탬프 6곳 · 최종 체크리스트</a:t>
-            </a:r>
-            <a:endParaRPr lang="en-US" sz="2600" dirty="0"/>
-          </a:p>
-        </p:txBody>
-      </p:sp>
-      <p:sp>
-        <p:nvSpPr>
-          <p:cNvPr id="4" name="Text 2"/>
-          <p:cNvSpPr txBox="1"/>
-          <p:nvPr/>
-        </p:nvSpPr>
-        <p:spPr>
-          <a:xfrm>
-            <a:off x="457200" y="1371600"/>
-            <a:ext cx="5486400" cy="365760"/>
-          </a:xfrm>
-          <a:prstGeom prst="rect">
-            <a:avLst/>
-          </a:prstGeom>
-          <a:noFill/>
-          <a:ln/>
-        </p:spPr>
-        <p:txBody>
-          <a:bodyPr wrap="square" lIns="0" tIns="0" rIns="0" bIns="0" rtlCol="0" anchor="ctr"/>
-          <a:lstStyle/>
-          <a:p>
-            <a:pPr indent="0" marL="0">
-              <a:buNone/>
-            </a:pPr>
-            <a:r>
-              <a:rPr lang="en-US" sz="1500" b="1" dirty="0">
-                <a:solidFill>
-                  <a:srgbClr val="1A2440"/>
-                </a:solidFill>
-                <a:latin typeface="Noto Sans CJK KR" pitchFamily="34" charset="0"/>
-                <a:ea typeface="Noto Sans CJK KR" pitchFamily="34" charset="-122"/>
-                <a:cs typeface="Noto Sans CJK KR" pitchFamily="34" charset="-120"/>
-              </a:rPr>
-              <a:t>몬스터 랠리 스탬프 6곳</a:t>
-            </a:r>
-            <a:endParaRPr lang="en-US" sz="1500" dirty="0"/>
-          </a:p>
-        </p:txBody>
-      </p:sp>
-      <p:sp>
-        <p:nvSpPr>
-          <p:cNvPr id="5" name="Shape 3"/>
-          <p:cNvSpPr/>
-          <p:nvPr/>
-        </p:nvSpPr>
-        <p:spPr>
-          <a:xfrm>
-            <a:off x="457200" y="1828800"/>
-            <a:ext cx="5486400" cy="411480"/>
-          </a:xfrm>
-          <a:prstGeom prst="roundRect">
-            <a:avLst>
-              <a:gd name="adj" fmla="val 13333"/>
-            </a:avLst>
-          </a:prstGeom>
-          <a:solidFill>
-            <a:srgbClr val="F5F6F8"/>
-          </a:solidFill>
-          <a:ln w="9525">
-            <a:solidFill>
-              <a:srgbClr val="E2E4E8"/>
-            </a:solidFill>
-            <a:prstDash val="solid"/>
-          </a:ln>
-        </p:spPr>
-      </p:sp>
-      <p:sp>
-        <p:nvSpPr>
-          <p:cNvPr id="6" name="Text 4"/>
-          <p:cNvSpPr txBox="1"/>
-          <p:nvPr/>
-        </p:nvSpPr>
-        <p:spPr>
-          <a:xfrm>
-            <a:off x="685800" y="1828800"/>
-            <a:ext cx="5029200" cy="411480"/>
-          </a:xfrm>
-          <a:prstGeom prst="rect">
-            <a:avLst/>
-          </a:prstGeom>
-          <a:noFill/>
-          <a:ln/>
-        </p:spPr>
-        <p:txBody>
-          <a:bodyPr wrap="square" lIns="0" tIns="0" rIns="0" bIns="0" rtlCol="0" anchor="ctr"/>
-          <a:lstStyle/>
-          <a:p>
-            <a:pPr indent="0" marL="0">
-              <a:buNone/>
-            </a:pPr>
-            <a:r>
-              <a:rPr lang="en-US" sz="1250" dirty="0">
-                <a:solidFill>
-                  <a:srgbClr val="1A2440"/>
-                </a:solidFill>
-                <a:latin typeface="Noto Sans CJK KR" pitchFamily="34" charset="0"/>
-                <a:ea typeface="Noto Sans CJK KR" pitchFamily="34" charset="-122"/>
-                <a:cs typeface="Noto Sans CJK KR" pitchFamily="34" charset="-120"/>
-              </a:rPr>
-              <a:t>① 드래곤 코스터</a:t>
-            </a:r>
-            <a:endParaRPr lang="en-US" sz="1250" dirty="0"/>
-          </a:p>
-        </p:txBody>
-      </p:sp>
-      <p:sp>
-        <p:nvSpPr>
-          <p:cNvPr id="7" name="Shape 5"/>
-          <p:cNvSpPr/>
-          <p:nvPr/>
-        </p:nvSpPr>
-        <p:spPr>
-          <a:xfrm>
-            <a:off x="457200" y="2331720"/>
-            <a:ext cx="5486400" cy="411480"/>
-          </a:xfrm>
-          <a:prstGeom prst="roundRect">
-            <a:avLst>
-              <a:gd name="adj" fmla="val 13333"/>
-            </a:avLst>
-          </a:prstGeom>
-          <a:solidFill>
-            <a:srgbClr val="FFFFFF"/>
-          </a:solidFill>
-          <a:ln w="9525">
-            <a:solidFill>
-              <a:srgbClr val="E2E4E8"/>
-            </a:solidFill>
-            <a:prstDash val="solid"/>
-          </a:ln>
-        </p:spPr>
-      </p:sp>
-      <p:sp>
-        <p:nvSpPr>
-          <p:cNvPr id="8" name="Text 6"/>
-          <p:cNvSpPr txBox="1"/>
-          <p:nvPr/>
-        </p:nvSpPr>
-        <p:spPr>
-          <a:xfrm>
-            <a:off x="685800" y="2331720"/>
-            <a:ext cx="5029200" cy="411480"/>
-          </a:xfrm>
-          <a:prstGeom prst="rect">
-            <a:avLst/>
-          </a:prstGeom>
-          <a:noFill/>
-          <a:ln/>
-        </p:spPr>
-        <p:txBody>
-          <a:bodyPr wrap="square" lIns="0" tIns="0" rIns="0" bIns="0" rtlCol="0" anchor="ctr"/>
-          <a:lstStyle/>
-          <a:p>
-            <a:pPr indent="0" marL="0">
-              <a:buNone/>
-            </a:pPr>
-            <a:r>
-              <a:rPr lang="en-US" sz="1250" dirty="0">
-                <a:solidFill>
-                  <a:srgbClr val="1A2440"/>
-                </a:solidFill>
-                <a:latin typeface="Noto Sans CJK KR" pitchFamily="34" charset="0"/>
-                <a:ea typeface="Noto Sans CJK KR" pitchFamily="34" charset="-122"/>
-                <a:cs typeface="Noto Sans CJK KR" pitchFamily="34" charset="-120"/>
-              </a:rPr>
-              <a:t>② Masters of Spinjitzu</a:t>
-            </a:r>
-            <a:endParaRPr lang="en-US" sz="1250" dirty="0"/>
-          </a:p>
-        </p:txBody>
-      </p:sp>
-      <p:sp>
-        <p:nvSpPr>
-          <p:cNvPr id="9" name="Shape 7"/>
-          <p:cNvSpPr/>
-          <p:nvPr/>
-        </p:nvSpPr>
-        <p:spPr>
-          <a:xfrm>
-            <a:off x="457200" y="2834640"/>
-            <a:ext cx="5486400" cy="411480"/>
-          </a:xfrm>
-          <a:prstGeom prst="roundRect">
-            <a:avLst>
-              <a:gd name="adj" fmla="val 13333"/>
-            </a:avLst>
-          </a:prstGeom>
-          <a:solidFill>
-            <a:srgbClr val="F5F6F8"/>
-          </a:solidFill>
-          <a:ln w="9525">
-            <a:solidFill>
-              <a:srgbClr val="E2E4E8"/>
-            </a:solidFill>
-            <a:prstDash val="solid"/>
-          </a:ln>
-        </p:spPr>
-      </p:sp>
-      <p:sp>
-        <p:nvSpPr>
-          <p:cNvPr id="10" name="Text 8"/>
-          <p:cNvSpPr txBox="1"/>
-          <p:nvPr/>
-        </p:nvSpPr>
-        <p:spPr>
-          <a:xfrm>
-            <a:off x="685800" y="2834640"/>
-            <a:ext cx="5029200" cy="411480"/>
-          </a:xfrm>
-          <a:prstGeom prst="rect">
-            <a:avLst/>
-          </a:prstGeom>
-          <a:noFill/>
-          <a:ln/>
-        </p:spPr>
-        <p:txBody>
-          <a:bodyPr wrap="square" lIns="0" tIns="0" rIns="0" bIns="0" rtlCol="0" anchor="ctr"/>
-          <a:lstStyle/>
-          <a:p>
-            <a:pPr indent="0" marL="0">
-              <a:buNone/>
-            </a:pPr>
-            <a:r>
-              <a:rPr lang="en-US" sz="1250" dirty="0">
-                <a:solidFill>
-                  <a:srgbClr val="1A2440"/>
-                </a:solidFill>
-                <a:latin typeface="Noto Sans CJK KR" pitchFamily="34" charset="0"/>
-                <a:ea typeface="Noto Sans CJK KR" pitchFamily="34" charset="-122"/>
-                <a:cs typeface="Noto Sans CJK KR" pitchFamily="34" charset="-120"/>
-              </a:rPr>
-              <a:t>③ NINJAGO The Ride</a:t>
-            </a:r>
-            <a:endParaRPr lang="en-US" sz="1250" dirty="0"/>
-          </a:p>
-        </p:txBody>
-      </p:sp>
-      <p:sp>
-        <p:nvSpPr>
-          <p:cNvPr id="11" name="Shape 9"/>
-          <p:cNvSpPr/>
-          <p:nvPr/>
-        </p:nvSpPr>
-        <p:spPr>
-          <a:xfrm>
-            <a:off x="457200" y="3337560"/>
-            <a:ext cx="5486400" cy="411480"/>
-          </a:xfrm>
-          <a:prstGeom prst="roundRect">
-            <a:avLst>
-              <a:gd name="adj" fmla="val 13333"/>
-            </a:avLst>
-          </a:prstGeom>
-          <a:solidFill>
-            <a:srgbClr val="FFFFFF"/>
-          </a:solidFill>
-          <a:ln w="9525">
-            <a:solidFill>
-              <a:srgbClr val="E2E4E8"/>
-            </a:solidFill>
-            <a:prstDash val="solid"/>
-          </a:ln>
-        </p:spPr>
-      </p:sp>
-      <p:sp>
-        <p:nvSpPr>
-          <p:cNvPr id="12" name="Text 10"/>
-          <p:cNvSpPr txBox="1"/>
-          <p:nvPr/>
-        </p:nvSpPr>
-        <p:spPr>
-          <a:xfrm>
-            <a:off x="685800" y="3337560"/>
-            <a:ext cx="5029200" cy="411480"/>
-          </a:xfrm>
-          <a:prstGeom prst="rect">
-            <a:avLst/>
-          </a:prstGeom>
-          <a:noFill/>
-          <a:ln/>
-        </p:spPr>
-        <p:txBody>
-          <a:bodyPr wrap="square" lIns="0" tIns="0" rIns="0" bIns="0" rtlCol="0" anchor="ctr"/>
-          <a:lstStyle/>
-          <a:p>
-            <a:pPr indent="0" marL="0">
-              <a:buNone/>
-            </a:pPr>
-            <a:r>
-              <a:rPr lang="en-US" sz="1250" dirty="0">
-                <a:solidFill>
-                  <a:srgbClr val="1A2440"/>
-                </a:solidFill>
-                <a:latin typeface="Noto Sans CJK KR" pitchFamily="34" charset="0"/>
-                <a:ea typeface="Noto Sans CJK KR" pitchFamily="34" charset="-122"/>
-                <a:cs typeface="Noto Sans CJK KR" pitchFamily="34" charset="-120"/>
-              </a:rPr>
-              <a:t>④ LEGOLAND Lookout</a:t>
-            </a:r>
-            <a:endParaRPr lang="en-US" sz="1250" dirty="0"/>
-          </a:p>
-        </p:txBody>
-      </p:sp>
-      <p:sp>
-        <p:nvSpPr>
-          <p:cNvPr id="13" name="Shape 11"/>
-          <p:cNvSpPr/>
-          <p:nvPr/>
-        </p:nvSpPr>
-        <p:spPr>
-          <a:xfrm>
-            <a:off x="457200" y="3840480"/>
-            <a:ext cx="5486400" cy="411480"/>
-          </a:xfrm>
-          <a:prstGeom prst="roundRect">
-            <a:avLst>
-              <a:gd name="adj" fmla="val 13333"/>
-            </a:avLst>
-          </a:prstGeom>
-          <a:solidFill>
-            <a:srgbClr val="F5F6F8"/>
-          </a:solidFill>
-          <a:ln w="9525">
-            <a:solidFill>
-              <a:srgbClr val="E2E4E8"/>
-            </a:solidFill>
-            <a:prstDash val="solid"/>
-          </a:ln>
-        </p:spPr>
-      </p:sp>
-      <p:sp>
-        <p:nvSpPr>
-          <p:cNvPr id="14" name="Text 12"/>
-          <p:cNvSpPr txBox="1"/>
-          <p:nvPr/>
-        </p:nvSpPr>
-        <p:spPr>
-          <a:xfrm>
-            <a:off x="685800" y="3840480"/>
-            <a:ext cx="5029200" cy="411480"/>
-          </a:xfrm>
-          <a:prstGeom prst="rect">
-            <a:avLst/>
-          </a:prstGeom>
-          <a:noFill/>
-          <a:ln/>
-        </p:spPr>
-        <p:txBody>
-          <a:bodyPr wrap="square" lIns="0" tIns="0" rIns="0" bIns="0" rtlCol="0" anchor="ctr"/>
-          <a:lstStyle/>
-          <a:p>
-            <a:pPr indent="0" marL="0">
-              <a:buNone/>
-            </a:pPr>
-            <a:r>
-              <a:rPr lang="en-US" sz="1250" dirty="0">
-                <a:solidFill>
-                  <a:srgbClr val="1A2440"/>
-                </a:solidFill>
-                <a:latin typeface="Noto Sans CJK KR" pitchFamily="34" charset="0"/>
-                <a:ea typeface="Noto Sans CJK KR" pitchFamily="34" charset="-122"/>
-                <a:cs typeface="Noto Sans CJK KR" pitchFamily="34" charset="-120"/>
-              </a:rPr>
-              <a:t>⑤ 브릭토피아 라운지</a:t>
-            </a:r>
-            <a:endParaRPr lang="en-US" sz="1250" dirty="0"/>
-          </a:p>
-        </p:txBody>
-      </p:sp>
-      <p:sp>
-        <p:nvSpPr>
-          <p:cNvPr id="15" name="Shape 13"/>
-          <p:cNvSpPr/>
-          <p:nvPr/>
-        </p:nvSpPr>
-        <p:spPr>
-          <a:xfrm>
-            <a:off x="457200" y="4343400"/>
-            <a:ext cx="5486400" cy="411480"/>
-          </a:xfrm>
-          <a:prstGeom prst="roundRect">
-            <a:avLst>
-              <a:gd name="adj" fmla="val 13333"/>
-            </a:avLst>
-          </a:prstGeom>
-          <a:solidFill>
-            <a:srgbClr val="FFFFFF"/>
-          </a:solidFill>
-          <a:ln w="9525">
-            <a:solidFill>
-              <a:srgbClr val="E2E4E8"/>
-            </a:solidFill>
-            <a:prstDash val="solid"/>
-          </a:ln>
-        </p:spPr>
-      </p:sp>
-      <p:sp>
-        <p:nvSpPr>
-          <p:cNvPr id="16" name="Text 14"/>
-          <p:cNvSpPr txBox="1"/>
-          <p:nvPr/>
-        </p:nvSpPr>
-        <p:spPr>
-          <a:xfrm>
-            <a:off x="685800" y="4343400"/>
-            <a:ext cx="5029200" cy="411480"/>
-          </a:xfrm>
-          <a:prstGeom prst="rect">
-            <a:avLst/>
-          </a:prstGeom>
-          <a:noFill/>
-          <a:ln/>
-        </p:spPr>
-        <p:txBody>
-          <a:bodyPr wrap="square" lIns="0" tIns="0" rIns="0" bIns="0" rtlCol="0" anchor="ctr"/>
-          <a:lstStyle/>
-          <a:p>
-            <a:pPr indent="0" marL="0">
-              <a:buNone/>
-            </a:pPr>
-            <a:r>
-              <a:rPr lang="en-US" sz="1250" dirty="0">
-                <a:solidFill>
-                  <a:srgbClr val="1A2440"/>
-                </a:solidFill>
-                <a:latin typeface="Noto Sans CJK KR" pitchFamily="34" charset="0"/>
-                <a:ea typeface="Noto Sans CJK KR" pitchFamily="34" charset="-122"/>
-                <a:cs typeface="Noto Sans CJK KR" pitchFamily="34" charset="-120"/>
-              </a:rPr>
-              <a:t>⑥ LEGO Factory Adventure</a:t>
-            </a:r>
-            <a:endParaRPr lang="en-US" sz="1250" dirty="0"/>
-          </a:p>
-        </p:txBody>
-      </p:sp>
-      <p:sp>
-        <p:nvSpPr>
-          <p:cNvPr id="17" name="Text 15"/>
-          <p:cNvSpPr txBox="1"/>
-          <p:nvPr/>
-        </p:nvSpPr>
-        <p:spPr>
-          <a:xfrm>
-            <a:off x="457200" y="4937760"/>
-            <a:ext cx="5486400" cy="365760"/>
-          </a:xfrm>
-          <a:prstGeom prst="rect">
-            <a:avLst/>
-          </a:prstGeom>
-          <a:noFill/>
-          <a:ln/>
-        </p:spPr>
-        <p:txBody>
-          <a:bodyPr wrap="square" lIns="0" tIns="0" rIns="0" bIns="0" rtlCol="0" anchor="ctr"/>
-          <a:lstStyle/>
-          <a:p>
-            <a:pPr indent="0" marL="0">
-              <a:buNone/>
-            </a:pPr>
-            <a:r>
-              <a:rPr lang="en-US" sz="1150" i="1" dirty="0">
-                <a:solidFill>
-                  <a:srgbClr val="5C5749"/>
-                </a:solidFill>
-                <a:latin typeface="Noto Sans CJK KR" pitchFamily="34" charset="0"/>
-                <a:ea typeface="Noto Sans CJK KR" pitchFamily="34" charset="-122"/>
-                <a:cs typeface="Noto Sans CJK KR" pitchFamily="34" charset="-120"/>
-              </a:rPr>
-              <a:t>완주 시 몬스터 배지 + 젤리 수령 (16:20~16:45, Brick Street)</a:t>
-            </a:r>
-            <a:endParaRPr lang="en-US" sz="1150" dirty="0"/>
-          </a:p>
-        </p:txBody>
-      </p:sp>
-      <p:sp>
-        <p:nvSpPr>
-          <p:cNvPr id="18" name="Text 16"/>
-          <p:cNvSpPr txBox="1"/>
-          <p:nvPr/>
-        </p:nvSpPr>
-        <p:spPr>
-          <a:xfrm>
-            <a:off x="6309360" y="1371600"/>
-            <a:ext cx="5394960" cy="365760"/>
-          </a:xfrm>
-          <a:prstGeom prst="rect">
-            <a:avLst/>
-          </a:prstGeom>
-          <a:noFill/>
-          <a:ln/>
-        </p:spPr>
-        <p:txBody>
-          <a:bodyPr wrap="square" lIns="0" tIns="0" rIns="0" bIns="0" rtlCol="0" anchor="ctr"/>
-          <a:lstStyle/>
-          <a:p>
-            <a:pPr indent="0" marL="0">
-              <a:buNone/>
-            </a:pPr>
-            <a:r>
-              <a:rPr lang="en-US" sz="1500" b="1" dirty="0">
-                <a:solidFill>
-                  <a:srgbClr val="1A2440"/>
-                </a:solidFill>
-                <a:latin typeface="Noto Sans CJK KR" pitchFamily="34" charset="0"/>
-                <a:ea typeface="Noto Sans CJK KR" pitchFamily="34" charset="-122"/>
-                <a:cs typeface="Noto Sans CJK KR" pitchFamily="34" charset="-120"/>
-              </a:rPr>
-              <a:t>현장에서 마지막으로 확인할 것</a:t>
-            </a:r>
-            <a:endParaRPr lang="en-US" sz="1500" dirty="0"/>
-          </a:p>
-        </p:txBody>
-      </p:sp>
-      <p:sp>
-        <p:nvSpPr>
-          <p:cNvPr id="19" name="Shape 17"/>
-          <p:cNvSpPr/>
-          <p:nvPr/>
-        </p:nvSpPr>
-        <p:spPr>
-          <a:xfrm>
-            <a:off x="6309360" y="1828800"/>
-            <a:ext cx="320040" cy="320040"/>
-          </a:xfrm>
-          <a:prstGeom prst="roundRect">
-            <a:avLst>
-              <a:gd name="adj" fmla="val 14286"/>
-            </a:avLst>
-          </a:prstGeom>
-          <a:solidFill>
-            <a:srgbClr val="FFFFFF"/>
-          </a:solidFill>
-          <a:ln w="19050">
-            <a:solidFill>
-              <a:srgbClr val="D62839"/>
-            </a:solidFill>
-            <a:prstDash val="solid"/>
-          </a:ln>
-        </p:spPr>
-      </p:sp>
-      <p:sp>
-        <p:nvSpPr>
-          <p:cNvPr id="20" name="Text 18"/>
-          <p:cNvSpPr txBox="1"/>
-          <p:nvPr/>
-        </p:nvSpPr>
-        <p:spPr>
-          <a:xfrm>
-            <a:off x="6766560" y="1783080"/>
-            <a:ext cx="4937760" cy="502920"/>
-          </a:xfrm>
-          <a:prstGeom prst="rect">
-            <a:avLst/>
-          </a:prstGeom>
-          <a:noFill/>
-          <a:ln/>
-        </p:spPr>
-        <p:txBody>
-          <a:bodyPr wrap="square" lIns="0" tIns="0" rIns="0" bIns="0" rtlCol="0" anchor="ctr"/>
-          <a:lstStyle/>
-          <a:p>
-            <a:pPr indent="0" marL="0">
-              <a:buNone/>
-            </a:pPr>
-            <a:r>
-              <a:rPr lang="en-US" sz="1200" dirty="0">
-                <a:solidFill>
-                  <a:srgbClr val="1A2440"/>
-                </a:solidFill>
-                <a:latin typeface="Noto Sans CJK KR" pitchFamily="34" charset="0"/>
-                <a:ea typeface="Noto Sans CJK KR" pitchFamily="34" charset="-122"/>
-                <a:cs typeface="Noto Sans CJK KR" pitchFamily="34" charset="-120"/>
-              </a:rPr>
-              <a:t>PINK 구역 배정 가능 여부 (안내 요원에게 요청)</a:t>
-            </a:r>
-            <a:endParaRPr lang="en-US" sz="1200" dirty="0"/>
-          </a:p>
-        </p:txBody>
-      </p:sp>
-      <p:sp>
-        <p:nvSpPr>
-          <p:cNvPr id="21" name="Shape 19"/>
-          <p:cNvSpPr/>
-          <p:nvPr/>
-        </p:nvSpPr>
-        <p:spPr>
-          <a:xfrm>
-            <a:off x="6309360" y="2395728"/>
-            <a:ext cx="320040" cy="320040"/>
-          </a:xfrm>
-          <a:prstGeom prst="roundRect">
-            <a:avLst>
-              <a:gd name="adj" fmla="val 14286"/>
-            </a:avLst>
-          </a:prstGeom>
-          <a:solidFill>
-            <a:srgbClr val="FFFFFF"/>
-          </a:solidFill>
-          <a:ln w="19050">
-            <a:solidFill>
-              <a:srgbClr val="D62839"/>
-            </a:solidFill>
-            <a:prstDash val="solid"/>
-          </a:ln>
-        </p:spPr>
-      </p:sp>
-      <p:sp>
-        <p:nvSpPr>
-          <p:cNvPr id="22" name="Text 20"/>
-          <p:cNvSpPr txBox="1"/>
-          <p:nvPr/>
-        </p:nvSpPr>
-        <p:spPr>
-          <a:xfrm>
-            <a:off x="6766560" y="2350008"/>
-            <a:ext cx="4937760" cy="502920"/>
-          </a:xfrm>
-          <a:prstGeom prst="rect">
-            <a:avLst/>
-          </a:prstGeom>
-          <a:noFill/>
-          <a:ln/>
-        </p:spPr>
-        <p:txBody>
-          <a:bodyPr wrap="square" lIns="0" tIns="0" rIns="0" bIns="0" rtlCol="0" anchor="ctr"/>
-          <a:lstStyle/>
-          <a:p>
-            <a:pPr indent="0" marL="0">
-              <a:buNone/>
-            </a:pPr>
-            <a:r>
-              <a:rPr lang="en-US" sz="1200" dirty="0">
-                <a:solidFill>
-                  <a:srgbClr val="1A2440"/>
-                </a:solidFill>
-                <a:latin typeface="Noto Sans CJK KR" pitchFamily="34" charset="0"/>
-                <a:ea typeface="Noto Sans CJK KR" pitchFamily="34" charset="-122"/>
-                <a:cs typeface="Noto Sans CJK KR" pitchFamily="34" charset="-120"/>
-              </a:rPr>
-              <a:t>몬스터 랠리 전단 — 스탬프 6곳 정확한 목록 재확인</a:t>
-            </a:r>
-            <a:endParaRPr lang="en-US" sz="1200" dirty="0"/>
-          </a:p>
-        </p:txBody>
-      </p:sp>
-      <p:sp>
-        <p:nvSpPr>
-          <p:cNvPr id="23" name="Shape 21"/>
-          <p:cNvSpPr/>
-          <p:nvPr/>
-        </p:nvSpPr>
-        <p:spPr>
-          <a:xfrm>
-            <a:off x="6309360" y="2962656"/>
-            <a:ext cx="320040" cy="320040"/>
-          </a:xfrm>
-          <a:prstGeom prst="roundRect">
-            <a:avLst>
-              <a:gd name="adj" fmla="val 14286"/>
-            </a:avLst>
-          </a:prstGeom>
-          <a:solidFill>
-            <a:srgbClr val="FFFFFF"/>
-          </a:solidFill>
-          <a:ln w="19050">
-            <a:solidFill>
-              <a:srgbClr val="D62839"/>
-            </a:solidFill>
-            <a:prstDash val="solid"/>
-          </a:ln>
-        </p:spPr>
-      </p:sp>
-      <p:sp>
-        <p:nvSpPr>
-          <p:cNvPr id="24" name="Text 22"/>
-          <p:cNvSpPr txBox="1"/>
-          <p:nvPr/>
-        </p:nvSpPr>
-        <p:spPr>
-          <a:xfrm>
-            <a:off x="6766560" y="2916936"/>
-            <a:ext cx="4937760" cy="502920"/>
-          </a:xfrm>
-          <a:prstGeom prst="rect">
-            <a:avLst/>
-          </a:prstGeom>
-          <a:noFill/>
-          <a:ln/>
-        </p:spPr>
-        <p:txBody>
-          <a:bodyPr wrap="square" lIns="0" tIns="0" rIns="0" bIns="0" rtlCol="0" anchor="ctr"/>
-          <a:lstStyle/>
-          <a:p>
-            <a:pPr indent="0" marL="0">
-              <a:buNone/>
-            </a:pPr>
-            <a:r>
-              <a:rPr lang="en-US" sz="1200" dirty="0">
-                <a:solidFill>
-                  <a:srgbClr val="1A2440"/>
-                </a:solidFill>
-                <a:latin typeface="Noto Sans CJK KR" pitchFamily="34" charset="0"/>
-                <a:ea typeface="Noto Sans CJK KR" pitchFamily="34" charset="-122"/>
-                <a:cs typeface="Noto Sans CJK KR" pitchFamily="34" charset="-120"/>
-              </a:rPr>
-              <a:t>Palace 4D Cinema 상영 시각 — 공식 앱</a:t>
-            </a:r>
-            <a:endParaRPr lang="en-US" sz="1200" dirty="0"/>
-          </a:p>
-        </p:txBody>
-      </p:sp>
-      <p:sp>
-        <p:nvSpPr>
-          <p:cNvPr id="25" name="Shape 23"/>
-          <p:cNvSpPr/>
-          <p:nvPr/>
-        </p:nvSpPr>
-        <p:spPr>
-          <a:xfrm>
-            <a:off x="6309360" y="3529584"/>
-            <a:ext cx="320040" cy="320040"/>
-          </a:xfrm>
-          <a:prstGeom prst="roundRect">
-            <a:avLst>
-              <a:gd name="adj" fmla="val 14286"/>
-            </a:avLst>
-          </a:prstGeom>
-          <a:solidFill>
-            <a:srgbClr val="FFFFFF"/>
-          </a:solidFill>
-          <a:ln w="19050">
-            <a:solidFill>
-              <a:srgbClr val="D62839"/>
-            </a:solidFill>
-            <a:prstDash val="solid"/>
-          </a:ln>
-        </p:spPr>
-      </p:sp>
-      <p:sp>
-        <p:nvSpPr>
-          <p:cNvPr id="26" name="Text 24"/>
-          <p:cNvSpPr txBox="1"/>
-          <p:nvPr/>
-        </p:nvSpPr>
-        <p:spPr>
-          <a:xfrm>
-            <a:off x="6766560" y="3483864"/>
-            <a:ext cx="4937760" cy="502920"/>
-          </a:xfrm>
-          <a:prstGeom prst="rect">
-            <a:avLst/>
-          </a:prstGeom>
-          <a:noFill/>
-          <a:ln/>
-        </p:spPr>
-        <p:txBody>
-          <a:bodyPr wrap="square" lIns="0" tIns="0" rIns="0" bIns="0" rtlCol="0" anchor="ctr"/>
-          <a:lstStyle/>
-          <a:p>
-            <a:pPr indent="0" marL="0">
-              <a:buNone/>
-            </a:pPr>
-            <a:r>
-              <a:rPr lang="en-US" sz="1200" dirty="0">
-                <a:solidFill>
-                  <a:srgbClr val="1A2440"/>
-                </a:solidFill>
-                <a:latin typeface="Noto Sans CJK KR" pitchFamily="34" charset="0"/>
-                <a:ea typeface="Noto Sans CJK KR" pitchFamily="34" charset="-122"/>
-                <a:cs typeface="Noto Sans CJK KR" pitchFamily="34" charset="-120"/>
-              </a:rPr>
-              <a:t>드래곤 코스터 대기시간 — 10:05 첫 확인 후 몰아타기 지속 여부 판단</a:t>
-            </a:r>
-            <a:endParaRPr lang="en-US" sz="1200" dirty="0"/>
-          </a:p>
-        </p:txBody>
-      </p:sp>
-      <p:sp>
-        <p:nvSpPr>
-          <p:cNvPr id="27" name="Shape 25"/>
-          <p:cNvSpPr/>
-          <p:nvPr/>
-        </p:nvSpPr>
-        <p:spPr>
-          <a:xfrm>
-            <a:off x="6309360" y="4096512"/>
-            <a:ext cx="320040" cy="320040"/>
-          </a:xfrm>
-          <a:prstGeom prst="roundRect">
-            <a:avLst>
-              <a:gd name="adj" fmla="val 14286"/>
-            </a:avLst>
-          </a:prstGeom>
-          <a:solidFill>
-            <a:srgbClr val="FFFFFF"/>
-          </a:solidFill>
-          <a:ln w="19050">
-            <a:solidFill>
-              <a:srgbClr val="D62839"/>
-            </a:solidFill>
-            <a:prstDash val="solid"/>
-          </a:ln>
-        </p:spPr>
-      </p:sp>
-      <p:sp>
-        <p:nvSpPr>
-          <p:cNvPr id="28" name="Text 26"/>
-          <p:cNvSpPr txBox="1"/>
-          <p:nvPr/>
-        </p:nvSpPr>
-        <p:spPr>
-          <a:xfrm>
-            <a:off x="6766560" y="4050792"/>
-            <a:ext cx="4937760" cy="502920"/>
-          </a:xfrm>
-          <a:prstGeom prst="rect">
-            <a:avLst/>
-          </a:prstGeom>
-          <a:noFill/>
-          <a:ln/>
-        </p:spPr>
-        <p:txBody>
-          <a:bodyPr wrap="square" lIns="0" tIns="0" rIns="0" bIns="0" rtlCol="0" anchor="ctr"/>
-          <a:lstStyle/>
-          <a:p>
-            <a:pPr indent="0" marL="0">
-              <a:buNone/>
-            </a:pPr>
-            <a:r>
-              <a:rPr lang="en-US" sz="1200" dirty="0">
-                <a:solidFill>
-                  <a:srgbClr val="1A2440"/>
-                </a:solidFill>
-                <a:latin typeface="Noto Sans CJK KR" pitchFamily="34" charset="0"/>
-                <a:ea typeface="Noto Sans CJK KR" pitchFamily="34" charset="-122"/>
-                <a:cs typeface="Noto Sans CJK KR" pitchFamily="34" charset="-120"/>
-              </a:rPr>
-              <a:t>웨건 셔틀 탑재 가능 여부(PINK 도보로 대체 시 불필요)</a:t>
-            </a:r>
-            <a:endParaRPr lang="en-US" sz="1200" dirty="0"/>
-          </a:p>
-        </p:txBody>
-      </p:sp>
-      <p:sp>
-        <p:nvSpPr>
-          <p:cNvPr id="29" name="Text 27"/>
-          <p:cNvSpPr txBox="1"/>
-          <p:nvPr/>
-        </p:nvSpPr>
-        <p:spPr>
-          <a:xfrm>
-            <a:off x="457200" y="6537960"/>
-            <a:ext cx="10515600" cy="274320"/>
-          </a:xfrm>
-          <a:prstGeom prst="rect">
-            <a:avLst/>
-          </a:prstGeom>
-          <a:noFill/>
-          <a:ln/>
-        </p:spPr>
-        <p:txBody>
-          <a:bodyPr wrap="square" lIns="0" tIns="0" rIns="0" bIns="0" rtlCol="0" anchor="ctr"/>
-          <a:lstStyle/>
-          <a:p>
-            <a:pPr indent="0" marL="0">
-              <a:buNone/>
-            </a:pPr>
-            <a:r>
-              <a:rPr lang="en-US" sz="900" dirty="0">
-                <a:solidFill>
-                  <a:srgbClr val="5C5749"/>
-                </a:solidFill>
-                <a:latin typeface="Noto Sans CJK KR" pitchFamily="34" charset="0"/>
-                <a:ea typeface="Noto Sans CJK KR" pitchFamily="34" charset="-122"/>
-                <a:cs typeface="Noto Sans CJK KR" pitchFamily="34" charset="-120"/>
-              </a:rPr>
-              <a:t>레고랜드 코리아 · 2026-09-23(수) · 아빠+첫째(8세·130cm)+둘째(3세후반·101cm)</a:t>
-            </a:r>
-            <a:endParaRPr lang="en-US" sz="900" dirty="0"/>
-          </a:p>
-        </p:txBody>
-      </p:sp>
-      <p:sp>
-        <p:nvSpPr>
-          <p:cNvPr id="30" name="Text 28"/>
           <p:cNvSpPr txBox="1"/>
           <p:nvPr/>
         </p:nvSpPr>

--- a/family-outings/assets/legoland_20260923_plan.pptx
+++ b/family-outings/assets/legoland_20260923_plan.pptx
@@ -3266,12 +3266,12 @@
         </p:nvSpPr>
         <p:spPr>
           <a:xfrm>
-            <a:off x="457200" y="1417320"/>
-            <a:ext cx="3566160" cy="2148840"/>
+            <a:off x="457200" y="1371600"/>
+            <a:ext cx="3566160" cy="2331720"/>
           </a:xfrm>
           <a:prstGeom prst="roundRect">
             <a:avLst>
-              <a:gd name="adj" fmla="val 3404"/>
+              <a:gd name="adj" fmla="val 3137"/>
             </a:avLst>
           </a:prstGeom>
           <a:solidFill>
@@ -3300,7 +3300,7 @@
         </p:nvSpPr>
         <p:spPr>
           <a:xfrm>
-            <a:off x="731520" y="1691640"/>
+            <a:off x="731520" y="1627632"/>
             <a:ext cx="502920" cy="502920"/>
           </a:xfrm>
           <a:prstGeom prst="ellipse">
@@ -3320,7 +3320,7 @@
         </p:nvSpPr>
         <p:spPr>
           <a:xfrm>
-            <a:off x="731520" y="2331720"/>
+            <a:off x="731520" y="2240280"/>
             <a:ext cx="3017520" cy="365760"/>
           </a:xfrm>
           <a:prstGeom prst="rect">
@@ -3359,8 +3359,8 @@
         </p:nvSpPr>
         <p:spPr>
           <a:xfrm>
-            <a:off x="731520" y="2697480"/>
-            <a:ext cx="3017520" cy="777240"/>
+            <a:off x="731520" y="2606040"/>
+            <a:ext cx="3017520" cy="1005840"/>
           </a:xfrm>
           <a:prstGeom prst="rect">
             <a:avLst/>
@@ -3373,10 +3373,13 @@
           <a:lstStyle/>
           <a:p>
             <a:pPr indent="0" marL="0">
+              <a:lnSpc>
+                <a:spcPct val="115000"/>
+              </a:lnSpc>
               <a:buNone/>
             </a:pPr>
             <a:r>
-              <a:rPr lang="en-US" sz="1200" dirty="0">
+              <a:rPr lang="en-US" sz="1150" dirty="0">
                 <a:solidFill>
                   <a:srgbClr val="5C5749"/>
                 </a:solidFill>
@@ -3384,9 +3387,9 @@
                 <a:ea typeface="Noto Sans CJK KR" pitchFamily="34" charset="-122"/>
                 <a:cs typeface="Noto Sans CJK KR" pitchFamily="34" charset="-120"/>
               </a:rPr>
-              <a:t>V.I.M 몬스터파티는 화·수 제외 운영 — 수요일인 내일은 안 열림</a:t>
+              <a:t>V.I.M 몬스터파티는 화·수 제외 운영 — 수요일인 내일은 안 열림. 대신 Palace 4D Cinema(영화)가 오늘의 유일한 공연성 콘텐츠</a:t>
             </a:r>
-            <a:endParaRPr lang="en-US" sz="1200" dirty="0"/>
+            <a:endParaRPr lang="en-US" sz="1150" dirty="0"/>
           </a:p>
         </p:txBody>
       </p:sp>
@@ -3398,12 +3401,12 @@
         </p:nvSpPr>
         <p:spPr>
           <a:xfrm>
-            <a:off x="4251960" y="1417320"/>
-            <a:ext cx="3566160" cy="2148840"/>
+            <a:off x="4251960" y="1371600"/>
+            <a:ext cx="3566160" cy="2331720"/>
           </a:xfrm>
           <a:prstGeom prst="roundRect">
             <a:avLst>
-              <a:gd name="adj" fmla="val 3404"/>
+              <a:gd name="adj" fmla="val 3137"/>
             </a:avLst>
           </a:prstGeom>
           <a:solidFill>
@@ -3432,7 +3435,7 @@
         </p:nvSpPr>
         <p:spPr>
           <a:xfrm>
-            <a:off x="4526280" y="1691640"/>
+            <a:off x="4526280" y="1627632"/>
             <a:ext cx="502920" cy="502920"/>
           </a:xfrm>
           <a:prstGeom prst="ellipse">
@@ -3452,7 +3455,7 @@
         </p:nvSpPr>
         <p:spPr>
           <a:xfrm>
-            <a:off x="4526280" y="2331720"/>
+            <a:off x="4526280" y="2240280"/>
             <a:ext cx="3017520" cy="365760"/>
           </a:xfrm>
           <a:prstGeom prst="rect">
@@ -3491,8 +3494,8 @@
         </p:nvSpPr>
         <p:spPr>
           <a:xfrm>
-            <a:off x="4526280" y="2697480"/>
-            <a:ext cx="3017520" cy="777240"/>
+            <a:off x="4526280" y="2606040"/>
+            <a:ext cx="3017520" cy="1005840"/>
           </a:xfrm>
           <a:prstGeom prst="rect">
             <a:avLst/>
@@ -3505,10 +3508,13 @@
           <a:lstStyle/>
           <a:p>
             <a:pPr indent="0" marL="0">
+              <a:lnSpc>
+                <a:spcPct val="115000"/>
+              </a:lnSpc>
               <a:buNone/>
             </a:pPr>
             <a:r>
-              <a:rPr lang="en-US" sz="1200" dirty="0">
+              <a:rPr lang="en-US" sz="1150" dirty="0">
                 <a:solidFill>
                   <a:srgbClr val="5C5749"/>
                 </a:solidFill>
@@ -3518,7 +3524,7 @@
               </a:rPr>
               <a:t>최고 24~29℃ · 최저 12~20℃, 대체로 맑음. 일교차 커서 겉옷 필요</a:t>
             </a:r>
-            <a:endParaRPr lang="en-US" sz="1200" dirty="0"/>
+            <a:endParaRPr lang="en-US" sz="1150" dirty="0"/>
           </a:p>
         </p:txBody>
       </p:sp>
@@ -3530,12 +3536,12 @@
         </p:nvSpPr>
         <p:spPr>
           <a:xfrm>
-            <a:off x="8046720" y="1417320"/>
-            <a:ext cx="3566160" cy="2148840"/>
+            <a:off x="8046720" y="1371600"/>
+            <a:ext cx="3566160" cy="2331720"/>
           </a:xfrm>
           <a:prstGeom prst="roundRect">
             <a:avLst>
-              <a:gd name="adj" fmla="val 3404"/>
+              <a:gd name="adj" fmla="val 3137"/>
             </a:avLst>
           </a:prstGeom>
           <a:solidFill>
@@ -3564,7 +3570,7 @@
         </p:nvSpPr>
         <p:spPr>
           <a:xfrm>
-            <a:off x="8321040" y="1691640"/>
+            <a:off x="8321040" y="1627632"/>
             <a:ext cx="502920" cy="502920"/>
           </a:xfrm>
           <a:prstGeom prst="ellipse">
@@ -3584,7 +3590,7 @@
         </p:nvSpPr>
         <p:spPr>
           <a:xfrm>
-            <a:off x="8321040" y="2331720"/>
+            <a:off x="8321040" y="2240280"/>
             <a:ext cx="3017520" cy="365760"/>
           </a:xfrm>
           <a:prstGeom prst="rect">
@@ -3623,8 +3629,8 @@
         </p:nvSpPr>
         <p:spPr>
           <a:xfrm>
-            <a:off x="8321040" y="2697480"/>
-            <a:ext cx="3017520" cy="777240"/>
+            <a:off x="8321040" y="2606040"/>
+            <a:ext cx="3017520" cy="1005840"/>
           </a:xfrm>
           <a:prstGeom prst="rect">
             <a:avLst/>
@@ -3637,10 +3643,13 @@
           <a:lstStyle/>
           <a:p>
             <a:pPr indent="0" marL="0">
+              <a:lnSpc>
+                <a:spcPct val="115000"/>
+              </a:lnSpc>
               <a:buNone/>
             </a:pPr>
             <a:r>
-              <a:rPr lang="en-US" sz="1200" dirty="0">
+              <a:rPr lang="en-US" sz="1150" dirty="0">
                 <a:solidFill>
                   <a:srgbClr val="5C5749"/>
                 </a:solidFill>
@@ -3650,7 +3659,7 @@
               </a:rPr>
               <a:t>파크 유일 스릴라이드이자 최고 인기 — “사람 적을 것” 낙관 금지</a:t>
             </a:r>
-            <a:endParaRPr lang="en-US" sz="1200" dirty="0"/>
+            <a:endParaRPr lang="en-US" sz="1150" dirty="0"/>
           </a:p>
         </p:txBody>
       </p:sp>
@@ -3662,12 +3671,12 @@
         </p:nvSpPr>
         <p:spPr>
           <a:xfrm>
-            <a:off x="457200" y="3794760"/>
-            <a:ext cx="11247120" cy="2331720"/>
+            <a:off x="457200" y="3886200"/>
+            <a:ext cx="11247120" cy="2240280"/>
           </a:xfrm>
           <a:prstGeom prst="roundRect">
             <a:avLst>
-              <a:gd name="adj" fmla="val 3137"/>
+              <a:gd name="adj" fmla="val 3265"/>
             </a:avLst>
           </a:prstGeom>
           <a:solidFill>
@@ -3689,7 +3698,7 @@
         </p:nvSpPr>
         <p:spPr>
           <a:xfrm>
-            <a:off x="777240" y="4023360"/>
+            <a:off x="777240" y="4096512"/>
             <a:ext cx="2743200" cy="365760"/>
           </a:xfrm>
           <a:prstGeom prst="rect">
@@ -3728,8 +3737,8 @@
         </p:nvSpPr>
         <p:spPr>
           <a:xfrm>
-            <a:off x="777240" y="4434840"/>
-            <a:ext cx="10607040" cy="1554480"/>
+            <a:off x="777240" y="4480560"/>
+            <a:ext cx="10607040" cy="1508760"/>
           </a:xfrm>
           <a:prstGeom prst="rect">
             <a:avLst/>
@@ -3756,7 +3765,7 @@
                 <a:ea typeface="Noto Sans CJK KR" pitchFamily="34" charset="-122"/>
                 <a:cs typeface="Noto Sans CJK KR" pitchFamily="34" charset="-120"/>
               </a:rPr>
-              <a:t>내일은 시즌 이벤트가 거의 없는 날입니다. 시간표에 맞출 공연이 없으니, 하루를 “드래곤 코스터를 몇 번 타느냐” 하나에 맞춰 설계했습니다. 개장 직후(55분)와 폐장 전(65분), 두 번 몰아서 집중 탑승하고, 그 사이에 스탬프 6곳 · 어트랙션 9종 · 영화 1편 · 점심을 끼워 넣는 구조입니다.</a:t>
+              <a:t>내일은 시즌 이벤트가 거의 없는 날입니다. 시간표에 맞출 공연이 없으니, 하루를 “드래곤 코스터를 몇 번 타느냐” 하나에 맞춰 설계했습니다. 개장 직후(55분)와 폐장 전(65분), 두 번 몰아서 집중 탑승하고, 그 사이에 스탬프 6곳 · 어트랙션 9종 · 영화 1편(오늘의 실질적 공연) · 점심을 끼워 넣는 구조입니다.</a:t>
             </a:r>
             <a:endParaRPr lang="en-US" sz="1500" dirty="0"/>
           </a:p>

--- a/family-outings/assets/legoland_20260923_plan.pptx
+++ b/family-outings/assets/legoland_20260923_plan.pptx
@@ -2932,7 +2932,7 @@
                 <a:ea typeface="Noto Sans CJK KR" pitchFamily="34" charset="-122"/>
                 <a:cs typeface="Noto Sans CJK KR" pitchFamily="34" charset="-120"/>
               </a:rPr>
-              <a:t>Palace 4D Cinema 상영 시각 — 공식 앱</a:t>
+              <a:t>Palace 4D Cinema 14:30 쇼 — 앱에서 변동 여부 재확인(예고 없이 바뀔 수 있음)</a:t>
             </a:r>
             <a:endParaRPr lang="en-US" sz="1200" dirty="0"/>
           </a:p>
@@ -7173,7 +7173,7 @@
                           <a:ea typeface="Noto Sans CJK KR" pitchFamily="34" charset="-122"/>
                           <a:cs typeface="Noto Sans CJK KR" pitchFamily="34" charset="-120"/>
                         </a:rPr>
-                        <a:t>12:15~13:00</a:t>
+                        <a:t>12:15~12:55</a:t>
                       </a:r>
                       <a:endParaRPr lang="en-US" sz="1150" dirty="0">
                         <a:latin typeface="Noto Sans CJK KR" charset="0"/>
@@ -7379,7 +7379,7 @@
                           <a:ea typeface="Noto Sans CJK KR" pitchFamily="34" charset="-122"/>
                           <a:cs typeface="Noto Sans CJK KR" pitchFamily="34" charset="-120"/>
                         </a:rPr>
-                        <a:t>13:00~13:20</a:t>
+                        <a:t>12:55~13:15</a:t>
                       </a:r>
                       <a:endParaRPr lang="en-US" sz="1150" dirty="0">
                         <a:latin typeface="Noto Sans CJK KR" charset="0"/>
@@ -7585,7 +7585,7 @@
                           <a:ea typeface="Noto Sans CJK KR" pitchFamily="34" charset="-122"/>
                           <a:cs typeface="Noto Sans CJK KR" pitchFamily="34" charset="-120"/>
                         </a:rPr>
-                        <a:t>13:20~13:40</a:t>
+                        <a:t>13:15~13:35</a:t>
                       </a:r>
                       <a:endParaRPr lang="en-US" sz="1150" dirty="0">
                         <a:latin typeface="Noto Sans CJK KR" charset="0"/>
@@ -7791,7 +7791,7 @@
                           <a:ea typeface="Noto Sans CJK KR" pitchFamily="34" charset="-122"/>
                           <a:cs typeface="Noto Sans CJK KR" pitchFamily="34" charset="-120"/>
                         </a:rPr>
-                        <a:t>13:40~14:05</a:t>
+                        <a:t>13:35~13:55</a:t>
                       </a:r>
                       <a:endParaRPr lang="en-US" sz="1150" dirty="0">
                         <a:latin typeface="Noto Sans CJK KR" charset="0"/>
@@ -7839,212 +7839,6 @@
                     </a:lnB>
                     <a:solidFill>
                       <a:srgbClr val="F5F6F8"/>
-                    </a:solidFill>
-                  </a:tcPr>
-                </a:tc>
-                <a:tc>
-                  <a:txBody>
-                    <a:bodyPr/>
-                    <a:lstStyle/>
-                    <a:p>
-                      <a:pPr indent="0" marL="0">
-                        <a:buNone/>
-                      </a:pPr>
-                      <a:r>
-                        <a:rPr lang="en-US" sz="1150" dirty="0">
-                          <a:solidFill>
-                            <a:srgbClr val="1A2440"/>
-                          </a:solidFill>
-                          <a:latin typeface="Noto Sans CJK KR" pitchFamily="34" charset="0"/>
-                          <a:ea typeface="Noto Sans CJK KR" pitchFamily="34" charset="-122"/>
-                          <a:cs typeface="Noto Sans CJK KR" pitchFamily="34" charset="-120"/>
-                        </a:rPr>
-                        <a:t>Palace 4D Cinema</a:t>
-                      </a:r>
-                      <a:endParaRPr lang="en-US" sz="1150" dirty="0">
-                        <a:latin typeface="Noto Sans CJK KR" charset="0"/>
-                        <a:ea typeface="Noto Sans CJK KR" charset="0"/>
-                        <a:cs typeface="Noto Sans CJK KR" charset="0"/>
-                      </a:endParaRPr>
-                    </a:p>
-                  </a:txBody>
-                  <a:tcPr marL="91440" marR="91440" marT="45720" marB="45720" anchor="ctr">
-                    <a:lnL w="9525" cap="flat" cmpd="sng" algn="ctr">
-                      <a:solidFill>
-                        <a:srgbClr val="E2E4E8"/>
-                      </a:solidFill>
-                      <a:prstDash val="solid"/>
-                      <a:round/>
-                      <a:headEnd type="none" w="med" len="med"/>
-                      <a:tailEnd type="none" w="med" len="med"/>
-                    </a:lnL>
-                    <a:lnR w="9525" cap="flat" cmpd="sng" algn="ctr">
-                      <a:solidFill>
-                        <a:srgbClr val="E2E4E8"/>
-                      </a:solidFill>
-                      <a:prstDash val="solid"/>
-                      <a:round/>
-                      <a:headEnd type="none" w="med" len="med"/>
-                      <a:tailEnd type="none" w="med" len="med"/>
-                    </a:lnR>
-                    <a:lnT w="9525" cap="flat" cmpd="sng" algn="ctr">
-                      <a:solidFill>
-                        <a:srgbClr val="E2E4E8"/>
-                      </a:solidFill>
-                      <a:prstDash val="solid"/>
-                      <a:round/>
-                      <a:headEnd type="none" w="med" len="med"/>
-                      <a:tailEnd type="none" w="med" len="med"/>
-                    </a:lnT>
-                    <a:lnB w="9525" cap="flat" cmpd="sng" algn="ctr">
-                      <a:solidFill>
-                        <a:srgbClr val="E2E4E8"/>
-                      </a:solidFill>
-                      <a:prstDash val="solid"/>
-                      <a:round/>
-                      <a:headEnd type="none" w="med" len="med"/>
-                      <a:tailEnd type="none" w="med" len="med"/>
-                    </a:lnB>
-                    <a:solidFill>
-                      <a:srgbClr val="F5F6F8"/>
-                    </a:solidFill>
-                  </a:tcPr>
-                </a:tc>
-                <a:tc>
-                  <a:txBody>
-                    <a:bodyPr/>
-                    <a:lstStyle/>
-                    <a:p>
-                      <a:pPr indent="0" marL="0">
-                        <a:buNone/>
-                      </a:pPr>
-                      <a:r>
-                        <a:rPr lang="en-US" sz="1150" dirty="0">
-                          <a:solidFill>
-                            <a:srgbClr val="1A2440"/>
-                          </a:solidFill>
-                          <a:latin typeface="Noto Sans CJK KR" pitchFamily="34" charset="0"/>
-                          <a:ea typeface="Noto Sans CJK KR" pitchFamily="34" charset="-122"/>
-                          <a:cs typeface="Noto Sans CJK KR" pitchFamily="34" charset="-120"/>
-                        </a:rPr>
-                        <a:t>도착 즉시 앱으로 상영 시각 확인 후 배정 — 다음 슬라이드 참고</a:t>
-                      </a:r>
-                      <a:endParaRPr lang="en-US" sz="1150" dirty="0">
-                        <a:latin typeface="Noto Sans CJK KR" charset="0"/>
-                        <a:ea typeface="Noto Sans CJK KR" charset="0"/>
-                        <a:cs typeface="Noto Sans CJK KR" charset="0"/>
-                      </a:endParaRPr>
-                    </a:p>
-                  </a:txBody>
-                  <a:tcPr marL="91440" marR="91440" marT="45720" marB="45720" anchor="ctr">
-                    <a:lnL w="9525" cap="flat" cmpd="sng" algn="ctr">
-                      <a:solidFill>
-                        <a:srgbClr val="E2E4E8"/>
-                      </a:solidFill>
-                      <a:prstDash val="solid"/>
-                      <a:round/>
-                      <a:headEnd type="none" w="med" len="med"/>
-                      <a:tailEnd type="none" w="med" len="med"/>
-                    </a:lnL>
-                    <a:lnR w="9525" cap="flat" cmpd="sng" algn="ctr">
-                      <a:solidFill>
-                        <a:srgbClr val="E2E4E8"/>
-                      </a:solidFill>
-                      <a:prstDash val="solid"/>
-                      <a:round/>
-                      <a:headEnd type="none" w="med" len="med"/>
-                      <a:tailEnd type="none" w="med" len="med"/>
-                    </a:lnR>
-                    <a:lnT w="9525" cap="flat" cmpd="sng" algn="ctr">
-                      <a:solidFill>
-                        <a:srgbClr val="E2E4E8"/>
-                      </a:solidFill>
-                      <a:prstDash val="solid"/>
-                      <a:round/>
-                      <a:headEnd type="none" w="med" len="med"/>
-                      <a:tailEnd type="none" w="med" len="med"/>
-                    </a:lnT>
-                    <a:lnB w="9525" cap="flat" cmpd="sng" algn="ctr">
-                      <a:solidFill>
-                        <a:srgbClr val="E2E4E8"/>
-                      </a:solidFill>
-                      <a:prstDash val="solid"/>
-                      <a:round/>
-                      <a:headEnd type="none" w="med" len="med"/>
-                      <a:tailEnd type="none" w="med" len="med"/>
-                    </a:lnB>
-                    <a:solidFill>
-                      <a:srgbClr val="F5F6F8"/>
-                    </a:solidFill>
-                  </a:tcPr>
-                </a:tc>
-              </a:tr>
-              <a:tr h="420624">
-                <a:tc>
-                  <a:txBody>
-                    <a:bodyPr/>
-                    <a:lstStyle/>
-                    <a:p>
-                      <a:pPr indent="0" marL="0">
-                        <a:buNone/>
-                      </a:pPr>
-                      <a:r>
-                        <a:rPr lang="en-US" sz="1150" dirty="0">
-                          <a:solidFill>
-                            <a:srgbClr val="1A2440"/>
-                          </a:solidFill>
-                          <a:latin typeface="Noto Sans CJK KR" pitchFamily="34" charset="0"/>
-                          <a:ea typeface="Noto Sans CJK KR" pitchFamily="34" charset="-122"/>
-                          <a:cs typeface="Noto Sans CJK KR" pitchFamily="34" charset="-120"/>
-                        </a:rPr>
-                        <a:t>14:05~14:20</a:t>
-                      </a:r>
-                      <a:endParaRPr lang="en-US" sz="1150" dirty="0">
-                        <a:latin typeface="Noto Sans CJK KR" charset="0"/>
-                        <a:ea typeface="Noto Sans CJK KR" charset="0"/>
-                        <a:cs typeface="Noto Sans CJK KR" charset="0"/>
-                      </a:endParaRPr>
-                    </a:p>
-                  </a:txBody>
-                  <a:tcPr marL="91440" marR="91440" marT="45720" marB="45720" anchor="ctr">
-                    <a:lnL w="9525" cap="flat" cmpd="sng" algn="ctr">
-                      <a:solidFill>
-                        <a:srgbClr val="E2E4E8"/>
-                      </a:solidFill>
-                      <a:prstDash val="solid"/>
-                      <a:round/>
-                      <a:headEnd type="none" w="med" len="med"/>
-                      <a:tailEnd type="none" w="med" len="med"/>
-                    </a:lnL>
-                    <a:lnR w="9525" cap="flat" cmpd="sng" algn="ctr">
-                      <a:solidFill>
-                        <a:srgbClr val="E2E4E8"/>
-                      </a:solidFill>
-                      <a:prstDash val="solid"/>
-                      <a:round/>
-                      <a:headEnd type="none" w="med" len="med"/>
-                      <a:tailEnd type="none" w="med" len="med"/>
-                    </a:lnR>
-                    <a:lnT w="9525" cap="flat" cmpd="sng" algn="ctr">
-                      <a:solidFill>
-                        <a:srgbClr val="E2E4E8"/>
-                      </a:solidFill>
-                      <a:prstDash val="solid"/>
-                      <a:round/>
-                      <a:headEnd type="none" w="med" len="med"/>
-                      <a:tailEnd type="none" w="med" len="med"/>
-                    </a:lnT>
-                    <a:lnB w="9525" cap="flat" cmpd="sng" algn="ctr">
-                      <a:solidFill>
-                        <a:srgbClr val="E2E4E8"/>
-                      </a:solidFill>
-                      <a:prstDash val="solid"/>
-                      <a:round/>
-                      <a:headEnd type="none" w="med" len="med"/>
-                      <a:tailEnd type="none" w="med" len="med"/>
-                    </a:lnB>
-                    <a:solidFill>
-                      <a:srgbClr val="FFFFFF"/>
                     </a:solidFill>
                   </a:tcPr>
                 </a:tc>
@@ -8112,7 +7906,7 @@
                       <a:tailEnd type="none" w="med" len="med"/>
                     </a:lnB>
                     <a:solidFill>
-                      <a:srgbClr val="FFFFFF"/>
+                      <a:srgbClr val="F5F6F8"/>
                     </a:solidFill>
                   </a:tcPr>
                 </a:tc>
@@ -8180,6 +7974,212 @@
                       <a:tailEnd type="none" w="med" len="med"/>
                     </a:lnB>
                     <a:solidFill>
+                      <a:srgbClr val="F5F6F8"/>
+                    </a:solidFill>
+                  </a:tcPr>
+                </a:tc>
+              </a:tr>
+              <a:tr h="420624">
+                <a:tc>
+                  <a:txBody>
+                    <a:bodyPr/>
+                    <a:lstStyle/>
+                    <a:p>
+                      <a:pPr indent="0" marL="0">
+                        <a:buNone/>
+                      </a:pPr>
+                      <a:r>
+                        <a:rPr lang="en-US" sz="1150" dirty="0">
+                          <a:solidFill>
+                            <a:srgbClr val="1A2440"/>
+                          </a:solidFill>
+                          <a:latin typeface="Noto Sans CJK KR" pitchFamily="34" charset="0"/>
+                          <a:ea typeface="Noto Sans CJK KR" pitchFamily="34" charset="-122"/>
+                          <a:cs typeface="Noto Sans CJK KR" pitchFamily="34" charset="-120"/>
+                        </a:rPr>
+                        <a:t>13:55~14:25</a:t>
+                      </a:r>
+                      <a:endParaRPr lang="en-US" sz="1150" dirty="0">
+                        <a:latin typeface="Noto Sans CJK KR" charset="0"/>
+                        <a:ea typeface="Noto Sans CJK KR" charset="0"/>
+                        <a:cs typeface="Noto Sans CJK KR" charset="0"/>
+                      </a:endParaRPr>
+                    </a:p>
+                  </a:txBody>
+                  <a:tcPr marL="91440" marR="91440" marT="45720" marB="45720" anchor="ctr">
+                    <a:lnL w="9525" cap="flat" cmpd="sng" algn="ctr">
+                      <a:solidFill>
+                        <a:srgbClr val="E2E4E8"/>
+                      </a:solidFill>
+                      <a:prstDash val="solid"/>
+                      <a:round/>
+                      <a:headEnd type="none" w="med" len="med"/>
+                      <a:tailEnd type="none" w="med" len="med"/>
+                    </a:lnL>
+                    <a:lnR w="9525" cap="flat" cmpd="sng" algn="ctr">
+                      <a:solidFill>
+                        <a:srgbClr val="E2E4E8"/>
+                      </a:solidFill>
+                      <a:prstDash val="solid"/>
+                      <a:round/>
+                      <a:headEnd type="none" w="med" len="med"/>
+                      <a:tailEnd type="none" w="med" len="med"/>
+                    </a:lnR>
+                    <a:lnT w="9525" cap="flat" cmpd="sng" algn="ctr">
+                      <a:solidFill>
+                        <a:srgbClr val="E2E4E8"/>
+                      </a:solidFill>
+                      <a:prstDash val="solid"/>
+                      <a:round/>
+                      <a:headEnd type="none" w="med" len="med"/>
+                      <a:tailEnd type="none" w="med" len="med"/>
+                    </a:lnT>
+                    <a:lnB w="9525" cap="flat" cmpd="sng" algn="ctr">
+                      <a:solidFill>
+                        <a:srgbClr val="E2E4E8"/>
+                      </a:solidFill>
+                      <a:prstDash val="solid"/>
+                      <a:round/>
+                      <a:headEnd type="none" w="med" len="med"/>
+                      <a:tailEnd type="none" w="med" len="med"/>
+                    </a:lnB>
+                    <a:solidFill>
+                      <a:srgbClr val="FFFFFF"/>
+                    </a:solidFill>
+                  </a:tcPr>
+                </a:tc>
+                <a:tc>
+                  <a:txBody>
+                    <a:bodyPr/>
+                    <a:lstStyle/>
+                    <a:p>
+                      <a:pPr indent="0" marL="0">
+                        <a:buNone/>
+                      </a:pPr>
+                      <a:r>
+                        <a:rPr lang="en-US" sz="1150" dirty="0">
+                          <a:solidFill>
+                            <a:srgbClr val="1A2440"/>
+                          </a:solidFill>
+                          <a:latin typeface="Noto Sans CJK KR" pitchFamily="34" charset="0"/>
+                          <a:ea typeface="Noto Sans CJK KR" pitchFamily="34" charset="-122"/>
+                          <a:cs typeface="Noto Sans CJK KR" pitchFamily="34" charset="-120"/>
+                        </a:rPr>
+                        <a:t>자유시간</a:t>
+                      </a:r>
+                      <a:endParaRPr lang="en-US" sz="1150" dirty="0">
+                        <a:latin typeface="Noto Sans CJK KR" charset="0"/>
+                        <a:ea typeface="Noto Sans CJK KR" charset="0"/>
+                        <a:cs typeface="Noto Sans CJK KR" charset="0"/>
+                      </a:endParaRPr>
+                    </a:p>
+                  </a:txBody>
+                  <a:tcPr marL="91440" marR="91440" marT="45720" marB="45720" anchor="ctr">
+                    <a:lnL w="9525" cap="flat" cmpd="sng" algn="ctr">
+                      <a:solidFill>
+                        <a:srgbClr val="E2E4E8"/>
+                      </a:solidFill>
+                      <a:prstDash val="solid"/>
+                      <a:round/>
+                      <a:headEnd type="none" w="med" len="med"/>
+                      <a:tailEnd type="none" w="med" len="med"/>
+                    </a:lnL>
+                    <a:lnR w="9525" cap="flat" cmpd="sng" algn="ctr">
+                      <a:solidFill>
+                        <a:srgbClr val="E2E4E8"/>
+                      </a:solidFill>
+                      <a:prstDash val="solid"/>
+                      <a:round/>
+                      <a:headEnd type="none" w="med" len="med"/>
+                      <a:tailEnd type="none" w="med" len="med"/>
+                    </a:lnR>
+                    <a:lnT w="9525" cap="flat" cmpd="sng" algn="ctr">
+                      <a:solidFill>
+                        <a:srgbClr val="E2E4E8"/>
+                      </a:solidFill>
+                      <a:prstDash val="solid"/>
+                      <a:round/>
+                      <a:headEnd type="none" w="med" len="med"/>
+                      <a:tailEnd type="none" w="med" len="med"/>
+                    </a:lnT>
+                    <a:lnB w="9525" cap="flat" cmpd="sng" algn="ctr">
+                      <a:solidFill>
+                        <a:srgbClr val="E2E4E8"/>
+                      </a:solidFill>
+                      <a:prstDash val="solid"/>
+                      <a:round/>
+                      <a:headEnd type="none" w="med" len="med"/>
+                      <a:tailEnd type="none" w="med" len="med"/>
+                    </a:lnB>
+                    <a:solidFill>
+                      <a:srgbClr val="FFFFFF"/>
+                    </a:solidFill>
+                  </a:tcPr>
+                </a:tc>
+                <a:tc>
+                  <a:txBody>
+                    <a:bodyPr/>
+                    <a:lstStyle/>
+                    <a:p>
+                      <a:pPr indent="0" marL="0">
+                        <a:buNone/>
+                      </a:pPr>
+                      <a:r>
+                        <a:rPr lang="en-US" sz="1150" dirty="0">
+                          <a:solidFill>
+                            <a:srgbClr val="1A2440"/>
+                          </a:solidFill>
+                          <a:latin typeface="Noto Sans CJK KR" pitchFamily="34" charset="0"/>
+                          <a:ea typeface="Noto Sans CJK KR" pitchFamily="34" charset="-122"/>
+                          <a:cs typeface="Noto Sans CJK KR" pitchFamily="34" charset="-120"/>
+                        </a:rPr>
+                        <a:t>City 존 내 — 영화 오픈(14:30) 전 대기, 기념품·간식</a:t>
+                      </a:r>
+                      <a:endParaRPr lang="en-US" sz="1150" dirty="0">
+                        <a:latin typeface="Noto Sans CJK KR" charset="0"/>
+                        <a:ea typeface="Noto Sans CJK KR" charset="0"/>
+                        <a:cs typeface="Noto Sans CJK KR" charset="0"/>
+                      </a:endParaRPr>
+                    </a:p>
+                  </a:txBody>
+                  <a:tcPr marL="91440" marR="91440" marT="45720" marB="45720" anchor="ctr">
+                    <a:lnL w="9525" cap="flat" cmpd="sng" algn="ctr">
+                      <a:solidFill>
+                        <a:srgbClr val="E2E4E8"/>
+                      </a:solidFill>
+                      <a:prstDash val="solid"/>
+                      <a:round/>
+                      <a:headEnd type="none" w="med" len="med"/>
+                      <a:tailEnd type="none" w="med" len="med"/>
+                    </a:lnL>
+                    <a:lnR w="9525" cap="flat" cmpd="sng" algn="ctr">
+                      <a:solidFill>
+                        <a:srgbClr val="E2E4E8"/>
+                      </a:solidFill>
+                      <a:prstDash val="solid"/>
+                      <a:round/>
+                      <a:headEnd type="none" w="med" len="med"/>
+                      <a:tailEnd type="none" w="med" len="med"/>
+                    </a:lnR>
+                    <a:lnT w="9525" cap="flat" cmpd="sng" algn="ctr">
+                      <a:solidFill>
+                        <a:srgbClr val="E2E4E8"/>
+                      </a:solidFill>
+                      <a:prstDash val="solid"/>
+                      <a:round/>
+                      <a:headEnd type="none" w="med" len="med"/>
+                      <a:tailEnd type="none" w="med" len="med"/>
+                    </a:lnT>
+                    <a:lnB w="9525" cap="flat" cmpd="sng" algn="ctr">
+                      <a:solidFill>
+                        <a:srgbClr val="E2E4E8"/>
+                      </a:solidFill>
+                      <a:prstDash val="solid"/>
+                      <a:round/>
+                      <a:headEnd type="none" w="med" len="med"/>
+                      <a:tailEnd type="none" w="med" len="med"/>
+                    </a:lnB>
+                    <a:solidFill>
                       <a:srgbClr val="FFFFFF"/>
                     </a:solidFill>
                   </a:tcPr>
@@ -8203,7 +8203,213 @@
                           <a:ea typeface="Noto Sans CJK KR" pitchFamily="34" charset="-122"/>
                           <a:cs typeface="Noto Sans CJK KR" pitchFamily="34" charset="-120"/>
                         </a:rPr>
-                        <a:t>14:20~14:35</a:t>
+                        <a:t>14:25~14:40</a:t>
+                      </a:r>
+                      <a:endParaRPr lang="en-US" sz="1150" dirty="0">
+                        <a:latin typeface="Noto Sans CJK KR" charset="0"/>
+                        <a:ea typeface="Noto Sans CJK KR" charset="0"/>
+                        <a:cs typeface="Noto Sans CJK KR" charset="0"/>
+                      </a:endParaRPr>
+                    </a:p>
+                  </a:txBody>
+                  <a:tcPr marL="91440" marR="91440" marT="45720" marB="45720" anchor="ctr">
+                    <a:lnL w="9525" cap="flat" cmpd="sng" algn="ctr">
+                      <a:solidFill>
+                        <a:srgbClr val="E2E4E8"/>
+                      </a:solidFill>
+                      <a:prstDash val="solid"/>
+                      <a:round/>
+                      <a:headEnd type="none" w="med" len="med"/>
+                      <a:tailEnd type="none" w="med" len="med"/>
+                    </a:lnL>
+                    <a:lnR w="9525" cap="flat" cmpd="sng" algn="ctr">
+                      <a:solidFill>
+                        <a:srgbClr val="E2E4E8"/>
+                      </a:solidFill>
+                      <a:prstDash val="solid"/>
+                      <a:round/>
+                      <a:headEnd type="none" w="med" len="med"/>
+                      <a:tailEnd type="none" w="med" len="med"/>
+                    </a:lnR>
+                    <a:lnT w="9525" cap="flat" cmpd="sng" algn="ctr">
+                      <a:solidFill>
+                        <a:srgbClr val="E2E4E8"/>
+                      </a:solidFill>
+                      <a:prstDash val="solid"/>
+                      <a:round/>
+                      <a:headEnd type="none" w="med" len="med"/>
+                      <a:tailEnd type="none" w="med" len="med"/>
+                    </a:lnT>
+                    <a:lnB w="9525" cap="flat" cmpd="sng" algn="ctr">
+                      <a:solidFill>
+                        <a:srgbClr val="E2E4E8"/>
+                      </a:solidFill>
+                      <a:prstDash val="solid"/>
+                      <a:round/>
+                      <a:headEnd type="none" w="med" len="med"/>
+                      <a:tailEnd type="none" w="med" len="med"/>
+                    </a:lnB>
+                    <a:solidFill>
+                      <a:srgbClr val="FDECEC"/>
+                    </a:solidFill>
+                  </a:tcPr>
+                </a:tc>
+                <a:tc>
+                  <a:txBody>
+                    <a:bodyPr/>
+                    <a:lstStyle/>
+                    <a:p>
+                      <a:pPr indent="0" marL="0">
+                        <a:buNone/>
+                      </a:pPr>
+                      <a:r>
+                        <a:rPr lang="en-US" sz="1150" b="1" dirty="0">
+                          <a:solidFill>
+                            <a:srgbClr val="1A2440"/>
+                          </a:solidFill>
+                          <a:latin typeface="Noto Sans CJK KR" pitchFamily="34" charset="0"/>
+                          <a:ea typeface="Noto Sans CJK KR" pitchFamily="34" charset="-122"/>
+                          <a:cs typeface="Noto Sans CJK KR" pitchFamily="34" charset="-120"/>
+                        </a:rPr>
+                        <a:t>Palace 4D Cinema</a:t>
+                      </a:r>
+                      <a:endParaRPr lang="en-US" sz="1150" dirty="0">
+                        <a:latin typeface="Noto Sans CJK KR" charset="0"/>
+                        <a:ea typeface="Noto Sans CJK KR" charset="0"/>
+                        <a:cs typeface="Noto Sans CJK KR" charset="0"/>
+                      </a:endParaRPr>
+                    </a:p>
+                  </a:txBody>
+                  <a:tcPr marL="91440" marR="91440" marT="45720" marB="45720" anchor="ctr">
+                    <a:lnL w="9525" cap="flat" cmpd="sng" algn="ctr">
+                      <a:solidFill>
+                        <a:srgbClr val="E2E4E8"/>
+                      </a:solidFill>
+                      <a:prstDash val="solid"/>
+                      <a:round/>
+                      <a:headEnd type="none" w="med" len="med"/>
+                      <a:tailEnd type="none" w="med" len="med"/>
+                    </a:lnL>
+                    <a:lnR w="9525" cap="flat" cmpd="sng" algn="ctr">
+                      <a:solidFill>
+                        <a:srgbClr val="E2E4E8"/>
+                      </a:solidFill>
+                      <a:prstDash val="solid"/>
+                      <a:round/>
+                      <a:headEnd type="none" w="med" len="med"/>
+                      <a:tailEnd type="none" w="med" len="med"/>
+                    </a:lnR>
+                    <a:lnT w="9525" cap="flat" cmpd="sng" algn="ctr">
+                      <a:solidFill>
+                        <a:srgbClr val="E2E4E8"/>
+                      </a:solidFill>
+                      <a:prstDash val="solid"/>
+                      <a:round/>
+                      <a:headEnd type="none" w="med" len="med"/>
+                      <a:tailEnd type="none" w="med" len="med"/>
+                    </a:lnT>
+                    <a:lnB w="9525" cap="flat" cmpd="sng" algn="ctr">
+                      <a:solidFill>
+                        <a:srgbClr val="E2E4E8"/>
+                      </a:solidFill>
+                      <a:prstDash val="solid"/>
+                      <a:round/>
+                      <a:headEnd type="none" w="med" len="med"/>
+                      <a:tailEnd type="none" w="med" len="med"/>
+                    </a:lnB>
+                    <a:solidFill>
+                      <a:srgbClr val="FDECEC"/>
+                    </a:solidFill>
+                  </a:tcPr>
+                </a:tc>
+                <a:tc>
+                  <a:txBody>
+                    <a:bodyPr/>
+                    <a:lstStyle/>
+                    <a:p>
+                      <a:pPr indent="0" marL="0">
+                        <a:buNone/>
+                      </a:pPr>
+                      <a:r>
+                        <a:rPr lang="en-US" sz="1150" dirty="0">
+                          <a:solidFill>
+                            <a:srgbClr val="1A2440"/>
+                          </a:solidFill>
+                          <a:latin typeface="Noto Sans CJK KR" pitchFamily="34" charset="0"/>
+                          <a:ea typeface="Noto Sans CJK KR" pitchFamily="34" charset="-122"/>
+                          <a:cs typeface="Noto Sans CJK KR" pitchFamily="34" charset="-120"/>
+                        </a:rPr>
+                        <a:t>14:30 쇼타임 — 앱 실측 운영시간 오후 2:30~5:00, 30분 간격. 다음 슬라이드 참고</a:t>
+                      </a:r>
+                      <a:endParaRPr lang="en-US" sz="1150" dirty="0">
+                        <a:latin typeface="Noto Sans CJK KR" charset="0"/>
+                        <a:ea typeface="Noto Sans CJK KR" charset="0"/>
+                        <a:cs typeface="Noto Sans CJK KR" charset="0"/>
+                      </a:endParaRPr>
+                    </a:p>
+                  </a:txBody>
+                  <a:tcPr marL="91440" marR="91440" marT="45720" marB="45720" anchor="ctr">
+                    <a:lnL w="9525" cap="flat" cmpd="sng" algn="ctr">
+                      <a:solidFill>
+                        <a:srgbClr val="E2E4E8"/>
+                      </a:solidFill>
+                      <a:prstDash val="solid"/>
+                      <a:round/>
+                      <a:headEnd type="none" w="med" len="med"/>
+                      <a:tailEnd type="none" w="med" len="med"/>
+                    </a:lnL>
+                    <a:lnR w="9525" cap="flat" cmpd="sng" algn="ctr">
+                      <a:solidFill>
+                        <a:srgbClr val="E2E4E8"/>
+                      </a:solidFill>
+                      <a:prstDash val="solid"/>
+                      <a:round/>
+                      <a:headEnd type="none" w="med" len="med"/>
+                      <a:tailEnd type="none" w="med" len="med"/>
+                    </a:lnR>
+                    <a:lnT w="9525" cap="flat" cmpd="sng" algn="ctr">
+                      <a:solidFill>
+                        <a:srgbClr val="E2E4E8"/>
+                      </a:solidFill>
+                      <a:prstDash val="solid"/>
+                      <a:round/>
+                      <a:headEnd type="none" w="med" len="med"/>
+                      <a:tailEnd type="none" w="med" len="med"/>
+                    </a:lnT>
+                    <a:lnB w="9525" cap="flat" cmpd="sng" algn="ctr">
+                      <a:solidFill>
+                        <a:srgbClr val="E2E4E8"/>
+                      </a:solidFill>
+                      <a:prstDash val="solid"/>
+                      <a:round/>
+                      <a:headEnd type="none" w="med" len="med"/>
+                      <a:tailEnd type="none" w="med" len="med"/>
+                    </a:lnB>
+                    <a:solidFill>
+                      <a:srgbClr val="FDECEC"/>
+                    </a:solidFill>
+                  </a:tcPr>
+                </a:tc>
+              </a:tr>
+              <a:tr h="420624">
+                <a:tc>
+                  <a:txBody>
+                    <a:bodyPr/>
+                    <a:lstStyle/>
+                    <a:p>
+                      <a:pPr indent="0" marL="0">
+                        <a:buNone/>
+                      </a:pPr>
+                      <a:r>
+                        <a:rPr lang="en-US" sz="1150" b="1" dirty="0">
+                          <a:solidFill>
+                            <a:srgbClr val="D62839"/>
+                          </a:solidFill>
+                          <a:latin typeface="Noto Sans CJK KR" pitchFamily="34" charset="0"/>
+                          <a:ea typeface="Noto Sans CJK KR" pitchFamily="34" charset="-122"/>
+                          <a:cs typeface="Noto Sans CJK KR" pitchFamily="34" charset="-120"/>
+                        </a:rPr>
+                        <a:t>14:40~14:55</a:t>
                       </a:r>
                       <a:endParaRPr lang="en-US" sz="1150" dirty="0">
                         <a:latin typeface="Noto Sans CJK KR" charset="0"/>
@@ -8409,7 +8615,7 @@
                           <a:ea typeface="Noto Sans CJK KR" pitchFamily="34" charset="-122"/>
                           <a:cs typeface="Noto Sans CJK KR" pitchFamily="34" charset="-120"/>
                         </a:rPr>
-                        <a:t>14:35~15:40</a:t>
+                        <a:t>14:55~16:00</a:t>
                       </a:r>
                       <a:endParaRPr lang="en-US" sz="1150" dirty="0">
                         <a:latin typeface="Noto Sans CJK KR" charset="0"/>
@@ -9040,7 +9246,7 @@
                           <a:ea typeface="Noto Sans CJK KR" pitchFamily="34" charset="-122"/>
                           <a:cs typeface="Noto Sans CJK KR" pitchFamily="34" charset="-120"/>
                         </a:rPr>
-                        <a:t>15:40~15:45</a:t>
+                        <a:t>16:00~16:05</a:t>
                       </a:r>
                       <a:endParaRPr lang="en-US" sz="1150" dirty="0">
                         <a:latin typeface="Noto Sans CJK KR" charset="0"/>
@@ -9246,7 +9452,7 @@
                           <a:ea typeface="Noto Sans CJK KR" pitchFamily="34" charset="-122"/>
                           <a:cs typeface="Noto Sans CJK KR" pitchFamily="34" charset="-120"/>
                         </a:rPr>
-                        <a:t>15:45~16:15</a:t>
+                        <a:t>16:05~16:20</a:t>
                       </a:r>
                       <a:endParaRPr lang="en-US" sz="1150" dirty="0">
                         <a:latin typeface="Noto Sans CJK KR" charset="0"/>
@@ -9382,7 +9588,7 @@
                           <a:ea typeface="Noto Sans CJK KR" pitchFamily="34" charset="-122"/>
                           <a:cs typeface="Noto Sans CJK KR" pitchFamily="34" charset="-120"/>
                         </a:rPr>
-                        <a:t>LEGOLAND Lookout(스탬프④) + 브릭토피아 라운지(스탬프⑤) + Monkey Climb</a:t>
+                        <a:t>LEGOLAND Lookout(스탬프④) + 브릭토피아 라운지(스탬프⑤) — Monkey Climb는 시간상 생략</a:t>
                       </a:r>
                       <a:endParaRPr lang="en-US" sz="1150" dirty="0">
                         <a:latin typeface="Noto Sans CJK KR" charset="0"/>
@@ -9452,7 +9658,7 @@
                           <a:ea typeface="Noto Sans CJK KR" pitchFamily="34" charset="-122"/>
                           <a:cs typeface="Noto Sans CJK KR" pitchFamily="34" charset="-120"/>
                         </a:rPr>
-                        <a:t>16:15~16:20</a:t>
+                        <a:t>16:20~16:25</a:t>
                       </a:r>
                       <a:endParaRPr lang="en-US" sz="1150" dirty="0">
                         <a:latin typeface="Noto Sans CJK KR" charset="0"/>
@@ -9658,7 +9864,7 @@
                           <a:ea typeface="Noto Sans CJK KR" pitchFamily="34" charset="-122"/>
                           <a:cs typeface="Noto Sans CJK KR" pitchFamily="34" charset="-120"/>
                         </a:rPr>
-                        <a:t>16:20~16:45</a:t>
+                        <a:t>16:25~16:50</a:t>
                       </a:r>
                       <a:endParaRPr lang="en-US" sz="1150" dirty="0">
                         <a:latin typeface="Noto Sans CJK KR" charset="0"/>
@@ -9864,7 +10070,7 @@
                           <a:ea typeface="Noto Sans CJK KR" pitchFamily="34" charset="-122"/>
                           <a:cs typeface="Noto Sans CJK KR" pitchFamily="34" charset="-120"/>
                         </a:rPr>
-                        <a:t>16:45~16:55</a:t>
+                        <a:t>16:50~16:55</a:t>
                       </a:r>
                       <a:endParaRPr lang="en-US" sz="1150" dirty="0">
                         <a:latin typeface="Noto Sans CJK KR" charset="0"/>
@@ -10206,7 +10412,7 @@
                           <a:ea typeface="Noto Sans CJK KR" pitchFamily="34" charset="-122"/>
                           <a:cs typeface="Noto Sans CJK KR" pitchFamily="34" charset="-120"/>
                         </a:rPr>
-                        <a:t>폐장(17:00) 5분 전 — 여유 없음, 늦어지면 Bricktopia 축소</a:t>
+                        <a:t>폐장(17:00) 5분 전 — 영화 넣느라 뒤가 빡빡함, 늦어지면 Bricktopia 생략</a:t>
                       </a:r>
                       <a:endParaRPr lang="en-US" sz="1150" dirty="0">
                         <a:latin typeface="Noto Sans CJK KR" charset="0"/>
@@ -14433,7 +14639,7 @@
                 <a:ea typeface="Noto Sans CJK KR" pitchFamily="34" charset="-122"/>
                 <a:cs typeface="Noto Sans CJK KR" pitchFamily="34" charset="-120"/>
               </a:rPr>
-              <a:t>CINEMA — RE-VERIFIED</a:t>
+              <a:t>CINEMA — CONFIRMED</a:t>
             </a:r>
             <a:endParaRPr lang="en-US" sz="1200" dirty="0"/>
           </a:p>
@@ -14472,7 +14678,7 @@
                 <a:ea typeface="Noto Sans CJK KR" pitchFamily="34" charset="-122"/>
                 <a:cs typeface="Noto Sans CJK KR" pitchFamily="34" charset="-120"/>
               </a:rPr>
-              <a:t>영화 — Palace 4D Cinema, 다시 제대로 확인</a:t>
+              <a:t>영화 — Palace 4D Cinema, 앱 실측 화면으로 확정</a:t>
             </a:r>
             <a:endParaRPr lang="en-US" sz="2600" dirty="0"/>
           </a:p>
@@ -14538,7 +14744,7 @@
                 <a:ea typeface="Noto Sans CJK KR" pitchFamily="34" charset="-122"/>
                 <a:cs typeface="Noto Sans CJK KR" pitchFamily="34" charset="-120"/>
               </a:rPr>
-              <a:t>정정 — “하루 6회, 11:30/13:30/15:30”는 근거가 부족했습니다</a:t>
+              <a:t>확인 — 오후에만 운영, 개장 직후엔 상영 안 함</a:t>
             </a:r>
             <a:endParaRPr lang="en-US" sz="1500" dirty="0"/>
           </a:p>
@@ -14580,7 +14786,7 @@
                 <a:ea typeface="Noto Sans CJK KR" pitchFamily="34" charset="-122"/>
                 <a:cs typeface="Noto Sans CJK KR" pitchFamily="34" charset="-120"/>
               </a:rPr>
-              <a:t>공식 페이지 원문을 다시 직접 받아 확인한 결과, 상영 시각은 어디에도 고정 시간표로 나오지 않습니다. 대신 페이지가 두 번이나 명시적으로 이렇게 말합니다:</a:t>
+              <a:t>공식 홈페이지엔 고정 시간표가 없었지만, 레고랜드 공식 앱 화면을 직접 캡처해 확인한 결과 운영시간과 쇼타임이 명확했습니다. 이전 일정의 “13:40 상영” 배치는 오픈 전이라 불가능했던 것으로 정정합니다.</a:t>
             </a:r>
             <a:endParaRPr lang="en-US" sz="1250" dirty="0"/>
           </a:p>
@@ -14641,7 +14847,7 @@
                 <a:ea typeface="Noto Sans CJK KR" pitchFamily="34" charset="-122"/>
                 <a:cs typeface="Noto Sans CJK KR" pitchFamily="34" charset="-120"/>
               </a:rPr>
-              <a:t>“Download our mobile app for showtimes!” — 공식 페이지 원문(영문), 2회 반복 게재</a:t>
+              <a:t>오후 2:30~5:00 운영 · 쇼타임 2:30 / 3:30 / 4:30 (30분 간격) — 공식 앱 화면 실측</a:t>
             </a:r>
             <a:endParaRPr lang="en-US" sz="1500" dirty="0"/>
           </a:p>
@@ -14662,7 +14868,7 @@
           </p:nvPr>
         </p:nvGraphicFramePr>
         <p:xfrm>
-          <a:off x="457200" y="3520440"/>
+          <a:off x="457200" y="3429000"/>
           <a:ext cx="11247120" cy="914400"/>
         </p:xfrm>
         <a:graphic>
@@ -14674,7 +14880,7 @@
                 <a:gridCol w="7589520"/>
                 <a:gridCol w="1280160"/>
               </a:tblGrid>
-              <a:tr h="338328">
+              <a:tr h="292608">
                 <a:tc>
                   <a:txBody>
                     <a:bodyPr/>
@@ -14684,7 +14890,7 @@
                         <a:buNone/>
                       </a:pPr>
                       <a:r>
-                        <a:rPr lang="en-US" sz="1250" b="1" dirty="0">
+                        <a:rPr lang="en-US" sz="1200" b="1" dirty="0">
                           <a:solidFill>
                             <a:srgbClr val="FFFFFF"/>
                           </a:solidFill>
@@ -14694,7 +14900,7 @@
                         </a:rPr>
                         <a:t>항목</a:t>
                       </a:r>
-                      <a:endParaRPr lang="en-US" sz="1250" dirty="0">
+                      <a:endParaRPr lang="en-US" sz="1200" dirty="0">
                         <a:latin typeface="Noto Sans CJK KR" charset="0"/>
                         <a:ea typeface="Noto Sans CJK KR" charset="0"/>
                         <a:cs typeface="Noto Sans CJK KR" charset="0"/>
@@ -14752,7 +14958,7 @@
                         <a:buNone/>
                       </a:pPr>
                       <a:r>
-                        <a:rPr lang="en-US" sz="1250" b="1" dirty="0">
+                        <a:rPr lang="en-US" sz="1200" b="1" dirty="0">
                           <a:solidFill>
                             <a:srgbClr val="FFFFFF"/>
                           </a:solidFill>
@@ -14762,7 +14968,7 @@
                         </a:rPr>
                         <a:t>내용</a:t>
                       </a:r>
-                      <a:endParaRPr lang="en-US" sz="1250" dirty="0">
+                      <a:endParaRPr lang="en-US" sz="1200" dirty="0">
                         <a:latin typeface="Noto Sans CJK KR" charset="0"/>
                         <a:ea typeface="Noto Sans CJK KR" charset="0"/>
                         <a:cs typeface="Noto Sans CJK KR" charset="0"/>
@@ -14820,7 +15026,7 @@
                         <a:buNone/>
                       </a:pPr>
                       <a:r>
-                        <a:rPr lang="en-US" sz="1250" b="1" dirty="0">
+                        <a:rPr lang="en-US" sz="1200" b="1" dirty="0">
                           <a:solidFill>
                             <a:srgbClr val="FFFFFF"/>
                           </a:solidFill>
@@ -14830,7 +15036,7 @@
                         </a:rPr>
                         <a:t>등급</a:t>
                       </a:r>
-                      <a:endParaRPr lang="en-US" sz="1250" dirty="0">
+                      <a:endParaRPr lang="en-US" sz="1200" dirty="0">
                         <a:latin typeface="Noto Sans CJK KR" charset="0"/>
                         <a:ea typeface="Noto Sans CJK KR" charset="0"/>
                         <a:cs typeface="Noto Sans CJK KR" charset="0"/>
@@ -14880,7 +15086,7 @@
                   </a:tcPr>
                 </a:tc>
               </a:tr>
-              <a:tr h="338328">
+              <a:tr h="292608">
                 <a:tc>
                   <a:txBody>
                     <a:bodyPr/>
@@ -14890,7 +15096,7 @@
                         <a:buNone/>
                       </a:pPr>
                       <a:r>
-                        <a:rPr lang="en-US" sz="1250" dirty="0">
+                        <a:rPr lang="en-US" sz="1200" dirty="0">
                           <a:solidFill>
                             <a:srgbClr val="1A2440"/>
                           </a:solidFill>
@@ -14900,7 +15106,7 @@
                         </a:rPr>
                         <a:t>상영작</a:t>
                       </a:r>
-                      <a:endParaRPr lang="en-US" sz="1250" dirty="0">
+                      <a:endParaRPr lang="en-US" sz="1200" dirty="0">
                         <a:latin typeface="Noto Sans CJK KR" charset="0"/>
                         <a:ea typeface="Noto Sans CJK KR" charset="0"/>
                         <a:cs typeface="Noto Sans CJK KR" charset="0"/>
@@ -14958,7 +15164,7 @@
                         <a:buNone/>
                       </a:pPr>
                       <a:r>
-                        <a:rPr lang="en-US" sz="1250" dirty="0">
+                        <a:rPr lang="en-US" sz="1200" dirty="0">
                           <a:solidFill>
                             <a:srgbClr val="1A2440"/>
                           </a:solidFill>
@@ -14968,7 +15174,7 @@
                         </a:rPr>
                         <a:t>LEGO® CITY 4D: Officer in Pursuit (한국어 ‘추격하는 경찰관!’)</a:t>
                       </a:r>
-                      <a:endParaRPr lang="en-US" sz="1250" dirty="0">
+                      <a:endParaRPr lang="en-US" sz="1200" dirty="0">
                         <a:latin typeface="Noto Sans CJK KR" charset="0"/>
                         <a:ea typeface="Noto Sans CJK KR" charset="0"/>
                         <a:cs typeface="Noto Sans CJK KR" charset="0"/>
@@ -15026,7 +15232,7 @@
                         <a:buNone/>
                       </a:pPr>
                       <a:r>
-                        <a:rPr lang="en-US" sz="1250" dirty="0">
+                        <a:rPr lang="en-US" sz="1200" dirty="0">
                           <a:solidFill>
                             <a:srgbClr val="0B6E64"/>
                           </a:solidFill>
@@ -15036,7 +15242,7 @@
                         </a:rPr>
                         <a:t>A</a:t>
                       </a:r>
-                      <a:endParaRPr lang="en-US" sz="1250" dirty="0">
+                      <a:endParaRPr lang="en-US" sz="1200" dirty="0">
                         <a:latin typeface="Noto Sans CJK KR" charset="0"/>
                         <a:ea typeface="Noto Sans CJK KR" charset="0"/>
                         <a:cs typeface="Noto Sans CJK KR" charset="0"/>
@@ -15086,7 +15292,7 @@
                   </a:tcPr>
                 </a:tc>
               </a:tr>
-              <a:tr h="338328">
+              <a:tr h="292608">
                 <a:tc>
                   <a:txBody>
                     <a:bodyPr/>
@@ -15096,7 +15302,7 @@
                         <a:buNone/>
                       </a:pPr>
                       <a:r>
-                        <a:rPr lang="en-US" sz="1250" dirty="0">
+                        <a:rPr lang="en-US" sz="1200" dirty="0">
                           <a:solidFill>
                             <a:srgbClr val="1A2440"/>
                           </a:solidFill>
@@ -15106,7 +15312,7 @@
                         </a:rPr>
                         <a:t>내용</a:t>
                       </a:r>
-                      <a:endParaRPr lang="en-US" sz="1250" dirty="0">
+                      <a:endParaRPr lang="en-US" sz="1200" dirty="0">
                         <a:latin typeface="Noto Sans CJK KR" charset="0"/>
                         <a:ea typeface="Noto Sans CJK KR" charset="0"/>
                         <a:cs typeface="Noto Sans CJK KR" charset="0"/>
@@ -15164,7 +15370,7 @@
                         <a:buNone/>
                       </a:pPr>
                       <a:r>
-                        <a:rPr lang="en-US" sz="1250" dirty="0">
+                        <a:rPr lang="en-US" sz="1200" dirty="0">
                           <a:solidFill>
                             <a:srgbClr val="1A2440"/>
                           </a:solidFill>
@@ -15174,7 +15380,7 @@
                         </a:rPr>
                         <a:t>미니피겨 경찰이 범인을 쫓는 4D 코미디 액션</a:t>
                       </a:r>
-                      <a:endParaRPr lang="en-US" sz="1250" dirty="0">
+                      <a:endParaRPr lang="en-US" sz="1200" dirty="0">
                         <a:latin typeface="Noto Sans CJK KR" charset="0"/>
                         <a:ea typeface="Noto Sans CJK KR" charset="0"/>
                         <a:cs typeface="Noto Sans CJK KR" charset="0"/>
@@ -15232,7 +15438,7 @@
                         <a:buNone/>
                       </a:pPr>
                       <a:r>
-                        <a:rPr lang="en-US" sz="1250" dirty="0">
+                        <a:rPr lang="en-US" sz="1200" dirty="0">
                           <a:solidFill>
                             <a:srgbClr val="0B6E64"/>
                           </a:solidFill>
@@ -15242,7 +15448,7 @@
                         </a:rPr>
                         <a:t>A</a:t>
                       </a:r>
-                      <a:endParaRPr lang="en-US" sz="1250" dirty="0">
+                      <a:endParaRPr lang="en-US" sz="1200" dirty="0">
                         <a:latin typeface="Noto Sans CJK KR" charset="0"/>
                         <a:ea typeface="Noto Sans CJK KR" charset="0"/>
                         <a:cs typeface="Noto Sans CJK KR" charset="0"/>
@@ -15292,7 +15498,7 @@
                   </a:tcPr>
                 </a:tc>
               </a:tr>
-              <a:tr h="338328">
+              <a:tr h="292608">
                 <a:tc>
                   <a:txBody>
                     <a:bodyPr/>
@@ -15302,7 +15508,7 @@
                         <a:buNone/>
                       </a:pPr>
                       <a:r>
-                        <a:rPr lang="en-US" sz="1250" dirty="0">
+                        <a:rPr lang="en-US" sz="1200" dirty="0">
                           <a:solidFill>
                             <a:srgbClr val="1A2440"/>
                           </a:solidFill>
@@ -15312,7 +15518,7 @@
                         </a:rPr>
                         <a:t>소요·좌석</a:t>
                       </a:r>
-                      <a:endParaRPr lang="en-US" sz="1250" dirty="0">
+                      <a:endParaRPr lang="en-US" sz="1200" dirty="0">
                         <a:latin typeface="Noto Sans CJK KR" charset="0"/>
                         <a:ea typeface="Noto Sans CJK KR" charset="0"/>
                         <a:cs typeface="Noto Sans CJK KR" charset="0"/>
@@ -15370,7 +15576,7 @@
                         <a:buNone/>
                       </a:pPr>
                       <a:r>
-                        <a:rPr lang="en-US" sz="1250" dirty="0">
+                        <a:rPr lang="en-US" sz="1200" dirty="0">
                           <a:solidFill>
                             <a:srgbClr val="1A2440"/>
                           </a:solidFill>
@@ -15380,7 +15586,7 @@
                         </a:rPr>
                         <a:t>약 10분 / 497석</a:t>
                       </a:r>
-                      <a:endParaRPr lang="en-US" sz="1250" dirty="0">
+                      <a:endParaRPr lang="en-US" sz="1200" dirty="0">
                         <a:latin typeface="Noto Sans CJK KR" charset="0"/>
                         <a:ea typeface="Noto Sans CJK KR" charset="0"/>
                         <a:cs typeface="Noto Sans CJK KR" charset="0"/>
@@ -15438,7 +15644,7 @@
                         <a:buNone/>
                       </a:pPr>
                       <a:r>
-                        <a:rPr lang="en-US" sz="1250" dirty="0">
+                        <a:rPr lang="en-US" sz="1200" dirty="0">
                           <a:solidFill>
                             <a:srgbClr val="D62839"/>
                           </a:solidFill>
@@ -15448,7 +15654,7 @@
                         </a:rPr>
                         <a:t>B</a:t>
                       </a:r>
-                      <a:endParaRPr lang="en-US" sz="1250" dirty="0">
+                      <a:endParaRPr lang="en-US" sz="1200" dirty="0">
                         <a:latin typeface="Noto Sans CJK KR" charset="0"/>
                         <a:ea typeface="Noto Sans CJK KR" charset="0"/>
                         <a:cs typeface="Noto Sans CJK KR" charset="0"/>
@@ -15498,7 +15704,7 @@
                   </a:tcPr>
                 </a:tc>
               </a:tr>
-              <a:tr h="338328">
+              <a:tr h="292608">
                 <a:tc>
                   <a:txBody>
                     <a:bodyPr/>
@@ -15508,7 +15714,7 @@
                         <a:buNone/>
                       </a:pPr>
                       <a:r>
-                        <a:rPr lang="en-US" sz="1250" dirty="0">
+                        <a:rPr lang="en-US" sz="1200" dirty="0">
                           <a:solidFill>
                             <a:srgbClr val="1A2440"/>
                           </a:solidFill>
@@ -15518,7 +15724,7 @@
                         </a:rPr>
                         <a:t>효과</a:t>
                       </a:r>
-                      <a:endParaRPr lang="en-US" sz="1250" dirty="0">
+                      <a:endParaRPr lang="en-US" sz="1200" dirty="0">
                         <a:latin typeface="Noto Sans CJK KR" charset="0"/>
                         <a:ea typeface="Noto Sans CJK KR" charset="0"/>
                         <a:cs typeface="Noto Sans CJK KR" charset="0"/>
@@ -15576,7 +15782,7 @@
                         <a:buNone/>
                       </a:pPr>
                       <a:r>
-                        <a:rPr lang="en-US" sz="1250" dirty="0">
+                        <a:rPr lang="en-US" sz="1200" dirty="0">
                           <a:solidFill>
                             <a:srgbClr val="1A2440"/>
                           </a:solidFill>
@@ -15586,7 +15792,7 @@
                         </a:rPr>
                         <a:t>대형 스크린 + 입체 사운드 + 물·바람·거품·인공눈</a:t>
                       </a:r>
-                      <a:endParaRPr lang="en-US" sz="1250" dirty="0">
+                      <a:endParaRPr lang="en-US" sz="1200" dirty="0">
                         <a:latin typeface="Noto Sans CJK KR" charset="0"/>
                         <a:ea typeface="Noto Sans CJK KR" charset="0"/>
                         <a:cs typeface="Noto Sans CJK KR" charset="0"/>
@@ -15644,7 +15850,7 @@
                         <a:buNone/>
                       </a:pPr>
                       <a:r>
-                        <a:rPr lang="en-US" sz="1250" dirty="0">
+                        <a:rPr lang="en-US" sz="1200" dirty="0">
                           <a:solidFill>
                             <a:srgbClr val="D62839"/>
                           </a:solidFill>
@@ -15654,7 +15860,7 @@
                         </a:rPr>
                         <a:t>B</a:t>
                       </a:r>
-                      <a:endParaRPr lang="en-US" sz="1250" dirty="0">
+                      <a:endParaRPr lang="en-US" sz="1200" dirty="0">
                         <a:latin typeface="Noto Sans CJK KR" charset="0"/>
                         <a:ea typeface="Noto Sans CJK KR" charset="0"/>
                         <a:cs typeface="Noto Sans CJK KR" charset="0"/>
@@ -15704,7 +15910,7 @@
                   </a:tcPr>
                 </a:tc>
               </a:tr>
-              <a:tr h="338328">
+              <a:tr h="292608">
                 <a:tc>
                   <a:txBody>
                     <a:bodyPr/>
@@ -15714,7 +15920,7 @@
                         <a:buNone/>
                       </a:pPr>
                       <a:r>
-                        <a:rPr lang="en-US" sz="1250" dirty="0">
+                        <a:rPr lang="en-US" sz="1200" dirty="0">
                           <a:solidFill>
                             <a:srgbClr val="1A2440"/>
                           </a:solidFill>
@@ -15722,9 +15928,9 @@
                           <a:ea typeface="Noto Sans CJK KR" pitchFamily="34" charset="-122"/>
                           <a:cs typeface="Noto Sans CJK KR" pitchFamily="34" charset="-120"/>
                         </a:rPr>
-                        <a:t>상영 시각</a:t>
+                        <a:t>운영시간</a:t>
                       </a:r>
-                      <a:endParaRPr lang="en-US" sz="1250" dirty="0">
+                      <a:endParaRPr lang="en-US" sz="1200" dirty="0">
                         <a:latin typeface="Noto Sans CJK KR" charset="0"/>
                         <a:ea typeface="Noto Sans CJK KR" charset="0"/>
                         <a:cs typeface="Noto Sans CJK KR" charset="0"/>
@@ -15782,7 +15988,7 @@
                         <a:buNone/>
                       </a:pPr>
                       <a:r>
-                        <a:rPr lang="en-US" sz="1250" dirty="0">
+                        <a:rPr lang="en-US" sz="1200" dirty="0">
                           <a:solidFill>
                             <a:srgbClr val="1A2440"/>
                           </a:solidFill>
@@ -15790,9 +15996,9 @@
                           <a:ea typeface="Noto Sans CJK KR" pitchFamily="34" charset="-122"/>
                           <a:cs typeface="Noto Sans CJK KR" pitchFamily="34" charset="-120"/>
                         </a:rPr>
-                        <a:t>고정 시간표 없음 — 공식 앱에서 당일 확인 필요</a:t>
+                        <a:t>오후 2:30~5:00, 쇼타임 2:30/3:30/4:30 — 앱 화면 실측(오늘 기준)</a:t>
                       </a:r>
-                      <a:endParaRPr lang="en-US" sz="1250" dirty="0">
+                      <a:endParaRPr lang="en-US" sz="1200" dirty="0">
                         <a:latin typeface="Noto Sans CJK KR" charset="0"/>
                         <a:ea typeface="Noto Sans CJK KR" charset="0"/>
                         <a:cs typeface="Noto Sans CJK KR" charset="0"/>
@@ -15850,7 +16056,7 @@
                         <a:buNone/>
                       </a:pPr>
                       <a:r>
-                        <a:rPr lang="en-US" sz="1250" dirty="0">
+                        <a:rPr lang="en-US" sz="1200" dirty="0">
                           <a:solidFill>
                             <a:srgbClr val="0B6E64"/>
                           </a:solidFill>
@@ -15860,7 +16066,7 @@
                         </a:rPr>
                         <a:t>A</a:t>
                       </a:r>
-                      <a:endParaRPr lang="en-US" sz="1250" dirty="0">
+                      <a:endParaRPr lang="en-US" sz="1200" dirty="0">
                         <a:latin typeface="Noto Sans CJK KR" charset="0"/>
                         <a:ea typeface="Noto Sans CJK KR" charset="0"/>
                         <a:cs typeface="Noto Sans CJK KR" charset="0"/>
@@ -15910,7 +16116,7 @@
                   </a:tcPr>
                 </a:tc>
               </a:tr>
-              <a:tr h="338328">
+              <a:tr h="292608">
                 <a:tc>
                   <a:txBody>
                     <a:bodyPr/>
@@ -15920,7 +16126,7 @@
                         <a:buNone/>
                       </a:pPr>
                       <a:r>
-                        <a:rPr lang="en-US" sz="1250" dirty="0">
+                        <a:rPr lang="en-US" sz="1200" dirty="0">
                           <a:solidFill>
                             <a:srgbClr val="1A2440"/>
                           </a:solidFill>
@@ -15928,9 +16134,9 @@
                           <a:ea typeface="Noto Sans CJK KR" pitchFamily="34" charset="-122"/>
                           <a:cs typeface="Noto Sans CJK KR" pitchFamily="34" charset="-120"/>
                         </a:rPr>
-                        <a:t>신장·나이 제한</a:t>
+                        <a:t>변동 가능성</a:t>
                       </a:r>
-                      <a:endParaRPr lang="en-US" sz="1250" dirty="0">
+                      <a:endParaRPr lang="en-US" sz="1200" dirty="0">
                         <a:latin typeface="Noto Sans CJK KR" charset="0"/>
                         <a:ea typeface="Noto Sans CJK KR" charset="0"/>
                         <a:cs typeface="Noto Sans CJK KR" charset="0"/>
@@ -15988,7 +16194,7 @@
                         <a:buNone/>
                       </a:pPr>
                       <a:r>
-                        <a:rPr lang="en-US" sz="1250" dirty="0">
+                        <a:rPr lang="en-US" sz="1200" dirty="0">
                           <a:solidFill>
                             <a:srgbClr val="1A2440"/>
                           </a:solidFill>
@@ -15996,9 +16202,9 @@
                           <a:ea typeface="Noto Sans CJK KR" pitchFamily="34" charset="-122"/>
                           <a:cs typeface="Noto Sans CJK KR" pitchFamily="34" charset="-120"/>
                         </a:rPr>
-                        <a:t>없음</a:t>
+                        <a:t>“현장 상황에 따라 예고 없이 중단·변동될 수 있음” — 앱 공식 문구</a:t>
                       </a:r>
-                      <a:endParaRPr lang="en-US" sz="1250" dirty="0">
+                      <a:endParaRPr lang="en-US" sz="1200" dirty="0">
                         <a:latin typeface="Noto Sans CJK KR" charset="0"/>
                         <a:ea typeface="Noto Sans CJK KR" charset="0"/>
                         <a:cs typeface="Noto Sans CJK KR" charset="0"/>
@@ -16056,7 +16262,7 @@
                         <a:buNone/>
                       </a:pPr>
                       <a:r>
-                        <a:rPr lang="en-US" sz="1250" dirty="0">
+                        <a:rPr lang="en-US" sz="1200" dirty="0">
                           <a:solidFill>
                             <a:srgbClr val="0B6E64"/>
                           </a:solidFill>
@@ -16066,7 +16272,7 @@
                         </a:rPr>
                         <a:t>A</a:t>
                       </a:r>
-                      <a:endParaRPr lang="en-US" sz="1250" dirty="0">
+                      <a:endParaRPr lang="en-US" sz="1200" dirty="0">
                         <a:latin typeface="Noto Sans CJK KR" charset="0"/>
                         <a:ea typeface="Noto Sans CJK KR" charset="0"/>
                         <a:cs typeface="Noto Sans CJK KR" charset="0"/>
@@ -16116,6 +16322,212 @@
                   </a:tcPr>
                 </a:tc>
               </a:tr>
+              <a:tr h="292608">
+                <a:tc>
+                  <a:txBody>
+                    <a:bodyPr/>
+                    <a:lstStyle/>
+                    <a:p>
+                      <a:pPr algn="l" indent="0" marL="0">
+                        <a:buNone/>
+                      </a:pPr>
+                      <a:r>
+                        <a:rPr lang="en-US" sz="1200" dirty="0">
+                          <a:solidFill>
+                            <a:srgbClr val="1A2440"/>
+                          </a:solidFill>
+                          <a:latin typeface="Noto Sans CJK KR" pitchFamily="34" charset="0"/>
+                          <a:ea typeface="Noto Sans CJK KR" pitchFamily="34" charset="-122"/>
+                          <a:cs typeface="Noto Sans CJK KR" pitchFamily="34" charset="-120"/>
+                        </a:rPr>
+                        <a:t>신장·나이 제한</a:t>
+                      </a:r>
+                      <a:endParaRPr lang="en-US" sz="1200" dirty="0">
+                        <a:latin typeface="Noto Sans CJK KR" charset="0"/>
+                        <a:ea typeface="Noto Sans CJK KR" charset="0"/>
+                        <a:cs typeface="Noto Sans CJK KR" charset="0"/>
+                      </a:endParaRPr>
+                    </a:p>
+                  </a:txBody>
+                  <a:tcPr marL="91440" marR="91440" marT="45720" marB="45720" anchor="ctr">
+                    <a:lnL w="9525" cap="flat" cmpd="sng" algn="ctr">
+                      <a:solidFill>
+                        <a:srgbClr val="E2E4E8"/>
+                      </a:solidFill>
+                      <a:prstDash val="solid"/>
+                      <a:round/>
+                      <a:headEnd type="none" w="med" len="med"/>
+                      <a:tailEnd type="none" w="med" len="med"/>
+                    </a:lnL>
+                    <a:lnR w="9525" cap="flat" cmpd="sng" algn="ctr">
+                      <a:solidFill>
+                        <a:srgbClr val="E2E4E8"/>
+                      </a:solidFill>
+                      <a:prstDash val="solid"/>
+                      <a:round/>
+                      <a:headEnd type="none" w="med" len="med"/>
+                      <a:tailEnd type="none" w="med" len="med"/>
+                    </a:lnR>
+                    <a:lnT w="9525" cap="flat" cmpd="sng" algn="ctr">
+                      <a:solidFill>
+                        <a:srgbClr val="E2E4E8"/>
+                      </a:solidFill>
+                      <a:prstDash val="solid"/>
+                      <a:round/>
+                      <a:headEnd type="none" w="med" len="med"/>
+                      <a:tailEnd type="none" w="med" len="med"/>
+                    </a:lnT>
+                    <a:lnB w="9525" cap="flat" cmpd="sng" algn="ctr">
+                      <a:solidFill>
+                        <a:srgbClr val="E2E4E8"/>
+                      </a:solidFill>
+                      <a:prstDash val="solid"/>
+                      <a:round/>
+                      <a:headEnd type="none" w="med" len="med"/>
+                      <a:tailEnd type="none" w="med" len="med"/>
+                    </a:lnB>
+                    <a:solidFill>
+                      <a:srgbClr val="FFFFFF"/>
+                    </a:solidFill>
+                  </a:tcPr>
+                </a:tc>
+                <a:tc>
+                  <a:txBody>
+                    <a:bodyPr/>
+                    <a:lstStyle/>
+                    <a:p>
+                      <a:pPr algn="l" indent="0" marL="0">
+                        <a:buNone/>
+                      </a:pPr>
+                      <a:r>
+                        <a:rPr lang="en-US" sz="1200" dirty="0">
+                          <a:solidFill>
+                            <a:srgbClr val="1A2440"/>
+                          </a:solidFill>
+                          <a:latin typeface="Noto Sans CJK KR" pitchFamily="34" charset="0"/>
+                          <a:ea typeface="Noto Sans CJK KR" pitchFamily="34" charset="-122"/>
+                          <a:cs typeface="Noto Sans CJK KR" pitchFamily="34" charset="-120"/>
+                        </a:rPr>
+                        <a:t>없음</a:t>
+                      </a:r>
+                      <a:endParaRPr lang="en-US" sz="1200" dirty="0">
+                        <a:latin typeface="Noto Sans CJK KR" charset="0"/>
+                        <a:ea typeface="Noto Sans CJK KR" charset="0"/>
+                        <a:cs typeface="Noto Sans CJK KR" charset="0"/>
+                      </a:endParaRPr>
+                    </a:p>
+                  </a:txBody>
+                  <a:tcPr marL="91440" marR="91440" marT="45720" marB="45720" anchor="ctr">
+                    <a:lnL w="9525" cap="flat" cmpd="sng" algn="ctr">
+                      <a:solidFill>
+                        <a:srgbClr val="E2E4E8"/>
+                      </a:solidFill>
+                      <a:prstDash val="solid"/>
+                      <a:round/>
+                      <a:headEnd type="none" w="med" len="med"/>
+                      <a:tailEnd type="none" w="med" len="med"/>
+                    </a:lnL>
+                    <a:lnR w="9525" cap="flat" cmpd="sng" algn="ctr">
+                      <a:solidFill>
+                        <a:srgbClr val="E2E4E8"/>
+                      </a:solidFill>
+                      <a:prstDash val="solid"/>
+                      <a:round/>
+                      <a:headEnd type="none" w="med" len="med"/>
+                      <a:tailEnd type="none" w="med" len="med"/>
+                    </a:lnR>
+                    <a:lnT w="9525" cap="flat" cmpd="sng" algn="ctr">
+                      <a:solidFill>
+                        <a:srgbClr val="E2E4E8"/>
+                      </a:solidFill>
+                      <a:prstDash val="solid"/>
+                      <a:round/>
+                      <a:headEnd type="none" w="med" len="med"/>
+                      <a:tailEnd type="none" w="med" len="med"/>
+                    </a:lnT>
+                    <a:lnB w="9525" cap="flat" cmpd="sng" algn="ctr">
+                      <a:solidFill>
+                        <a:srgbClr val="E2E4E8"/>
+                      </a:solidFill>
+                      <a:prstDash val="solid"/>
+                      <a:round/>
+                      <a:headEnd type="none" w="med" len="med"/>
+                      <a:tailEnd type="none" w="med" len="med"/>
+                    </a:lnB>
+                    <a:solidFill>
+                      <a:srgbClr val="FFFFFF"/>
+                    </a:solidFill>
+                  </a:tcPr>
+                </a:tc>
+                <a:tc>
+                  <a:txBody>
+                    <a:bodyPr/>
+                    <a:lstStyle/>
+                    <a:p>
+                      <a:pPr algn="ctr" indent="0" marL="0">
+                        <a:buNone/>
+                      </a:pPr>
+                      <a:r>
+                        <a:rPr lang="en-US" sz="1200" dirty="0">
+                          <a:solidFill>
+                            <a:srgbClr val="0B6E64"/>
+                          </a:solidFill>
+                          <a:latin typeface="Noto Sans CJK KR" pitchFamily="34" charset="0"/>
+                          <a:ea typeface="Noto Sans CJK KR" pitchFamily="34" charset="-122"/>
+                          <a:cs typeface="Noto Sans CJK KR" pitchFamily="34" charset="-120"/>
+                        </a:rPr>
+                        <a:t>A</a:t>
+                      </a:r>
+                      <a:endParaRPr lang="en-US" sz="1200" dirty="0">
+                        <a:latin typeface="Noto Sans CJK KR" charset="0"/>
+                        <a:ea typeface="Noto Sans CJK KR" charset="0"/>
+                        <a:cs typeface="Noto Sans CJK KR" charset="0"/>
+                      </a:endParaRPr>
+                    </a:p>
+                  </a:txBody>
+                  <a:tcPr marL="91440" marR="91440" marT="45720" marB="45720" anchor="ctr">
+                    <a:lnL w="9525" cap="flat" cmpd="sng" algn="ctr">
+                      <a:solidFill>
+                        <a:srgbClr val="E2E4E8"/>
+                      </a:solidFill>
+                      <a:prstDash val="solid"/>
+                      <a:round/>
+                      <a:headEnd type="none" w="med" len="med"/>
+                      <a:tailEnd type="none" w="med" len="med"/>
+                    </a:lnL>
+                    <a:lnR w="9525" cap="flat" cmpd="sng" algn="ctr">
+                      <a:solidFill>
+                        <a:srgbClr val="E2E4E8"/>
+                      </a:solidFill>
+                      <a:prstDash val="solid"/>
+                      <a:round/>
+                      <a:headEnd type="none" w="med" len="med"/>
+                      <a:tailEnd type="none" w="med" len="med"/>
+                    </a:lnR>
+                    <a:lnT w="9525" cap="flat" cmpd="sng" algn="ctr">
+                      <a:solidFill>
+                        <a:srgbClr val="E2E4E8"/>
+                      </a:solidFill>
+                      <a:prstDash val="solid"/>
+                      <a:round/>
+                      <a:headEnd type="none" w="med" len="med"/>
+                      <a:tailEnd type="none" w="med" len="med"/>
+                    </a:lnT>
+                    <a:lnB w="9525" cap="flat" cmpd="sng" algn="ctr">
+                      <a:solidFill>
+                        <a:srgbClr val="E2E4E8"/>
+                      </a:solidFill>
+                      <a:prstDash val="solid"/>
+                      <a:round/>
+                      <a:headEnd type="none" w="med" len="med"/>
+                      <a:tailEnd type="none" w="med" len="med"/>
+                    </a:lnB>
+                    <a:solidFill>
+                      <a:srgbClr val="FFFFFF"/>
+                    </a:solidFill>
+                  </a:tcPr>
+                </a:tc>
+              </a:tr>
             </a:tbl>
           </a:graphicData>
         </a:graphic>
@@ -16129,7 +16541,7 @@
         <p:spPr>
           <a:xfrm>
             <a:off x="457200" y="5989320"/>
-            <a:ext cx="11247120" cy="365760"/>
+            <a:ext cx="11247120" cy="457200"/>
           </a:xfrm>
           <a:prstGeom prst="rect">
             <a:avLst/>
@@ -16142,10 +16554,13 @@
           <a:lstStyle/>
           <a:p>
             <a:pPr indent="0" marL="0">
+              <a:lnSpc>
+                <a:spcPct val="110000"/>
+              </a:lnSpc>
               <a:buNone/>
             </a:pPr>
             <a:r>
-              <a:rPr lang="en-US" sz="1300" b="1" dirty="0">
+              <a:rPr lang="en-US" sz="1200" b="1" dirty="0">
                 <a:solidFill>
                   <a:srgbClr val="1A2440"/>
                 </a:solidFill>
@@ -16153,9 +16568,9 @@
                 <a:ea typeface="Noto Sans CJK KR" pitchFamily="34" charset="-122"/>
                 <a:cs typeface="Noto Sans CJK KR" pitchFamily="34" charset="-120"/>
               </a:rPr>
-              <a:t>→ LEGO City 구간(13:00~14:05) 안에서 도착 즉시 앱으로 상영 시각을 확인하고 그 사이 시간에 맞춰 넣습니다.</a:t>
+              <a:t>→ 2:30 쇼에 맞춰 시티 구간을 14:25까지 늘리고, 캐슬 귀환·드래곤 2차를 그만큼 늦춥니다. 뒤 시간을 맞추려 Bricktopia의 Monkey Climb는 생략.</a:t>
             </a:r>
-            <a:endParaRPr lang="en-US" sz="1300" dirty="0"/>
+            <a:endParaRPr lang="en-US" sz="1200" dirty="0"/>
           </a:p>
         </p:txBody>
       </p:sp>

--- a/family-outings/assets/legoland_20260923_plan.pptx
+++ b/family-outings/assets/legoland_20260923_plan.pptx
@@ -15,9 +15,10 @@
     <p:sldId id="263" r:id="rId9"/>
     <p:sldId id="264" r:id="rId10"/>
     <p:sldId id="265" r:id="rId11"/>
+    <p:sldId id="266" r:id="rId12"/>
   </p:sldIdLst>
   <p:notesMasterIdLst>
-    <p:notesMasterId r:id="rId12"/>
+    <p:notesMasterId r:id="rId13"/>
   </p:notesMasterIdLst>
   <p:sldSz cx="12192000" cy="6858000"/>
   <p:notesSz cx="6858000" cy="12192000"/>
@@ -623,6 +624,94 @@
             <a:fld id="{F7021451-1387-4CA6-816F-3879F97B5CBC}" type="slidenum">
               <a:rPr lang="en-US"/>
               <a:t>10</a:t>
+            </a:fld>
+            <a:endParaRPr lang="en-US"/>
+          </a:p>
+        </p:txBody>
+      </p:sp>
+    </p:spTree>
+    <p:extLst>
+      <p:ext uri="{BB962C8B-B14F-4D97-AF65-F5344CB8AC3E}">
+        <p14:creationId xmlns:p14="http://schemas.microsoft.com/office/powerpoint/2010/main" val="1024086991"/>
+      </p:ext>
+    </p:extLst>
+  </p:cSld>
+  <p:clrMapOvr>
+    <a:masterClrMapping/>
+  </p:clrMapOvr>
+</p:notes>
+</file>
+
+<file path=ppt/notesSlides/notesSlide11.xml><?xml version="1.0" encoding="utf-8"?>
+<p:notes xmlns:a="http://schemas.openxmlformats.org/drawingml/2006/main" xmlns:r="http://schemas.openxmlformats.org/officeDocument/2006/relationships" xmlns:p="http://schemas.openxmlformats.org/presentationml/2006/main">
+  <p:cSld>
+    <p:spTree>
+      <p:nvGrpSpPr>
+        <p:cNvPr id="1" name=""/>
+        <p:cNvGrpSpPr/>
+        <p:nvPr/>
+      </p:nvGrpSpPr>
+      <p:grpSpPr>
+        <a:xfrm>
+          <a:off x="0" y="0"/>
+          <a:ext cx="0" cy="0"/>
+          <a:chOff x="0" y="0"/>
+          <a:chExt cx="0" cy="0"/>
+        </a:xfrm>
+      </p:grpSpPr>
+      <p:sp>
+        <p:nvSpPr>
+          <p:cNvPr id="2" name="Slide Image Placeholder 1"/>
+          <p:cNvSpPr>
+            <a:spLocks noGrp="1" noRot="1" noChangeAspect="1"/>
+          </p:cNvSpPr>
+          <p:nvPr>
+            <p:ph type="sldImg"/>
+          </p:nvPr>
+        </p:nvSpPr>
+        <p:spPr/>
+      </p:sp>
+      <p:sp>
+        <p:nvSpPr>
+          <p:cNvPr id="3" name="Notes Placeholder 2"/>
+          <p:cNvSpPr>
+            <a:spLocks noGrp="1"/>
+          </p:cNvSpPr>
+          <p:nvPr>
+            <p:ph type="body" idx="1"/>
+          </p:nvPr>
+        </p:nvSpPr>
+        <p:spPr/>
+        <p:txBody>
+          <a:bodyPr/>
+          <a:lstStyle/>
+          <a:p>
+            <a:r>
+              <a:rPr lang="en-US" dirty="0"/>
+              <a:t/>
+            </a:r>
+            <a:endParaRPr lang="en-US" dirty="0"/>
+          </a:p>
+        </p:txBody>
+      </p:sp>
+      <p:sp>
+        <p:nvSpPr>
+          <p:cNvPr id="4" name="Slide Number Placeholder 3"/>
+          <p:cNvSpPr>
+            <a:spLocks noGrp="1"/>
+          </p:cNvSpPr>
+          <p:nvPr>
+            <p:ph type="sldNum" sz="quarter" idx="10"/>
+          </p:nvPr>
+        </p:nvSpPr>
+        <p:spPr/>
+        <p:txBody>
+          <a:bodyPr/>
+          <a:lstStyle/>
+          <a:p>
+            <a:fld id="{F7021451-1387-4CA6-816F-3879F97B5CBC}" type="slidenum">
+              <a:rPr lang="en-US"/>
+              <a:t>11</a:t>
             </a:fld>
             <a:endParaRPr lang="en-US"/>
           </a:p>
@@ -3156,6 +3245,1912 @@
 </p:sld>
 </file>
 
+<file path=ppt/slides/slide11.xml><?xml version="1.0" encoding="utf-8"?>
+<p:sld xmlns:a="http://schemas.openxmlformats.org/drawingml/2006/main" xmlns:r="http://schemas.openxmlformats.org/officeDocument/2006/relationships" xmlns:p="http://schemas.openxmlformats.org/presentationml/2006/main">
+  <p:cSld name="Slide 11">
+    <p:bg>
+      <p:bgPr>
+        <a:solidFill>
+          <a:srgbClr val="FFFFFF"/>
+        </a:solidFill>
+      </p:bgPr>
+    </p:bg>
+    <p:spTree>
+      <p:nvGrpSpPr>
+        <p:cNvPr id="1" name=""/>
+        <p:cNvGrpSpPr/>
+        <p:nvPr/>
+      </p:nvGrpSpPr>
+      <p:grpSpPr>
+        <a:xfrm>
+          <a:off x="0" y="0"/>
+          <a:ext cx="0" cy="0"/>
+          <a:chOff x="0" y="0"/>
+          <a:chExt cx="0" cy="0"/>
+        </a:xfrm>
+      </p:grpSpPr>
+      <p:sp>
+        <p:nvSpPr>
+          <p:cNvPr id="2" name="Text 0"/>
+          <p:cNvSpPr txBox="1"/>
+          <p:nvPr/>
+        </p:nvSpPr>
+        <p:spPr>
+          <a:xfrm>
+            <a:off x="457200" y="320040"/>
+            <a:ext cx="11247120" cy="320040"/>
+          </a:xfrm>
+          <a:prstGeom prst="rect">
+            <a:avLst/>
+          </a:prstGeom>
+          <a:noFill/>
+          <a:ln/>
+        </p:spPr>
+        <p:txBody>
+          <a:bodyPr wrap="square" lIns="0" tIns="0" rIns="0" bIns="0" rtlCol="0" anchor="ctr"/>
+          <a:lstStyle/>
+          <a:p>
+            <a:pPr indent="0" marL="0">
+              <a:buNone/>
+            </a:pPr>
+            <a:r>
+              <a:rPr lang="en-US" sz="1200" b="1" dirty="0">
+                <a:solidFill>
+                  <a:srgbClr val="D62839"/>
+                </a:solidFill>
+                <a:latin typeface="Noto Sans CJK KR" pitchFamily="34" charset="0"/>
+                <a:ea typeface="Noto Sans CJK KR" pitchFamily="34" charset="-122"/>
+                <a:cs typeface="Noto Sans CJK KR" pitchFamily="34" charset="-120"/>
+              </a:rPr>
+              <a:t>CAUTIONS</a:t>
+            </a:r>
+            <a:endParaRPr lang="en-US" sz="1200" dirty="0"/>
+          </a:p>
+        </p:txBody>
+      </p:sp>
+      <p:sp>
+        <p:nvSpPr>
+          <p:cNvPr id="3" name="Text 1"/>
+          <p:cNvSpPr txBox="1"/>
+          <p:nvPr/>
+        </p:nvSpPr>
+        <p:spPr>
+          <a:xfrm>
+            <a:off x="457200" y="594360"/>
+            <a:ext cx="11247120" cy="548640"/>
+          </a:xfrm>
+          <a:prstGeom prst="rect">
+            <a:avLst/>
+          </a:prstGeom>
+          <a:noFill/>
+          <a:ln/>
+        </p:spPr>
+        <p:txBody>
+          <a:bodyPr wrap="square" lIns="0" tIns="0" rIns="0" bIns="0" rtlCol="0" anchor="ctr"/>
+          <a:lstStyle/>
+          <a:p>
+            <a:pPr indent="0" marL="0">
+              <a:buNone/>
+            </a:pPr>
+            <a:r>
+              <a:rPr lang="en-US" sz="2600" b="1" dirty="0">
+                <a:solidFill>
+                  <a:srgbClr val="1A2440"/>
+                </a:solidFill>
+                <a:latin typeface="Noto Sans CJK KR" pitchFamily="34" charset="0"/>
+                <a:ea typeface="Noto Sans CJK KR" pitchFamily="34" charset="-122"/>
+                <a:cs typeface="Noto Sans CJK KR" pitchFamily="34" charset="-120"/>
+              </a:rPr>
+              <a:t>주의점 — 오늘 계획의 위험 요소와 근거 등급</a:t>
+            </a:r>
+            <a:endParaRPr lang="en-US" sz="2600" dirty="0"/>
+          </a:p>
+        </p:txBody>
+      </p:sp>
+      <p:graphicFrame>
+        <p:nvGraphicFramePr>
+          <p:cNvPr id="12" name="Table 0"/>
+          <p:cNvGraphicFramePr>
+            <a:graphicFrameLocks noGrp="1"/>
+          </p:cNvGraphicFramePr>
+          <p:nvPr>
+            <p:extLst>
+              <p:ext uri="{D42A27DB-BD31-4B8C-83A1-F6EECF244321}">
+                <p14:modId xmlns:p14="http://schemas.microsoft.com/office/powerpoint/2010/main" val="1579011935"/>
+              </p:ext>
+            </p:extLst>
+          </p:nvPr>
+        </p:nvGraphicFramePr>
+        <p:xfrm>
+          <a:off x="457200" y="1325880"/>
+          <a:ext cx="11247120" cy="914400"/>
+        </p:xfrm>
+        <a:graphic>
+          <a:graphicData uri="http://schemas.openxmlformats.org/drawingml/2006/table">
+            <a:tbl>
+              <a:tblPr/>
+              <a:tblGrid>
+                <a:gridCol w="2743200"/>
+                <a:gridCol w="7406640"/>
+                <a:gridCol w="1097280"/>
+              </a:tblGrid>
+              <a:tr h="566928">
+                <a:tc>
+                  <a:txBody>
+                    <a:bodyPr/>
+                    <a:lstStyle/>
+                    <a:p>
+                      <a:pPr algn="l" indent="0" marL="0">
+                        <a:buNone/>
+                      </a:pPr>
+                      <a:r>
+                        <a:rPr lang="en-US" sz="1200" b="1" dirty="0">
+                          <a:solidFill>
+                            <a:srgbClr val="FFFFFF"/>
+                          </a:solidFill>
+                          <a:latin typeface="Noto Sans CJK KR" pitchFamily="34" charset="0"/>
+                          <a:ea typeface="Noto Sans CJK KR" pitchFamily="34" charset="-122"/>
+                          <a:cs typeface="Noto Sans CJK KR" pitchFamily="34" charset="-120"/>
+                        </a:rPr>
+                        <a:t>항목</a:t>
+                      </a:r>
+                      <a:endParaRPr lang="en-US" sz="1200" dirty="0">
+                        <a:latin typeface="Noto Sans CJK KR" charset="0"/>
+                        <a:ea typeface="Noto Sans CJK KR" charset="0"/>
+                        <a:cs typeface="Noto Sans CJK KR" charset="0"/>
+                      </a:endParaRPr>
+                    </a:p>
+                  </a:txBody>
+                  <a:tcPr marL="91440" marR="91440" marT="45720" marB="45720" anchor="ctr">
+                    <a:lnL w="9525" cap="flat" cmpd="sng" algn="ctr">
+                      <a:solidFill>
+                        <a:srgbClr val="E2E4E8"/>
+                      </a:solidFill>
+                      <a:prstDash val="solid"/>
+                      <a:round/>
+                      <a:headEnd type="none" w="med" len="med"/>
+                      <a:tailEnd type="none" w="med" len="med"/>
+                    </a:lnL>
+                    <a:lnR w="9525" cap="flat" cmpd="sng" algn="ctr">
+                      <a:solidFill>
+                        <a:srgbClr val="E2E4E8"/>
+                      </a:solidFill>
+                      <a:prstDash val="solid"/>
+                      <a:round/>
+                      <a:headEnd type="none" w="med" len="med"/>
+                      <a:tailEnd type="none" w="med" len="med"/>
+                    </a:lnR>
+                    <a:lnT w="9525" cap="flat" cmpd="sng" algn="ctr">
+                      <a:solidFill>
+                        <a:srgbClr val="E2E4E8"/>
+                      </a:solidFill>
+                      <a:prstDash val="solid"/>
+                      <a:round/>
+                      <a:headEnd type="none" w="med" len="med"/>
+                      <a:tailEnd type="none" w="med" len="med"/>
+                    </a:lnT>
+                    <a:lnB w="9525" cap="flat" cmpd="sng" algn="ctr">
+                      <a:solidFill>
+                        <a:srgbClr val="E2E4E8"/>
+                      </a:solidFill>
+                      <a:prstDash val="solid"/>
+                      <a:round/>
+                      <a:headEnd type="none" w="med" len="med"/>
+                      <a:tailEnd type="none" w="med" len="med"/>
+                    </a:lnB>
+                    <a:solidFill>
+                      <a:srgbClr val="1A2440"/>
+                    </a:solidFill>
+                  </a:tcPr>
+                </a:tc>
+                <a:tc>
+                  <a:txBody>
+                    <a:bodyPr/>
+                    <a:lstStyle/>
+                    <a:p>
+                      <a:pPr algn="l" indent="0" marL="0">
+                        <a:buNone/>
+                      </a:pPr>
+                      <a:r>
+                        <a:rPr lang="en-US" sz="1200" b="1" dirty="0">
+                          <a:solidFill>
+                            <a:srgbClr val="FFFFFF"/>
+                          </a:solidFill>
+                          <a:latin typeface="Noto Sans CJK KR" pitchFamily="34" charset="0"/>
+                          <a:ea typeface="Noto Sans CJK KR" pitchFamily="34" charset="-122"/>
+                          <a:cs typeface="Noto Sans CJK KR" pitchFamily="34" charset="-120"/>
+                        </a:rPr>
+                        <a:t>왜 주의해야 하나</a:t>
+                      </a:r>
+                      <a:endParaRPr lang="en-US" sz="1200" dirty="0">
+                        <a:latin typeface="Noto Sans CJK KR" charset="0"/>
+                        <a:ea typeface="Noto Sans CJK KR" charset="0"/>
+                        <a:cs typeface="Noto Sans CJK KR" charset="0"/>
+                      </a:endParaRPr>
+                    </a:p>
+                  </a:txBody>
+                  <a:tcPr marL="91440" marR="91440" marT="45720" marB="45720" anchor="ctr">
+                    <a:lnL w="9525" cap="flat" cmpd="sng" algn="ctr">
+                      <a:solidFill>
+                        <a:srgbClr val="E2E4E8"/>
+                      </a:solidFill>
+                      <a:prstDash val="solid"/>
+                      <a:round/>
+                      <a:headEnd type="none" w="med" len="med"/>
+                      <a:tailEnd type="none" w="med" len="med"/>
+                    </a:lnL>
+                    <a:lnR w="9525" cap="flat" cmpd="sng" algn="ctr">
+                      <a:solidFill>
+                        <a:srgbClr val="E2E4E8"/>
+                      </a:solidFill>
+                      <a:prstDash val="solid"/>
+                      <a:round/>
+                      <a:headEnd type="none" w="med" len="med"/>
+                      <a:tailEnd type="none" w="med" len="med"/>
+                    </a:lnR>
+                    <a:lnT w="9525" cap="flat" cmpd="sng" algn="ctr">
+                      <a:solidFill>
+                        <a:srgbClr val="E2E4E8"/>
+                      </a:solidFill>
+                      <a:prstDash val="solid"/>
+                      <a:round/>
+                      <a:headEnd type="none" w="med" len="med"/>
+                      <a:tailEnd type="none" w="med" len="med"/>
+                    </a:lnT>
+                    <a:lnB w="9525" cap="flat" cmpd="sng" algn="ctr">
+                      <a:solidFill>
+                        <a:srgbClr val="E2E4E8"/>
+                      </a:solidFill>
+                      <a:prstDash val="solid"/>
+                      <a:round/>
+                      <a:headEnd type="none" w="med" len="med"/>
+                      <a:tailEnd type="none" w="med" len="med"/>
+                    </a:lnB>
+                    <a:solidFill>
+                      <a:srgbClr val="1A2440"/>
+                    </a:solidFill>
+                  </a:tcPr>
+                </a:tc>
+                <a:tc>
+                  <a:txBody>
+                    <a:bodyPr/>
+                    <a:lstStyle/>
+                    <a:p>
+                      <a:pPr algn="ctr" indent="0" marL="0">
+                        <a:buNone/>
+                      </a:pPr>
+                      <a:r>
+                        <a:rPr lang="en-US" sz="1200" b="1" dirty="0">
+                          <a:solidFill>
+                            <a:srgbClr val="FFFFFF"/>
+                          </a:solidFill>
+                          <a:latin typeface="Noto Sans CJK KR" pitchFamily="34" charset="0"/>
+                          <a:ea typeface="Noto Sans CJK KR" pitchFamily="34" charset="-122"/>
+                          <a:cs typeface="Noto Sans CJK KR" pitchFamily="34" charset="-120"/>
+                        </a:rPr>
+                        <a:t>등급</a:t>
+                      </a:r>
+                      <a:endParaRPr lang="en-US" sz="1200" dirty="0">
+                        <a:latin typeface="Noto Sans CJK KR" charset="0"/>
+                        <a:ea typeface="Noto Sans CJK KR" charset="0"/>
+                        <a:cs typeface="Noto Sans CJK KR" charset="0"/>
+                      </a:endParaRPr>
+                    </a:p>
+                  </a:txBody>
+                  <a:tcPr marL="91440" marR="91440" marT="45720" marB="45720" anchor="ctr">
+                    <a:lnL w="9525" cap="flat" cmpd="sng" algn="ctr">
+                      <a:solidFill>
+                        <a:srgbClr val="E2E4E8"/>
+                      </a:solidFill>
+                      <a:prstDash val="solid"/>
+                      <a:round/>
+                      <a:headEnd type="none" w="med" len="med"/>
+                      <a:tailEnd type="none" w="med" len="med"/>
+                    </a:lnL>
+                    <a:lnR w="9525" cap="flat" cmpd="sng" algn="ctr">
+                      <a:solidFill>
+                        <a:srgbClr val="E2E4E8"/>
+                      </a:solidFill>
+                      <a:prstDash val="solid"/>
+                      <a:round/>
+                      <a:headEnd type="none" w="med" len="med"/>
+                      <a:tailEnd type="none" w="med" len="med"/>
+                    </a:lnR>
+                    <a:lnT w="9525" cap="flat" cmpd="sng" algn="ctr">
+                      <a:solidFill>
+                        <a:srgbClr val="E2E4E8"/>
+                      </a:solidFill>
+                      <a:prstDash val="solid"/>
+                      <a:round/>
+                      <a:headEnd type="none" w="med" len="med"/>
+                      <a:tailEnd type="none" w="med" len="med"/>
+                    </a:lnT>
+                    <a:lnB w="9525" cap="flat" cmpd="sng" algn="ctr">
+                      <a:solidFill>
+                        <a:srgbClr val="E2E4E8"/>
+                      </a:solidFill>
+                      <a:prstDash val="solid"/>
+                      <a:round/>
+                      <a:headEnd type="none" w="med" len="med"/>
+                      <a:tailEnd type="none" w="med" len="med"/>
+                    </a:lnB>
+                    <a:solidFill>
+                      <a:srgbClr val="1A2440"/>
+                    </a:solidFill>
+                  </a:tcPr>
+                </a:tc>
+              </a:tr>
+              <a:tr h="566928">
+                <a:tc>
+                  <a:txBody>
+                    <a:bodyPr/>
+                    <a:lstStyle/>
+                    <a:p>
+                      <a:pPr algn="l" indent="0" marL="0">
+                        <a:buNone/>
+                      </a:pPr>
+                      <a:r>
+                        <a:rPr lang="en-US" sz="1200" b="1" dirty="0">
+                          <a:solidFill>
+                            <a:srgbClr val="1A2440"/>
+                          </a:solidFill>
+                          <a:latin typeface="Noto Sans CJK KR" pitchFamily="34" charset="0"/>
+                          <a:ea typeface="Noto Sans CJK KR" pitchFamily="34" charset="-122"/>
+                          <a:cs typeface="Noto Sans CJK KR" pitchFamily="34" charset="-120"/>
+                        </a:rPr>
+                        <a:t>폐장 시간 빡빡함</a:t>
+                      </a:r>
+                      <a:endParaRPr lang="en-US" sz="1200" dirty="0">
+                        <a:latin typeface="Noto Sans CJK KR" charset="0"/>
+                        <a:ea typeface="Noto Sans CJK KR" charset="0"/>
+                        <a:cs typeface="Noto Sans CJK KR" charset="0"/>
+                      </a:endParaRPr>
+                    </a:p>
+                  </a:txBody>
+                  <a:tcPr marL="91440" marR="91440" marT="45720" marB="45720" anchor="ctr">
+                    <a:lnL w="9525" cap="flat" cmpd="sng" algn="ctr">
+                      <a:solidFill>
+                        <a:srgbClr val="E2E4E8"/>
+                      </a:solidFill>
+                      <a:prstDash val="solid"/>
+                      <a:round/>
+                      <a:headEnd type="none" w="med" len="med"/>
+                      <a:tailEnd type="none" w="med" len="med"/>
+                    </a:lnL>
+                    <a:lnR w="9525" cap="flat" cmpd="sng" algn="ctr">
+                      <a:solidFill>
+                        <a:srgbClr val="E2E4E8"/>
+                      </a:solidFill>
+                      <a:prstDash val="solid"/>
+                      <a:round/>
+                      <a:headEnd type="none" w="med" len="med"/>
+                      <a:tailEnd type="none" w="med" len="med"/>
+                    </a:lnR>
+                    <a:lnT w="9525" cap="flat" cmpd="sng" algn="ctr">
+                      <a:solidFill>
+                        <a:srgbClr val="E2E4E8"/>
+                      </a:solidFill>
+                      <a:prstDash val="solid"/>
+                      <a:round/>
+                      <a:headEnd type="none" w="med" len="med"/>
+                      <a:tailEnd type="none" w="med" len="med"/>
+                    </a:lnT>
+                    <a:lnB w="9525" cap="flat" cmpd="sng" algn="ctr">
+                      <a:solidFill>
+                        <a:srgbClr val="E2E4E8"/>
+                      </a:solidFill>
+                      <a:prstDash val="solid"/>
+                      <a:round/>
+                      <a:headEnd type="none" w="med" len="med"/>
+                      <a:tailEnd type="none" w="med" len="med"/>
+                    </a:lnB>
+                    <a:solidFill>
+                      <a:srgbClr val="FFFFFF"/>
+                    </a:solidFill>
+                  </a:tcPr>
+                </a:tc>
+                <a:tc>
+                  <a:txBody>
+                    <a:bodyPr/>
+                    <a:lstStyle/>
+                    <a:p>
+                      <a:pPr algn="l" indent="0" marL="0">
+                        <a:buNone/>
+                      </a:pPr>
+                      <a:r>
+                        <a:rPr lang="en-US" sz="1200" dirty="0">
+                          <a:solidFill>
+                            <a:srgbClr val="1A2440"/>
+                          </a:solidFill>
+                          <a:latin typeface="Noto Sans CJK KR" pitchFamily="34" charset="0"/>
+                          <a:ea typeface="Noto Sans CJK KR" pitchFamily="34" charset="-122"/>
+                          <a:cs typeface="Noto Sans CJK KR" pitchFamily="34" charset="-120"/>
+                        </a:rPr>
+                        <a:t>16:55 퇴장 예정 — 영화를 넣느라 뒤 일정에 여유가 거의 없음. 늦어지면 Bricktopia부터 생략</a:t>
+                      </a:r>
+                      <a:endParaRPr lang="en-US" sz="1200" dirty="0">
+                        <a:latin typeface="Noto Sans CJK KR" charset="0"/>
+                        <a:ea typeface="Noto Sans CJK KR" charset="0"/>
+                        <a:cs typeface="Noto Sans CJK KR" charset="0"/>
+                      </a:endParaRPr>
+                    </a:p>
+                  </a:txBody>
+                  <a:tcPr marL="91440" marR="91440" marT="45720" marB="45720" anchor="ctr">
+                    <a:lnL w="9525" cap="flat" cmpd="sng" algn="ctr">
+                      <a:solidFill>
+                        <a:srgbClr val="E2E4E8"/>
+                      </a:solidFill>
+                      <a:prstDash val="solid"/>
+                      <a:round/>
+                      <a:headEnd type="none" w="med" len="med"/>
+                      <a:tailEnd type="none" w="med" len="med"/>
+                    </a:lnL>
+                    <a:lnR w="9525" cap="flat" cmpd="sng" algn="ctr">
+                      <a:solidFill>
+                        <a:srgbClr val="E2E4E8"/>
+                      </a:solidFill>
+                      <a:prstDash val="solid"/>
+                      <a:round/>
+                      <a:headEnd type="none" w="med" len="med"/>
+                      <a:tailEnd type="none" w="med" len="med"/>
+                    </a:lnR>
+                    <a:lnT w="9525" cap="flat" cmpd="sng" algn="ctr">
+                      <a:solidFill>
+                        <a:srgbClr val="E2E4E8"/>
+                      </a:solidFill>
+                      <a:prstDash val="solid"/>
+                      <a:round/>
+                      <a:headEnd type="none" w="med" len="med"/>
+                      <a:tailEnd type="none" w="med" len="med"/>
+                    </a:lnT>
+                    <a:lnB w="9525" cap="flat" cmpd="sng" algn="ctr">
+                      <a:solidFill>
+                        <a:srgbClr val="E2E4E8"/>
+                      </a:solidFill>
+                      <a:prstDash val="solid"/>
+                      <a:round/>
+                      <a:headEnd type="none" w="med" len="med"/>
+                      <a:tailEnd type="none" w="med" len="med"/>
+                    </a:lnB>
+                    <a:solidFill>
+                      <a:srgbClr val="FFFFFF"/>
+                    </a:solidFill>
+                  </a:tcPr>
+                </a:tc>
+                <a:tc>
+                  <a:txBody>
+                    <a:bodyPr/>
+                    <a:lstStyle/>
+                    <a:p>
+                      <a:pPr algn="ctr" indent="0" marL="0">
+                        <a:buNone/>
+                      </a:pPr>
+                      <a:r>
+                        <a:rPr lang="en-US" sz="1200" dirty="0">
+                          <a:solidFill>
+                            <a:srgbClr val="5C5749"/>
+                          </a:solidFill>
+                          <a:latin typeface="Noto Sans CJK KR" pitchFamily="34" charset="0"/>
+                          <a:ea typeface="Noto Sans CJK KR" pitchFamily="34" charset="-122"/>
+                          <a:cs typeface="Noto Sans CJK KR" pitchFamily="34" charset="-120"/>
+                        </a:rPr>
+                        <a:t>—</a:t>
+                      </a:r>
+                      <a:endParaRPr lang="en-US" sz="1200" dirty="0">
+                        <a:latin typeface="Noto Sans CJK KR" charset="0"/>
+                        <a:ea typeface="Noto Sans CJK KR" charset="0"/>
+                        <a:cs typeface="Noto Sans CJK KR" charset="0"/>
+                      </a:endParaRPr>
+                    </a:p>
+                  </a:txBody>
+                  <a:tcPr marL="91440" marR="91440" marT="45720" marB="45720" anchor="ctr">
+                    <a:lnL w="9525" cap="flat" cmpd="sng" algn="ctr">
+                      <a:solidFill>
+                        <a:srgbClr val="E2E4E8"/>
+                      </a:solidFill>
+                      <a:prstDash val="solid"/>
+                      <a:round/>
+                      <a:headEnd type="none" w="med" len="med"/>
+                      <a:tailEnd type="none" w="med" len="med"/>
+                    </a:lnL>
+                    <a:lnR w="9525" cap="flat" cmpd="sng" algn="ctr">
+                      <a:solidFill>
+                        <a:srgbClr val="E2E4E8"/>
+                      </a:solidFill>
+                      <a:prstDash val="solid"/>
+                      <a:round/>
+                      <a:headEnd type="none" w="med" len="med"/>
+                      <a:tailEnd type="none" w="med" len="med"/>
+                    </a:lnR>
+                    <a:lnT w="9525" cap="flat" cmpd="sng" algn="ctr">
+                      <a:solidFill>
+                        <a:srgbClr val="E2E4E8"/>
+                      </a:solidFill>
+                      <a:prstDash val="solid"/>
+                      <a:round/>
+                      <a:headEnd type="none" w="med" len="med"/>
+                      <a:tailEnd type="none" w="med" len="med"/>
+                    </a:lnT>
+                    <a:lnB w="9525" cap="flat" cmpd="sng" algn="ctr">
+                      <a:solidFill>
+                        <a:srgbClr val="E2E4E8"/>
+                      </a:solidFill>
+                      <a:prstDash val="solid"/>
+                      <a:round/>
+                      <a:headEnd type="none" w="med" len="med"/>
+                      <a:tailEnd type="none" w="med" len="med"/>
+                    </a:lnB>
+                    <a:solidFill>
+                      <a:srgbClr val="FFFFFF"/>
+                    </a:solidFill>
+                  </a:tcPr>
+                </a:tc>
+              </a:tr>
+              <a:tr h="566928">
+                <a:tc>
+                  <a:txBody>
+                    <a:bodyPr/>
+                    <a:lstStyle/>
+                    <a:p>
+                      <a:pPr algn="l" indent="0" marL="0">
+                        <a:buNone/>
+                      </a:pPr>
+                      <a:r>
+                        <a:rPr lang="en-US" sz="1200" b="1" dirty="0">
+                          <a:solidFill>
+                            <a:srgbClr val="1A2440"/>
+                          </a:solidFill>
+                          <a:latin typeface="Noto Sans CJK KR" pitchFamily="34" charset="0"/>
+                          <a:ea typeface="Noto Sans CJK KR" pitchFamily="34" charset="-122"/>
+                          <a:cs typeface="Noto Sans CJK KR" pitchFamily="34" charset="-120"/>
+                        </a:rPr>
+                        <a:t>영화 상영시간 변동 가능</a:t>
+                      </a:r>
+                      <a:endParaRPr lang="en-US" sz="1200" dirty="0">
+                        <a:latin typeface="Noto Sans CJK KR" charset="0"/>
+                        <a:ea typeface="Noto Sans CJK KR" charset="0"/>
+                        <a:cs typeface="Noto Sans CJK KR" charset="0"/>
+                      </a:endParaRPr>
+                    </a:p>
+                  </a:txBody>
+                  <a:tcPr marL="91440" marR="91440" marT="45720" marB="45720" anchor="ctr">
+                    <a:lnL w="9525" cap="flat" cmpd="sng" algn="ctr">
+                      <a:solidFill>
+                        <a:srgbClr val="E2E4E8"/>
+                      </a:solidFill>
+                      <a:prstDash val="solid"/>
+                      <a:round/>
+                      <a:headEnd type="none" w="med" len="med"/>
+                      <a:tailEnd type="none" w="med" len="med"/>
+                    </a:lnL>
+                    <a:lnR w="9525" cap="flat" cmpd="sng" algn="ctr">
+                      <a:solidFill>
+                        <a:srgbClr val="E2E4E8"/>
+                      </a:solidFill>
+                      <a:prstDash val="solid"/>
+                      <a:round/>
+                      <a:headEnd type="none" w="med" len="med"/>
+                      <a:tailEnd type="none" w="med" len="med"/>
+                    </a:lnR>
+                    <a:lnT w="9525" cap="flat" cmpd="sng" algn="ctr">
+                      <a:solidFill>
+                        <a:srgbClr val="E2E4E8"/>
+                      </a:solidFill>
+                      <a:prstDash val="solid"/>
+                      <a:round/>
+                      <a:headEnd type="none" w="med" len="med"/>
+                      <a:tailEnd type="none" w="med" len="med"/>
+                    </a:lnT>
+                    <a:lnB w="9525" cap="flat" cmpd="sng" algn="ctr">
+                      <a:solidFill>
+                        <a:srgbClr val="E2E4E8"/>
+                      </a:solidFill>
+                      <a:prstDash val="solid"/>
+                      <a:round/>
+                      <a:headEnd type="none" w="med" len="med"/>
+                      <a:tailEnd type="none" w="med" len="med"/>
+                    </a:lnB>
+                    <a:solidFill>
+                      <a:srgbClr val="F5F6F8"/>
+                    </a:solidFill>
+                  </a:tcPr>
+                </a:tc>
+                <a:tc>
+                  <a:txBody>
+                    <a:bodyPr/>
+                    <a:lstStyle/>
+                    <a:p>
+                      <a:pPr algn="l" indent="0" marL="0">
+                        <a:buNone/>
+                      </a:pPr>
+                      <a:r>
+                        <a:rPr lang="en-US" sz="1200" dirty="0">
+                          <a:solidFill>
+                            <a:srgbClr val="1A2440"/>
+                          </a:solidFill>
+                          <a:latin typeface="Noto Sans CJK KR" pitchFamily="34" charset="0"/>
+                          <a:ea typeface="Noto Sans CJK KR" pitchFamily="34" charset="-122"/>
+                          <a:cs typeface="Noto Sans CJK KR" pitchFamily="34" charset="-120"/>
+                        </a:rPr>
+                        <a:t>앱 자체가 “예고 없이 중단·변동될 수 있음”이라 명시. 캡처는 방문 전날 밤 기준 스냅샷</a:t>
+                      </a:r>
+                      <a:endParaRPr lang="en-US" sz="1200" dirty="0">
+                        <a:latin typeface="Noto Sans CJK KR" charset="0"/>
+                        <a:ea typeface="Noto Sans CJK KR" charset="0"/>
+                        <a:cs typeface="Noto Sans CJK KR" charset="0"/>
+                      </a:endParaRPr>
+                    </a:p>
+                  </a:txBody>
+                  <a:tcPr marL="91440" marR="91440" marT="45720" marB="45720" anchor="ctr">
+                    <a:lnL w="9525" cap="flat" cmpd="sng" algn="ctr">
+                      <a:solidFill>
+                        <a:srgbClr val="E2E4E8"/>
+                      </a:solidFill>
+                      <a:prstDash val="solid"/>
+                      <a:round/>
+                      <a:headEnd type="none" w="med" len="med"/>
+                      <a:tailEnd type="none" w="med" len="med"/>
+                    </a:lnL>
+                    <a:lnR w="9525" cap="flat" cmpd="sng" algn="ctr">
+                      <a:solidFill>
+                        <a:srgbClr val="E2E4E8"/>
+                      </a:solidFill>
+                      <a:prstDash val="solid"/>
+                      <a:round/>
+                      <a:headEnd type="none" w="med" len="med"/>
+                      <a:tailEnd type="none" w="med" len="med"/>
+                    </a:lnR>
+                    <a:lnT w="9525" cap="flat" cmpd="sng" algn="ctr">
+                      <a:solidFill>
+                        <a:srgbClr val="E2E4E8"/>
+                      </a:solidFill>
+                      <a:prstDash val="solid"/>
+                      <a:round/>
+                      <a:headEnd type="none" w="med" len="med"/>
+                      <a:tailEnd type="none" w="med" len="med"/>
+                    </a:lnT>
+                    <a:lnB w="9525" cap="flat" cmpd="sng" algn="ctr">
+                      <a:solidFill>
+                        <a:srgbClr val="E2E4E8"/>
+                      </a:solidFill>
+                      <a:prstDash val="solid"/>
+                      <a:round/>
+                      <a:headEnd type="none" w="med" len="med"/>
+                      <a:tailEnd type="none" w="med" len="med"/>
+                    </a:lnB>
+                    <a:solidFill>
+                      <a:srgbClr val="F5F6F8"/>
+                    </a:solidFill>
+                  </a:tcPr>
+                </a:tc>
+                <a:tc>
+                  <a:txBody>
+                    <a:bodyPr/>
+                    <a:lstStyle/>
+                    <a:p>
+                      <a:pPr algn="ctr" indent="0" marL="0">
+                        <a:buNone/>
+                      </a:pPr>
+                      <a:r>
+                        <a:rPr lang="en-US" sz="1200" dirty="0">
+                          <a:solidFill>
+                            <a:srgbClr val="0B6E64"/>
+                          </a:solidFill>
+                          <a:latin typeface="Noto Sans CJK KR" pitchFamily="34" charset="0"/>
+                          <a:ea typeface="Noto Sans CJK KR" pitchFamily="34" charset="-122"/>
+                          <a:cs typeface="Noto Sans CJK KR" pitchFamily="34" charset="-120"/>
+                        </a:rPr>
+                        <a:t>A</a:t>
+                      </a:r>
+                      <a:endParaRPr lang="en-US" sz="1200" dirty="0">
+                        <a:latin typeface="Noto Sans CJK KR" charset="0"/>
+                        <a:ea typeface="Noto Sans CJK KR" charset="0"/>
+                        <a:cs typeface="Noto Sans CJK KR" charset="0"/>
+                      </a:endParaRPr>
+                    </a:p>
+                  </a:txBody>
+                  <a:tcPr marL="91440" marR="91440" marT="45720" marB="45720" anchor="ctr">
+                    <a:lnL w="9525" cap="flat" cmpd="sng" algn="ctr">
+                      <a:solidFill>
+                        <a:srgbClr val="E2E4E8"/>
+                      </a:solidFill>
+                      <a:prstDash val="solid"/>
+                      <a:round/>
+                      <a:headEnd type="none" w="med" len="med"/>
+                      <a:tailEnd type="none" w="med" len="med"/>
+                    </a:lnL>
+                    <a:lnR w="9525" cap="flat" cmpd="sng" algn="ctr">
+                      <a:solidFill>
+                        <a:srgbClr val="E2E4E8"/>
+                      </a:solidFill>
+                      <a:prstDash val="solid"/>
+                      <a:round/>
+                      <a:headEnd type="none" w="med" len="med"/>
+                      <a:tailEnd type="none" w="med" len="med"/>
+                    </a:lnR>
+                    <a:lnT w="9525" cap="flat" cmpd="sng" algn="ctr">
+                      <a:solidFill>
+                        <a:srgbClr val="E2E4E8"/>
+                      </a:solidFill>
+                      <a:prstDash val="solid"/>
+                      <a:round/>
+                      <a:headEnd type="none" w="med" len="med"/>
+                      <a:tailEnd type="none" w="med" len="med"/>
+                    </a:lnT>
+                    <a:lnB w="9525" cap="flat" cmpd="sng" algn="ctr">
+                      <a:solidFill>
+                        <a:srgbClr val="E2E4E8"/>
+                      </a:solidFill>
+                      <a:prstDash val="solid"/>
+                      <a:round/>
+                      <a:headEnd type="none" w="med" len="med"/>
+                      <a:tailEnd type="none" w="med" len="med"/>
+                    </a:lnB>
+                    <a:solidFill>
+                      <a:srgbClr val="F5F6F8"/>
+                    </a:solidFill>
+                  </a:tcPr>
+                </a:tc>
+              </a:tr>
+              <a:tr h="566928">
+                <a:tc>
+                  <a:txBody>
+                    <a:bodyPr/>
+                    <a:lstStyle/>
+                    <a:p>
+                      <a:pPr algn="l" indent="0" marL="0">
+                        <a:buNone/>
+                      </a:pPr>
+                      <a:r>
+                        <a:rPr lang="en-US" sz="1200" b="1" dirty="0">
+                          <a:solidFill>
+                            <a:srgbClr val="1A2440"/>
+                          </a:solidFill>
+                          <a:latin typeface="Noto Sans CJK KR" pitchFamily="34" charset="0"/>
+                          <a:ea typeface="Noto Sans CJK KR" pitchFamily="34" charset="-122"/>
+                          <a:cs typeface="Noto Sans CJK KR" pitchFamily="34" charset="-120"/>
+                        </a:rPr>
+                        <a:t>드래곤 코스터 100~120cm 구간</a:t>
+                      </a:r>
+                      <a:endParaRPr lang="en-US" sz="1200" dirty="0">
+                        <a:latin typeface="Noto Sans CJK KR" charset="0"/>
+                        <a:ea typeface="Noto Sans CJK KR" charset="0"/>
+                        <a:cs typeface="Noto Sans CJK KR" charset="0"/>
+                      </a:endParaRPr>
+                    </a:p>
+                  </a:txBody>
+                  <a:tcPr marL="91440" marR="91440" marT="45720" marB="45720" anchor="ctr">
+                    <a:lnL w="9525" cap="flat" cmpd="sng" algn="ctr">
+                      <a:solidFill>
+                        <a:srgbClr val="E2E4E8"/>
+                      </a:solidFill>
+                      <a:prstDash val="solid"/>
+                      <a:round/>
+                      <a:headEnd type="none" w="med" len="med"/>
+                      <a:tailEnd type="none" w="med" len="med"/>
+                    </a:lnL>
+                    <a:lnR w="9525" cap="flat" cmpd="sng" algn="ctr">
+                      <a:solidFill>
+                        <a:srgbClr val="E2E4E8"/>
+                      </a:solidFill>
+                      <a:prstDash val="solid"/>
+                      <a:round/>
+                      <a:headEnd type="none" w="med" len="med"/>
+                      <a:tailEnd type="none" w="med" len="med"/>
+                    </a:lnR>
+                    <a:lnT w="9525" cap="flat" cmpd="sng" algn="ctr">
+                      <a:solidFill>
+                        <a:srgbClr val="E2E4E8"/>
+                      </a:solidFill>
+                      <a:prstDash val="solid"/>
+                      <a:round/>
+                      <a:headEnd type="none" w="med" len="med"/>
+                      <a:tailEnd type="none" w="med" len="med"/>
+                    </a:lnT>
+                    <a:lnB w="9525" cap="flat" cmpd="sng" algn="ctr">
+                      <a:solidFill>
+                        <a:srgbClr val="E2E4E8"/>
+                      </a:solidFill>
+                      <a:prstDash val="solid"/>
+                      <a:round/>
+                      <a:headEnd type="none" w="med" len="med"/>
+                      <a:tailEnd type="none" w="med" len="med"/>
+                    </a:lnB>
+                    <a:solidFill>
+                      <a:srgbClr val="FFFFFF"/>
+                    </a:solidFill>
+                  </a:tcPr>
+                </a:tc>
+                <a:tc>
+                  <a:txBody>
+                    <a:bodyPr/>
+                    <a:lstStyle/>
+                    <a:p>
+                      <a:pPr algn="l" indent="0" marL="0">
+                        <a:buNone/>
+                      </a:pPr>
+                      <a:r>
+                        <a:rPr lang="en-US" sz="1200" dirty="0">
+                          <a:solidFill>
+                            <a:srgbClr val="1A2440"/>
+                          </a:solidFill>
+                          <a:latin typeface="Noto Sans CJK KR" pitchFamily="34" charset="0"/>
+                          <a:ea typeface="Noto Sans CJK KR" pitchFamily="34" charset="-122"/>
+                          <a:cs typeface="Noto Sans CJK KR" pitchFamily="34" charset="-120"/>
+                        </a:rPr>
+                        <a:t>보호자 동반 조건까지 공식 원문으로 재확인했지만, 최종 판단은 현장 신장 측정대</a:t>
+                      </a:r>
+                      <a:endParaRPr lang="en-US" sz="1200" dirty="0">
+                        <a:latin typeface="Noto Sans CJK KR" charset="0"/>
+                        <a:ea typeface="Noto Sans CJK KR" charset="0"/>
+                        <a:cs typeface="Noto Sans CJK KR" charset="0"/>
+                      </a:endParaRPr>
+                    </a:p>
+                  </a:txBody>
+                  <a:tcPr marL="91440" marR="91440" marT="45720" marB="45720" anchor="ctr">
+                    <a:lnL w="9525" cap="flat" cmpd="sng" algn="ctr">
+                      <a:solidFill>
+                        <a:srgbClr val="E2E4E8"/>
+                      </a:solidFill>
+                      <a:prstDash val="solid"/>
+                      <a:round/>
+                      <a:headEnd type="none" w="med" len="med"/>
+                      <a:tailEnd type="none" w="med" len="med"/>
+                    </a:lnL>
+                    <a:lnR w="9525" cap="flat" cmpd="sng" algn="ctr">
+                      <a:solidFill>
+                        <a:srgbClr val="E2E4E8"/>
+                      </a:solidFill>
+                      <a:prstDash val="solid"/>
+                      <a:round/>
+                      <a:headEnd type="none" w="med" len="med"/>
+                      <a:tailEnd type="none" w="med" len="med"/>
+                    </a:lnR>
+                    <a:lnT w="9525" cap="flat" cmpd="sng" algn="ctr">
+                      <a:solidFill>
+                        <a:srgbClr val="E2E4E8"/>
+                      </a:solidFill>
+                      <a:prstDash val="solid"/>
+                      <a:round/>
+                      <a:headEnd type="none" w="med" len="med"/>
+                      <a:tailEnd type="none" w="med" len="med"/>
+                    </a:lnT>
+                    <a:lnB w="9525" cap="flat" cmpd="sng" algn="ctr">
+                      <a:solidFill>
+                        <a:srgbClr val="E2E4E8"/>
+                      </a:solidFill>
+                      <a:prstDash val="solid"/>
+                      <a:round/>
+                      <a:headEnd type="none" w="med" len="med"/>
+                      <a:tailEnd type="none" w="med" len="med"/>
+                    </a:lnB>
+                    <a:solidFill>
+                      <a:srgbClr val="FFFFFF"/>
+                    </a:solidFill>
+                  </a:tcPr>
+                </a:tc>
+                <a:tc>
+                  <a:txBody>
+                    <a:bodyPr/>
+                    <a:lstStyle/>
+                    <a:p>
+                      <a:pPr algn="ctr" indent="0" marL="0">
+                        <a:buNone/>
+                      </a:pPr>
+                      <a:r>
+                        <a:rPr lang="en-US" sz="1200" dirty="0">
+                          <a:solidFill>
+                            <a:srgbClr val="0B6E64"/>
+                          </a:solidFill>
+                          <a:latin typeface="Noto Sans CJK KR" pitchFamily="34" charset="0"/>
+                          <a:ea typeface="Noto Sans CJK KR" pitchFamily="34" charset="-122"/>
+                          <a:cs typeface="Noto Sans CJK KR" pitchFamily="34" charset="-120"/>
+                        </a:rPr>
+                        <a:t>A</a:t>
+                      </a:r>
+                      <a:endParaRPr lang="en-US" sz="1200" dirty="0">
+                        <a:latin typeface="Noto Sans CJK KR" charset="0"/>
+                        <a:ea typeface="Noto Sans CJK KR" charset="0"/>
+                        <a:cs typeface="Noto Sans CJK KR" charset="0"/>
+                      </a:endParaRPr>
+                    </a:p>
+                  </a:txBody>
+                  <a:tcPr marL="91440" marR="91440" marT="45720" marB="45720" anchor="ctr">
+                    <a:lnL w="9525" cap="flat" cmpd="sng" algn="ctr">
+                      <a:solidFill>
+                        <a:srgbClr val="E2E4E8"/>
+                      </a:solidFill>
+                      <a:prstDash val="solid"/>
+                      <a:round/>
+                      <a:headEnd type="none" w="med" len="med"/>
+                      <a:tailEnd type="none" w="med" len="med"/>
+                    </a:lnL>
+                    <a:lnR w="9525" cap="flat" cmpd="sng" algn="ctr">
+                      <a:solidFill>
+                        <a:srgbClr val="E2E4E8"/>
+                      </a:solidFill>
+                      <a:prstDash val="solid"/>
+                      <a:round/>
+                      <a:headEnd type="none" w="med" len="med"/>
+                      <a:tailEnd type="none" w="med" len="med"/>
+                    </a:lnR>
+                    <a:lnT w="9525" cap="flat" cmpd="sng" algn="ctr">
+                      <a:solidFill>
+                        <a:srgbClr val="E2E4E8"/>
+                      </a:solidFill>
+                      <a:prstDash val="solid"/>
+                      <a:round/>
+                      <a:headEnd type="none" w="med" len="med"/>
+                      <a:tailEnd type="none" w="med" len="med"/>
+                    </a:lnT>
+                    <a:lnB w="9525" cap="flat" cmpd="sng" algn="ctr">
+                      <a:solidFill>
+                        <a:srgbClr val="E2E4E8"/>
+                      </a:solidFill>
+                      <a:prstDash val="solid"/>
+                      <a:round/>
+                      <a:headEnd type="none" w="med" len="med"/>
+                      <a:tailEnd type="none" w="med" len="med"/>
+                    </a:lnB>
+                    <a:solidFill>
+                      <a:srgbClr val="FFFFFF"/>
+                    </a:solidFill>
+                  </a:tcPr>
+                </a:tc>
+              </a:tr>
+              <a:tr h="566928">
+                <a:tc>
+                  <a:txBody>
+                    <a:bodyPr/>
+                    <a:lstStyle/>
+                    <a:p>
+                      <a:pPr algn="l" indent="0" marL="0">
+                        <a:buNone/>
+                      </a:pPr>
+                      <a:r>
+                        <a:rPr lang="en-US" sz="1200" b="1" dirty="0">
+                          <a:solidFill>
+                            <a:srgbClr val="1A2440"/>
+                          </a:solidFill>
+                          <a:latin typeface="Noto Sans CJK KR" pitchFamily="34" charset="0"/>
+                          <a:ea typeface="Noto Sans CJK KR" pitchFamily="34" charset="-122"/>
+                          <a:cs typeface="Noto Sans CJK KR" pitchFamily="34" charset="-120"/>
+                        </a:rPr>
+                        <a:t>PINK 구역 배정 불확실</a:t>
+                      </a:r>
+                      <a:endParaRPr lang="en-US" sz="1200" dirty="0">
+                        <a:latin typeface="Noto Sans CJK KR" charset="0"/>
+                        <a:ea typeface="Noto Sans CJK KR" charset="0"/>
+                        <a:cs typeface="Noto Sans CJK KR" charset="0"/>
+                      </a:endParaRPr>
+                    </a:p>
+                  </a:txBody>
+                  <a:tcPr marL="91440" marR="91440" marT="45720" marB="45720" anchor="ctr">
+                    <a:lnL w="9525" cap="flat" cmpd="sng" algn="ctr">
+                      <a:solidFill>
+                        <a:srgbClr val="E2E4E8"/>
+                      </a:solidFill>
+                      <a:prstDash val="solid"/>
+                      <a:round/>
+                      <a:headEnd type="none" w="med" len="med"/>
+                      <a:tailEnd type="none" w="med" len="med"/>
+                    </a:lnL>
+                    <a:lnR w="9525" cap="flat" cmpd="sng" algn="ctr">
+                      <a:solidFill>
+                        <a:srgbClr val="E2E4E8"/>
+                      </a:solidFill>
+                      <a:prstDash val="solid"/>
+                      <a:round/>
+                      <a:headEnd type="none" w="med" len="med"/>
+                      <a:tailEnd type="none" w="med" len="med"/>
+                    </a:lnR>
+                    <a:lnT w="9525" cap="flat" cmpd="sng" algn="ctr">
+                      <a:solidFill>
+                        <a:srgbClr val="E2E4E8"/>
+                      </a:solidFill>
+                      <a:prstDash val="solid"/>
+                      <a:round/>
+                      <a:headEnd type="none" w="med" len="med"/>
+                      <a:tailEnd type="none" w="med" len="med"/>
+                    </a:lnT>
+                    <a:lnB w="9525" cap="flat" cmpd="sng" algn="ctr">
+                      <a:solidFill>
+                        <a:srgbClr val="E2E4E8"/>
+                      </a:solidFill>
+                      <a:prstDash val="solid"/>
+                      <a:round/>
+                      <a:headEnd type="none" w="med" len="med"/>
+                      <a:tailEnd type="none" w="med" len="med"/>
+                    </a:lnB>
+                    <a:solidFill>
+                      <a:srgbClr val="F5F6F8"/>
+                    </a:solidFill>
+                  </a:tcPr>
+                </a:tc>
+                <a:tc>
+                  <a:txBody>
+                    <a:bodyPr/>
+                    <a:lstStyle/>
+                    <a:p>
+                      <a:pPr algn="l" indent="0" marL="0">
+                        <a:buNone/>
+                      </a:pPr>
+                      <a:r>
+                        <a:rPr lang="en-US" sz="1200" dirty="0">
+                          <a:solidFill>
+                            <a:srgbClr val="1A2440"/>
+                          </a:solidFill>
+                          <a:latin typeface="Noto Sans CJK KR" pitchFamily="34" charset="0"/>
+                          <a:ea typeface="Noto Sans CJK KR" pitchFamily="34" charset="-122"/>
+                          <a:cs typeface="Noto Sans CJK KR" pitchFamily="34" charset="-120"/>
+                        </a:rPr>
+                        <a:t>안내 요원에게 요청하는 사항이라 보장 안 됨 — 못 받으면 도보 8~10분보다 더 걸릴 수 있음</a:t>
+                      </a:r>
+                      <a:endParaRPr lang="en-US" sz="1200" dirty="0">
+                        <a:latin typeface="Noto Sans CJK KR" charset="0"/>
+                        <a:ea typeface="Noto Sans CJK KR" charset="0"/>
+                        <a:cs typeface="Noto Sans CJK KR" charset="0"/>
+                      </a:endParaRPr>
+                    </a:p>
+                  </a:txBody>
+                  <a:tcPr marL="91440" marR="91440" marT="45720" marB="45720" anchor="ctr">
+                    <a:lnL w="9525" cap="flat" cmpd="sng" algn="ctr">
+                      <a:solidFill>
+                        <a:srgbClr val="E2E4E8"/>
+                      </a:solidFill>
+                      <a:prstDash val="solid"/>
+                      <a:round/>
+                      <a:headEnd type="none" w="med" len="med"/>
+                      <a:tailEnd type="none" w="med" len="med"/>
+                    </a:lnL>
+                    <a:lnR w="9525" cap="flat" cmpd="sng" algn="ctr">
+                      <a:solidFill>
+                        <a:srgbClr val="E2E4E8"/>
+                      </a:solidFill>
+                      <a:prstDash val="solid"/>
+                      <a:round/>
+                      <a:headEnd type="none" w="med" len="med"/>
+                      <a:tailEnd type="none" w="med" len="med"/>
+                    </a:lnR>
+                    <a:lnT w="9525" cap="flat" cmpd="sng" algn="ctr">
+                      <a:solidFill>
+                        <a:srgbClr val="E2E4E8"/>
+                      </a:solidFill>
+                      <a:prstDash val="solid"/>
+                      <a:round/>
+                      <a:headEnd type="none" w="med" len="med"/>
+                      <a:tailEnd type="none" w="med" len="med"/>
+                    </a:lnT>
+                    <a:lnB w="9525" cap="flat" cmpd="sng" algn="ctr">
+                      <a:solidFill>
+                        <a:srgbClr val="E2E4E8"/>
+                      </a:solidFill>
+                      <a:prstDash val="solid"/>
+                      <a:round/>
+                      <a:headEnd type="none" w="med" len="med"/>
+                      <a:tailEnd type="none" w="med" len="med"/>
+                    </a:lnB>
+                    <a:solidFill>
+                      <a:srgbClr val="F5F6F8"/>
+                    </a:solidFill>
+                  </a:tcPr>
+                </a:tc>
+                <a:tc>
+                  <a:txBody>
+                    <a:bodyPr/>
+                    <a:lstStyle/>
+                    <a:p>
+                      <a:pPr algn="ctr" indent="0" marL="0">
+                        <a:buNone/>
+                      </a:pPr>
+                      <a:r>
+                        <a:rPr lang="en-US" sz="1200" dirty="0">
+                          <a:solidFill>
+                            <a:srgbClr val="D62839"/>
+                          </a:solidFill>
+                          <a:latin typeface="Noto Sans CJK KR" pitchFamily="34" charset="0"/>
+                          <a:ea typeface="Noto Sans CJK KR" pitchFamily="34" charset="-122"/>
+                          <a:cs typeface="Noto Sans CJK KR" pitchFamily="34" charset="-120"/>
+                        </a:rPr>
+                        <a:t>B</a:t>
+                      </a:r>
+                      <a:endParaRPr lang="en-US" sz="1200" dirty="0">
+                        <a:latin typeface="Noto Sans CJK KR" charset="0"/>
+                        <a:ea typeface="Noto Sans CJK KR" charset="0"/>
+                        <a:cs typeface="Noto Sans CJK KR" charset="0"/>
+                      </a:endParaRPr>
+                    </a:p>
+                  </a:txBody>
+                  <a:tcPr marL="91440" marR="91440" marT="45720" marB="45720" anchor="ctr">
+                    <a:lnL w="9525" cap="flat" cmpd="sng" algn="ctr">
+                      <a:solidFill>
+                        <a:srgbClr val="E2E4E8"/>
+                      </a:solidFill>
+                      <a:prstDash val="solid"/>
+                      <a:round/>
+                      <a:headEnd type="none" w="med" len="med"/>
+                      <a:tailEnd type="none" w="med" len="med"/>
+                    </a:lnL>
+                    <a:lnR w="9525" cap="flat" cmpd="sng" algn="ctr">
+                      <a:solidFill>
+                        <a:srgbClr val="E2E4E8"/>
+                      </a:solidFill>
+                      <a:prstDash val="solid"/>
+                      <a:round/>
+                      <a:headEnd type="none" w="med" len="med"/>
+                      <a:tailEnd type="none" w="med" len="med"/>
+                    </a:lnR>
+                    <a:lnT w="9525" cap="flat" cmpd="sng" algn="ctr">
+                      <a:solidFill>
+                        <a:srgbClr val="E2E4E8"/>
+                      </a:solidFill>
+                      <a:prstDash val="solid"/>
+                      <a:round/>
+                      <a:headEnd type="none" w="med" len="med"/>
+                      <a:tailEnd type="none" w="med" len="med"/>
+                    </a:lnT>
+                    <a:lnB w="9525" cap="flat" cmpd="sng" algn="ctr">
+                      <a:solidFill>
+                        <a:srgbClr val="E2E4E8"/>
+                      </a:solidFill>
+                      <a:prstDash val="solid"/>
+                      <a:round/>
+                      <a:headEnd type="none" w="med" len="med"/>
+                      <a:tailEnd type="none" w="med" len="med"/>
+                    </a:lnB>
+                    <a:solidFill>
+                      <a:srgbClr val="F5F6F8"/>
+                    </a:solidFill>
+                  </a:tcPr>
+                </a:tc>
+              </a:tr>
+              <a:tr h="566928">
+                <a:tc>
+                  <a:txBody>
+                    <a:bodyPr/>
+                    <a:lstStyle/>
+                    <a:p>
+                      <a:pPr algn="l" indent="0" marL="0">
+                        <a:buNone/>
+                      </a:pPr>
+                      <a:r>
+                        <a:rPr lang="en-US" sz="1200" b="1" dirty="0">
+                          <a:solidFill>
+                            <a:srgbClr val="1A2440"/>
+                          </a:solidFill>
+                          <a:latin typeface="Noto Sans CJK KR" pitchFamily="34" charset="0"/>
+                          <a:ea typeface="Noto Sans CJK KR" pitchFamily="34" charset="-122"/>
+                          <a:cs typeface="Noto Sans CJK KR" pitchFamily="34" charset="-120"/>
+                        </a:rPr>
+                        <a:t>구역 간 이동 시간은 전부 추정치</a:t>
+                      </a:r>
+                      <a:endParaRPr lang="en-US" sz="1200" dirty="0">
+                        <a:latin typeface="Noto Sans CJK KR" charset="0"/>
+                        <a:ea typeface="Noto Sans CJK KR" charset="0"/>
+                        <a:cs typeface="Noto Sans CJK KR" charset="0"/>
+                      </a:endParaRPr>
+                    </a:p>
+                  </a:txBody>
+                  <a:tcPr marL="91440" marR="91440" marT="45720" marB="45720" anchor="ctr">
+                    <a:lnL w="9525" cap="flat" cmpd="sng" algn="ctr">
+                      <a:solidFill>
+                        <a:srgbClr val="E2E4E8"/>
+                      </a:solidFill>
+                      <a:prstDash val="solid"/>
+                      <a:round/>
+                      <a:headEnd type="none" w="med" len="med"/>
+                      <a:tailEnd type="none" w="med" len="med"/>
+                    </a:lnL>
+                    <a:lnR w="9525" cap="flat" cmpd="sng" algn="ctr">
+                      <a:solidFill>
+                        <a:srgbClr val="E2E4E8"/>
+                      </a:solidFill>
+                      <a:prstDash val="solid"/>
+                      <a:round/>
+                      <a:headEnd type="none" w="med" len="med"/>
+                      <a:tailEnd type="none" w="med" len="med"/>
+                    </a:lnR>
+                    <a:lnT w="9525" cap="flat" cmpd="sng" algn="ctr">
+                      <a:solidFill>
+                        <a:srgbClr val="E2E4E8"/>
+                      </a:solidFill>
+                      <a:prstDash val="solid"/>
+                      <a:round/>
+                      <a:headEnd type="none" w="med" len="med"/>
+                      <a:tailEnd type="none" w="med" len="med"/>
+                    </a:lnT>
+                    <a:lnB w="9525" cap="flat" cmpd="sng" algn="ctr">
+                      <a:solidFill>
+                        <a:srgbClr val="E2E4E8"/>
+                      </a:solidFill>
+                      <a:prstDash val="solid"/>
+                      <a:round/>
+                      <a:headEnd type="none" w="med" len="med"/>
+                      <a:tailEnd type="none" w="med" len="med"/>
+                    </a:lnB>
+                    <a:solidFill>
+                      <a:srgbClr val="FFFFFF"/>
+                    </a:solidFill>
+                  </a:tcPr>
+                </a:tc>
+                <a:tc>
+                  <a:txBody>
+                    <a:bodyPr/>
+                    <a:lstStyle/>
+                    <a:p>
+                      <a:pPr algn="l" indent="0" marL="0">
+                        <a:buNone/>
+                      </a:pPr>
+                      <a:r>
+                        <a:rPr lang="en-US" sz="1200" dirty="0">
+                          <a:solidFill>
+                            <a:srgbClr val="1A2440"/>
+                          </a:solidFill>
+                          <a:latin typeface="Noto Sans CJK KR" pitchFamily="34" charset="0"/>
+                          <a:ea typeface="Noto Sans CJK KR" pitchFamily="34" charset="-122"/>
+                          <a:cs typeface="Noto Sans CJK KR" pitchFamily="34" charset="-120"/>
+                        </a:rPr>
+                        <a:t>공식 파크맵이 “실제 스케일 아님”이라 명시 — 인접 3~5분, 대형 이동 12~15분은 순서 기반 추정</a:t>
+                      </a:r>
+                      <a:endParaRPr lang="en-US" sz="1200" dirty="0">
+                        <a:latin typeface="Noto Sans CJK KR" charset="0"/>
+                        <a:ea typeface="Noto Sans CJK KR" charset="0"/>
+                        <a:cs typeface="Noto Sans CJK KR" charset="0"/>
+                      </a:endParaRPr>
+                    </a:p>
+                  </a:txBody>
+                  <a:tcPr marL="91440" marR="91440" marT="45720" marB="45720" anchor="ctr">
+                    <a:lnL w="9525" cap="flat" cmpd="sng" algn="ctr">
+                      <a:solidFill>
+                        <a:srgbClr val="E2E4E8"/>
+                      </a:solidFill>
+                      <a:prstDash val="solid"/>
+                      <a:round/>
+                      <a:headEnd type="none" w="med" len="med"/>
+                      <a:tailEnd type="none" w="med" len="med"/>
+                    </a:lnL>
+                    <a:lnR w="9525" cap="flat" cmpd="sng" algn="ctr">
+                      <a:solidFill>
+                        <a:srgbClr val="E2E4E8"/>
+                      </a:solidFill>
+                      <a:prstDash val="solid"/>
+                      <a:round/>
+                      <a:headEnd type="none" w="med" len="med"/>
+                      <a:tailEnd type="none" w="med" len="med"/>
+                    </a:lnR>
+                    <a:lnT w="9525" cap="flat" cmpd="sng" algn="ctr">
+                      <a:solidFill>
+                        <a:srgbClr val="E2E4E8"/>
+                      </a:solidFill>
+                      <a:prstDash val="solid"/>
+                      <a:round/>
+                      <a:headEnd type="none" w="med" len="med"/>
+                      <a:tailEnd type="none" w="med" len="med"/>
+                    </a:lnT>
+                    <a:lnB w="9525" cap="flat" cmpd="sng" algn="ctr">
+                      <a:solidFill>
+                        <a:srgbClr val="E2E4E8"/>
+                      </a:solidFill>
+                      <a:prstDash val="solid"/>
+                      <a:round/>
+                      <a:headEnd type="none" w="med" len="med"/>
+                      <a:tailEnd type="none" w="med" len="med"/>
+                    </a:lnB>
+                    <a:solidFill>
+                      <a:srgbClr val="FFFFFF"/>
+                    </a:solidFill>
+                  </a:tcPr>
+                </a:tc>
+                <a:tc>
+                  <a:txBody>
+                    <a:bodyPr/>
+                    <a:lstStyle/>
+                    <a:p>
+                      <a:pPr algn="ctr" indent="0" marL="0">
+                        <a:buNone/>
+                      </a:pPr>
+                      <a:r>
+                        <a:rPr lang="en-US" sz="1200" dirty="0">
+                          <a:solidFill>
+                            <a:srgbClr val="D62839"/>
+                          </a:solidFill>
+                          <a:latin typeface="Noto Sans CJK KR" pitchFamily="34" charset="0"/>
+                          <a:ea typeface="Noto Sans CJK KR" pitchFamily="34" charset="-122"/>
+                          <a:cs typeface="Noto Sans CJK KR" pitchFamily="34" charset="-120"/>
+                        </a:rPr>
+                        <a:t>D</a:t>
+                      </a:r>
+                      <a:endParaRPr lang="en-US" sz="1200" dirty="0">
+                        <a:latin typeface="Noto Sans CJK KR" charset="0"/>
+                        <a:ea typeface="Noto Sans CJK KR" charset="0"/>
+                        <a:cs typeface="Noto Sans CJK KR" charset="0"/>
+                      </a:endParaRPr>
+                    </a:p>
+                  </a:txBody>
+                  <a:tcPr marL="91440" marR="91440" marT="45720" marB="45720" anchor="ctr">
+                    <a:lnL w="9525" cap="flat" cmpd="sng" algn="ctr">
+                      <a:solidFill>
+                        <a:srgbClr val="E2E4E8"/>
+                      </a:solidFill>
+                      <a:prstDash val="solid"/>
+                      <a:round/>
+                      <a:headEnd type="none" w="med" len="med"/>
+                      <a:tailEnd type="none" w="med" len="med"/>
+                    </a:lnL>
+                    <a:lnR w="9525" cap="flat" cmpd="sng" algn="ctr">
+                      <a:solidFill>
+                        <a:srgbClr val="E2E4E8"/>
+                      </a:solidFill>
+                      <a:prstDash val="solid"/>
+                      <a:round/>
+                      <a:headEnd type="none" w="med" len="med"/>
+                      <a:tailEnd type="none" w="med" len="med"/>
+                    </a:lnR>
+                    <a:lnT w="9525" cap="flat" cmpd="sng" algn="ctr">
+                      <a:solidFill>
+                        <a:srgbClr val="E2E4E8"/>
+                      </a:solidFill>
+                      <a:prstDash val="solid"/>
+                      <a:round/>
+                      <a:headEnd type="none" w="med" len="med"/>
+                      <a:tailEnd type="none" w="med" len="med"/>
+                    </a:lnT>
+                    <a:lnB w="9525" cap="flat" cmpd="sng" algn="ctr">
+                      <a:solidFill>
+                        <a:srgbClr val="E2E4E8"/>
+                      </a:solidFill>
+                      <a:prstDash val="solid"/>
+                      <a:round/>
+                      <a:headEnd type="none" w="med" len="med"/>
+                      <a:tailEnd type="none" w="med" len="med"/>
+                    </a:lnB>
+                    <a:solidFill>
+                      <a:srgbClr val="FFFFFF"/>
+                    </a:solidFill>
+                  </a:tcPr>
+                </a:tc>
+              </a:tr>
+              <a:tr h="566928">
+                <a:tc>
+                  <a:txBody>
+                    <a:bodyPr/>
+                    <a:lstStyle/>
+                    <a:p>
+                      <a:pPr algn="l" indent="0" marL="0">
+                        <a:buNone/>
+                      </a:pPr>
+                      <a:r>
+                        <a:rPr lang="en-US" sz="1200" b="1" dirty="0">
+                          <a:solidFill>
+                            <a:srgbClr val="1A2440"/>
+                          </a:solidFill>
+                          <a:latin typeface="Noto Sans CJK KR" pitchFamily="34" charset="0"/>
+                          <a:ea typeface="Noto Sans CJK KR" pitchFamily="34" charset="-122"/>
+                          <a:cs typeface="Noto Sans CJK KR" pitchFamily="34" charset="-120"/>
+                        </a:rPr>
+                        <a:t>몬스터 랠리 스탬프 목록</a:t>
+                      </a:r>
+                      <a:endParaRPr lang="en-US" sz="1200" dirty="0">
+                        <a:latin typeface="Noto Sans CJK KR" charset="0"/>
+                        <a:ea typeface="Noto Sans CJK KR" charset="0"/>
+                        <a:cs typeface="Noto Sans CJK KR" charset="0"/>
+                      </a:endParaRPr>
+                    </a:p>
+                  </a:txBody>
+                  <a:tcPr marL="91440" marR="91440" marT="45720" marB="45720" anchor="ctr">
+                    <a:lnL w="9525" cap="flat" cmpd="sng" algn="ctr">
+                      <a:solidFill>
+                        <a:srgbClr val="E2E4E8"/>
+                      </a:solidFill>
+                      <a:prstDash val="solid"/>
+                      <a:round/>
+                      <a:headEnd type="none" w="med" len="med"/>
+                      <a:tailEnd type="none" w="med" len="med"/>
+                    </a:lnL>
+                    <a:lnR w="9525" cap="flat" cmpd="sng" algn="ctr">
+                      <a:solidFill>
+                        <a:srgbClr val="E2E4E8"/>
+                      </a:solidFill>
+                      <a:prstDash val="solid"/>
+                      <a:round/>
+                      <a:headEnd type="none" w="med" len="med"/>
+                      <a:tailEnd type="none" w="med" len="med"/>
+                    </a:lnR>
+                    <a:lnT w="9525" cap="flat" cmpd="sng" algn="ctr">
+                      <a:solidFill>
+                        <a:srgbClr val="E2E4E8"/>
+                      </a:solidFill>
+                      <a:prstDash val="solid"/>
+                      <a:round/>
+                      <a:headEnd type="none" w="med" len="med"/>
+                      <a:tailEnd type="none" w="med" len="med"/>
+                    </a:lnT>
+                    <a:lnB w="9525" cap="flat" cmpd="sng" algn="ctr">
+                      <a:solidFill>
+                        <a:srgbClr val="E2E4E8"/>
+                      </a:solidFill>
+                      <a:prstDash val="solid"/>
+                      <a:round/>
+                      <a:headEnd type="none" w="med" len="med"/>
+                      <a:tailEnd type="none" w="med" len="med"/>
+                    </a:lnB>
+                    <a:solidFill>
+                      <a:srgbClr val="F5F6F8"/>
+                    </a:solidFill>
+                  </a:tcPr>
+                </a:tc>
+                <a:tc>
+                  <a:txBody>
+                    <a:bodyPr/>
+                    <a:lstStyle/>
+                    <a:p>
+                      <a:pPr algn="l" indent="0" marL="0">
+                        <a:buNone/>
+                      </a:pPr>
+                      <a:r>
+                        <a:rPr lang="en-US" sz="1200" dirty="0">
+                          <a:solidFill>
+                            <a:srgbClr val="1A2440"/>
+                          </a:solidFill>
+                          <a:latin typeface="Noto Sans CJK KR" pitchFamily="34" charset="0"/>
+                          <a:ea typeface="Noto Sans CJK KR" pitchFamily="34" charset="-122"/>
+                          <a:cs typeface="Noto Sans CJK KR" pitchFamily="34" charset="-120"/>
+                        </a:rPr>
+                        <a:t>단일 언론 기사 기반, 2차 교차확인 못 함 — 전단으로 현장 재확인 권장</a:t>
+                      </a:r>
+                      <a:endParaRPr lang="en-US" sz="1200" dirty="0">
+                        <a:latin typeface="Noto Sans CJK KR" charset="0"/>
+                        <a:ea typeface="Noto Sans CJK KR" charset="0"/>
+                        <a:cs typeface="Noto Sans CJK KR" charset="0"/>
+                      </a:endParaRPr>
+                    </a:p>
+                  </a:txBody>
+                  <a:tcPr marL="91440" marR="91440" marT="45720" marB="45720" anchor="ctr">
+                    <a:lnL w="9525" cap="flat" cmpd="sng" algn="ctr">
+                      <a:solidFill>
+                        <a:srgbClr val="E2E4E8"/>
+                      </a:solidFill>
+                      <a:prstDash val="solid"/>
+                      <a:round/>
+                      <a:headEnd type="none" w="med" len="med"/>
+                      <a:tailEnd type="none" w="med" len="med"/>
+                    </a:lnL>
+                    <a:lnR w="9525" cap="flat" cmpd="sng" algn="ctr">
+                      <a:solidFill>
+                        <a:srgbClr val="E2E4E8"/>
+                      </a:solidFill>
+                      <a:prstDash val="solid"/>
+                      <a:round/>
+                      <a:headEnd type="none" w="med" len="med"/>
+                      <a:tailEnd type="none" w="med" len="med"/>
+                    </a:lnR>
+                    <a:lnT w="9525" cap="flat" cmpd="sng" algn="ctr">
+                      <a:solidFill>
+                        <a:srgbClr val="E2E4E8"/>
+                      </a:solidFill>
+                      <a:prstDash val="solid"/>
+                      <a:round/>
+                      <a:headEnd type="none" w="med" len="med"/>
+                      <a:tailEnd type="none" w="med" len="med"/>
+                    </a:lnT>
+                    <a:lnB w="9525" cap="flat" cmpd="sng" algn="ctr">
+                      <a:solidFill>
+                        <a:srgbClr val="E2E4E8"/>
+                      </a:solidFill>
+                      <a:prstDash val="solid"/>
+                      <a:round/>
+                      <a:headEnd type="none" w="med" len="med"/>
+                      <a:tailEnd type="none" w="med" len="med"/>
+                    </a:lnB>
+                    <a:solidFill>
+                      <a:srgbClr val="F5F6F8"/>
+                    </a:solidFill>
+                  </a:tcPr>
+                </a:tc>
+                <a:tc>
+                  <a:txBody>
+                    <a:bodyPr/>
+                    <a:lstStyle/>
+                    <a:p>
+                      <a:pPr algn="ctr" indent="0" marL="0">
+                        <a:buNone/>
+                      </a:pPr>
+                      <a:r>
+                        <a:rPr lang="en-US" sz="1200" dirty="0">
+                          <a:solidFill>
+                            <a:srgbClr val="D62839"/>
+                          </a:solidFill>
+                          <a:latin typeface="Noto Sans CJK KR" pitchFamily="34" charset="0"/>
+                          <a:ea typeface="Noto Sans CJK KR" pitchFamily="34" charset="-122"/>
+                          <a:cs typeface="Noto Sans CJK KR" pitchFamily="34" charset="-120"/>
+                        </a:rPr>
+                        <a:t>B</a:t>
+                      </a:r>
+                      <a:endParaRPr lang="en-US" sz="1200" dirty="0">
+                        <a:latin typeface="Noto Sans CJK KR" charset="0"/>
+                        <a:ea typeface="Noto Sans CJK KR" charset="0"/>
+                        <a:cs typeface="Noto Sans CJK KR" charset="0"/>
+                      </a:endParaRPr>
+                    </a:p>
+                  </a:txBody>
+                  <a:tcPr marL="91440" marR="91440" marT="45720" marB="45720" anchor="ctr">
+                    <a:lnL w="9525" cap="flat" cmpd="sng" algn="ctr">
+                      <a:solidFill>
+                        <a:srgbClr val="E2E4E8"/>
+                      </a:solidFill>
+                      <a:prstDash val="solid"/>
+                      <a:round/>
+                      <a:headEnd type="none" w="med" len="med"/>
+                      <a:tailEnd type="none" w="med" len="med"/>
+                    </a:lnL>
+                    <a:lnR w="9525" cap="flat" cmpd="sng" algn="ctr">
+                      <a:solidFill>
+                        <a:srgbClr val="E2E4E8"/>
+                      </a:solidFill>
+                      <a:prstDash val="solid"/>
+                      <a:round/>
+                      <a:headEnd type="none" w="med" len="med"/>
+                      <a:tailEnd type="none" w="med" len="med"/>
+                    </a:lnR>
+                    <a:lnT w="9525" cap="flat" cmpd="sng" algn="ctr">
+                      <a:solidFill>
+                        <a:srgbClr val="E2E4E8"/>
+                      </a:solidFill>
+                      <a:prstDash val="solid"/>
+                      <a:round/>
+                      <a:headEnd type="none" w="med" len="med"/>
+                      <a:tailEnd type="none" w="med" len="med"/>
+                    </a:lnT>
+                    <a:lnB w="9525" cap="flat" cmpd="sng" algn="ctr">
+                      <a:solidFill>
+                        <a:srgbClr val="E2E4E8"/>
+                      </a:solidFill>
+                      <a:prstDash val="solid"/>
+                      <a:round/>
+                      <a:headEnd type="none" w="med" len="med"/>
+                      <a:tailEnd type="none" w="med" len="med"/>
+                    </a:lnB>
+                    <a:solidFill>
+                      <a:srgbClr val="F5F6F8"/>
+                    </a:solidFill>
+                  </a:tcPr>
+                </a:tc>
+              </a:tr>
+              <a:tr h="566928">
+                <a:tc>
+                  <a:txBody>
+                    <a:bodyPr/>
+                    <a:lstStyle/>
+                    <a:p>
+                      <a:pPr algn="l" indent="0" marL="0">
+                        <a:buNone/>
+                      </a:pPr>
+                      <a:r>
+                        <a:rPr lang="en-US" sz="1200" b="1" dirty="0">
+                          <a:solidFill>
+                            <a:srgbClr val="1A2440"/>
+                          </a:solidFill>
+                          <a:latin typeface="Noto Sans CJK KR" pitchFamily="34" charset="0"/>
+                          <a:ea typeface="Noto Sans CJK KR" pitchFamily="34" charset="-122"/>
+                          <a:cs typeface="Noto Sans CJK KR" pitchFamily="34" charset="-120"/>
+                        </a:rPr>
+                        <a:t>일교차·젖는 라이드</a:t>
+                      </a:r>
+                      <a:endParaRPr lang="en-US" sz="1200" dirty="0">
+                        <a:latin typeface="Noto Sans CJK KR" charset="0"/>
+                        <a:ea typeface="Noto Sans CJK KR" charset="0"/>
+                        <a:cs typeface="Noto Sans CJK KR" charset="0"/>
+                      </a:endParaRPr>
+                    </a:p>
+                  </a:txBody>
+                  <a:tcPr marL="91440" marR="91440" marT="45720" marB="45720" anchor="ctr">
+                    <a:lnL w="9525" cap="flat" cmpd="sng" algn="ctr">
+                      <a:solidFill>
+                        <a:srgbClr val="E2E4E8"/>
+                      </a:solidFill>
+                      <a:prstDash val="solid"/>
+                      <a:round/>
+                      <a:headEnd type="none" w="med" len="med"/>
+                      <a:tailEnd type="none" w="med" len="med"/>
+                    </a:lnL>
+                    <a:lnR w="9525" cap="flat" cmpd="sng" algn="ctr">
+                      <a:solidFill>
+                        <a:srgbClr val="E2E4E8"/>
+                      </a:solidFill>
+                      <a:prstDash val="solid"/>
+                      <a:round/>
+                      <a:headEnd type="none" w="med" len="med"/>
+                      <a:tailEnd type="none" w="med" len="med"/>
+                    </a:lnR>
+                    <a:lnT w="9525" cap="flat" cmpd="sng" algn="ctr">
+                      <a:solidFill>
+                        <a:srgbClr val="E2E4E8"/>
+                      </a:solidFill>
+                      <a:prstDash val="solid"/>
+                      <a:round/>
+                      <a:headEnd type="none" w="med" len="med"/>
+                      <a:tailEnd type="none" w="med" len="med"/>
+                    </a:lnT>
+                    <a:lnB w="9525" cap="flat" cmpd="sng" algn="ctr">
+                      <a:solidFill>
+                        <a:srgbClr val="E2E4E8"/>
+                      </a:solidFill>
+                      <a:prstDash val="solid"/>
+                      <a:round/>
+                      <a:headEnd type="none" w="med" len="med"/>
+                      <a:tailEnd type="none" w="med" len="med"/>
+                    </a:lnB>
+                    <a:solidFill>
+                      <a:srgbClr val="FFFFFF"/>
+                    </a:solidFill>
+                  </a:tcPr>
+                </a:tc>
+                <a:tc>
+                  <a:txBody>
+                    <a:bodyPr/>
+                    <a:lstStyle/>
+                    <a:p>
+                      <a:pPr algn="l" indent="0" marL="0">
+                        <a:buNone/>
+                      </a:pPr>
+                      <a:r>
+                        <a:rPr lang="en-US" sz="1200" dirty="0">
+                          <a:solidFill>
+                            <a:srgbClr val="1A2440"/>
+                          </a:solidFill>
+                          <a:latin typeface="Noto Sans CJK KR" pitchFamily="34" charset="0"/>
+                          <a:ea typeface="Noto Sans CJK KR" pitchFamily="34" charset="-122"/>
+                          <a:cs typeface="Noto Sans CJK KR" pitchFamily="34" charset="-120"/>
+                        </a:rPr>
+                        <a:t>최저 12℃~최고 29℃ + Wave Racers·Coast Guard·Cinema 모두 물 사용 — 겉옷·여벌옷 필수</a:t>
+                      </a:r>
+                      <a:endParaRPr lang="en-US" sz="1200" dirty="0">
+                        <a:latin typeface="Noto Sans CJK KR" charset="0"/>
+                        <a:ea typeface="Noto Sans CJK KR" charset="0"/>
+                        <a:cs typeface="Noto Sans CJK KR" charset="0"/>
+                      </a:endParaRPr>
+                    </a:p>
+                  </a:txBody>
+                  <a:tcPr marL="91440" marR="91440" marT="45720" marB="45720" anchor="ctr">
+                    <a:lnL w="9525" cap="flat" cmpd="sng" algn="ctr">
+                      <a:solidFill>
+                        <a:srgbClr val="E2E4E8"/>
+                      </a:solidFill>
+                      <a:prstDash val="solid"/>
+                      <a:round/>
+                      <a:headEnd type="none" w="med" len="med"/>
+                      <a:tailEnd type="none" w="med" len="med"/>
+                    </a:lnL>
+                    <a:lnR w="9525" cap="flat" cmpd="sng" algn="ctr">
+                      <a:solidFill>
+                        <a:srgbClr val="E2E4E8"/>
+                      </a:solidFill>
+                      <a:prstDash val="solid"/>
+                      <a:round/>
+                      <a:headEnd type="none" w="med" len="med"/>
+                      <a:tailEnd type="none" w="med" len="med"/>
+                    </a:lnR>
+                    <a:lnT w="9525" cap="flat" cmpd="sng" algn="ctr">
+                      <a:solidFill>
+                        <a:srgbClr val="E2E4E8"/>
+                      </a:solidFill>
+                      <a:prstDash val="solid"/>
+                      <a:round/>
+                      <a:headEnd type="none" w="med" len="med"/>
+                      <a:tailEnd type="none" w="med" len="med"/>
+                    </a:lnT>
+                    <a:lnB w="9525" cap="flat" cmpd="sng" algn="ctr">
+                      <a:solidFill>
+                        <a:srgbClr val="E2E4E8"/>
+                      </a:solidFill>
+                      <a:prstDash val="solid"/>
+                      <a:round/>
+                      <a:headEnd type="none" w="med" len="med"/>
+                      <a:tailEnd type="none" w="med" len="med"/>
+                    </a:lnB>
+                    <a:solidFill>
+                      <a:srgbClr val="FFFFFF"/>
+                    </a:solidFill>
+                  </a:tcPr>
+                </a:tc>
+                <a:tc>
+                  <a:txBody>
+                    <a:bodyPr/>
+                    <a:lstStyle/>
+                    <a:p>
+                      <a:pPr algn="ctr" indent="0" marL="0">
+                        <a:buNone/>
+                      </a:pPr>
+                      <a:r>
+                        <a:rPr lang="en-US" sz="1200" dirty="0">
+                          <a:solidFill>
+                            <a:srgbClr val="0B6E64"/>
+                          </a:solidFill>
+                          <a:latin typeface="Noto Sans CJK KR" pitchFamily="34" charset="0"/>
+                          <a:ea typeface="Noto Sans CJK KR" pitchFamily="34" charset="-122"/>
+                          <a:cs typeface="Noto Sans CJK KR" pitchFamily="34" charset="-120"/>
+                        </a:rPr>
+                        <a:t>A</a:t>
+                      </a:r>
+                      <a:endParaRPr lang="en-US" sz="1200" dirty="0">
+                        <a:latin typeface="Noto Sans CJK KR" charset="0"/>
+                        <a:ea typeface="Noto Sans CJK KR" charset="0"/>
+                        <a:cs typeface="Noto Sans CJK KR" charset="0"/>
+                      </a:endParaRPr>
+                    </a:p>
+                  </a:txBody>
+                  <a:tcPr marL="91440" marR="91440" marT="45720" marB="45720" anchor="ctr">
+                    <a:lnL w="9525" cap="flat" cmpd="sng" algn="ctr">
+                      <a:solidFill>
+                        <a:srgbClr val="E2E4E8"/>
+                      </a:solidFill>
+                      <a:prstDash val="solid"/>
+                      <a:round/>
+                      <a:headEnd type="none" w="med" len="med"/>
+                      <a:tailEnd type="none" w="med" len="med"/>
+                    </a:lnL>
+                    <a:lnR w="9525" cap="flat" cmpd="sng" algn="ctr">
+                      <a:solidFill>
+                        <a:srgbClr val="E2E4E8"/>
+                      </a:solidFill>
+                      <a:prstDash val="solid"/>
+                      <a:round/>
+                      <a:headEnd type="none" w="med" len="med"/>
+                      <a:tailEnd type="none" w="med" len="med"/>
+                    </a:lnR>
+                    <a:lnT w="9525" cap="flat" cmpd="sng" algn="ctr">
+                      <a:solidFill>
+                        <a:srgbClr val="E2E4E8"/>
+                      </a:solidFill>
+                      <a:prstDash val="solid"/>
+                      <a:round/>
+                      <a:headEnd type="none" w="med" len="med"/>
+                      <a:tailEnd type="none" w="med" len="med"/>
+                    </a:lnT>
+                    <a:lnB w="9525" cap="flat" cmpd="sng" algn="ctr">
+                      <a:solidFill>
+                        <a:srgbClr val="E2E4E8"/>
+                      </a:solidFill>
+                      <a:prstDash val="solid"/>
+                      <a:round/>
+                      <a:headEnd type="none" w="med" len="med"/>
+                      <a:tailEnd type="none" w="med" len="med"/>
+                    </a:lnB>
+                    <a:solidFill>
+                      <a:srgbClr val="FFFFFF"/>
+                    </a:solidFill>
+                  </a:tcPr>
+                </a:tc>
+              </a:tr>
+            </a:tbl>
+          </a:graphicData>
+        </a:graphic>
+      </p:graphicFrame>
+      <p:sp>
+        <p:nvSpPr>
+          <p:cNvPr id="5" name="Text 2"/>
+          <p:cNvSpPr txBox="1"/>
+          <p:nvPr/>
+        </p:nvSpPr>
+        <p:spPr>
+          <a:xfrm>
+            <a:off x="457200" y="6172200"/>
+            <a:ext cx="11247120" cy="320040"/>
+          </a:xfrm>
+          <a:prstGeom prst="rect">
+            <a:avLst/>
+          </a:prstGeom>
+          <a:noFill/>
+          <a:ln/>
+        </p:spPr>
+        <p:txBody>
+          <a:bodyPr wrap="square" lIns="0" tIns="0" rIns="0" bIns="0" rtlCol="0" anchor="ctr"/>
+          <a:lstStyle/>
+          <a:p>
+            <a:pPr indent="0" marL="0">
+              <a:buNone/>
+            </a:pPr>
+            <a:r>
+              <a:rPr lang="en-US" sz="1050" i="1" dirty="0">
+                <a:solidFill>
+                  <a:srgbClr val="5C5749"/>
+                </a:solidFill>
+                <a:latin typeface="Noto Sans CJK KR" pitchFamily="34" charset="0"/>
+                <a:ea typeface="Noto Sans CJK KR" pitchFamily="34" charset="-122"/>
+                <a:cs typeface="Noto Sans CJK KR" pitchFamily="34" charset="-120"/>
+              </a:rPr>
+              <a:t>등급: A=공식 확인 · B=2차 자료 교차확인 · D=미확인(추정) · —=계획 설계상 리스크(사실 확인 대상 아님)</a:t>
+            </a:r>
+            <a:endParaRPr lang="en-US" sz="1050" dirty="0"/>
+          </a:p>
+        </p:txBody>
+      </p:sp>
+      <p:sp>
+        <p:nvSpPr>
+          <p:cNvPr id="6" name="Text 3"/>
+          <p:cNvSpPr txBox="1"/>
+          <p:nvPr/>
+        </p:nvSpPr>
+        <p:spPr>
+          <a:xfrm>
+            <a:off x="457200" y="6537960"/>
+            <a:ext cx="10515600" cy="274320"/>
+          </a:xfrm>
+          <a:prstGeom prst="rect">
+            <a:avLst/>
+          </a:prstGeom>
+          <a:noFill/>
+          <a:ln/>
+        </p:spPr>
+        <p:txBody>
+          <a:bodyPr wrap="square" lIns="0" tIns="0" rIns="0" bIns="0" rtlCol="0" anchor="ctr"/>
+          <a:lstStyle/>
+          <a:p>
+            <a:pPr indent="0" marL="0">
+              <a:buNone/>
+            </a:pPr>
+            <a:r>
+              <a:rPr lang="en-US" sz="900" dirty="0">
+                <a:solidFill>
+                  <a:srgbClr val="5C5749"/>
+                </a:solidFill>
+                <a:latin typeface="Noto Sans CJK KR" pitchFamily="34" charset="0"/>
+                <a:ea typeface="Noto Sans CJK KR" pitchFamily="34" charset="-122"/>
+                <a:cs typeface="Noto Sans CJK KR" pitchFamily="34" charset="-120"/>
+              </a:rPr>
+              <a:t>레고랜드 코리아 · 2026-09-23(수) · 아빠+첫째(8세·130cm)+둘째(3세후반·101cm)</a:t>
+            </a:r>
+            <a:endParaRPr lang="en-US" sz="900" dirty="0"/>
+          </a:p>
+        </p:txBody>
+      </p:sp>
+      <p:sp>
+        <p:nvSpPr>
+          <p:cNvPr id="7" name="Text 4"/>
+          <p:cNvSpPr txBox="1"/>
+          <p:nvPr/>
+        </p:nvSpPr>
+        <p:spPr>
+          <a:xfrm>
+            <a:off x="11430000" y="6537960"/>
+            <a:ext cx="365760" cy="274320"/>
+          </a:xfrm>
+          <a:prstGeom prst="rect">
+            <a:avLst/>
+          </a:prstGeom>
+          <a:noFill/>
+          <a:ln/>
+        </p:spPr>
+        <p:txBody>
+          <a:bodyPr wrap="square" lIns="0" tIns="0" rIns="0" bIns="0" rtlCol="0" anchor="ctr"/>
+          <a:lstStyle/>
+          <a:p>
+            <a:pPr algn="r" indent="0" marL="0">
+              <a:buNone/>
+            </a:pPr>
+            <a:r>
+              <a:rPr lang="en-US" sz="900" dirty="0">
+                <a:solidFill>
+                  <a:srgbClr val="5C5749"/>
+                </a:solidFill>
+                <a:latin typeface="Noto Sans CJK KR" pitchFamily="34" charset="0"/>
+                <a:ea typeface="Noto Sans CJK KR" pitchFamily="34" charset="-122"/>
+                <a:cs typeface="Noto Sans CJK KR" pitchFamily="34" charset="-120"/>
+              </a:rPr>
+              <a:t>11</a:t>
+            </a:r>
+            <a:endParaRPr lang="en-US" sz="900" dirty="0"/>
+          </a:p>
+        </p:txBody>
+      </p:sp>
+    </p:spTree>
+  </p:cSld>
+  <p:clrMapOvr>
+    <a:masterClrMapping/>
+  </p:clrMapOvr>
+</p:sld>
+</file>
+
 <file path=ppt/slides/slide2.xml><?xml version="1.0" encoding="utf-8"?>
 <p:sld xmlns:a="http://schemas.openxmlformats.org/drawingml/2006/main" xmlns:r="http://schemas.openxmlformats.org/officeDocument/2006/relationships" xmlns:p="http://schemas.openxmlformats.org/presentationml/2006/main">
   <p:cSld name="Slide 2">
